--- a/Reporting/Claude Presents/Deck4_Monorail/The_Monorail_Transition_Explained.pptx
+++ b/Reporting/Claude Presents/Deck4_Monorail/The_Monorail_Transition_Explained.pptx
@@ -20,6 +20,13 @@
     <p:sldId id="268" r:id="rId19"/>
     <p:sldId id="269" r:id="rId20"/>
     <p:sldId id="270" r:id="rId21"/>
+    <p:sldId id="271" r:id="rId22"/>
+    <p:sldId id="272" r:id="rId23"/>
+    <p:sldId id="273" r:id="rId24"/>
+    <p:sldId id="274" r:id="rId25"/>
+    <p:sldId id="275" r:id="rId26"/>
+    <p:sldId id="276" r:id="rId27"/>
+    <p:sldId id="277" r:id="rId28"/>
   </p:sldIdLst>
   <p:sldSz cx="12192000" cy="6858000" type="screen4x3"/>
   <p:notesSz cx="6858000" cy="9144000"/>
@@ -3149,9 +3156,71 @@
           </a:p>
         </p:txBody>
       </p:sp>
+      <p:pic>
+        <p:nvPicPr>
+          <p:cNvPr id="3" name="PICTURE R02" descr="High-detail render of the mod's two-rail track. Visual development only: not Unreal-tested, not production-ready."/>
+          <p:cNvPicPr>
+            <a:picLocks noChangeAspect="1"/>
+          </p:cNvPicPr>
+          <p:nvPr/>
+        </p:nvPicPr>
+        <p:blipFill>
+          <a:blip r:embed="rId2"/>
+          <a:srcRect l="20409" r="34409"/>
+          <a:stretch>
+            <a:fillRect/>
+          </a:stretch>
+        </p:blipFill>
+        <p:spPr>
+          <a:xfrm>
+            <a:off x="7086600" y="411480"/>
+            <a:ext cx="4553712" cy="5669280"/>
+          </a:xfrm>
+          <a:prstGeom prst="roundRect">
+            <a:avLst>
+              <a:gd name="adj" fmla="val 1606"/>
+            </a:avLst>
+          </a:prstGeom>
+        </p:spPr>
+      </p:pic>
       <p:sp>
         <p:nvSpPr>
-          <p:cNvPr id="3" name="TITLE RULE"/>
+          <p:cNvPr id="4" name="CREDIT"/>
+          <p:cNvSpPr txBox="1"/>
+          <p:nvPr/>
+        </p:nvSpPr>
+        <p:spPr>
+          <a:xfrm>
+            <a:off x="7086600" y="6163056"/>
+            <a:ext cx="4553712" cy="201168"/>
+          </a:xfrm>
+          <a:prstGeom prst="rect">
+            <a:avLst/>
+          </a:prstGeom>
+          <a:noFill/>
+        </p:spPr>
+        <p:txBody>
+          <a:bodyPr wrap="square" anchor="t" lIns="0" tIns="0" rIns="0" bIns="0">
+            <a:noAutofit/>
+          </a:bodyPr>
+          <a:lstStyle/>
+          <a:p>
+            <a:pPr algn="l"/>
+            <a:r>
+              <a:rPr sz="1000" b="0" i="0" lang="en-GB">
+                <a:solidFill>
+                  <a:srgbClr val="A9B0B8"/>
+                </a:solidFill>
+                <a:latin typeface="Arial"/>
+              </a:rPr>
+              <a:t>Early Locomotion project (visual development, not final art).</a:t>
+            </a:r>
+          </a:p>
+        </p:txBody>
+      </p:sp>
+      <p:sp>
+        <p:nvSpPr>
+          <p:cNvPr id="5" name="TITLE RULE"/>
           <p:cNvSpPr/>
           <p:nvPr/>
         </p:nvSpPr>
@@ -3180,7 +3249,7 @@
       </p:sp>
       <p:sp>
         <p:nvSpPr>
-          <p:cNvPr id="4" name="CAPTION"/>
+          <p:cNvPr id="6" name="CAPTION"/>
           <p:cNvSpPr txBox="1"/>
           <p:nvPr/>
         </p:nvSpPr>
@@ -3209,68 +3278,6 @@
                 <a:latin typeface="Arial"/>
               </a:rPr>
               <a:t>What happens when the game's electric trains arrive, and how the mod plans to handle it.</a:t>
-            </a:r>
-          </a:p>
-        </p:txBody>
-      </p:sp>
-      <p:pic>
-        <p:nvPicPr>
-          <p:cNvPr id="5" name="PICTURE R02" descr="High-detail render of the mod's two-rail track. Visual development only: not Unreal-tested, not production-ready."/>
-          <p:cNvPicPr>
-            <a:picLocks noChangeAspect="1"/>
-          </p:cNvPicPr>
-          <p:nvPr/>
-        </p:nvPicPr>
-        <p:blipFill>
-          <a:blip r:embed="rId2"/>
-          <a:srcRect l="20409" r="34409"/>
-          <a:stretch>
-            <a:fillRect/>
-          </a:stretch>
-        </p:blipFill>
-        <p:spPr>
-          <a:xfrm>
-            <a:off x="7086600" y="411480"/>
-            <a:ext cx="4553712" cy="5669280"/>
-          </a:xfrm>
-          <a:prstGeom prst="roundRect">
-            <a:avLst>
-              <a:gd name="adj" fmla="val 1606"/>
-            </a:avLst>
-          </a:prstGeom>
-        </p:spPr>
-      </p:pic>
-      <p:sp>
-        <p:nvSpPr>
-          <p:cNvPr id="6" name="CREDIT"/>
-          <p:cNvSpPr txBox="1"/>
-          <p:nvPr/>
-        </p:nvSpPr>
-        <p:spPr>
-          <a:xfrm>
-            <a:off x="7086600" y="6163056"/>
-            <a:ext cx="4553712" cy="201168"/>
-          </a:xfrm>
-          <a:prstGeom prst="rect">
-            <a:avLst/>
-          </a:prstGeom>
-          <a:noFill/>
-        </p:spPr>
-        <p:txBody>
-          <a:bodyPr wrap="square" anchor="t" lIns="0" tIns="0" rIns="0" bIns="0">
-            <a:noAutofit/>
-          </a:bodyPr>
-          <a:lstStyle/>
-          <a:p>
-            <a:pPr algn="l"/>
-            <a:r>
-              <a:rPr sz="1000" b="0" i="0" lang="en-GB">
-                <a:solidFill>
-                  <a:srgbClr val="A9B0B8"/>
-                </a:solidFill>
-                <a:latin typeface="Arial"/>
-              </a:rPr>
-              <a:t>Early Locomotion project (visual development, not final art).</a:t>
             </a:r>
           </a:p>
         </p:txBody>
@@ -5039,7 +5046,11 @@
           </a:bodyPr>
           <a:lstStyle/>
           <a:p>
-            <a:pPr algn="l"/>
+            <a:pPr algn="l">
+              <a:lnSpc>
+                <a:spcPct val="95000"/>
+              </a:lnSpc>
+            </a:pPr>
             <a:r>
               <a:rPr sz="2000" b="0" i="0" lang="en-GB">
                 <a:solidFill>
@@ -6599,7 +6610,11 @@
           </a:bodyPr>
           <a:lstStyle/>
           <a:p>
-            <a:pPr algn="l"/>
+            <a:pPr algn="l">
+              <a:lnSpc>
+                <a:spcPct val="95000"/>
+              </a:lnSpc>
+            </a:pPr>
             <a:r>
               <a:rPr sz="2000" b="0" i="0" lang="en-GB">
                 <a:solidFill>
@@ -7366,7 +7381,11 @@
           </a:bodyPr>
           <a:lstStyle/>
           <a:p>
-            <a:pPr algn="l"/>
+            <a:pPr algn="l">
+              <a:lnSpc>
+                <a:spcPct val="95000"/>
+              </a:lnSpc>
+            </a:pPr>
             <a:r>
               <a:rPr sz="2000" b="0" i="0" lang="en-GB">
                 <a:solidFill>
@@ -7525,10 +7544,10 @@
         </p:nvGrpSpPr>
         <p:grpSpPr>
           <a:xfrm>
-            <a:off x="822960" y="1600200"/>
-            <a:ext cx="10515600" cy="3108960"/>
-            <a:chOff x="822960" y="1600200"/>
-            <a:chExt cx="10515600" cy="3108960"/>
+            <a:off x="822960" y="1874519"/>
+            <a:ext cx="10515600" cy="3108961"/>
+            <a:chOff x="822960" y="1874519"/>
+            <a:chExt cx="10515600" cy="3108961"/>
           </a:xfrm>
         </p:grpSpPr>
         <p:sp>
@@ -7539,7 +7558,7 @@
           </p:nvSpPr>
           <p:spPr>
             <a:xfrm>
-              <a:off x="822960" y="3246120"/>
+              <a:off x="822960" y="3520439"/>
               <a:ext cx="10515600" cy="182880"/>
             </a:xfrm>
             <a:prstGeom prst="roundRect">
@@ -7570,7 +7589,7 @@
           </p:nvSpPr>
           <p:spPr>
             <a:xfrm>
-              <a:off x="1554480" y="2103120"/>
+              <a:off x="1554480" y="2377439"/>
               <a:ext cx="1554480" cy="1234440"/>
             </a:xfrm>
             <a:custGeom>
@@ -7616,8 +7635,8 @@
           </p:nvSpPr>
           <p:spPr>
             <a:xfrm>
-              <a:off x="6217920" y="3337560"/>
-              <a:ext cx="1554480" cy="1188720"/>
+              <a:off x="6217920" y="3611879"/>
+              <a:ext cx="1554480" cy="1188721"/>
             </a:xfrm>
             <a:custGeom>
               <a:avLst/>
@@ -7626,15 +7645,15 @@
               <a:cxnLst/>
               <a:rect l="l" t="t" r="r" b="b"/>
               <a:pathLst>
-                <a:path w="1554480" h="1188720">
+                <a:path w="1554480" h="1188721">
                   <a:moveTo>
                     <a:pt x="0" y="0"/>
                   </a:moveTo>
                   <a:lnTo>
-                    <a:pt x="0" y="1188720"/>
-                  </a:lnTo>
-                  <a:lnTo>
-                    <a:pt x="1554480" y="1188720"/>
+                    <a:pt x="0" y="1188721"/>
+                  </a:lnTo>
+                  <a:lnTo>
+                    <a:pt x="1554480" y="1188721"/>
                   </a:lnTo>
                 </a:path>
               </a:pathLst>
@@ -7662,7 +7681,7 @@
           </p:nvSpPr>
           <p:spPr>
             <a:xfrm>
-              <a:off x="9326880" y="2103120"/>
+              <a:off x="9326880" y="2377439"/>
               <a:ext cx="1554480" cy="1234440"/>
             </a:xfrm>
             <a:custGeom>
@@ -7708,7 +7727,7 @@
           </p:nvSpPr>
           <p:spPr>
             <a:xfrm>
-              <a:off x="1234440" y="1920239"/>
+              <a:off x="1234440" y="2194559"/>
               <a:ext cx="365760" cy="365760"/>
             </a:xfrm>
             <a:prstGeom prst="ellipse">
@@ -7739,7 +7758,7 @@
           </p:nvSpPr>
           <p:spPr>
             <a:xfrm>
-              <a:off x="7726680" y="4343400"/>
+              <a:off x="7726680" y="4617720"/>
               <a:ext cx="365760" cy="365760"/>
             </a:xfrm>
             <a:prstGeom prst="ellipse">
@@ -7770,7 +7789,7 @@
           </p:nvSpPr>
           <p:spPr>
             <a:xfrm>
-              <a:off x="10835640" y="1920239"/>
+              <a:off x="10835640" y="2194559"/>
               <a:ext cx="365760" cy="365760"/>
             </a:xfrm>
             <a:prstGeom prst="ellipse">
@@ -7801,7 +7820,7 @@
           </p:nvSpPr>
           <p:spPr>
             <a:xfrm>
-              <a:off x="2926079" y="3154679"/>
+              <a:off x="2926079" y="3428999"/>
               <a:ext cx="365760" cy="365760"/>
             </a:xfrm>
             <a:prstGeom prst="rect">
@@ -7832,7 +7851,7 @@
           </p:nvSpPr>
           <p:spPr>
             <a:xfrm>
-              <a:off x="2286000" y="3611879"/>
+              <a:off x="2286000" y="3886200"/>
               <a:ext cx="1645920" cy="347472"/>
             </a:xfrm>
             <a:prstGeom prst="rect">
@@ -7867,7 +7886,7 @@
           </p:nvSpPr>
           <p:spPr>
             <a:xfrm>
-              <a:off x="6035040" y="3154679"/>
+              <a:off x="6035040" y="3428999"/>
               <a:ext cx="365760" cy="365760"/>
             </a:xfrm>
             <a:prstGeom prst="rect">
@@ -7898,7 +7917,7 @@
           </p:nvSpPr>
           <p:spPr>
             <a:xfrm>
-              <a:off x="5394959" y="2715768"/>
+              <a:off x="5394959" y="2990087"/>
               <a:ext cx="1645920" cy="347472"/>
             </a:xfrm>
             <a:prstGeom prst="rect">
@@ -7933,7 +7952,7 @@
           </p:nvSpPr>
           <p:spPr>
             <a:xfrm>
-              <a:off x="9144000" y="3154679"/>
+              <a:off x="9144000" y="3428999"/>
               <a:ext cx="365760" cy="365760"/>
             </a:xfrm>
             <a:prstGeom prst="rect">
@@ -7964,7 +7983,7 @@
           </p:nvSpPr>
           <p:spPr>
             <a:xfrm>
-              <a:off x="8503919" y="3611879"/>
+              <a:off x="8503919" y="3886200"/>
               <a:ext cx="1645920" cy="347472"/>
             </a:xfrm>
             <a:prstGeom prst="rect">
@@ -7999,7 +8018,7 @@
           </p:nvSpPr>
           <p:spPr>
             <a:xfrm>
-              <a:off x="822960" y="2697480"/>
+              <a:off x="822960" y="2971800"/>
               <a:ext cx="2194560" cy="365760"/>
             </a:xfrm>
             <a:prstGeom prst="rect">
@@ -8034,7 +8053,7 @@
           </p:nvSpPr>
           <p:spPr>
             <a:xfrm>
-              <a:off x="1554480" y="1600200"/>
+              <a:off x="1554480" y="1874519"/>
               <a:ext cx="2560320" cy="365760"/>
             </a:xfrm>
             <a:prstGeom prst="rect">
@@ -8144,7 +8163,11 @@
           </a:bodyPr>
           <a:lstStyle/>
           <a:p>
-            <a:pPr algn="l"/>
+            <a:pPr algn="l">
+              <a:lnSpc>
+                <a:spcPct val="95000"/>
+              </a:lnSpc>
+            </a:pPr>
             <a:r>
               <a:rPr sz="2000" b="0" i="0" lang="en-GB">
                 <a:solidFill>
@@ -9894,7 +9917,11 @@
           </a:bodyPr>
           <a:lstStyle/>
           <a:p>
-            <a:pPr algn="l"/>
+            <a:pPr algn="l">
+              <a:lnSpc>
+                <a:spcPct val="95000"/>
+              </a:lnSpc>
+            </a:pPr>
             <a:r>
               <a:rPr sz="2000" b="0" i="0" lang="en-GB">
                 <a:solidFill>
@@ -10322,7 +10349,11 @@
           </a:bodyPr>
           <a:lstStyle/>
           <a:p>
-            <a:pPr algn="l"/>
+            <a:pPr algn="l">
+              <a:lnSpc>
+                <a:spcPct val="95000"/>
+              </a:lnSpc>
+            </a:pPr>
             <a:r>
               <a:rPr sz="2000" b="0" i="0" lang="en-GB">
                 <a:solidFill>
@@ -10366,6 +10397,6003 @@
                 <a:latin typeface="Arial"/>
               </a:rPr>
               <a:t>15</a:t>
+            </a:r>
+          </a:p>
+        </p:txBody>
+      </p:sp>
+    </p:spTree>
+  </p:cSld>
+  <p:clrMapOvr>
+    <a:masterClrMapping/>
+  </p:clrMapOvr>
+</p:sld>
+</file>
+
+<file path=ppt/slides/slide16.xml><?xml version="1.0" encoding="utf-8"?>
+<p:sld xmlns:a="http://schemas.openxmlformats.org/drawingml/2006/main" xmlns:p="http://schemas.openxmlformats.org/presentationml/2006/main" xmlns:r="http://schemas.openxmlformats.org/officeDocument/2006/relationships">
+  <p:cSld>
+    <p:bg>
+      <p:bgPr>
+        <a:solidFill>
+          <a:srgbClr val="1E2126"/>
+        </a:solidFill>
+        <a:effectLst/>
+      </p:bgPr>
+    </p:bg>
+    <p:spTree>
+      <p:nvGrpSpPr>
+        <p:cNvPr id="1" name=""/>
+        <p:cNvGrpSpPr/>
+        <p:nvPr/>
+      </p:nvGrpSpPr>
+      <p:grpSpPr/>
+      <p:sp>
+        <p:nvSpPr>
+          <p:cNvPr id="2" name="TITLE"/>
+          <p:cNvSpPr>
+            <a:spLocks noGrp="1"/>
+          </p:cNvSpPr>
+          <p:nvPr>
+            <p:ph type="title"/>
+          </p:nvPr>
+        </p:nvSpPr>
+        <p:spPr>
+          <a:xfrm>
+            <a:off x="548640" y="365760"/>
+            <a:ext cx="9326880" cy="731520"/>
+          </a:xfrm>
+        </p:spPr>
+        <p:txBody>
+          <a:bodyPr wrap="square" anchor="ctr" lIns="0" rIns="0" tIns="0" bIns="0">
+            <a:noAutofit/>
+          </a:bodyPr>
+          <a:lstStyle/>
+          <a:p>
+            <a:pPr algn="l"/>
+            <a:r>
+              <a:rPr sz="3600" b="1" i="0" lang="en-GB">
+                <a:solidFill>
+                  <a:srgbClr val="F2F2F2"/>
+                </a:solidFill>
+                <a:latin typeface="Arial"/>
+              </a:rPr>
+              <a:t>What could go wrong?</a:t>
+            </a:r>
+          </a:p>
+        </p:txBody>
+      </p:sp>
+      <p:sp>
+        <p:nvSpPr>
+          <p:cNvPr id="3" name="CHIP"/>
+          <p:cNvSpPr/>
+          <p:nvPr/>
+        </p:nvSpPr>
+        <p:spPr>
+          <a:xfrm>
+            <a:off x="10088575" y="548640"/>
+            <a:ext cx="1554480" cy="365760"/>
+          </a:xfrm>
+          <a:prstGeom prst="roundRect">
+            <a:avLst>
+              <a:gd name="adj" fmla="val 50000"/>
+            </a:avLst>
+          </a:prstGeom>
+          <a:noFill/>
+          <a:ln w="25400">
+            <a:solidFill>
+              <a:srgbClr val="A9B0B8"/>
+            </a:solidFill>
+          </a:ln>
+        </p:spPr>
+        <p:txBody>
+          <a:bodyPr rtlCol="0" anchor="ctr" wrap="square" lIns="36576" tIns="0" rIns="36576" bIns="0">
+            <a:noAutofit/>
+          </a:bodyPr>
+          <a:lstStyle/>
+          <a:p>
+            <a:pPr algn="ctr"/>
+            <a:r>
+              <a:rPr sz="1400" b="1" i="0" lang="en-GB">
+                <a:solidFill>
+                  <a:srgbClr val="F2F2F2"/>
+                </a:solidFill>
+                <a:latin typeface="Arial"/>
+              </a:rPr>
+              <a:t>UNDECIDED</a:t>
+            </a:r>
+          </a:p>
+        </p:txBody>
+      </p:sp>
+      <p:grpSp>
+        <p:nvGrpSpPr>
+          <p:cNvPr id="4" name="SCENARIO 1" descr="A steam train on a section of track where a blue beam preview overlaps it. Marked with a question mark."/>
+          <p:cNvGrpSpPr/>
+          <p:nvPr/>
+        </p:nvGrpSpPr>
+        <p:grpSpPr>
+          <a:xfrm>
+            <a:off x="548640" y="1371600"/>
+            <a:ext cx="2656332" cy="3520440"/>
+            <a:chOff x="548640" y="1371600"/>
+            <a:chExt cx="2656332" cy="3520440"/>
+          </a:xfrm>
+        </p:grpSpPr>
+        <p:sp>
+          <p:nvSpPr>
+            <p:cNvPr id="5" name="Rounded Rectangle 4"/>
+            <p:cNvSpPr/>
+            <p:nvPr/>
+          </p:nvSpPr>
+          <p:spPr>
+            <a:xfrm>
+              <a:off x="548640" y="1371600"/>
+              <a:ext cx="2656332" cy="3520440"/>
+            </a:xfrm>
+            <a:prstGeom prst="roundRect">
+              <a:avLst>
+                <a:gd name="adj" fmla="val 2753"/>
+              </a:avLst>
+            </a:prstGeom>
+            <a:solidFill>
+              <a:srgbClr val="2B2F36"/>
+            </a:solidFill>
+            <a:ln>
+              <a:noFill/>
+            </a:ln>
+          </p:spPr>
+          <p:txBody>
+            <a:bodyPr rtlCol="0" anchor="ctr"/>
+            <a:lstStyle/>
+            <a:p>
+              <a:pPr algn="ctr"/>
+            </a:p>
+          </p:txBody>
+        </p:sp>
+        <p:sp>
+          <p:nvSpPr>
+            <p:cNvPr id="6" name="Rounded Rectangle 5"/>
+            <p:cNvSpPr/>
+            <p:nvPr/>
+          </p:nvSpPr>
+          <p:spPr>
+            <a:xfrm>
+              <a:off x="658368" y="1965960"/>
+              <a:ext cx="2436876" cy="2011680"/>
+            </a:xfrm>
+            <a:prstGeom prst="roundRect">
+              <a:avLst>
+                <a:gd name="adj" fmla="val 2727"/>
+              </a:avLst>
+            </a:prstGeom>
+            <a:solidFill>
+              <a:srgbClr val="1E2126"/>
+            </a:solidFill>
+            <a:ln>
+              <a:noFill/>
+            </a:ln>
+          </p:spPr>
+          <p:txBody>
+            <a:bodyPr rtlCol="0" anchor="ctr"/>
+            <a:lstStyle/>
+            <a:p>
+              <a:pPr algn="ctr"/>
+            </a:p>
+          </p:txBody>
+        </p:sp>
+        <p:sp>
+          <p:nvSpPr>
+            <p:cNvPr id="7" name="QBADGE"/>
+            <p:cNvSpPr/>
+            <p:nvPr/>
+          </p:nvSpPr>
+          <p:spPr>
+            <a:xfrm>
+              <a:off x="2564891" y="1490472"/>
+              <a:ext cx="457200" cy="457200"/>
+            </a:xfrm>
+            <a:prstGeom prst="ellipse">
+              <a:avLst/>
+            </a:prstGeom>
+            <a:noFill/>
+            <a:ln w="25400">
+              <a:solidFill>
+                <a:srgbClr val="A9B0B8"/>
+              </a:solidFill>
+            </a:ln>
+          </p:spPr>
+          <p:txBody>
+            <a:bodyPr rtlCol="0" anchor="ctr" wrap="square" lIns="0" tIns="0" rIns="0" bIns="0">
+              <a:noAutofit/>
+            </a:bodyPr>
+            <a:lstStyle/>
+            <a:p>
+              <a:pPr algn="ctr"/>
+              <a:r>
+                <a:rPr sz="2200" b="1" i="0" lang="en-GB">
+                  <a:solidFill>
+                    <a:srgbClr val="F2F2F2"/>
+                  </a:solidFill>
+                  <a:latin typeface="Arial"/>
+                </a:rPr>
+                <a:t>?</a:t>
+              </a:r>
+            </a:p>
+          </p:txBody>
+        </p:sp>
+        <p:sp>
+          <p:nvSpPr>
+            <p:cNvPr id="8" name="TextBox 7"/>
+            <p:cNvSpPr txBox="1"/>
+            <p:nvPr/>
+          </p:nvSpPr>
+          <p:spPr>
+            <a:xfrm>
+              <a:off x="640080" y="4069080"/>
+              <a:ext cx="2473451" cy="685800"/>
+            </a:xfrm>
+            <a:prstGeom prst="rect">
+              <a:avLst/>
+            </a:prstGeom>
+            <a:noFill/>
+          </p:spPr>
+          <p:txBody>
+            <a:bodyPr wrap="square" anchor="ctr" lIns="18288" tIns="9144" rIns="18288" bIns="9144">
+              <a:noAutofit/>
+            </a:bodyPr>
+            <a:lstStyle/>
+            <a:p>
+              <a:pPr algn="ctr"/>
+              <a:r>
+                <a:rPr sz="2000" b="1" i="0" lang="en-GB">
+                  <a:solidFill>
+                    <a:srgbClr val="F2F2F2"/>
+                  </a:solidFill>
+                  <a:latin typeface="Arial"/>
+                </a:rPr>
+                <a:t>Train on the track</a:t>
+              </a:r>
+            </a:p>
+          </p:txBody>
+        </p:sp>
+        <p:sp>
+          <p:nvSpPr>
+            <p:cNvPr id="9" name="Rectangle 8"/>
+            <p:cNvSpPr/>
+            <p:nvPr/>
+          </p:nvSpPr>
+          <p:spPr>
+            <a:xfrm>
+              <a:off x="914399" y="2752344"/>
+              <a:ext cx="54864" cy="493776"/>
+            </a:xfrm>
+            <a:prstGeom prst="rect">
+              <a:avLst/>
+            </a:prstGeom>
+            <a:solidFill>
+              <a:srgbClr val="6B5B4B"/>
+            </a:solidFill>
+            <a:ln>
+              <a:noFill/>
+            </a:ln>
+          </p:spPr>
+          <p:txBody>
+            <a:bodyPr rtlCol="0" anchor="ctr"/>
+            <a:lstStyle/>
+            <a:p>
+              <a:pPr algn="ctr"/>
+            </a:p>
+          </p:txBody>
+        </p:sp>
+        <p:sp>
+          <p:nvSpPr>
+            <p:cNvPr id="10" name="Rectangle 9"/>
+            <p:cNvSpPr/>
+            <p:nvPr/>
+          </p:nvSpPr>
+          <p:spPr>
+            <a:xfrm>
+              <a:off x="1188719" y="2752344"/>
+              <a:ext cx="54864" cy="493776"/>
+            </a:xfrm>
+            <a:prstGeom prst="rect">
+              <a:avLst/>
+            </a:prstGeom>
+            <a:solidFill>
+              <a:srgbClr val="6B5B4B"/>
+            </a:solidFill>
+            <a:ln>
+              <a:noFill/>
+            </a:ln>
+          </p:spPr>
+          <p:txBody>
+            <a:bodyPr rtlCol="0" anchor="ctr"/>
+            <a:lstStyle/>
+            <a:p>
+              <a:pPr algn="ctr"/>
+            </a:p>
+          </p:txBody>
+        </p:sp>
+        <p:sp>
+          <p:nvSpPr>
+            <p:cNvPr id="11" name="Rectangle 10"/>
+            <p:cNvSpPr/>
+            <p:nvPr/>
+          </p:nvSpPr>
+          <p:spPr>
+            <a:xfrm>
+              <a:off x="1463039" y="2752344"/>
+              <a:ext cx="54864" cy="493776"/>
+            </a:xfrm>
+            <a:prstGeom prst="rect">
+              <a:avLst/>
+            </a:prstGeom>
+            <a:solidFill>
+              <a:srgbClr val="6B5B4B"/>
+            </a:solidFill>
+            <a:ln>
+              <a:noFill/>
+            </a:ln>
+          </p:spPr>
+          <p:txBody>
+            <a:bodyPr rtlCol="0" anchor="ctr"/>
+            <a:lstStyle/>
+            <a:p>
+              <a:pPr algn="ctr"/>
+            </a:p>
+          </p:txBody>
+        </p:sp>
+        <p:sp>
+          <p:nvSpPr>
+            <p:cNvPr id="12" name="Rectangle 11"/>
+            <p:cNvSpPr/>
+            <p:nvPr/>
+          </p:nvSpPr>
+          <p:spPr>
+            <a:xfrm>
+              <a:off x="1737360" y="2752344"/>
+              <a:ext cx="54864" cy="493776"/>
+            </a:xfrm>
+            <a:prstGeom prst="rect">
+              <a:avLst/>
+            </a:prstGeom>
+            <a:solidFill>
+              <a:srgbClr val="6B5B4B"/>
+            </a:solidFill>
+            <a:ln>
+              <a:noFill/>
+            </a:ln>
+          </p:spPr>
+          <p:txBody>
+            <a:bodyPr rtlCol="0" anchor="ctr"/>
+            <a:lstStyle/>
+            <a:p>
+              <a:pPr algn="ctr"/>
+            </a:p>
+          </p:txBody>
+        </p:sp>
+        <p:sp>
+          <p:nvSpPr>
+            <p:cNvPr id="13" name="Rectangle 12"/>
+            <p:cNvSpPr/>
+            <p:nvPr/>
+          </p:nvSpPr>
+          <p:spPr>
+            <a:xfrm>
+              <a:off x="2011679" y="2752344"/>
+              <a:ext cx="54864" cy="493776"/>
+            </a:xfrm>
+            <a:prstGeom prst="rect">
+              <a:avLst/>
+            </a:prstGeom>
+            <a:solidFill>
+              <a:srgbClr val="6B5B4B"/>
+            </a:solidFill>
+            <a:ln>
+              <a:noFill/>
+            </a:ln>
+          </p:spPr>
+          <p:txBody>
+            <a:bodyPr rtlCol="0" anchor="ctr"/>
+            <a:lstStyle/>
+            <a:p>
+              <a:pPr algn="ctr"/>
+            </a:p>
+          </p:txBody>
+        </p:sp>
+        <p:sp>
+          <p:nvSpPr>
+            <p:cNvPr id="14" name="Rectangle 13"/>
+            <p:cNvSpPr/>
+            <p:nvPr/>
+          </p:nvSpPr>
+          <p:spPr>
+            <a:xfrm>
+              <a:off x="2285999" y="2752344"/>
+              <a:ext cx="54864" cy="493776"/>
+            </a:xfrm>
+            <a:prstGeom prst="rect">
+              <a:avLst/>
+            </a:prstGeom>
+            <a:solidFill>
+              <a:srgbClr val="6B5B4B"/>
+            </a:solidFill>
+            <a:ln>
+              <a:noFill/>
+            </a:ln>
+          </p:spPr>
+          <p:txBody>
+            <a:bodyPr rtlCol="0" anchor="ctr"/>
+            <a:lstStyle/>
+            <a:p>
+              <a:pPr algn="ctr"/>
+            </a:p>
+          </p:txBody>
+        </p:sp>
+        <p:sp>
+          <p:nvSpPr>
+            <p:cNvPr id="15" name="Rectangle 14"/>
+            <p:cNvSpPr/>
+            <p:nvPr/>
+          </p:nvSpPr>
+          <p:spPr>
+            <a:xfrm>
+              <a:off x="2560319" y="2752344"/>
+              <a:ext cx="54864" cy="493776"/>
+            </a:xfrm>
+            <a:prstGeom prst="rect">
+              <a:avLst/>
+            </a:prstGeom>
+            <a:solidFill>
+              <a:srgbClr val="6B5B4B"/>
+            </a:solidFill>
+            <a:ln>
+              <a:noFill/>
+            </a:ln>
+          </p:spPr>
+          <p:txBody>
+            <a:bodyPr rtlCol="0" anchor="ctr"/>
+            <a:lstStyle/>
+            <a:p>
+              <a:pPr algn="ctr"/>
+            </a:p>
+          </p:txBody>
+        </p:sp>
+        <p:sp>
+          <p:nvSpPr>
+            <p:cNvPr id="16" name="Rectangle 15"/>
+            <p:cNvSpPr/>
+            <p:nvPr/>
+          </p:nvSpPr>
+          <p:spPr>
+            <a:xfrm>
+              <a:off x="2834639" y="2752344"/>
+              <a:ext cx="54864" cy="493776"/>
+            </a:xfrm>
+            <a:prstGeom prst="rect">
+              <a:avLst/>
+            </a:prstGeom>
+            <a:solidFill>
+              <a:srgbClr val="6B5B4B"/>
+            </a:solidFill>
+            <a:ln>
+              <a:noFill/>
+            </a:ln>
+          </p:spPr>
+          <p:txBody>
+            <a:bodyPr rtlCol="0" anchor="ctr"/>
+            <a:lstStyle/>
+            <a:p>
+              <a:pPr algn="ctr"/>
+            </a:p>
+          </p:txBody>
+        </p:sp>
+        <p:sp>
+          <p:nvSpPr>
+            <p:cNvPr id="17" name="Rectangle 16"/>
+            <p:cNvSpPr/>
+            <p:nvPr/>
+          </p:nvSpPr>
+          <p:spPr>
+            <a:xfrm>
+              <a:off x="822959" y="2816352"/>
+              <a:ext cx="2107691" cy="54864"/>
+            </a:xfrm>
+            <a:prstGeom prst="rect">
+              <a:avLst/>
+            </a:prstGeom>
+            <a:solidFill>
+              <a:srgbClr val="F28C28"/>
+            </a:solidFill>
+            <a:ln>
+              <a:noFill/>
+            </a:ln>
+          </p:spPr>
+          <p:txBody>
+            <a:bodyPr rtlCol="0" anchor="ctr"/>
+            <a:lstStyle/>
+            <a:p>
+              <a:pPr algn="ctr"/>
+            </a:p>
+          </p:txBody>
+        </p:sp>
+        <p:sp>
+          <p:nvSpPr>
+            <p:cNvPr id="18" name="Rectangle 17"/>
+            <p:cNvSpPr/>
+            <p:nvPr/>
+          </p:nvSpPr>
+          <p:spPr>
+            <a:xfrm>
+              <a:off x="822959" y="3127248"/>
+              <a:ext cx="2107691" cy="54864"/>
+            </a:xfrm>
+            <a:prstGeom prst="rect">
+              <a:avLst/>
+            </a:prstGeom>
+            <a:solidFill>
+              <a:srgbClr val="F28C28"/>
+            </a:solidFill>
+            <a:ln>
+              <a:noFill/>
+            </a:ln>
+          </p:spPr>
+          <p:txBody>
+            <a:bodyPr rtlCol="0" anchor="ctr"/>
+            <a:lstStyle/>
+            <a:p>
+              <a:pPr algn="ctr"/>
+            </a:p>
+          </p:txBody>
+        </p:sp>
+        <p:sp>
+          <p:nvSpPr>
+            <p:cNvPr id="19" name="Rounded Rectangle 18"/>
+            <p:cNvSpPr/>
+            <p:nvPr/>
+          </p:nvSpPr>
+          <p:spPr>
+            <a:xfrm>
+              <a:off x="1005839" y="2752344"/>
+              <a:ext cx="822960" cy="438912"/>
+            </a:xfrm>
+            <a:prstGeom prst="roundRect">
+              <a:avLst>
+                <a:gd name="adj" fmla="val 16666"/>
+              </a:avLst>
+            </a:prstGeom>
+            <a:solidFill>
+              <a:srgbClr val="F28C28"/>
+            </a:solidFill>
+            <a:ln>
+              <a:noFill/>
+            </a:ln>
+          </p:spPr>
+          <p:txBody>
+            <a:bodyPr rtlCol="0" anchor="ctr"/>
+            <a:lstStyle/>
+            <a:p>
+              <a:pPr algn="ctr"/>
+            </a:p>
+          </p:txBody>
+        </p:sp>
+        <p:sp>
+          <p:nvSpPr>
+            <p:cNvPr id="20" name="Oval 19"/>
+            <p:cNvSpPr/>
+            <p:nvPr/>
+          </p:nvSpPr>
+          <p:spPr>
+            <a:xfrm>
+              <a:off x="1691639" y="2889504"/>
+              <a:ext cx="164592" cy="164592"/>
+            </a:xfrm>
+            <a:prstGeom prst="ellipse">
+              <a:avLst/>
+            </a:prstGeom>
+            <a:solidFill>
+              <a:srgbClr val="1B1D21"/>
+            </a:solidFill>
+            <a:ln>
+              <a:noFill/>
+            </a:ln>
+          </p:spPr>
+          <p:txBody>
+            <a:bodyPr rtlCol="0" anchor="ctr"/>
+            <a:lstStyle/>
+            <a:p>
+              <a:pPr algn="ctr"/>
+            </a:p>
+          </p:txBody>
+        </p:sp>
+        <p:sp>
+          <p:nvSpPr>
+            <p:cNvPr id="21" name="Rounded Rectangle 20"/>
+            <p:cNvSpPr/>
+            <p:nvPr/>
+          </p:nvSpPr>
+          <p:spPr>
+            <a:xfrm>
+              <a:off x="1920239" y="2788920"/>
+              <a:ext cx="822960" cy="365760"/>
+            </a:xfrm>
+            <a:prstGeom prst="roundRect">
+              <a:avLst>
+                <a:gd name="adj" fmla="val 12500"/>
+              </a:avLst>
+            </a:prstGeom>
+            <a:solidFill>
+              <a:srgbClr val="6C7480"/>
+            </a:solidFill>
+            <a:ln>
+              <a:noFill/>
+            </a:ln>
+          </p:spPr>
+          <p:txBody>
+            <a:bodyPr rtlCol="0" anchor="ctr"/>
+            <a:lstStyle/>
+            <a:p>
+              <a:pPr algn="ctr"/>
+            </a:p>
+          </p:txBody>
+        </p:sp>
+        <p:sp>
+          <p:nvSpPr>
+            <p:cNvPr id="22" name="Rounded Rectangle 21"/>
+            <p:cNvSpPr/>
+            <p:nvPr/>
+          </p:nvSpPr>
+          <p:spPr>
+            <a:xfrm>
+              <a:off x="777239" y="2560320"/>
+              <a:ext cx="2199132" cy="822960"/>
+            </a:xfrm>
+            <a:prstGeom prst="roundRect">
+              <a:avLst>
+                <a:gd name="adj" fmla="val 11111"/>
+              </a:avLst>
+            </a:prstGeom>
+            <a:solidFill>
+              <a:srgbClr val="6CA0DC">
+                <a:alpha val="30000"/>
+              </a:srgbClr>
+            </a:solidFill>
+            <a:ln w="31750">
+              <a:solidFill>
+                <a:srgbClr val="6CA0DC"/>
+              </a:solidFill>
+              <a:prstDash val="dash"/>
+            </a:ln>
+          </p:spPr>
+          <p:txBody>
+            <a:bodyPr rtlCol="0" anchor="ctr"/>
+            <a:lstStyle/>
+            <a:p>
+              <a:pPr algn="ctr"/>
+            </a:p>
+          </p:txBody>
+        </p:sp>
+      </p:grpSp>
+      <p:grpSp>
+        <p:nvGrpSpPr>
+          <p:cNvPr id="23" name="SCENARIO 2" descr="A steam train sitting on a section that is already a blue beam. Marked with a question mark."/>
+          <p:cNvGrpSpPr/>
+          <p:nvPr/>
+        </p:nvGrpSpPr>
+        <p:grpSpPr>
+          <a:xfrm>
+            <a:off x="3360420" y="1371600"/>
+            <a:ext cx="2656332" cy="3520440"/>
+            <a:chOff x="3360420" y="1371600"/>
+            <a:chExt cx="2656332" cy="3520440"/>
+          </a:xfrm>
+        </p:grpSpPr>
+        <p:sp>
+          <p:nvSpPr>
+            <p:cNvPr id="24" name="Rounded Rectangle 23"/>
+            <p:cNvSpPr/>
+            <p:nvPr/>
+          </p:nvSpPr>
+          <p:spPr>
+            <a:xfrm>
+              <a:off x="3360420" y="1371600"/>
+              <a:ext cx="2656332" cy="3520440"/>
+            </a:xfrm>
+            <a:prstGeom prst="roundRect">
+              <a:avLst>
+                <a:gd name="adj" fmla="val 2753"/>
+              </a:avLst>
+            </a:prstGeom>
+            <a:solidFill>
+              <a:srgbClr val="2B2F36"/>
+            </a:solidFill>
+            <a:ln>
+              <a:noFill/>
+            </a:ln>
+          </p:spPr>
+          <p:txBody>
+            <a:bodyPr rtlCol="0" anchor="ctr"/>
+            <a:lstStyle/>
+            <a:p>
+              <a:pPr algn="ctr"/>
+            </a:p>
+          </p:txBody>
+        </p:sp>
+        <p:sp>
+          <p:nvSpPr>
+            <p:cNvPr id="25" name="Rounded Rectangle 24"/>
+            <p:cNvSpPr/>
+            <p:nvPr/>
+          </p:nvSpPr>
+          <p:spPr>
+            <a:xfrm>
+              <a:off x="3470148" y="1965960"/>
+              <a:ext cx="2436876" cy="2011680"/>
+            </a:xfrm>
+            <a:prstGeom prst="roundRect">
+              <a:avLst>
+                <a:gd name="adj" fmla="val 2727"/>
+              </a:avLst>
+            </a:prstGeom>
+            <a:solidFill>
+              <a:srgbClr val="1E2126"/>
+            </a:solidFill>
+            <a:ln>
+              <a:noFill/>
+            </a:ln>
+          </p:spPr>
+          <p:txBody>
+            <a:bodyPr rtlCol="0" anchor="ctr"/>
+            <a:lstStyle/>
+            <a:p>
+              <a:pPr algn="ctr"/>
+            </a:p>
+          </p:txBody>
+        </p:sp>
+        <p:sp>
+          <p:nvSpPr>
+            <p:cNvPr id="26" name="QBADGE"/>
+            <p:cNvSpPr/>
+            <p:nvPr/>
+          </p:nvSpPr>
+          <p:spPr>
+            <a:xfrm>
+              <a:off x="5376672" y="1490472"/>
+              <a:ext cx="457200" cy="457200"/>
+            </a:xfrm>
+            <a:prstGeom prst="ellipse">
+              <a:avLst/>
+            </a:prstGeom>
+            <a:noFill/>
+            <a:ln w="25400">
+              <a:solidFill>
+                <a:srgbClr val="A9B0B8"/>
+              </a:solidFill>
+            </a:ln>
+          </p:spPr>
+          <p:txBody>
+            <a:bodyPr rtlCol="0" anchor="ctr" wrap="square" lIns="0" tIns="0" rIns="0" bIns="0">
+              <a:noAutofit/>
+            </a:bodyPr>
+            <a:lstStyle/>
+            <a:p>
+              <a:pPr algn="ctr"/>
+              <a:r>
+                <a:rPr sz="2200" b="1" i="0" lang="en-GB">
+                  <a:solidFill>
+                    <a:srgbClr val="F2F2F2"/>
+                  </a:solidFill>
+                  <a:latin typeface="Arial"/>
+                </a:rPr>
+                <a:t>?</a:t>
+              </a:r>
+            </a:p>
+          </p:txBody>
+        </p:sp>
+        <p:sp>
+          <p:nvSpPr>
+            <p:cNvPr id="27" name="TextBox 26"/>
+            <p:cNvSpPr txBox="1"/>
+            <p:nvPr/>
+          </p:nvSpPr>
+          <p:spPr>
+            <a:xfrm>
+              <a:off x="3451860" y="4069080"/>
+              <a:ext cx="2473451" cy="685800"/>
+            </a:xfrm>
+            <a:prstGeom prst="rect">
+              <a:avLst/>
+            </a:prstGeom>
+            <a:noFill/>
+          </p:spPr>
+          <p:txBody>
+            <a:bodyPr wrap="square" anchor="ctr" lIns="18288" tIns="9144" rIns="18288" bIns="9144">
+              <a:noAutofit/>
+            </a:bodyPr>
+            <a:lstStyle/>
+            <a:p>
+              <a:pPr algn="ctr"/>
+              <a:r>
+                <a:rPr sz="2000" b="1" i="0" lang="en-GB">
+                  <a:solidFill>
+                    <a:srgbClr val="F2F2F2"/>
+                  </a:solidFill>
+                  <a:latin typeface="Arial"/>
+                </a:rPr>
+                <a:t>Steam train stranded</a:t>
+              </a:r>
+            </a:p>
+          </p:txBody>
+        </p:sp>
+        <p:sp>
+          <p:nvSpPr>
+            <p:cNvPr id="28" name="Rectangle 27"/>
+            <p:cNvSpPr/>
+            <p:nvPr/>
+          </p:nvSpPr>
+          <p:spPr>
+            <a:xfrm>
+              <a:off x="3726179" y="2752344"/>
+              <a:ext cx="54864" cy="493776"/>
+            </a:xfrm>
+            <a:prstGeom prst="rect">
+              <a:avLst/>
+            </a:prstGeom>
+            <a:solidFill>
+              <a:srgbClr val="6B5B4B"/>
+            </a:solidFill>
+            <a:ln>
+              <a:noFill/>
+            </a:ln>
+          </p:spPr>
+          <p:txBody>
+            <a:bodyPr rtlCol="0" anchor="ctr"/>
+            <a:lstStyle/>
+            <a:p>
+              <a:pPr algn="ctr"/>
+            </a:p>
+          </p:txBody>
+        </p:sp>
+        <p:sp>
+          <p:nvSpPr>
+            <p:cNvPr id="29" name="Rectangle 28"/>
+            <p:cNvSpPr/>
+            <p:nvPr/>
+          </p:nvSpPr>
+          <p:spPr>
+            <a:xfrm>
+              <a:off x="4000499" y="2752344"/>
+              <a:ext cx="54864" cy="493776"/>
+            </a:xfrm>
+            <a:prstGeom prst="rect">
+              <a:avLst/>
+            </a:prstGeom>
+            <a:solidFill>
+              <a:srgbClr val="6B5B4B"/>
+            </a:solidFill>
+            <a:ln>
+              <a:noFill/>
+            </a:ln>
+          </p:spPr>
+          <p:txBody>
+            <a:bodyPr rtlCol="0" anchor="ctr"/>
+            <a:lstStyle/>
+            <a:p>
+              <a:pPr algn="ctr"/>
+            </a:p>
+          </p:txBody>
+        </p:sp>
+        <p:sp>
+          <p:nvSpPr>
+            <p:cNvPr id="30" name="Rectangle 29"/>
+            <p:cNvSpPr/>
+            <p:nvPr/>
+          </p:nvSpPr>
+          <p:spPr>
+            <a:xfrm>
+              <a:off x="4274819" y="2752344"/>
+              <a:ext cx="54864" cy="493776"/>
+            </a:xfrm>
+            <a:prstGeom prst="rect">
+              <a:avLst/>
+            </a:prstGeom>
+            <a:solidFill>
+              <a:srgbClr val="6B5B4B"/>
+            </a:solidFill>
+            <a:ln>
+              <a:noFill/>
+            </a:ln>
+          </p:spPr>
+          <p:txBody>
+            <a:bodyPr rtlCol="0" anchor="ctr"/>
+            <a:lstStyle/>
+            <a:p>
+              <a:pPr algn="ctr"/>
+            </a:p>
+          </p:txBody>
+        </p:sp>
+        <p:sp>
+          <p:nvSpPr>
+            <p:cNvPr id="31" name="Rectangle 30"/>
+            <p:cNvSpPr/>
+            <p:nvPr/>
+          </p:nvSpPr>
+          <p:spPr>
+            <a:xfrm>
+              <a:off x="3634739" y="2816352"/>
+              <a:ext cx="777240" cy="54864"/>
+            </a:xfrm>
+            <a:prstGeom prst="rect">
+              <a:avLst/>
+            </a:prstGeom>
+            <a:solidFill>
+              <a:srgbClr val="F28C28"/>
+            </a:solidFill>
+            <a:ln>
+              <a:noFill/>
+            </a:ln>
+          </p:spPr>
+          <p:txBody>
+            <a:bodyPr rtlCol="0" anchor="ctr"/>
+            <a:lstStyle/>
+            <a:p>
+              <a:pPr algn="ctr"/>
+            </a:p>
+          </p:txBody>
+        </p:sp>
+        <p:sp>
+          <p:nvSpPr>
+            <p:cNvPr id="32" name="Rectangle 31"/>
+            <p:cNvSpPr/>
+            <p:nvPr/>
+          </p:nvSpPr>
+          <p:spPr>
+            <a:xfrm>
+              <a:off x="3634739" y="3127248"/>
+              <a:ext cx="777240" cy="54864"/>
+            </a:xfrm>
+            <a:prstGeom prst="rect">
+              <a:avLst/>
+            </a:prstGeom>
+            <a:solidFill>
+              <a:srgbClr val="F28C28"/>
+            </a:solidFill>
+            <a:ln>
+              <a:noFill/>
+            </a:ln>
+          </p:spPr>
+          <p:txBody>
+            <a:bodyPr rtlCol="0" anchor="ctr"/>
+            <a:lstStyle/>
+            <a:p>
+              <a:pPr algn="ctr"/>
+            </a:p>
+          </p:txBody>
+        </p:sp>
+        <p:sp>
+          <p:nvSpPr>
+            <p:cNvPr id="33" name="Rounded Rectangle 32"/>
+            <p:cNvSpPr/>
+            <p:nvPr/>
+          </p:nvSpPr>
+          <p:spPr>
+            <a:xfrm>
+              <a:off x="4503420" y="2852928"/>
+              <a:ext cx="1239011" cy="237744"/>
+            </a:xfrm>
+            <a:prstGeom prst="roundRect">
+              <a:avLst>
+                <a:gd name="adj" fmla="val 23076"/>
+              </a:avLst>
+            </a:prstGeom>
+            <a:solidFill>
+              <a:srgbClr val="6CA0DC"/>
+            </a:solidFill>
+            <a:ln>
+              <a:noFill/>
+            </a:ln>
+          </p:spPr>
+          <p:txBody>
+            <a:bodyPr rtlCol="0" anchor="ctr"/>
+            <a:lstStyle/>
+            <a:p>
+              <a:pPr algn="ctr"/>
+            </a:p>
+          </p:txBody>
+        </p:sp>
+        <p:sp>
+          <p:nvSpPr>
+            <p:cNvPr id="34" name="Rounded Rectangle 33"/>
+            <p:cNvSpPr/>
+            <p:nvPr/>
+          </p:nvSpPr>
+          <p:spPr>
+            <a:xfrm>
+              <a:off x="4594859" y="2697480"/>
+              <a:ext cx="1005840" cy="457200"/>
+            </a:xfrm>
+            <a:prstGeom prst="roundRect">
+              <a:avLst>
+                <a:gd name="adj" fmla="val 16000"/>
+              </a:avLst>
+            </a:prstGeom>
+            <a:solidFill>
+              <a:srgbClr val="F28C28"/>
+            </a:solidFill>
+            <a:ln>
+              <a:noFill/>
+            </a:ln>
+          </p:spPr>
+          <p:txBody>
+            <a:bodyPr rtlCol="0" anchor="ctr"/>
+            <a:lstStyle/>
+            <a:p>
+              <a:pPr algn="ctr"/>
+            </a:p>
+          </p:txBody>
+        </p:sp>
+        <p:sp>
+          <p:nvSpPr>
+            <p:cNvPr id="35" name="Oval 34"/>
+            <p:cNvSpPr/>
+            <p:nvPr/>
+          </p:nvSpPr>
+          <p:spPr>
+            <a:xfrm>
+              <a:off x="5372100" y="2843784"/>
+              <a:ext cx="164592" cy="164592"/>
+            </a:xfrm>
+            <a:prstGeom prst="ellipse">
+              <a:avLst/>
+            </a:prstGeom>
+            <a:solidFill>
+              <a:srgbClr val="1B1D21"/>
+            </a:solidFill>
+            <a:ln>
+              <a:noFill/>
+            </a:ln>
+          </p:spPr>
+          <p:txBody>
+            <a:bodyPr rtlCol="0" anchor="ctr"/>
+            <a:lstStyle/>
+            <a:p>
+              <a:pPr algn="ctr"/>
+            </a:p>
+          </p:txBody>
+        </p:sp>
+      </p:grpSp>
+      <p:grpSp>
+        <p:nvGrpSpPr>
+          <p:cNvPr id="36" name="SCENARIO 3" descr="A line with orange steam track on the left and a blue beam on the right. Marked with a question mark."/>
+          <p:cNvGrpSpPr/>
+          <p:nvPr/>
+        </p:nvGrpSpPr>
+        <p:grpSpPr>
+          <a:xfrm>
+            <a:off x="6172199" y="1371600"/>
+            <a:ext cx="2656332" cy="3520440"/>
+            <a:chOff x="6172199" y="1371600"/>
+            <a:chExt cx="2656332" cy="3520440"/>
+          </a:xfrm>
+        </p:grpSpPr>
+        <p:sp>
+          <p:nvSpPr>
+            <p:cNvPr id="37" name="Rounded Rectangle 36"/>
+            <p:cNvSpPr/>
+            <p:nvPr/>
+          </p:nvSpPr>
+          <p:spPr>
+            <a:xfrm>
+              <a:off x="6172199" y="1371600"/>
+              <a:ext cx="2656332" cy="3520440"/>
+            </a:xfrm>
+            <a:prstGeom prst="roundRect">
+              <a:avLst>
+                <a:gd name="adj" fmla="val 2753"/>
+              </a:avLst>
+            </a:prstGeom>
+            <a:solidFill>
+              <a:srgbClr val="2B2F36"/>
+            </a:solidFill>
+            <a:ln>
+              <a:noFill/>
+            </a:ln>
+          </p:spPr>
+          <p:txBody>
+            <a:bodyPr rtlCol="0" anchor="ctr"/>
+            <a:lstStyle/>
+            <a:p>
+              <a:pPr algn="ctr"/>
+            </a:p>
+          </p:txBody>
+        </p:sp>
+        <p:sp>
+          <p:nvSpPr>
+            <p:cNvPr id="38" name="Rounded Rectangle 37"/>
+            <p:cNvSpPr/>
+            <p:nvPr/>
+          </p:nvSpPr>
+          <p:spPr>
+            <a:xfrm>
+              <a:off x="6281927" y="1965960"/>
+              <a:ext cx="2436876" cy="2011680"/>
+            </a:xfrm>
+            <a:prstGeom prst="roundRect">
+              <a:avLst>
+                <a:gd name="adj" fmla="val 2727"/>
+              </a:avLst>
+            </a:prstGeom>
+            <a:solidFill>
+              <a:srgbClr val="1E2126"/>
+            </a:solidFill>
+            <a:ln>
+              <a:noFill/>
+            </a:ln>
+          </p:spPr>
+          <p:txBody>
+            <a:bodyPr rtlCol="0" anchor="ctr"/>
+            <a:lstStyle/>
+            <a:p>
+              <a:pPr algn="ctr"/>
+            </a:p>
+          </p:txBody>
+        </p:sp>
+        <p:sp>
+          <p:nvSpPr>
+            <p:cNvPr id="39" name="QBADGE"/>
+            <p:cNvSpPr/>
+            <p:nvPr/>
+          </p:nvSpPr>
+          <p:spPr>
+            <a:xfrm>
+              <a:off x="8188452" y="1490472"/>
+              <a:ext cx="457200" cy="457200"/>
+            </a:xfrm>
+            <a:prstGeom prst="ellipse">
+              <a:avLst/>
+            </a:prstGeom>
+            <a:noFill/>
+            <a:ln w="25400">
+              <a:solidFill>
+                <a:srgbClr val="A9B0B8"/>
+              </a:solidFill>
+            </a:ln>
+          </p:spPr>
+          <p:txBody>
+            <a:bodyPr rtlCol="0" anchor="ctr" wrap="square" lIns="0" tIns="0" rIns="0" bIns="0">
+              <a:noAutofit/>
+            </a:bodyPr>
+            <a:lstStyle/>
+            <a:p>
+              <a:pPr algn="ctr"/>
+              <a:r>
+                <a:rPr sz="2200" b="1" i="0" lang="en-GB">
+                  <a:solidFill>
+                    <a:srgbClr val="F2F2F2"/>
+                  </a:solidFill>
+                  <a:latin typeface="Arial"/>
+                </a:rPr>
+                <a:t>?</a:t>
+              </a:r>
+            </a:p>
+          </p:txBody>
+        </p:sp>
+        <p:sp>
+          <p:nvSpPr>
+            <p:cNvPr id="40" name="TextBox 39"/>
+            <p:cNvSpPr txBox="1"/>
+            <p:nvPr/>
+          </p:nvSpPr>
+          <p:spPr>
+            <a:xfrm>
+              <a:off x="6263639" y="4069080"/>
+              <a:ext cx="2473451" cy="685800"/>
+            </a:xfrm>
+            <a:prstGeom prst="rect">
+              <a:avLst/>
+            </a:prstGeom>
+            <a:noFill/>
+          </p:spPr>
+          <p:txBody>
+            <a:bodyPr wrap="square" anchor="ctr" lIns="18288" tIns="9144" rIns="18288" bIns="9144">
+              <a:noAutofit/>
+            </a:bodyPr>
+            <a:lstStyle/>
+            <a:p>
+              <a:pPr algn="ctr"/>
+              <a:r>
+                <a:rPr sz="2000" b="1" i="0" lang="en-GB">
+                  <a:solidFill>
+                    <a:srgbClr val="F2F2F2"/>
+                  </a:solidFill>
+                  <a:latin typeface="Arial"/>
+                </a:rPr>
+                <a:t>Half-upgraded line</a:t>
+              </a:r>
+            </a:p>
+          </p:txBody>
+        </p:sp>
+        <p:sp>
+          <p:nvSpPr>
+            <p:cNvPr id="41" name="Rectangle 40"/>
+            <p:cNvSpPr/>
+            <p:nvPr/>
+          </p:nvSpPr>
+          <p:spPr>
+            <a:xfrm>
+              <a:off x="6537959" y="2752344"/>
+              <a:ext cx="54864" cy="493776"/>
+            </a:xfrm>
+            <a:prstGeom prst="rect">
+              <a:avLst/>
+            </a:prstGeom>
+            <a:solidFill>
+              <a:srgbClr val="6B5B4B"/>
+            </a:solidFill>
+            <a:ln>
+              <a:noFill/>
+            </a:ln>
+          </p:spPr>
+          <p:txBody>
+            <a:bodyPr rtlCol="0" anchor="ctr"/>
+            <a:lstStyle/>
+            <a:p>
+              <a:pPr algn="ctr"/>
+            </a:p>
+          </p:txBody>
+        </p:sp>
+        <p:sp>
+          <p:nvSpPr>
+            <p:cNvPr id="42" name="Rectangle 41"/>
+            <p:cNvSpPr/>
+            <p:nvPr/>
+          </p:nvSpPr>
+          <p:spPr>
+            <a:xfrm>
+              <a:off x="6812279" y="2752344"/>
+              <a:ext cx="54864" cy="493776"/>
+            </a:xfrm>
+            <a:prstGeom prst="rect">
+              <a:avLst/>
+            </a:prstGeom>
+            <a:solidFill>
+              <a:srgbClr val="6B5B4B"/>
+            </a:solidFill>
+            <a:ln>
+              <a:noFill/>
+            </a:ln>
+          </p:spPr>
+          <p:txBody>
+            <a:bodyPr rtlCol="0" anchor="ctr"/>
+            <a:lstStyle/>
+            <a:p>
+              <a:pPr algn="ctr"/>
+            </a:p>
+          </p:txBody>
+        </p:sp>
+        <p:sp>
+          <p:nvSpPr>
+            <p:cNvPr id="43" name="Rectangle 42"/>
+            <p:cNvSpPr/>
+            <p:nvPr/>
+          </p:nvSpPr>
+          <p:spPr>
+            <a:xfrm>
+              <a:off x="7086599" y="2752344"/>
+              <a:ext cx="54864" cy="493776"/>
+            </a:xfrm>
+            <a:prstGeom prst="rect">
+              <a:avLst/>
+            </a:prstGeom>
+            <a:solidFill>
+              <a:srgbClr val="6B5B4B"/>
+            </a:solidFill>
+            <a:ln>
+              <a:noFill/>
+            </a:ln>
+          </p:spPr>
+          <p:txBody>
+            <a:bodyPr rtlCol="0" anchor="ctr"/>
+            <a:lstStyle/>
+            <a:p>
+              <a:pPr algn="ctr"/>
+            </a:p>
+          </p:txBody>
+        </p:sp>
+        <p:sp>
+          <p:nvSpPr>
+            <p:cNvPr id="44" name="Rectangle 43"/>
+            <p:cNvSpPr/>
+            <p:nvPr/>
+          </p:nvSpPr>
+          <p:spPr>
+            <a:xfrm>
+              <a:off x="7360919" y="2752344"/>
+              <a:ext cx="54864" cy="493776"/>
+            </a:xfrm>
+            <a:prstGeom prst="rect">
+              <a:avLst/>
+            </a:prstGeom>
+            <a:solidFill>
+              <a:srgbClr val="6B5B4B"/>
+            </a:solidFill>
+            <a:ln>
+              <a:noFill/>
+            </a:ln>
+          </p:spPr>
+          <p:txBody>
+            <a:bodyPr rtlCol="0" anchor="ctr"/>
+            <a:lstStyle/>
+            <a:p>
+              <a:pPr algn="ctr"/>
+            </a:p>
+          </p:txBody>
+        </p:sp>
+        <p:sp>
+          <p:nvSpPr>
+            <p:cNvPr id="45" name="Rectangle 44"/>
+            <p:cNvSpPr/>
+            <p:nvPr/>
+          </p:nvSpPr>
+          <p:spPr>
+            <a:xfrm>
+              <a:off x="6446519" y="2816352"/>
+              <a:ext cx="1005840" cy="54864"/>
+            </a:xfrm>
+            <a:prstGeom prst="rect">
+              <a:avLst/>
+            </a:prstGeom>
+            <a:solidFill>
+              <a:srgbClr val="F28C28"/>
+            </a:solidFill>
+            <a:ln>
+              <a:noFill/>
+            </a:ln>
+          </p:spPr>
+          <p:txBody>
+            <a:bodyPr rtlCol="0" anchor="ctr"/>
+            <a:lstStyle/>
+            <a:p>
+              <a:pPr algn="ctr"/>
+            </a:p>
+          </p:txBody>
+        </p:sp>
+        <p:sp>
+          <p:nvSpPr>
+            <p:cNvPr id="46" name="Rectangle 45"/>
+            <p:cNvSpPr/>
+            <p:nvPr/>
+          </p:nvSpPr>
+          <p:spPr>
+            <a:xfrm>
+              <a:off x="6446519" y="3127248"/>
+              <a:ext cx="1005840" cy="54864"/>
+            </a:xfrm>
+            <a:prstGeom prst="rect">
+              <a:avLst/>
+            </a:prstGeom>
+            <a:solidFill>
+              <a:srgbClr val="F28C28"/>
+            </a:solidFill>
+            <a:ln>
+              <a:noFill/>
+            </a:ln>
+          </p:spPr>
+          <p:txBody>
+            <a:bodyPr rtlCol="0" anchor="ctr"/>
+            <a:lstStyle/>
+            <a:p>
+              <a:pPr algn="ctr"/>
+            </a:p>
+          </p:txBody>
+        </p:sp>
+        <p:sp>
+          <p:nvSpPr>
+            <p:cNvPr id="47" name="Rounded Rectangle 46"/>
+            <p:cNvSpPr/>
+            <p:nvPr/>
+          </p:nvSpPr>
+          <p:spPr>
+            <a:xfrm>
+              <a:off x="7543799" y="2852928"/>
+              <a:ext cx="1010411" cy="237744"/>
+            </a:xfrm>
+            <a:prstGeom prst="roundRect">
+              <a:avLst>
+                <a:gd name="adj" fmla="val 23076"/>
+              </a:avLst>
+            </a:prstGeom>
+            <a:solidFill>
+              <a:srgbClr val="6CA0DC"/>
+            </a:solidFill>
+            <a:ln>
+              <a:noFill/>
+            </a:ln>
+          </p:spPr>
+          <p:txBody>
+            <a:bodyPr rtlCol="0" anchor="ctr"/>
+            <a:lstStyle/>
+            <a:p>
+              <a:pPr algn="ctr"/>
+            </a:p>
+          </p:txBody>
+        </p:sp>
+        <p:cxnSp>
+          <p:nvCxnSpPr>
+            <p:cNvPr id="48" name="Connector 47"/>
+            <p:cNvCxnSpPr/>
+            <p:nvPr/>
+          </p:nvCxnSpPr>
+          <p:spPr>
+            <a:xfrm>
+              <a:off x="7498079" y="2423160"/>
+              <a:ext cx="0" cy="1097280"/>
+            </a:xfrm>
+            <a:prstGeom prst="line">
+              <a:avLst/>
+            </a:prstGeom>
+            <a:ln w="31750">
+              <a:solidFill>
+                <a:srgbClr val="A9B0B8"/>
+              </a:solidFill>
+              <a:prstDash val="dash"/>
+            </a:ln>
+          </p:spPr>
+        </p:cxnSp>
+      </p:grpSp>
+      <p:grpSp>
+        <p:nvGrpSpPr>
+          <p:cNvPr id="49" name="SCENARIO 4" descr="A junction where the line splits, with a dashed boundary and blue beams beyond it. Marked with a question mark."/>
+          <p:cNvGrpSpPr/>
+          <p:nvPr/>
+        </p:nvGrpSpPr>
+        <p:grpSpPr>
+          <a:xfrm>
+            <a:off x="8983980" y="1371600"/>
+            <a:ext cx="2656332" cy="3520440"/>
+            <a:chOff x="8983980" y="1371600"/>
+            <a:chExt cx="2656332" cy="3520440"/>
+          </a:xfrm>
+        </p:grpSpPr>
+        <p:sp>
+          <p:nvSpPr>
+            <p:cNvPr id="50" name="Rounded Rectangle 49"/>
+            <p:cNvSpPr/>
+            <p:nvPr/>
+          </p:nvSpPr>
+          <p:spPr>
+            <a:xfrm>
+              <a:off x="8983980" y="1371600"/>
+              <a:ext cx="2656332" cy="3520440"/>
+            </a:xfrm>
+            <a:prstGeom prst="roundRect">
+              <a:avLst>
+                <a:gd name="adj" fmla="val 2753"/>
+              </a:avLst>
+            </a:prstGeom>
+            <a:solidFill>
+              <a:srgbClr val="2B2F36"/>
+            </a:solidFill>
+            <a:ln>
+              <a:noFill/>
+            </a:ln>
+          </p:spPr>
+          <p:txBody>
+            <a:bodyPr rtlCol="0" anchor="ctr"/>
+            <a:lstStyle/>
+            <a:p>
+              <a:pPr algn="ctr"/>
+            </a:p>
+          </p:txBody>
+        </p:sp>
+        <p:sp>
+          <p:nvSpPr>
+            <p:cNvPr id="51" name="Rounded Rectangle 50"/>
+            <p:cNvSpPr/>
+            <p:nvPr/>
+          </p:nvSpPr>
+          <p:spPr>
+            <a:xfrm>
+              <a:off x="9093707" y="1965960"/>
+              <a:ext cx="2436876" cy="2011680"/>
+            </a:xfrm>
+            <a:prstGeom prst="roundRect">
+              <a:avLst>
+                <a:gd name="adj" fmla="val 2727"/>
+              </a:avLst>
+            </a:prstGeom>
+            <a:solidFill>
+              <a:srgbClr val="1E2126"/>
+            </a:solidFill>
+            <a:ln>
+              <a:noFill/>
+            </a:ln>
+          </p:spPr>
+          <p:txBody>
+            <a:bodyPr rtlCol="0" anchor="ctr"/>
+            <a:lstStyle/>
+            <a:p>
+              <a:pPr algn="ctr"/>
+            </a:p>
+          </p:txBody>
+        </p:sp>
+        <p:sp>
+          <p:nvSpPr>
+            <p:cNvPr id="52" name="QBADGE"/>
+            <p:cNvSpPr/>
+            <p:nvPr/>
+          </p:nvSpPr>
+          <p:spPr>
+            <a:xfrm>
+              <a:off x="11000232" y="1490472"/>
+              <a:ext cx="457200" cy="457200"/>
+            </a:xfrm>
+            <a:prstGeom prst="ellipse">
+              <a:avLst/>
+            </a:prstGeom>
+            <a:noFill/>
+            <a:ln w="25400">
+              <a:solidFill>
+                <a:srgbClr val="A9B0B8"/>
+              </a:solidFill>
+            </a:ln>
+          </p:spPr>
+          <p:txBody>
+            <a:bodyPr rtlCol="0" anchor="ctr" wrap="square" lIns="0" tIns="0" rIns="0" bIns="0">
+              <a:noAutofit/>
+            </a:bodyPr>
+            <a:lstStyle/>
+            <a:p>
+              <a:pPr algn="ctr"/>
+              <a:r>
+                <a:rPr sz="2200" b="1" i="0" lang="en-GB">
+                  <a:solidFill>
+                    <a:srgbClr val="F2F2F2"/>
+                  </a:solidFill>
+                  <a:latin typeface="Arial"/>
+                </a:rPr>
+                <a:t>?</a:t>
+              </a:r>
+            </a:p>
+          </p:txBody>
+        </p:sp>
+        <p:sp>
+          <p:nvSpPr>
+            <p:cNvPr id="53" name="TextBox 52"/>
+            <p:cNvSpPr txBox="1"/>
+            <p:nvPr/>
+          </p:nvSpPr>
+          <p:spPr>
+            <a:xfrm>
+              <a:off x="9075419" y="4069080"/>
+              <a:ext cx="2473451" cy="685800"/>
+            </a:xfrm>
+            <a:prstGeom prst="rect">
+              <a:avLst/>
+            </a:prstGeom>
+            <a:noFill/>
+          </p:spPr>
+          <p:txBody>
+            <a:bodyPr wrap="square" anchor="ctr" lIns="18288" tIns="9144" rIns="18288" bIns="9144">
+              <a:noAutofit/>
+            </a:bodyPr>
+            <a:lstStyle/>
+            <a:p>
+              <a:pPr algn="ctr"/>
+              <a:r>
+                <a:rPr sz="2000" b="1" i="0" lang="en-GB">
+                  <a:solidFill>
+                    <a:srgbClr val="F2F2F2"/>
+                  </a:solidFill>
+                  <a:latin typeface="Arial"/>
+                </a:rPr>
+                <a:t>Junction boundary</a:t>
+              </a:r>
+            </a:p>
+          </p:txBody>
+        </p:sp>
+        <p:sp>
+          <p:nvSpPr>
+            <p:cNvPr id="54" name="Freeform 53"/>
+            <p:cNvSpPr/>
+            <p:nvPr/>
+          </p:nvSpPr>
+          <p:spPr>
+            <a:xfrm>
+              <a:off x="9258300" y="2971800"/>
+              <a:ext cx="868680" cy="0"/>
+            </a:xfrm>
+            <a:custGeom>
+              <a:avLst/>
+              <a:gdLst/>
+              <a:ahLst/>
+              <a:cxnLst/>
+              <a:rect l="l" t="t" r="r" b="b"/>
+              <a:pathLst>
+                <a:path w="868680" h="0">
+                  <a:moveTo>
+                    <a:pt x="0" y="0"/>
+                  </a:moveTo>
+                  <a:lnTo>
+                    <a:pt x="868680" y="0"/>
+                  </a:lnTo>
+                </a:path>
+              </a:pathLst>
+            </a:custGeom>
+            <a:noFill/>
+            <a:ln w="88900">
+              <a:solidFill>
+                <a:srgbClr val="F28C28"/>
+              </a:solidFill>
+            </a:ln>
+          </p:spPr>
+          <p:txBody>
+            <a:bodyPr rtlCol="0" anchor="ctr"/>
+            <a:lstStyle/>
+            <a:p>
+              <a:pPr algn="ctr"/>
+            </a:p>
+          </p:txBody>
+        </p:sp>
+        <p:sp>
+          <p:nvSpPr>
+            <p:cNvPr id="55" name="Freeform 54"/>
+            <p:cNvSpPr/>
+            <p:nvPr/>
+          </p:nvSpPr>
+          <p:spPr>
+            <a:xfrm>
+              <a:off x="10126980" y="2514600"/>
+              <a:ext cx="1239012" cy="457200"/>
+            </a:xfrm>
+            <a:custGeom>
+              <a:avLst/>
+              <a:gdLst/>
+              <a:ahLst/>
+              <a:cxnLst/>
+              <a:rect l="l" t="t" r="r" b="b"/>
+              <a:pathLst>
+                <a:path w="1239012" h="457200">
+                  <a:moveTo>
+                    <a:pt x="0" y="457200"/>
+                  </a:moveTo>
+                  <a:lnTo>
+                    <a:pt x="457200" y="0"/>
+                  </a:lnTo>
+                  <a:lnTo>
+                    <a:pt x="1239012" y="0"/>
+                  </a:lnTo>
+                </a:path>
+              </a:pathLst>
+            </a:custGeom>
+            <a:noFill/>
+            <a:ln w="88900">
+              <a:solidFill>
+                <a:srgbClr val="6CA0DC"/>
+              </a:solidFill>
+            </a:ln>
+          </p:spPr>
+          <p:txBody>
+            <a:bodyPr rtlCol="0" anchor="ctr"/>
+            <a:lstStyle/>
+            <a:p>
+              <a:pPr algn="ctr"/>
+            </a:p>
+          </p:txBody>
+        </p:sp>
+        <p:sp>
+          <p:nvSpPr>
+            <p:cNvPr id="56" name="Freeform 55"/>
+            <p:cNvSpPr/>
+            <p:nvPr/>
+          </p:nvSpPr>
+          <p:spPr>
+            <a:xfrm>
+              <a:off x="10126980" y="2971800"/>
+              <a:ext cx="1239012" cy="457200"/>
+            </a:xfrm>
+            <a:custGeom>
+              <a:avLst/>
+              <a:gdLst/>
+              <a:ahLst/>
+              <a:cxnLst/>
+              <a:rect l="l" t="t" r="r" b="b"/>
+              <a:pathLst>
+                <a:path w="1239012" h="457200">
+                  <a:moveTo>
+                    <a:pt x="0" y="0"/>
+                  </a:moveTo>
+                  <a:lnTo>
+                    <a:pt x="457200" y="457200"/>
+                  </a:lnTo>
+                  <a:lnTo>
+                    <a:pt x="1239012" y="457200"/>
+                  </a:lnTo>
+                </a:path>
+              </a:pathLst>
+            </a:custGeom>
+            <a:noFill/>
+            <a:ln w="88900">
+              <a:solidFill>
+                <a:srgbClr val="6CA0DC"/>
+              </a:solidFill>
+            </a:ln>
+          </p:spPr>
+          <p:txBody>
+            <a:bodyPr rtlCol="0" anchor="ctr"/>
+            <a:lstStyle/>
+            <a:p>
+              <a:pPr algn="ctr"/>
+            </a:p>
+          </p:txBody>
+        </p:sp>
+        <p:cxnSp>
+          <p:nvCxnSpPr>
+            <p:cNvPr id="57" name="Connector 56"/>
+            <p:cNvCxnSpPr/>
+            <p:nvPr/>
+          </p:nvCxnSpPr>
+          <p:spPr>
+            <a:xfrm>
+              <a:off x="10291572" y="2194560"/>
+              <a:ext cx="0" cy="1554479"/>
+            </a:xfrm>
+            <a:prstGeom prst="line">
+              <a:avLst/>
+            </a:prstGeom>
+            <a:ln w="31750">
+              <a:solidFill>
+                <a:srgbClr val="A9B0B8"/>
+              </a:solidFill>
+              <a:prstDash val="dash"/>
+            </a:ln>
+          </p:spPr>
+        </p:cxnSp>
+      </p:grpSp>
+      <p:sp>
+        <p:nvSpPr>
+          <p:cNvPr id="58" name="FOOTER"/>
+          <p:cNvSpPr txBox="1"/>
+          <p:nvPr/>
+        </p:nvSpPr>
+        <p:spPr>
+          <a:xfrm>
+            <a:off x="9784080" y="5074920"/>
+            <a:ext cx="1856231" cy="274320"/>
+          </a:xfrm>
+          <a:prstGeom prst="rect">
+            <a:avLst/>
+          </a:prstGeom>
+          <a:noFill/>
+        </p:spPr>
+        <p:txBody>
+          <a:bodyPr wrap="square" anchor="ctr" lIns="18288" tIns="9144" rIns="18288" bIns="9144">
+            <a:noAutofit/>
+          </a:bodyPr>
+          <a:lstStyle/>
+          <a:p>
+            <a:pPr algn="r"/>
+            <a:r>
+              <a:rPr sz="1400" b="0" i="0" lang="en-GB">
+                <a:solidFill>
+                  <a:srgbClr val="A9B0B8"/>
+                </a:solidFill>
+                <a:latin typeface="Arial"/>
+              </a:rPr>
+              <a:t>OQ12</a:t>
+            </a:r>
+          </a:p>
+        </p:txBody>
+      </p:sp>
+      <p:sp>
+        <p:nvSpPr>
+          <p:cNvPr id="59" name="CAPTION BAR"/>
+          <p:cNvSpPr/>
+          <p:nvPr/>
+        </p:nvSpPr>
+        <p:spPr>
+          <a:xfrm>
+            <a:off x="548640" y="5760720"/>
+            <a:ext cx="11091672" cy="731520"/>
+          </a:xfrm>
+          <a:prstGeom prst="roundRect">
+            <a:avLst>
+              <a:gd name="adj" fmla="val 10000"/>
+            </a:avLst>
+          </a:prstGeom>
+          <a:solidFill>
+            <a:srgbClr val="2B2F36"/>
+          </a:solidFill>
+          <a:ln>
+            <a:noFill/>
+          </a:ln>
+        </p:spPr>
+        <p:txBody>
+          <a:bodyPr rtlCol="0" anchor="ctr"/>
+          <a:lstStyle/>
+          <a:p>
+            <a:pPr algn="ctr"/>
+          </a:p>
+        </p:txBody>
+      </p:sp>
+      <p:sp>
+        <p:nvSpPr>
+          <p:cNvPr id="60" name="CAPTION RULE"/>
+          <p:cNvSpPr/>
+          <p:nvPr/>
+        </p:nvSpPr>
+        <p:spPr>
+          <a:xfrm>
+            <a:off x="548640" y="5815583"/>
+            <a:ext cx="73152" cy="621792"/>
+          </a:xfrm>
+          <a:prstGeom prst="rect">
+            <a:avLst/>
+          </a:prstGeom>
+          <a:solidFill>
+            <a:srgbClr val="F28C28"/>
+          </a:solidFill>
+          <a:ln>
+            <a:noFill/>
+          </a:ln>
+        </p:spPr>
+        <p:txBody>
+          <a:bodyPr rtlCol="0" anchor="ctr"/>
+          <a:lstStyle/>
+          <a:p>
+            <a:pPr algn="ctr"/>
+          </a:p>
+        </p:txBody>
+      </p:sp>
+      <p:sp>
+        <p:nvSpPr>
+          <p:cNvPr id="61" name="CAPTION"/>
+          <p:cNvSpPr txBox="1"/>
+          <p:nvPr/>
+        </p:nvSpPr>
+        <p:spPr>
+          <a:xfrm>
+            <a:off x="777240" y="5760720"/>
+            <a:ext cx="10744200" cy="731520"/>
+          </a:xfrm>
+          <a:prstGeom prst="rect">
+            <a:avLst/>
+          </a:prstGeom>
+          <a:noFill/>
+        </p:spPr>
+        <p:txBody>
+          <a:bodyPr wrap="square" anchor="ctr" lIns="18288" tIns="9144" rIns="18288" bIns="9144">
+            <a:noAutofit/>
+          </a:bodyPr>
+          <a:lstStyle/>
+          <a:p>
+            <a:pPr algn="l">
+              <a:lnSpc>
+                <a:spcPct val="95000"/>
+              </a:lnSpc>
+            </a:pPr>
+            <a:r>
+              <a:rPr sz="2000" b="0" i="0" lang="en-GB">
+                <a:solidFill>
+                  <a:srgbClr val="F2F2F2"/>
+                </a:solidFill>
+                <a:latin typeface="Arial"/>
+              </a:rPr>
+              <a:t>Some cases still need answers: busy track, stranded trains, half-converted lines.</a:t>
+            </a:r>
+          </a:p>
+        </p:txBody>
+      </p:sp>
+      <p:sp>
+        <p:nvSpPr>
+          <p:cNvPr id="62" name="NUM"/>
+          <p:cNvSpPr txBox="1"/>
+          <p:nvPr/>
+        </p:nvSpPr>
+        <p:spPr>
+          <a:xfrm>
+            <a:off x="10728655" y="6528816"/>
+            <a:ext cx="914400" cy="274320"/>
+          </a:xfrm>
+          <a:prstGeom prst="rect">
+            <a:avLst/>
+          </a:prstGeom>
+          <a:noFill/>
+        </p:spPr>
+        <p:txBody>
+          <a:bodyPr wrap="square" anchor="ctr" lIns="18288" tIns="9144" rIns="18288" bIns="9144">
+            <a:noAutofit/>
+          </a:bodyPr>
+          <a:lstStyle/>
+          <a:p>
+            <a:pPr algn="r"/>
+            <a:r>
+              <a:rPr sz="1400" b="0" i="0" lang="en-GB">
+                <a:solidFill>
+                  <a:srgbClr val="A9B0B8"/>
+                </a:solidFill>
+                <a:latin typeface="Arial"/>
+              </a:rPr>
+              <a:t>16</a:t>
+            </a:r>
+          </a:p>
+        </p:txBody>
+      </p:sp>
+    </p:spTree>
+  </p:cSld>
+  <p:clrMapOvr>
+    <a:masterClrMapping/>
+  </p:clrMapOvr>
+</p:sld>
+</file>
+
+<file path=ppt/slides/slide17.xml><?xml version="1.0" encoding="utf-8"?>
+<p:sld xmlns:a="http://schemas.openxmlformats.org/drawingml/2006/main" xmlns:p="http://schemas.openxmlformats.org/presentationml/2006/main" xmlns:r="http://schemas.openxmlformats.org/officeDocument/2006/relationships">
+  <p:cSld>
+    <p:bg>
+      <p:bgPr>
+        <a:solidFill>
+          <a:srgbClr val="1E2126"/>
+        </a:solidFill>
+        <a:effectLst/>
+      </p:bgPr>
+    </p:bg>
+    <p:spTree>
+      <p:nvGrpSpPr>
+        <p:cNvPr id="1" name=""/>
+        <p:cNvGrpSpPr/>
+        <p:nvPr/>
+      </p:nvGrpSpPr>
+      <p:grpSpPr/>
+      <p:sp>
+        <p:nvSpPr>
+          <p:cNvPr id="2" name="TITLE"/>
+          <p:cNvSpPr>
+            <a:spLocks noGrp="1"/>
+          </p:cNvSpPr>
+          <p:nvPr>
+            <p:ph type="title"/>
+          </p:nvPr>
+        </p:nvSpPr>
+        <p:spPr>
+          <a:xfrm>
+            <a:off x="548640" y="365760"/>
+            <a:ext cx="9326880" cy="731520"/>
+          </a:xfrm>
+        </p:spPr>
+        <p:txBody>
+          <a:bodyPr wrap="square" anchor="ctr" lIns="0" rIns="0" tIns="0" bIns="0">
+            <a:noAutofit/>
+          </a:bodyPr>
+          <a:lstStyle/>
+          <a:p>
+            <a:pPr algn="l"/>
+            <a:r>
+              <a:rPr sz="3600" b="1" i="0" lang="en-GB">
+                <a:solidFill>
+                  <a:srgbClr val="F2F2F2"/>
+                </a:solidFill>
+                <a:latin typeface="Arial"/>
+              </a:rPr>
+              <a:t>Costs, refunds and undo</a:t>
+            </a:r>
+          </a:p>
+        </p:txBody>
+      </p:sp>
+      <p:sp>
+        <p:nvSpPr>
+          <p:cNvPr id="3" name="CHIP"/>
+          <p:cNvSpPr/>
+          <p:nvPr/>
+        </p:nvSpPr>
+        <p:spPr>
+          <a:xfrm>
+            <a:off x="10088575" y="548640"/>
+            <a:ext cx="1554480" cy="365760"/>
+          </a:xfrm>
+          <a:prstGeom prst="roundRect">
+            <a:avLst>
+              <a:gd name="adj" fmla="val 50000"/>
+            </a:avLst>
+          </a:prstGeom>
+          <a:noFill/>
+          <a:ln w="25400">
+            <a:solidFill>
+              <a:srgbClr val="A9B0B8"/>
+            </a:solidFill>
+          </a:ln>
+        </p:spPr>
+        <p:txBody>
+          <a:bodyPr rtlCol="0" anchor="ctr" wrap="square" lIns="36576" tIns="0" rIns="36576" bIns="0">
+            <a:noAutofit/>
+          </a:bodyPr>
+          <a:lstStyle/>
+          <a:p>
+            <a:pPr algn="ctr"/>
+            <a:r>
+              <a:rPr sz="1400" b="1" i="0" lang="en-GB">
+                <a:solidFill>
+                  <a:srgbClr val="F2F2F2"/>
+                </a:solidFill>
+                <a:latin typeface="Arial"/>
+              </a:rPr>
+              <a:t>UNDECIDED</a:t>
+            </a:r>
+          </a:p>
+        </p:txBody>
+      </p:sp>
+      <p:grpSp>
+        <p:nvGrpSpPr>
+          <p:cNvPr id="4" name="QUESTION 1" descr="Question card: cost and refund. Two small stacks of plates with arrows both ways."/>
+          <p:cNvGrpSpPr/>
+          <p:nvPr/>
+        </p:nvGrpSpPr>
+        <p:grpSpPr>
+          <a:xfrm>
+            <a:off x="548640" y="1417320"/>
+            <a:ext cx="3545128" cy="3566160"/>
+            <a:chOff x="548640" y="1417320"/>
+            <a:chExt cx="3545128" cy="3566160"/>
+          </a:xfrm>
+        </p:grpSpPr>
+        <p:sp>
+          <p:nvSpPr>
+            <p:cNvPr id="5" name="Rounded Rectangle 4"/>
+            <p:cNvSpPr/>
+            <p:nvPr/>
+          </p:nvSpPr>
+          <p:spPr>
+            <a:xfrm>
+              <a:off x="548640" y="1417320"/>
+              <a:ext cx="3545128" cy="3566160"/>
+            </a:xfrm>
+            <a:prstGeom prst="roundRect">
+              <a:avLst>
+                <a:gd name="adj" fmla="val 2063"/>
+              </a:avLst>
+            </a:prstGeom>
+            <a:solidFill>
+              <a:srgbClr val="2B2F36"/>
+            </a:solidFill>
+            <a:ln>
+              <a:noFill/>
+            </a:ln>
+          </p:spPr>
+          <p:txBody>
+            <a:bodyPr rtlCol="0" anchor="ctr"/>
+            <a:lstStyle/>
+            <a:p>
+              <a:pPr algn="ctr"/>
+            </a:p>
+          </p:txBody>
+        </p:sp>
+        <p:sp>
+          <p:nvSpPr>
+            <p:cNvPr id="6" name="TextBox 5"/>
+            <p:cNvSpPr txBox="1"/>
+            <p:nvPr/>
+          </p:nvSpPr>
+          <p:spPr>
+            <a:xfrm>
+              <a:off x="685800" y="3886200"/>
+              <a:ext cx="3270808" cy="822960"/>
+            </a:xfrm>
+            <a:prstGeom prst="rect">
+              <a:avLst/>
+            </a:prstGeom>
+            <a:noFill/>
+          </p:spPr>
+          <p:txBody>
+            <a:bodyPr wrap="square" anchor="ctr" lIns="18288" tIns="9144" rIns="18288" bIns="9144">
+              <a:noAutofit/>
+            </a:bodyPr>
+            <a:lstStyle/>
+            <a:p>
+              <a:pPr algn="ctr"/>
+              <a:r>
+                <a:rPr sz="2600" b="1" i="0" lang="en-GB">
+                  <a:solidFill>
+                    <a:srgbClr val="F2F2F2"/>
+                  </a:solidFill>
+                  <a:latin typeface="Arial"/>
+                </a:rPr>
+                <a:t>Cost and refund?</a:t>
+              </a:r>
+            </a:p>
+          </p:txBody>
+        </p:sp>
+        <p:sp>
+          <p:nvSpPr>
+            <p:cNvPr id="7" name="Rounded Rectangle 6"/>
+            <p:cNvSpPr/>
+            <p:nvPr/>
+          </p:nvSpPr>
+          <p:spPr>
+            <a:xfrm>
+              <a:off x="812444" y="3063240"/>
+              <a:ext cx="1005840" cy="237744"/>
+            </a:xfrm>
+            <a:prstGeom prst="roundRect">
+              <a:avLst>
+                <a:gd name="adj" fmla="val 19230"/>
+              </a:avLst>
+            </a:prstGeom>
+            <a:solidFill>
+              <a:srgbClr val="9AA0A6"/>
+            </a:solidFill>
+            <a:ln>
+              <a:noFill/>
+            </a:ln>
+          </p:spPr>
+          <p:txBody>
+            <a:bodyPr rtlCol="0" anchor="ctr"/>
+            <a:lstStyle/>
+            <a:p>
+              <a:pPr algn="ctr"/>
+            </a:p>
+          </p:txBody>
+        </p:sp>
+        <p:sp>
+          <p:nvSpPr>
+            <p:cNvPr id="8" name="Rounded Rectangle 7"/>
+            <p:cNvSpPr/>
+            <p:nvPr/>
+          </p:nvSpPr>
+          <p:spPr>
+            <a:xfrm>
+              <a:off x="2824124" y="3063240"/>
+              <a:ext cx="1005840" cy="237744"/>
+            </a:xfrm>
+            <a:prstGeom prst="roundRect">
+              <a:avLst>
+                <a:gd name="adj" fmla="val 19230"/>
+              </a:avLst>
+            </a:prstGeom>
+            <a:solidFill>
+              <a:srgbClr val="9AA0A6"/>
+            </a:solidFill>
+            <a:ln>
+              <a:noFill/>
+            </a:ln>
+          </p:spPr>
+          <p:txBody>
+            <a:bodyPr rtlCol="0" anchor="ctr"/>
+            <a:lstStyle/>
+            <a:p>
+              <a:pPr algn="ctr"/>
+            </a:p>
+          </p:txBody>
+        </p:sp>
+        <p:sp>
+          <p:nvSpPr>
+            <p:cNvPr id="9" name="Rounded Rectangle 8"/>
+            <p:cNvSpPr/>
+            <p:nvPr/>
+          </p:nvSpPr>
+          <p:spPr>
+            <a:xfrm>
+              <a:off x="812444" y="2770632"/>
+              <a:ext cx="1005840" cy="237744"/>
+            </a:xfrm>
+            <a:prstGeom prst="roundRect">
+              <a:avLst>
+                <a:gd name="adj" fmla="val 19230"/>
+              </a:avLst>
+            </a:prstGeom>
+            <a:solidFill>
+              <a:srgbClr val="9AA0A6"/>
+            </a:solidFill>
+            <a:ln>
+              <a:noFill/>
+            </a:ln>
+          </p:spPr>
+          <p:txBody>
+            <a:bodyPr rtlCol="0" anchor="ctr"/>
+            <a:lstStyle/>
+            <a:p>
+              <a:pPr algn="ctr"/>
+            </a:p>
+          </p:txBody>
+        </p:sp>
+        <p:sp>
+          <p:nvSpPr>
+            <p:cNvPr id="10" name="Rounded Rectangle 9"/>
+            <p:cNvSpPr/>
+            <p:nvPr/>
+          </p:nvSpPr>
+          <p:spPr>
+            <a:xfrm>
+              <a:off x="2824124" y="2770632"/>
+              <a:ext cx="1005840" cy="237744"/>
+            </a:xfrm>
+            <a:prstGeom prst="roundRect">
+              <a:avLst>
+                <a:gd name="adj" fmla="val 19230"/>
+              </a:avLst>
+            </a:prstGeom>
+            <a:solidFill>
+              <a:srgbClr val="9AA0A6"/>
+            </a:solidFill>
+            <a:ln>
+              <a:noFill/>
+            </a:ln>
+          </p:spPr>
+          <p:txBody>
+            <a:bodyPr rtlCol="0" anchor="ctr"/>
+            <a:lstStyle/>
+            <a:p>
+              <a:pPr algn="ctr"/>
+            </a:p>
+          </p:txBody>
+        </p:sp>
+        <p:sp>
+          <p:nvSpPr>
+            <p:cNvPr id="11" name="Rounded Rectangle 10"/>
+            <p:cNvSpPr/>
+            <p:nvPr/>
+          </p:nvSpPr>
+          <p:spPr>
+            <a:xfrm>
+              <a:off x="812444" y="2478024"/>
+              <a:ext cx="1005840" cy="237744"/>
+            </a:xfrm>
+            <a:prstGeom prst="roundRect">
+              <a:avLst>
+                <a:gd name="adj" fmla="val 19230"/>
+              </a:avLst>
+            </a:prstGeom>
+            <a:solidFill>
+              <a:srgbClr val="9AA0A6"/>
+            </a:solidFill>
+            <a:ln>
+              <a:noFill/>
+            </a:ln>
+          </p:spPr>
+          <p:txBody>
+            <a:bodyPr rtlCol="0" anchor="ctr"/>
+            <a:lstStyle/>
+            <a:p>
+              <a:pPr algn="ctr"/>
+            </a:p>
+          </p:txBody>
+        </p:sp>
+        <p:sp>
+          <p:nvSpPr>
+            <p:cNvPr id="12" name="Rounded Rectangle 11"/>
+            <p:cNvSpPr/>
+            <p:nvPr/>
+          </p:nvSpPr>
+          <p:spPr>
+            <a:xfrm>
+              <a:off x="2824124" y="2478024"/>
+              <a:ext cx="1005840" cy="237744"/>
+            </a:xfrm>
+            <a:prstGeom prst="roundRect">
+              <a:avLst>
+                <a:gd name="adj" fmla="val 19230"/>
+              </a:avLst>
+            </a:prstGeom>
+            <a:solidFill>
+              <a:srgbClr val="9AA0A6"/>
+            </a:solidFill>
+            <a:ln>
+              <a:noFill/>
+            </a:ln>
+          </p:spPr>
+          <p:txBody>
+            <a:bodyPr rtlCol="0" anchor="ctr"/>
+            <a:lstStyle/>
+            <a:p>
+              <a:pPr algn="ctr"/>
+            </a:p>
+          </p:txBody>
+        </p:sp>
+        <p:cxnSp>
+          <p:nvCxnSpPr>
+            <p:cNvPr id="13" name="Connector 12"/>
+            <p:cNvCxnSpPr/>
+            <p:nvPr/>
+          </p:nvCxnSpPr>
+          <p:spPr>
+            <a:xfrm>
+              <a:off x="1955444" y="2560320"/>
+              <a:ext cx="731520" cy="0"/>
+            </a:xfrm>
+            <a:prstGeom prst="line">
+              <a:avLst/>
+            </a:prstGeom>
+            <a:ln w="50800">
+              <a:solidFill>
+                <a:srgbClr val="F28C28"/>
+              </a:solidFill>
+              <a:tailEnd type="triangle" w="med" len="med"/>
+            </a:ln>
+          </p:spPr>
+        </p:cxnSp>
+        <p:cxnSp>
+          <p:nvCxnSpPr>
+            <p:cNvPr id="14" name="Connector 13"/>
+            <p:cNvCxnSpPr/>
+            <p:nvPr/>
+          </p:nvCxnSpPr>
+          <p:spPr>
+            <a:xfrm flipH="1">
+              <a:off x="1955444" y="3017520"/>
+              <a:ext cx="731520" cy="0"/>
+            </a:xfrm>
+            <a:prstGeom prst="line">
+              <a:avLst/>
+            </a:prstGeom>
+            <a:ln w="50800">
+              <a:solidFill>
+                <a:srgbClr val="F28C28"/>
+              </a:solidFill>
+              <a:tailEnd type="triangle" w="med" len="med"/>
+            </a:ln>
+          </p:spPr>
+        </p:cxnSp>
+      </p:grpSp>
+      <p:grpSp>
+        <p:nvGrpSpPr>
+          <p:cNvPr id="15" name="QUESTION 2" descr="Question card: undo or recovery. A circular undo arrow."/>
+          <p:cNvGrpSpPr/>
+          <p:nvPr/>
+        </p:nvGrpSpPr>
+        <p:grpSpPr>
+          <a:xfrm>
+            <a:off x="4322368" y="1417320"/>
+            <a:ext cx="3545128" cy="3566160"/>
+            <a:chOff x="4322368" y="1417320"/>
+            <a:chExt cx="3545128" cy="3566160"/>
+          </a:xfrm>
+        </p:grpSpPr>
+        <p:sp>
+          <p:nvSpPr>
+            <p:cNvPr id="16" name="Rounded Rectangle 15"/>
+            <p:cNvSpPr/>
+            <p:nvPr/>
+          </p:nvSpPr>
+          <p:spPr>
+            <a:xfrm>
+              <a:off x="4322368" y="1417320"/>
+              <a:ext cx="3545128" cy="3566160"/>
+            </a:xfrm>
+            <a:prstGeom prst="roundRect">
+              <a:avLst>
+                <a:gd name="adj" fmla="val 2063"/>
+              </a:avLst>
+            </a:prstGeom>
+            <a:solidFill>
+              <a:srgbClr val="2B2F36"/>
+            </a:solidFill>
+            <a:ln>
+              <a:noFill/>
+            </a:ln>
+          </p:spPr>
+          <p:txBody>
+            <a:bodyPr rtlCol="0" anchor="ctr"/>
+            <a:lstStyle/>
+            <a:p>
+              <a:pPr algn="ctr"/>
+            </a:p>
+          </p:txBody>
+        </p:sp>
+        <p:sp>
+          <p:nvSpPr>
+            <p:cNvPr id="17" name="TextBox 16"/>
+            <p:cNvSpPr txBox="1"/>
+            <p:nvPr/>
+          </p:nvSpPr>
+          <p:spPr>
+            <a:xfrm>
+              <a:off x="4459528" y="3886200"/>
+              <a:ext cx="3270808" cy="822960"/>
+            </a:xfrm>
+            <a:prstGeom prst="rect">
+              <a:avLst/>
+            </a:prstGeom>
+            <a:noFill/>
+          </p:spPr>
+          <p:txBody>
+            <a:bodyPr wrap="square" anchor="ctr" lIns="18288" tIns="9144" rIns="18288" bIns="9144">
+              <a:noAutofit/>
+            </a:bodyPr>
+            <a:lstStyle/>
+            <a:p>
+              <a:pPr algn="ctr"/>
+              <a:r>
+                <a:rPr sz="2600" b="1" i="0" lang="en-GB">
+                  <a:solidFill>
+                    <a:srgbClr val="F2F2F2"/>
+                  </a:solidFill>
+                  <a:latin typeface="Arial"/>
+                </a:rPr>
+                <a:t>Undo or recovery?</a:t>
+              </a:r>
+            </a:p>
+          </p:txBody>
+        </p:sp>
+        <p:sp>
+          <p:nvSpPr>
+            <p:cNvPr id="18" name="Freeform 17"/>
+            <p:cNvSpPr/>
+            <p:nvPr/>
+          </p:nvSpPr>
+          <p:spPr>
+            <a:xfrm>
+              <a:off x="5363963" y="2013246"/>
+              <a:ext cx="1393952" cy="1461439"/>
+            </a:xfrm>
+            <a:custGeom>
+              <a:avLst/>
+              <a:gdLst/>
+              <a:ahLst/>
+              <a:cxnLst/>
+              <a:rect l="l" t="t" r="r" b="b"/>
+              <a:pathLst>
+                <a:path w="1393952" h="1461439">
+                  <a:moveTo>
+                    <a:pt x="1393952" y="420800"/>
+                  </a:moveTo>
+                  <a:lnTo>
+                    <a:pt x="1346973" y="335414"/>
+                  </a:lnTo>
+                  <a:lnTo>
+                    <a:pt x="1289060" y="257030"/>
+                  </a:lnTo>
+                  <a:lnTo>
+                    <a:pt x="1221242" y="187041"/>
+                  </a:lnTo>
+                  <a:lnTo>
+                    <a:pt x="1144722" y="126687"/>
+                  </a:lnTo>
+                  <a:lnTo>
+                    <a:pt x="1060859" y="77041"/>
+                  </a:lnTo>
+                  <a:lnTo>
+                    <a:pt x="971140" y="38983"/>
+                  </a:lnTo>
+                  <a:lnTo>
+                    <a:pt x="877159" y="13190"/>
+                  </a:lnTo>
+                  <a:lnTo>
+                    <a:pt x="780583" y="118"/>
+                  </a:lnTo>
+                  <a:lnTo>
+                    <a:pt x="683126" y="0"/>
+                  </a:lnTo>
+                  <a:lnTo>
+                    <a:pt x="586518" y="12838"/>
+                  </a:lnTo>
+                  <a:lnTo>
+                    <a:pt x="492475" y="38403"/>
+                  </a:lnTo>
+                  <a:lnTo>
+                    <a:pt x="402664" y="76243"/>
+                  </a:lnTo>
+                  <a:lnTo>
+                    <a:pt x="318681" y="125686"/>
+                  </a:lnTo>
+                  <a:lnTo>
+                    <a:pt x="242015" y="185854"/>
+                  </a:lnTo>
+                  <a:lnTo>
+                    <a:pt x="174027" y="255679"/>
+                  </a:lnTo>
+                  <a:lnTo>
+                    <a:pt x="115925" y="333922"/>
+                  </a:lnTo>
+                  <a:lnTo>
+                    <a:pt x="68739" y="419194"/>
+                  </a:lnTo>
+                  <a:lnTo>
+                    <a:pt x="33307" y="509981"/>
+                  </a:lnTo>
+                  <a:lnTo>
+                    <a:pt x="10257" y="604673"/>
+                  </a:lnTo>
+                  <a:lnTo>
+                    <a:pt x="0" y="701589"/>
+                  </a:lnTo>
+                  <a:lnTo>
+                    <a:pt x="2716" y="799007"/>
+                  </a:lnTo>
+                  <a:lnTo>
+                    <a:pt x="18358" y="895201"/>
+                  </a:lnTo>
+                  <a:lnTo>
+                    <a:pt x="46649" y="988461"/>
+                  </a:lnTo>
+                  <a:lnTo>
+                    <a:pt x="87085" y="1077133"/>
+                  </a:lnTo>
+                  <a:lnTo>
+                    <a:pt x="138949" y="1159643"/>
+                  </a:lnTo>
+                  <a:lnTo>
+                    <a:pt x="201321" y="1234527"/>
+                  </a:lnTo>
+                  <a:lnTo>
+                    <a:pt x="273094" y="1300455"/>
+                  </a:lnTo>
+                  <a:lnTo>
+                    <a:pt x="352994" y="1356257"/>
+                  </a:lnTo>
+                  <a:lnTo>
+                    <a:pt x="439602" y="1400943"/>
+                  </a:lnTo>
+                  <a:lnTo>
+                    <a:pt x="531382" y="1433719"/>
+                  </a:lnTo>
+                  <a:lnTo>
+                    <a:pt x="626704" y="1454005"/>
+                  </a:lnTo>
+                  <a:lnTo>
+                    <a:pt x="723877" y="1461439"/>
+                  </a:lnTo>
+                  <a:lnTo>
+                    <a:pt x="821175" y="1455890"/>
+                  </a:lnTo>
+                  <a:lnTo>
+                    <a:pt x="916873" y="1437457"/>
+                  </a:lnTo>
+                  <a:lnTo>
+                    <a:pt x="1009271" y="1406466"/>
+                  </a:lnTo>
+                  <a:lnTo>
+                    <a:pt x="1096730" y="1363468"/>
+                  </a:lnTo>
+                </a:path>
+              </a:pathLst>
+            </a:custGeom>
+            <a:noFill/>
+            <a:ln w="76200">
+              <a:solidFill>
+                <a:srgbClr val="F28C28"/>
+              </a:solidFill>
+              <a:tailEnd type="triangle" w="med" len="med"/>
+            </a:ln>
+          </p:spPr>
+          <p:txBody>
+            <a:bodyPr rtlCol="0" anchor="ctr"/>
+            <a:lstStyle/>
+            <a:p>
+              <a:pPr algn="ctr"/>
+            </a:p>
+          </p:txBody>
+        </p:sp>
+      </p:grpSp>
+      <p:grpSp>
+        <p:nvGrpSpPr>
+          <p:cNvPr id="19" name="QUESTION 3" descr="Question card: longest piece. A short piece of track with a measuring line."/>
+          <p:cNvGrpSpPr/>
+          <p:nvPr/>
+        </p:nvGrpSpPr>
+        <p:grpSpPr>
+          <a:xfrm>
+            <a:off x="8096097" y="1417320"/>
+            <a:ext cx="3545128" cy="3566160"/>
+            <a:chOff x="8096097" y="1417320"/>
+            <a:chExt cx="3545128" cy="3566160"/>
+          </a:xfrm>
+        </p:grpSpPr>
+        <p:sp>
+          <p:nvSpPr>
+            <p:cNvPr id="20" name="Rounded Rectangle 19"/>
+            <p:cNvSpPr/>
+            <p:nvPr/>
+          </p:nvSpPr>
+          <p:spPr>
+            <a:xfrm>
+              <a:off x="8096097" y="1417320"/>
+              <a:ext cx="3545128" cy="3566160"/>
+            </a:xfrm>
+            <a:prstGeom prst="roundRect">
+              <a:avLst>
+                <a:gd name="adj" fmla="val 2063"/>
+              </a:avLst>
+            </a:prstGeom>
+            <a:solidFill>
+              <a:srgbClr val="2B2F36"/>
+            </a:solidFill>
+            <a:ln>
+              <a:noFill/>
+            </a:ln>
+          </p:spPr>
+          <p:txBody>
+            <a:bodyPr rtlCol="0" anchor="ctr"/>
+            <a:lstStyle/>
+            <a:p>
+              <a:pPr algn="ctr"/>
+            </a:p>
+          </p:txBody>
+        </p:sp>
+        <p:sp>
+          <p:nvSpPr>
+            <p:cNvPr id="21" name="TextBox 20"/>
+            <p:cNvSpPr txBox="1"/>
+            <p:nvPr/>
+          </p:nvSpPr>
+          <p:spPr>
+            <a:xfrm>
+              <a:off x="8233257" y="3886200"/>
+              <a:ext cx="3270808" cy="822960"/>
+            </a:xfrm>
+            <a:prstGeom prst="rect">
+              <a:avLst/>
+            </a:prstGeom>
+            <a:noFill/>
+          </p:spPr>
+          <p:txBody>
+            <a:bodyPr wrap="square" anchor="ctr" lIns="18288" tIns="9144" rIns="18288" bIns="9144">
+              <a:noAutofit/>
+            </a:bodyPr>
+            <a:lstStyle/>
+            <a:p>
+              <a:pPr algn="ctr"/>
+              <a:r>
+                <a:rPr sz="2600" b="1" i="0" lang="en-GB">
+                  <a:solidFill>
+                    <a:srgbClr val="F2F2F2"/>
+                  </a:solidFill>
+                  <a:latin typeface="Arial"/>
+                </a:rPr>
+                <a:t>Longest piece?</a:t>
+              </a:r>
+            </a:p>
+          </p:txBody>
+        </p:sp>
+        <p:sp>
+          <p:nvSpPr>
+            <p:cNvPr id="22" name="Rectangle 21"/>
+            <p:cNvSpPr/>
+            <p:nvPr/>
+          </p:nvSpPr>
+          <p:spPr>
+            <a:xfrm>
+              <a:off x="8497061" y="2313432"/>
+              <a:ext cx="54864" cy="530352"/>
+            </a:xfrm>
+            <a:prstGeom prst="rect">
+              <a:avLst/>
+            </a:prstGeom>
+            <a:solidFill>
+              <a:srgbClr val="6B5B4B"/>
+            </a:solidFill>
+            <a:ln>
+              <a:noFill/>
+            </a:ln>
+          </p:spPr>
+          <p:txBody>
+            <a:bodyPr rtlCol="0" anchor="ctr"/>
+            <a:lstStyle/>
+            <a:p>
+              <a:pPr algn="ctr"/>
+            </a:p>
+          </p:txBody>
+        </p:sp>
+        <p:sp>
+          <p:nvSpPr>
+            <p:cNvPr id="23" name="Rectangle 22"/>
+            <p:cNvSpPr/>
+            <p:nvPr/>
+          </p:nvSpPr>
+          <p:spPr>
+            <a:xfrm>
+              <a:off x="8862822" y="2313432"/>
+              <a:ext cx="54864" cy="530352"/>
+            </a:xfrm>
+            <a:prstGeom prst="rect">
+              <a:avLst/>
+            </a:prstGeom>
+            <a:solidFill>
+              <a:srgbClr val="6B5B4B"/>
+            </a:solidFill>
+            <a:ln>
+              <a:noFill/>
+            </a:ln>
+          </p:spPr>
+          <p:txBody>
+            <a:bodyPr rtlCol="0" anchor="ctr"/>
+            <a:lstStyle/>
+            <a:p>
+              <a:pPr algn="ctr"/>
+            </a:p>
+          </p:txBody>
+        </p:sp>
+        <p:sp>
+          <p:nvSpPr>
+            <p:cNvPr id="24" name="Rectangle 23"/>
+            <p:cNvSpPr/>
+            <p:nvPr/>
+          </p:nvSpPr>
+          <p:spPr>
+            <a:xfrm>
+              <a:off x="9228582" y="2313432"/>
+              <a:ext cx="54864" cy="530352"/>
+            </a:xfrm>
+            <a:prstGeom prst="rect">
+              <a:avLst/>
+            </a:prstGeom>
+            <a:solidFill>
+              <a:srgbClr val="6B5B4B"/>
+            </a:solidFill>
+            <a:ln>
+              <a:noFill/>
+            </a:ln>
+          </p:spPr>
+          <p:txBody>
+            <a:bodyPr rtlCol="0" anchor="ctr"/>
+            <a:lstStyle/>
+            <a:p>
+              <a:pPr algn="ctr"/>
+            </a:p>
+          </p:txBody>
+        </p:sp>
+        <p:sp>
+          <p:nvSpPr>
+            <p:cNvPr id="25" name="Rectangle 24"/>
+            <p:cNvSpPr/>
+            <p:nvPr/>
+          </p:nvSpPr>
+          <p:spPr>
+            <a:xfrm>
+              <a:off x="9594342" y="2313432"/>
+              <a:ext cx="54864" cy="530352"/>
+            </a:xfrm>
+            <a:prstGeom prst="rect">
+              <a:avLst/>
+            </a:prstGeom>
+            <a:solidFill>
+              <a:srgbClr val="6B5B4B"/>
+            </a:solidFill>
+            <a:ln>
+              <a:noFill/>
+            </a:ln>
+          </p:spPr>
+          <p:txBody>
+            <a:bodyPr rtlCol="0" anchor="ctr"/>
+            <a:lstStyle/>
+            <a:p>
+              <a:pPr algn="ctr"/>
+            </a:p>
+          </p:txBody>
+        </p:sp>
+        <p:sp>
+          <p:nvSpPr>
+            <p:cNvPr id="26" name="Rectangle 25"/>
+            <p:cNvSpPr/>
+            <p:nvPr/>
+          </p:nvSpPr>
+          <p:spPr>
+            <a:xfrm>
+              <a:off x="9960102" y="2313432"/>
+              <a:ext cx="54864" cy="530352"/>
+            </a:xfrm>
+            <a:prstGeom prst="rect">
+              <a:avLst/>
+            </a:prstGeom>
+            <a:solidFill>
+              <a:srgbClr val="6B5B4B"/>
+            </a:solidFill>
+            <a:ln>
+              <a:noFill/>
+            </a:ln>
+          </p:spPr>
+          <p:txBody>
+            <a:bodyPr rtlCol="0" anchor="ctr"/>
+            <a:lstStyle/>
+            <a:p>
+              <a:pPr algn="ctr"/>
+            </a:p>
+          </p:txBody>
+        </p:sp>
+        <p:sp>
+          <p:nvSpPr>
+            <p:cNvPr id="27" name="Rectangle 26"/>
+            <p:cNvSpPr/>
+            <p:nvPr/>
+          </p:nvSpPr>
+          <p:spPr>
+            <a:xfrm>
+              <a:off x="10325862" y="2313432"/>
+              <a:ext cx="54864" cy="530352"/>
+            </a:xfrm>
+            <a:prstGeom prst="rect">
+              <a:avLst/>
+            </a:prstGeom>
+            <a:solidFill>
+              <a:srgbClr val="6B5B4B"/>
+            </a:solidFill>
+            <a:ln>
+              <a:noFill/>
+            </a:ln>
+          </p:spPr>
+          <p:txBody>
+            <a:bodyPr rtlCol="0" anchor="ctr"/>
+            <a:lstStyle/>
+            <a:p>
+              <a:pPr algn="ctr"/>
+            </a:p>
+          </p:txBody>
+        </p:sp>
+        <p:sp>
+          <p:nvSpPr>
+            <p:cNvPr id="28" name="Rectangle 27"/>
+            <p:cNvSpPr/>
+            <p:nvPr/>
+          </p:nvSpPr>
+          <p:spPr>
+            <a:xfrm>
+              <a:off x="10691622" y="2313432"/>
+              <a:ext cx="54864" cy="530352"/>
+            </a:xfrm>
+            <a:prstGeom prst="rect">
+              <a:avLst/>
+            </a:prstGeom>
+            <a:solidFill>
+              <a:srgbClr val="6B5B4B"/>
+            </a:solidFill>
+            <a:ln>
+              <a:noFill/>
+            </a:ln>
+          </p:spPr>
+          <p:txBody>
+            <a:bodyPr rtlCol="0" anchor="ctr"/>
+            <a:lstStyle/>
+            <a:p>
+              <a:pPr algn="ctr"/>
+            </a:p>
+          </p:txBody>
+        </p:sp>
+        <p:sp>
+          <p:nvSpPr>
+            <p:cNvPr id="29" name="Rectangle 28"/>
+            <p:cNvSpPr/>
+            <p:nvPr/>
+          </p:nvSpPr>
+          <p:spPr>
+            <a:xfrm>
+              <a:off x="11057382" y="2313432"/>
+              <a:ext cx="54864" cy="530352"/>
+            </a:xfrm>
+            <a:prstGeom prst="rect">
+              <a:avLst/>
+            </a:prstGeom>
+            <a:solidFill>
+              <a:srgbClr val="6B5B4B"/>
+            </a:solidFill>
+            <a:ln>
+              <a:noFill/>
+            </a:ln>
+          </p:spPr>
+          <p:txBody>
+            <a:bodyPr rtlCol="0" anchor="ctr"/>
+            <a:lstStyle/>
+            <a:p>
+              <a:pPr algn="ctr"/>
+            </a:p>
+          </p:txBody>
+        </p:sp>
+        <p:sp>
+          <p:nvSpPr>
+            <p:cNvPr id="30" name="Rectangle 29"/>
+            <p:cNvSpPr/>
+            <p:nvPr/>
+          </p:nvSpPr>
+          <p:spPr>
+            <a:xfrm>
+              <a:off x="8405622" y="2377440"/>
+              <a:ext cx="2926080" cy="73152"/>
+            </a:xfrm>
+            <a:prstGeom prst="rect">
+              <a:avLst/>
+            </a:prstGeom>
+            <a:solidFill>
+              <a:srgbClr val="9AA0A6"/>
+            </a:solidFill>
+            <a:ln>
+              <a:noFill/>
+            </a:ln>
+          </p:spPr>
+          <p:txBody>
+            <a:bodyPr rtlCol="0" anchor="ctr"/>
+            <a:lstStyle/>
+            <a:p>
+              <a:pPr algn="ctr"/>
+            </a:p>
+          </p:txBody>
+        </p:sp>
+        <p:sp>
+          <p:nvSpPr>
+            <p:cNvPr id="31" name="Rectangle 30"/>
+            <p:cNvSpPr/>
+            <p:nvPr/>
+          </p:nvSpPr>
+          <p:spPr>
+            <a:xfrm>
+              <a:off x="8405622" y="2706624"/>
+              <a:ext cx="2926080" cy="73152"/>
+            </a:xfrm>
+            <a:prstGeom prst="rect">
+              <a:avLst/>
+            </a:prstGeom>
+            <a:solidFill>
+              <a:srgbClr val="9AA0A6"/>
+            </a:solidFill>
+            <a:ln>
+              <a:noFill/>
+            </a:ln>
+          </p:spPr>
+          <p:txBody>
+            <a:bodyPr rtlCol="0" anchor="ctr"/>
+            <a:lstStyle/>
+            <a:p>
+              <a:pPr algn="ctr"/>
+            </a:p>
+          </p:txBody>
+        </p:sp>
+        <p:cxnSp>
+          <p:nvCxnSpPr>
+            <p:cNvPr id="32" name="Connector 31"/>
+            <p:cNvCxnSpPr/>
+            <p:nvPr/>
+          </p:nvCxnSpPr>
+          <p:spPr>
+            <a:xfrm>
+              <a:off x="8405622" y="3200400"/>
+              <a:ext cx="2926079" cy="0"/>
+            </a:xfrm>
+            <a:prstGeom prst="line">
+              <a:avLst/>
+            </a:prstGeom>
+            <a:ln w="44450">
+              <a:solidFill>
+                <a:srgbClr val="F28C28"/>
+              </a:solidFill>
+              <a:headEnd type="triangle" w="med" len="med"/>
+              <a:tailEnd type="triangle" w="med" len="med"/>
+            </a:ln>
+          </p:spPr>
+        </p:cxnSp>
+        <p:cxnSp>
+          <p:nvCxnSpPr>
+            <p:cNvPr id="33" name="Connector 32"/>
+            <p:cNvCxnSpPr/>
+            <p:nvPr/>
+          </p:nvCxnSpPr>
+          <p:spPr>
+            <a:xfrm>
+              <a:off x="8405622" y="3035808"/>
+              <a:ext cx="0" cy="329184"/>
+            </a:xfrm>
+            <a:prstGeom prst="line">
+              <a:avLst/>
+            </a:prstGeom>
+            <a:ln w="44450">
+              <a:solidFill>
+                <a:srgbClr val="F28C28"/>
+              </a:solidFill>
+            </a:ln>
+          </p:spPr>
+        </p:cxnSp>
+        <p:cxnSp>
+          <p:nvCxnSpPr>
+            <p:cNvPr id="34" name="Connector 33"/>
+            <p:cNvCxnSpPr/>
+            <p:nvPr/>
+          </p:nvCxnSpPr>
+          <p:spPr>
+            <a:xfrm>
+              <a:off x="11331701" y="3035808"/>
+              <a:ext cx="0" cy="329184"/>
+            </a:xfrm>
+            <a:prstGeom prst="line">
+              <a:avLst/>
+            </a:prstGeom>
+            <a:ln w="44450">
+              <a:solidFill>
+                <a:srgbClr val="F28C28"/>
+              </a:solidFill>
+            </a:ln>
+          </p:spPr>
+        </p:cxnSp>
+      </p:grpSp>
+      <p:sp>
+        <p:nvSpPr>
+          <p:cNvPr id="35" name="FOOTER"/>
+          <p:cNvSpPr txBox="1"/>
+          <p:nvPr/>
+        </p:nvSpPr>
+        <p:spPr>
+          <a:xfrm>
+            <a:off x="9784080" y="5120640"/>
+            <a:ext cx="1856231" cy="274320"/>
+          </a:xfrm>
+          <a:prstGeom prst="rect">
+            <a:avLst/>
+          </a:prstGeom>
+          <a:noFill/>
+        </p:spPr>
+        <p:txBody>
+          <a:bodyPr wrap="square" anchor="ctr" lIns="18288" tIns="9144" rIns="18288" bIns="9144">
+            <a:noAutofit/>
+          </a:bodyPr>
+          <a:lstStyle/>
+          <a:p>
+            <a:pPr algn="r"/>
+            <a:r>
+              <a:rPr sz="1400" b="0" i="0" lang="en-GB">
+                <a:solidFill>
+                  <a:srgbClr val="A9B0B8"/>
+                </a:solidFill>
+                <a:latin typeface="Arial"/>
+              </a:rPr>
+              <a:t>OQ12</a:t>
+            </a:r>
+          </a:p>
+        </p:txBody>
+      </p:sp>
+      <p:sp>
+        <p:nvSpPr>
+          <p:cNvPr id="36" name="CAPTION BAR"/>
+          <p:cNvSpPr/>
+          <p:nvPr/>
+        </p:nvSpPr>
+        <p:spPr>
+          <a:xfrm>
+            <a:off x="548640" y="5760720"/>
+            <a:ext cx="11091672" cy="731520"/>
+          </a:xfrm>
+          <a:prstGeom prst="roundRect">
+            <a:avLst>
+              <a:gd name="adj" fmla="val 10000"/>
+            </a:avLst>
+          </a:prstGeom>
+          <a:solidFill>
+            <a:srgbClr val="2B2F36"/>
+          </a:solidFill>
+          <a:ln>
+            <a:noFill/>
+          </a:ln>
+        </p:spPr>
+        <p:txBody>
+          <a:bodyPr rtlCol="0" anchor="ctr"/>
+          <a:lstStyle/>
+          <a:p>
+            <a:pPr algn="ctr"/>
+          </a:p>
+        </p:txBody>
+      </p:sp>
+      <p:sp>
+        <p:nvSpPr>
+          <p:cNvPr id="37" name="CAPTION RULE"/>
+          <p:cNvSpPr/>
+          <p:nvPr/>
+        </p:nvSpPr>
+        <p:spPr>
+          <a:xfrm>
+            <a:off x="548640" y="5815583"/>
+            <a:ext cx="73152" cy="621792"/>
+          </a:xfrm>
+          <a:prstGeom prst="rect">
+            <a:avLst/>
+          </a:prstGeom>
+          <a:solidFill>
+            <a:srgbClr val="F28C28"/>
+          </a:solidFill>
+          <a:ln>
+            <a:noFill/>
+          </a:ln>
+        </p:spPr>
+        <p:txBody>
+          <a:bodyPr rtlCol="0" anchor="ctr"/>
+          <a:lstStyle/>
+          <a:p>
+            <a:pPr algn="ctr"/>
+          </a:p>
+        </p:txBody>
+      </p:sp>
+      <p:sp>
+        <p:nvSpPr>
+          <p:cNvPr id="38" name="CAPTION"/>
+          <p:cNvSpPr txBox="1"/>
+          <p:nvPr/>
+        </p:nvSpPr>
+        <p:spPr>
+          <a:xfrm>
+            <a:off x="777240" y="5760720"/>
+            <a:ext cx="10744200" cy="731520"/>
+          </a:xfrm>
+          <a:prstGeom prst="rect">
+            <a:avLst/>
+          </a:prstGeom>
+          <a:noFill/>
+        </p:spPr>
+        <p:txBody>
+          <a:bodyPr wrap="square" anchor="ctr" lIns="18288" tIns="9144" rIns="18288" bIns="9144">
+            <a:noAutofit/>
+          </a:bodyPr>
+          <a:lstStyle/>
+          <a:p>
+            <a:pPr algn="l">
+              <a:lnSpc>
+                <a:spcPct val="95000"/>
+              </a:lnSpc>
+            </a:pPr>
+            <a:r>
+              <a:rPr sz="2000" b="0" i="0" lang="en-GB">
+                <a:solidFill>
+                  <a:srgbClr val="F2F2F2"/>
+                </a:solidFill>
+                <a:latin typeface="Arial"/>
+              </a:rPr>
+              <a:t>Upgrade costs, refunds and an undo are not decided. Nor is the longest piece the game accepts.</a:t>
+            </a:r>
+          </a:p>
+        </p:txBody>
+      </p:sp>
+      <p:sp>
+        <p:nvSpPr>
+          <p:cNvPr id="39" name="NUM"/>
+          <p:cNvSpPr txBox="1"/>
+          <p:nvPr/>
+        </p:nvSpPr>
+        <p:spPr>
+          <a:xfrm>
+            <a:off x="10728655" y="6528816"/>
+            <a:ext cx="914400" cy="274320"/>
+          </a:xfrm>
+          <a:prstGeom prst="rect">
+            <a:avLst/>
+          </a:prstGeom>
+          <a:noFill/>
+        </p:spPr>
+        <p:txBody>
+          <a:bodyPr wrap="square" anchor="ctr" lIns="18288" tIns="9144" rIns="18288" bIns="9144">
+            <a:noAutofit/>
+          </a:bodyPr>
+          <a:lstStyle/>
+          <a:p>
+            <a:pPr algn="r"/>
+            <a:r>
+              <a:rPr sz="1400" b="0" i="0" lang="en-GB">
+                <a:solidFill>
+                  <a:srgbClr val="A9B0B8"/>
+                </a:solidFill>
+                <a:latin typeface="Arial"/>
+              </a:rPr>
+              <a:t>17</a:t>
+            </a:r>
+          </a:p>
+        </p:txBody>
+      </p:sp>
+    </p:spTree>
+  </p:cSld>
+  <p:clrMapOvr>
+    <a:masterClrMapping/>
+  </p:clrMapOvr>
+</p:sld>
+</file>
+
+<file path=ppt/slides/slide18.xml><?xml version="1.0" encoding="utf-8"?>
+<p:sld xmlns:a="http://schemas.openxmlformats.org/drawingml/2006/main" xmlns:p="http://schemas.openxmlformats.org/presentationml/2006/main" xmlns:r="http://schemas.openxmlformats.org/officeDocument/2006/relationships">
+  <p:cSld>
+    <p:bg>
+      <p:bgPr>
+        <a:solidFill>
+          <a:srgbClr val="1E2126"/>
+        </a:solidFill>
+        <a:effectLst/>
+      </p:bgPr>
+    </p:bg>
+    <p:spTree>
+      <p:nvGrpSpPr>
+        <p:cNvPr id="1" name=""/>
+        <p:cNvGrpSpPr/>
+        <p:nvPr/>
+      </p:nvGrpSpPr>
+      <p:grpSpPr/>
+      <p:sp>
+        <p:nvSpPr>
+          <p:cNvPr id="2" name="TITLE"/>
+          <p:cNvSpPr>
+            <a:spLocks noGrp="1"/>
+          </p:cNvSpPr>
+          <p:nvPr>
+            <p:ph type="title"/>
+          </p:nvPr>
+        </p:nvSpPr>
+        <p:spPr>
+          <a:xfrm>
+            <a:off x="548640" y="365760"/>
+            <a:ext cx="9326880" cy="731520"/>
+          </a:xfrm>
+        </p:spPr>
+        <p:txBody>
+          <a:bodyPr wrap="square" anchor="ctr" lIns="0" rIns="0" tIns="0" bIns="0">
+            <a:noAutofit/>
+          </a:bodyPr>
+          <a:lstStyle/>
+          <a:p>
+            <a:pPr algn="l"/>
+            <a:r>
+              <a:rPr sz="3600" b="1" i="0" lang="en-GB">
+                <a:solidFill>
+                  <a:srgbClr val="F2F2F2"/>
+                </a:solidFill>
+                <a:latin typeface="Arial"/>
+              </a:rPr>
+              <a:t>The road to electric</a:t>
+            </a:r>
+          </a:p>
+        </p:txBody>
+      </p:sp>
+      <p:sp>
+        <p:nvSpPr>
+          <p:cNvPr id="3" name="CHIP"/>
+          <p:cNvSpPr/>
+          <p:nvPr/>
+        </p:nvSpPr>
+        <p:spPr>
+          <a:xfrm>
+            <a:off x="10088575" y="548640"/>
+            <a:ext cx="1554480" cy="365760"/>
+          </a:xfrm>
+          <a:prstGeom prst="roundRect">
+            <a:avLst>
+              <a:gd name="adj" fmla="val 50000"/>
+            </a:avLst>
+          </a:prstGeom>
+          <a:solidFill>
+            <a:srgbClr val="4DA3FF"/>
+          </a:solidFill>
+          <a:ln>
+            <a:noFill/>
+          </a:ln>
+        </p:spPr>
+        <p:txBody>
+          <a:bodyPr rtlCol="0" anchor="ctr" wrap="square" lIns="36576" tIns="0" rIns="36576" bIns="0">
+            <a:noAutofit/>
+          </a:bodyPr>
+          <a:lstStyle/>
+          <a:p>
+            <a:pPr algn="ctr"/>
+            <a:r>
+              <a:rPr sz="1400" b="1" i="0" lang="en-GB">
+                <a:solidFill>
+                  <a:srgbClr val="101418"/>
+                </a:solidFill>
+                <a:latin typeface="Arial"/>
+              </a:rPr>
+              <a:t>PROVISIONAL</a:t>
+            </a:r>
+          </a:p>
+        </p:txBody>
+      </p:sp>
+      <p:grpSp>
+        <p:nvGrpSpPr>
+          <p:cNvPr id="4" name="DIAGRAM tier timeline" descr="A timeline of four tiers: Early Steam Railways, Railway Expansion, Heavy Steam, then the Monorail in blue."/>
+          <p:cNvGrpSpPr/>
+          <p:nvPr/>
+        </p:nvGrpSpPr>
+        <p:grpSpPr>
+          <a:xfrm>
+            <a:off x="548640" y="1691640"/>
+            <a:ext cx="11091672" cy="2478024"/>
+            <a:chOff x="548640" y="1691640"/>
+            <a:chExt cx="11091672" cy="2478024"/>
+          </a:xfrm>
+        </p:grpSpPr>
+        <p:sp>
+          <p:nvSpPr>
+            <p:cNvPr id="5" name="Rounded Rectangle 4"/>
+            <p:cNvSpPr/>
+            <p:nvPr/>
+          </p:nvSpPr>
+          <p:spPr>
+            <a:xfrm>
+              <a:off x="548640" y="1691640"/>
+              <a:ext cx="2514600" cy="1920240"/>
+            </a:xfrm>
+            <a:prstGeom prst="roundRect">
+              <a:avLst>
+                <a:gd name="adj" fmla="val 3809"/>
+              </a:avLst>
+            </a:prstGeom>
+            <a:solidFill>
+              <a:srgbClr val="2B2F36"/>
+            </a:solidFill>
+            <a:ln>
+              <a:noFill/>
+            </a:ln>
+          </p:spPr>
+          <p:txBody>
+            <a:bodyPr rtlCol="0" anchor="ctr"/>
+            <a:lstStyle/>
+            <a:p>
+              <a:pPr algn="ctr"/>
+            </a:p>
+          </p:txBody>
+        </p:sp>
+        <p:sp>
+          <p:nvSpPr>
+            <p:cNvPr id="6" name="Rounded Rectangle 5"/>
+            <p:cNvSpPr/>
+            <p:nvPr/>
+          </p:nvSpPr>
+          <p:spPr>
+            <a:xfrm>
+              <a:off x="548640" y="1691640"/>
+              <a:ext cx="2514600" cy="128016"/>
+            </a:xfrm>
+            <a:prstGeom prst="roundRect">
+              <a:avLst>
+                <a:gd name="adj" fmla="val 35714"/>
+              </a:avLst>
+            </a:prstGeom>
+            <a:solidFill>
+              <a:srgbClr val="F28C28"/>
+            </a:solidFill>
+            <a:ln>
+              <a:noFill/>
+            </a:ln>
+          </p:spPr>
+          <p:txBody>
+            <a:bodyPr rtlCol="0" anchor="ctr"/>
+            <a:lstStyle/>
+            <a:p>
+              <a:pPr algn="ctr"/>
+            </a:p>
+          </p:txBody>
+        </p:sp>
+        <p:sp>
+          <p:nvSpPr>
+            <p:cNvPr id="7" name="TextBox 6"/>
+            <p:cNvSpPr txBox="1"/>
+            <p:nvPr/>
+          </p:nvSpPr>
+          <p:spPr>
+            <a:xfrm>
+              <a:off x="685800" y="2011680"/>
+              <a:ext cx="2240280" cy="502920"/>
+            </a:xfrm>
+            <a:prstGeom prst="rect">
+              <a:avLst/>
+            </a:prstGeom>
+            <a:noFill/>
+          </p:spPr>
+          <p:txBody>
+            <a:bodyPr wrap="square" anchor="ctr" lIns="18288" tIns="9144" rIns="18288" bIns="9144">
+              <a:noAutofit/>
+            </a:bodyPr>
+            <a:lstStyle/>
+            <a:p>
+              <a:pPr algn="l"/>
+              <a:r>
+                <a:rPr sz="2400" b="1" i="0" lang="en-GB">
+                  <a:solidFill>
+                    <a:srgbClr val="F28C28"/>
+                  </a:solidFill>
+                  <a:latin typeface="Arial"/>
+                </a:rPr>
+                <a:t>Tier 3:</a:t>
+              </a:r>
+            </a:p>
+          </p:txBody>
+        </p:sp>
+        <p:sp>
+          <p:nvSpPr>
+            <p:cNvPr id="8" name="TextBox 7"/>
+            <p:cNvSpPr txBox="1"/>
+            <p:nvPr/>
+          </p:nvSpPr>
+          <p:spPr>
+            <a:xfrm>
+              <a:off x="685800" y="2560320"/>
+              <a:ext cx="2240280" cy="1188720"/>
+            </a:xfrm>
+            <a:prstGeom prst="rect">
+              <a:avLst/>
+            </a:prstGeom>
+            <a:noFill/>
+          </p:spPr>
+          <p:txBody>
+            <a:bodyPr wrap="square" anchor="t" lIns="18288" tIns="9144" rIns="18288" bIns="9144">
+              <a:noAutofit/>
+            </a:bodyPr>
+            <a:lstStyle/>
+            <a:p>
+              <a:pPr algn="l"/>
+              <a:r>
+                <a:rPr sz="2000" b="1" i="0" lang="en-GB">
+                  <a:solidFill>
+                    <a:srgbClr val="F2F2F2"/>
+                  </a:solidFill>
+                  <a:latin typeface="Arial"/>
+                </a:rPr>
+                <a:t>Early Steam Railways</a:t>
+              </a:r>
+            </a:p>
+          </p:txBody>
+        </p:sp>
+        <p:cxnSp>
+          <p:nvCxnSpPr>
+            <p:cNvPr id="9" name="Connector 8"/>
+            <p:cNvCxnSpPr/>
+            <p:nvPr/>
+          </p:nvCxnSpPr>
+          <p:spPr>
+            <a:xfrm>
+              <a:off x="3099816" y="2651760"/>
+              <a:ext cx="271272" cy="0"/>
+            </a:xfrm>
+            <a:prstGeom prst="line">
+              <a:avLst/>
+            </a:prstGeom>
+            <a:ln w="38100">
+              <a:solidFill>
+                <a:srgbClr val="F28C28"/>
+              </a:solidFill>
+              <a:tailEnd type="triangle" w="med" len="med"/>
+            </a:ln>
+          </p:spPr>
+        </p:cxnSp>
+        <p:sp>
+          <p:nvSpPr>
+            <p:cNvPr id="10" name="Oval 9"/>
+            <p:cNvSpPr/>
+            <p:nvPr/>
+          </p:nvSpPr>
+          <p:spPr>
+            <a:xfrm>
+              <a:off x="1687068" y="3931920"/>
+              <a:ext cx="237744" cy="237744"/>
+            </a:xfrm>
+            <a:prstGeom prst="ellipse">
+              <a:avLst/>
+            </a:prstGeom>
+            <a:solidFill>
+              <a:srgbClr val="F28C28"/>
+            </a:solidFill>
+            <a:ln>
+              <a:noFill/>
+            </a:ln>
+          </p:spPr>
+          <p:txBody>
+            <a:bodyPr rtlCol="0" anchor="ctr"/>
+            <a:lstStyle/>
+            <a:p>
+              <a:pPr algn="ctr"/>
+            </a:p>
+          </p:txBody>
+        </p:sp>
+        <p:sp>
+          <p:nvSpPr>
+            <p:cNvPr id="11" name="Rounded Rectangle 10"/>
+            <p:cNvSpPr/>
+            <p:nvPr/>
+          </p:nvSpPr>
+          <p:spPr>
+            <a:xfrm>
+              <a:off x="3407664" y="1691640"/>
+              <a:ext cx="2514600" cy="1920240"/>
+            </a:xfrm>
+            <a:prstGeom prst="roundRect">
+              <a:avLst>
+                <a:gd name="adj" fmla="val 3809"/>
+              </a:avLst>
+            </a:prstGeom>
+            <a:solidFill>
+              <a:srgbClr val="2B2F36"/>
+            </a:solidFill>
+            <a:ln>
+              <a:noFill/>
+            </a:ln>
+          </p:spPr>
+          <p:txBody>
+            <a:bodyPr rtlCol="0" anchor="ctr"/>
+            <a:lstStyle/>
+            <a:p>
+              <a:pPr algn="ctr"/>
+            </a:p>
+          </p:txBody>
+        </p:sp>
+        <p:sp>
+          <p:nvSpPr>
+            <p:cNvPr id="12" name="Rounded Rectangle 11"/>
+            <p:cNvSpPr/>
+            <p:nvPr/>
+          </p:nvSpPr>
+          <p:spPr>
+            <a:xfrm>
+              <a:off x="3407664" y="1691640"/>
+              <a:ext cx="2514600" cy="128016"/>
+            </a:xfrm>
+            <a:prstGeom prst="roundRect">
+              <a:avLst>
+                <a:gd name="adj" fmla="val 35714"/>
+              </a:avLst>
+            </a:prstGeom>
+            <a:solidFill>
+              <a:srgbClr val="F28C28"/>
+            </a:solidFill>
+            <a:ln>
+              <a:noFill/>
+            </a:ln>
+          </p:spPr>
+          <p:txBody>
+            <a:bodyPr rtlCol="0" anchor="ctr"/>
+            <a:lstStyle/>
+            <a:p>
+              <a:pPr algn="ctr"/>
+            </a:p>
+          </p:txBody>
+        </p:sp>
+        <p:sp>
+          <p:nvSpPr>
+            <p:cNvPr id="13" name="TextBox 12"/>
+            <p:cNvSpPr txBox="1"/>
+            <p:nvPr/>
+          </p:nvSpPr>
+          <p:spPr>
+            <a:xfrm>
+              <a:off x="3544824" y="2011680"/>
+              <a:ext cx="2240280" cy="502920"/>
+            </a:xfrm>
+            <a:prstGeom prst="rect">
+              <a:avLst/>
+            </a:prstGeom>
+            <a:noFill/>
+          </p:spPr>
+          <p:txBody>
+            <a:bodyPr wrap="square" anchor="ctr" lIns="18288" tIns="9144" rIns="18288" bIns="9144">
+              <a:noAutofit/>
+            </a:bodyPr>
+            <a:lstStyle/>
+            <a:p>
+              <a:pPr algn="l"/>
+              <a:r>
+                <a:rPr sz="2400" b="1" i="0" lang="en-GB">
+                  <a:solidFill>
+                    <a:srgbClr val="F28C28"/>
+                  </a:solidFill>
+                  <a:latin typeface="Arial"/>
+                </a:rPr>
+                <a:t>Tier 3 to 4:</a:t>
+              </a:r>
+            </a:p>
+          </p:txBody>
+        </p:sp>
+        <p:sp>
+          <p:nvSpPr>
+            <p:cNvPr id="14" name="TextBox 13"/>
+            <p:cNvSpPr txBox="1"/>
+            <p:nvPr/>
+          </p:nvSpPr>
+          <p:spPr>
+            <a:xfrm>
+              <a:off x="3544824" y="2560320"/>
+              <a:ext cx="2240280" cy="1188720"/>
+            </a:xfrm>
+            <a:prstGeom prst="rect">
+              <a:avLst/>
+            </a:prstGeom>
+            <a:noFill/>
+          </p:spPr>
+          <p:txBody>
+            <a:bodyPr wrap="square" anchor="t" lIns="18288" tIns="9144" rIns="18288" bIns="9144">
+              <a:noAutofit/>
+            </a:bodyPr>
+            <a:lstStyle/>
+            <a:p>
+              <a:pPr algn="l"/>
+              <a:r>
+                <a:rPr sz="2000" b="1" i="0" lang="en-GB">
+                  <a:solidFill>
+                    <a:srgbClr val="F2F2F2"/>
+                  </a:solidFill>
+                  <a:latin typeface="Arial"/>
+                </a:rPr>
+                <a:t>Railway Expansion</a:t>
+              </a:r>
+            </a:p>
+          </p:txBody>
+        </p:sp>
+        <p:cxnSp>
+          <p:nvCxnSpPr>
+            <p:cNvPr id="15" name="Connector 14"/>
+            <p:cNvCxnSpPr/>
+            <p:nvPr/>
+          </p:nvCxnSpPr>
+          <p:spPr>
+            <a:xfrm>
+              <a:off x="5958840" y="2651760"/>
+              <a:ext cx="271272" cy="0"/>
+            </a:xfrm>
+            <a:prstGeom prst="line">
+              <a:avLst/>
+            </a:prstGeom>
+            <a:ln w="38100">
+              <a:solidFill>
+                <a:srgbClr val="F28C28"/>
+              </a:solidFill>
+              <a:tailEnd type="triangle" w="med" len="med"/>
+            </a:ln>
+          </p:spPr>
+        </p:cxnSp>
+        <p:sp>
+          <p:nvSpPr>
+            <p:cNvPr id="16" name="Oval 15"/>
+            <p:cNvSpPr/>
+            <p:nvPr/>
+          </p:nvSpPr>
+          <p:spPr>
+            <a:xfrm>
+              <a:off x="4546092" y="3931920"/>
+              <a:ext cx="237744" cy="237744"/>
+            </a:xfrm>
+            <a:prstGeom prst="ellipse">
+              <a:avLst/>
+            </a:prstGeom>
+            <a:solidFill>
+              <a:srgbClr val="F28C28"/>
+            </a:solidFill>
+            <a:ln>
+              <a:noFill/>
+            </a:ln>
+          </p:spPr>
+          <p:txBody>
+            <a:bodyPr rtlCol="0" anchor="ctr"/>
+            <a:lstStyle/>
+            <a:p>
+              <a:pPr algn="ctr"/>
+            </a:p>
+          </p:txBody>
+        </p:sp>
+        <p:sp>
+          <p:nvSpPr>
+            <p:cNvPr id="17" name="Rounded Rectangle 16"/>
+            <p:cNvSpPr/>
+            <p:nvPr/>
+          </p:nvSpPr>
+          <p:spPr>
+            <a:xfrm>
+              <a:off x="6266688" y="1691640"/>
+              <a:ext cx="2514600" cy="1920240"/>
+            </a:xfrm>
+            <a:prstGeom prst="roundRect">
+              <a:avLst>
+                <a:gd name="adj" fmla="val 3809"/>
+              </a:avLst>
+            </a:prstGeom>
+            <a:solidFill>
+              <a:srgbClr val="2B2F36"/>
+            </a:solidFill>
+            <a:ln>
+              <a:noFill/>
+            </a:ln>
+          </p:spPr>
+          <p:txBody>
+            <a:bodyPr rtlCol="0" anchor="ctr"/>
+            <a:lstStyle/>
+            <a:p>
+              <a:pPr algn="ctr"/>
+            </a:p>
+          </p:txBody>
+        </p:sp>
+        <p:sp>
+          <p:nvSpPr>
+            <p:cNvPr id="18" name="Rounded Rectangle 17"/>
+            <p:cNvSpPr/>
+            <p:nvPr/>
+          </p:nvSpPr>
+          <p:spPr>
+            <a:xfrm>
+              <a:off x="6266688" y="1691640"/>
+              <a:ext cx="2514600" cy="128016"/>
+            </a:xfrm>
+            <a:prstGeom prst="roundRect">
+              <a:avLst>
+                <a:gd name="adj" fmla="val 35714"/>
+              </a:avLst>
+            </a:prstGeom>
+            <a:solidFill>
+              <a:srgbClr val="F28C28"/>
+            </a:solidFill>
+            <a:ln>
+              <a:noFill/>
+            </a:ln>
+          </p:spPr>
+          <p:txBody>
+            <a:bodyPr rtlCol="0" anchor="ctr"/>
+            <a:lstStyle/>
+            <a:p>
+              <a:pPr algn="ctr"/>
+            </a:p>
+          </p:txBody>
+        </p:sp>
+        <p:sp>
+          <p:nvSpPr>
+            <p:cNvPr id="19" name="TextBox 18"/>
+            <p:cNvSpPr txBox="1"/>
+            <p:nvPr/>
+          </p:nvSpPr>
+          <p:spPr>
+            <a:xfrm>
+              <a:off x="6403848" y="2011680"/>
+              <a:ext cx="2240280" cy="502920"/>
+            </a:xfrm>
+            <a:prstGeom prst="rect">
+              <a:avLst/>
+            </a:prstGeom>
+            <a:noFill/>
+          </p:spPr>
+          <p:txBody>
+            <a:bodyPr wrap="square" anchor="ctr" lIns="18288" tIns="9144" rIns="18288" bIns="9144">
+              <a:noAutofit/>
+            </a:bodyPr>
+            <a:lstStyle/>
+            <a:p>
+              <a:pPr algn="l"/>
+              <a:r>
+                <a:rPr sz="2400" b="1" i="0" lang="en-GB">
+                  <a:solidFill>
+                    <a:srgbClr val="F28C28"/>
+                  </a:solidFill>
+                  <a:latin typeface="Arial"/>
+                </a:rPr>
+                <a:t>Tier 4 to 5:</a:t>
+              </a:r>
+            </a:p>
+          </p:txBody>
+        </p:sp>
+        <p:sp>
+          <p:nvSpPr>
+            <p:cNvPr id="20" name="TextBox 19"/>
+            <p:cNvSpPr txBox="1"/>
+            <p:nvPr/>
+          </p:nvSpPr>
+          <p:spPr>
+            <a:xfrm>
+              <a:off x="6403848" y="2560320"/>
+              <a:ext cx="2240280" cy="1188720"/>
+            </a:xfrm>
+            <a:prstGeom prst="rect">
+              <a:avLst/>
+            </a:prstGeom>
+            <a:noFill/>
+          </p:spPr>
+          <p:txBody>
+            <a:bodyPr wrap="square" anchor="t" lIns="18288" tIns="9144" rIns="18288" bIns="9144">
+              <a:noAutofit/>
+            </a:bodyPr>
+            <a:lstStyle/>
+            <a:p>
+              <a:pPr algn="l"/>
+              <a:r>
+                <a:rPr sz="2000" b="1" i="0" lang="en-GB">
+                  <a:solidFill>
+                    <a:srgbClr val="F2F2F2"/>
+                  </a:solidFill>
+                  <a:latin typeface="Arial"/>
+                </a:rPr>
+                <a:t>Heavy Steam</a:t>
+              </a:r>
+            </a:p>
+          </p:txBody>
+        </p:sp>
+        <p:cxnSp>
+          <p:nvCxnSpPr>
+            <p:cNvPr id="21" name="Connector 20"/>
+            <p:cNvCxnSpPr/>
+            <p:nvPr/>
+          </p:nvCxnSpPr>
+          <p:spPr>
+            <a:xfrm>
+              <a:off x="8817864" y="2651760"/>
+              <a:ext cx="271272" cy="0"/>
+            </a:xfrm>
+            <a:prstGeom prst="line">
+              <a:avLst/>
+            </a:prstGeom>
+            <a:ln w="38100">
+              <a:solidFill>
+                <a:srgbClr val="F28C28"/>
+              </a:solidFill>
+              <a:tailEnd type="triangle" w="med" len="med"/>
+            </a:ln>
+          </p:spPr>
+        </p:cxnSp>
+        <p:sp>
+          <p:nvSpPr>
+            <p:cNvPr id="22" name="Oval 21"/>
+            <p:cNvSpPr/>
+            <p:nvPr/>
+          </p:nvSpPr>
+          <p:spPr>
+            <a:xfrm>
+              <a:off x="7405115" y="3931920"/>
+              <a:ext cx="237744" cy="237744"/>
+            </a:xfrm>
+            <a:prstGeom prst="ellipse">
+              <a:avLst/>
+            </a:prstGeom>
+            <a:solidFill>
+              <a:srgbClr val="F28C28"/>
+            </a:solidFill>
+            <a:ln>
+              <a:noFill/>
+            </a:ln>
+          </p:spPr>
+          <p:txBody>
+            <a:bodyPr rtlCol="0" anchor="ctr"/>
+            <a:lstStyle/>
+            <a:p>
+              <a:pPr algn="ctr"/>
+            </a:p>
+          </p:txBody>
+        </p:sp>
+        <p:sp>
+          <p:nvSpPr>
+            <p:cNvPr id="23" name="Rounded Rectangle 22"/>
+            <p:cNvSpPr/>
+            <p:nvPr/>
+          </p:nvSpPr>
+          <p:spPr>
+            <a:xfrm>
+              <a:off x="9125712" y="1691640"/>
+              <a:ext cx="2514600" cy="1920240"/>
+            </a:xfrm>
+            <a:prstGeom prst="roundRect">
+              <a:avLst>
+                <a:gd name="adj" fmla="val 3809"/>
+              </a:avLst>
+            </a:prstGeom>
+            <a:solidFill>
+              <a:srgbClr val="2B2F36"/>
+            </a:solidFill>
+            <a:ln w="31750">
+              <a:solidFill>
+                <a:srgbClr val="6CA0DC"/>
+              </a:solidFill>
+            </a:ln>
+          </p:spPr>
+          <p:txBody>
+            <a:bodyPr rtlCol="0" anchor="ctr"/>
+            <a:lstStyle/>
+            <a:p>
+              <a:pPr algn="ctr"/>
+            </a:p>
+          </p:txBody>
+        </p:sp>
+        <p:sp>
+          <p:nvSpPr>
+            <p:cNvPr id="24" name="Rounded Rectangle 23"/>
+            <p:cNvSpPr/>
+            <p:nvPr/>
+          </p:nvSpPr>
+          <p:spPr>
+            <a:xfrm>
+              <a:off x="9125712" y="1691640"/>
+              <a:ext cx="2514600" cy="128016"/>
+            </a:xfrm>
+            <a:prstGeom prst="roundRect">
+              <a:avLst>
+                <a:gd name="adj" fmla="val 35714"/>
+              </a:avLst>
+            </a:prstGeom>
+            <a:solidFill>
+              <a:srgbClr val="6CA0DC"/>
+            </a:solidFill>
+            <a:ln>
+              <a:noFill/>
+            </a:ln>
+          </p:spPr>
+          <p:txBody>
+            <a:bodyPr rtlCol="0" anchor="ctr"/>
+            <a:lstStyle/>
+            <a:p>
+              <a:pPr algn="ctr"/>
+            </a:p>
+          </p:txBody>
+        </p:sp>
+        <p:sp>
+          <p:nvSpPr>
+            <p:cNvPr id="25" name="TextBox 24"/>
+            <p:cNvSpPr txBox="1"/>
+            <p:nvPr/>
+          </p:nvSpPr>
+          <p:spPr>
+            <a:xfrm>
+              <a:off x="9262872" y="2011680"/>
+              <a:ext cx="2240280" cy="502920"/>
+            </a:xfrm>
+            <a:prstGeom prst="rect">
+              <a:avLst/>
+            </a:prstGeom>
+            <a:noFill/>
+          </p:spPr>
+          <p:txBody>
+            <a:bodyPr wrap="square" anchor="ctr" lIns="18288" tIns="9144" rIns="18288" bIns="9144">
+              <a:noAutofit/>
+            </a:bodyPr>
+            <a:lstStyle/>
+            <a:p>
+              <a:pPr algn="l"/>
+              <a:r>
+                <a:rPr sz="2400" b="1" i="0" lang="en-GB">
+                  <a:solidFill>
+                    <a:srgbClr val="6CA0DC"/>
+                  </a:solidFill>
+                  <a:latin typeface="Arial"/>
+                </a:rPr>
+                <a:t>Tier 6:</a:t>
+              </a:r>
+            </a:p>
+          </p:txBody>
+        </p:sp>
+        <p:sp>
+          <p:nvSpPr>
+            <p:cNvPr id="26" name="TextBox 25"/>
+            <p:cNvSpPr txBox="1"/>
+            <p:nvPr/>
+          </p:nvSpPr>
+          <p:spPr>
+            <a:xfrm>
+              <a:off x="9262872" y="2560320"/>
+              <a:ext cx="2240280" cy="1188720"/>
+            </a:xfrm>
+            <a:prstGeom prst="rect">
+              <a:avLst/>
+            </a:prstGeom>
+            <a:noFill/>
+          </p:spPr>
+          <p:txBody>
+            <a:bodyPr wrap="square" anchor="t" lIns="18288" tIns="9144" rIns="18288" bIns="9144">
+              <a:noAutofit/>
+            </a:bodyPr>
+            <a:lstStyle/>
+            <a:p>
+              <a:pPr algn="l"/>
+              <a:r>
+                <a:rPr sz="2000" b="1" i="0" lang="en-GB">
+                  <a:solidFill>
+                    <a:srgbClr val="F2F2F2"/>
+                  </a:solidFill>
+                  <a:latin typeface="Arial"/>
+                </a:rPr>
+                <a:t>Monorail</a:t>
+              </a:r>
+            </a:p>
+          </p:txBody>
+        </p:sp>
+        <p:sp>
+          <p:nvSpPr>
+            <p:cNvPr id="27" name="Oval 26"/>
+            <p:cNvSpPr/>
+            <p:nvPr/>
+          </p:nvSpPr>
+          <p:spPr>
+            <a:xfrm>
+              <a:off x="10264140" y="3931920"/>
+              <a:ext cx="237744" cy="237744"/>
+            </a:xfrm>
+            <a:prstGeom prst="ellipse">
+              <a:avLst/>
+            </a:prstGeom>
+            <a:solidFill>
+              <a:srgbClr val="6CA0DC"/>
+            </a:solidFill>
+            <a:ln>
+              <a:noFill/>
+            </a:ln>
+          </p:spPr>
+          <p:txBody>
+            <a:bodyPr rtlCol="0" anchor="ctr"/>
+            <a:lstStyle/>
+            <a:p>
+              <a:pPr algn="ctr"/>
+            </a:p>
+          </p:txBody>
+        </p:sp>
+        <p:cxnSp>
+          <p:nvCxnSpPr>
+            <p:cNvPr id="28" name="Connector 27"/>
+            <p:cNvCxnSpPr/>
+            <p:nvPr/>
+          </p:nvCxnSpPr>
+          <p:spPr>
+            <a:xfrm>
+              <a:off x="1805940" y="4050791"/>
+              <a:ext cx="8439912" cy="0"/>
+            </a:xfrm>
+            <a:prstGeom prst="line">
+              <a:avLst/>
+            </a:prstGeom>
+            <a:ln w="38100">
+              <a:solidFill>
+                <a:srgbClr val="4A515B"/>
+              </a:solidFill>
+            </a:ln>
+          </p:spPr>
+        </p:cxnSp>
+      </p:grpSp>
+      <p:grpSp>
+        <p:nvGrpSpPr>
+          <p:cNvPr id="29" name="NOTE" descr="Note: Tiers and prerequisites: provisional and undecided (OQ01) (Undecided)."/>
+          <p:cNvGrpSpPr/>
+          <p:nvPr/>
+        </p:nvGrpSpPr>
+        <p:grpSpPr>
+          <a:xfrm>
+            <a:off x="548640" y="4663440"/>
+            <a:ext cx="11091672" cy="594360"/>
+            <a:chOff x="548640" y="4663440"/>
+            <a:chExt cx="11091672" cy="594360"/>
+          </a:xfrm>
+        </p:grpSpPr>
+        <p:sp>
+          <p:nvSpPr>
+            <p:cNvPr id="30" name="Rounded Rectangle 29"/>
+            <p:cNvSpPr/>
+            <p:nvPr/>
+          </p:nvSpPr>
+          <p:spPr>
+            <a:xfrm>
+              <a:off x="548640" y="4663440"/>
+              <a:ext cx="11091672" cy="594360"/>
+            </a:xfrm>
+            <a:prstGeom prst="roundRect">
+              <a:avLst>
+                <a:gd name="adj" fmla="val 12307"/>
+              </a:avLst>
+            </a:prstGeom>
+            <a:solidFill>
+              <a:srgbClr val="2B2F36"/>
+            </a:solidFill>
+            <a:ln>
+              <a:noFill/>
+            </a:ln>
+          </p:spPr>
+          <p:txBody>
+            <a:bodyPr rtlCol="0" anchor="ctr"/>
+            <a:lstStyle/>
+            <a:p>
+              <a:pPr algn="ctr"/>
+            </a:p>
+          </p:txBody>
+        </p:sp>
+        <p:sp>
+          <p:nvSpPr>
+            <p:cNvPr id="31" name="ICHIP"/>
+            <p:cNvSpPr/>
+            <p:nvPr/>
+          </p:nvSpPr>
+          <p:spPr>
+            <a:xfrm>
+              <a:off x="777240" y="4805172"/>
+              <a:ext cx="1514221" cy="310896"/>
+            </a:xfrm>
+            <a:prstGeom prst="roundRect">
+              <a:avLst>
+                <a:gd name="adj" fmla="val 50000"/>
+              </a:avLst>
+            </a:prstGeom>
+            <a:noFill/>
+            <a:ln w="25400">
+              <a:solidFill>
+                <a:srgbClr val="A9B0B8"/>
+              </a:solidFill>
+            </a:ln>
+          </p:spPr>
+          <p:txBody>
+            <a:bodyPr rtlCol="0" anchor="ctr" wrap="square" lIns="36576" tIns="0" rIns="36576" bIns="0">
+              <a:noAutofit/>
+            </a:bodyPr>
+            <a:lstStyle/>
+            <a:p>
+              <a:pPr algn="ctr"/>
+              <a:r>
+                <a:rPr sz="1400" b="1" i="0" lang="en-GB">
+                  <a:solidFill>
+                    <a:srgbClr val="F2F2F2"/>
+                  </a:solidFill>
+                  <a:latin typeface="Arial"/>
+                </a:rPr>
+                <a:t>UNDECIDED</a:t>
+              </a:r>
+            </a:p>
+          </p:txBody>
+        </p:sp>
+        <p:sp>
+          <p:nvSpPr>
+            <p:cNvPr id="32" name="TextBox 31"/>
+            <p:cNvSpPr txBox="1"/>
+            <p:nvPr/>
+          </p:nvSpPr>
+          <p:spPr>
+            <a:xfrm>
+              <a:off x="2520061" y="4663440"/>
+              <a:ext cx="8754491" cy="594360"/>
+            </a:xfrm>
+            <a:prstGeom prst="rect">
+              <a:avLst/>
+            </a:prstGeom>
+            <a:noFill/>
+          </p:spPr>
+          <p:txBody>
+            <a:bodyPr wrap="square" anchor="ctr" lIns="18288" tIns="9144" rIns="18288" bIns="9144">
+              <a:noAutofit/>
+            </a:bodyPr>
+            <a:lstStyle/>
+            <a:p>
+              <a:pPr algn="l"/>
+              <a:r>
+                <a:rPr sz="2000" b="0" i="0" lang="en-GB">
+                  <a:solidFill>
+                    <a:srgbClr val="F2F2F2"/>
+                  </a:solidFill>
+                  <a:latin typeface="Arial"/>
+                </a:rPr>
+                <a:t>Tiers and prerequisites: provisional and undecided (OQ01)</a:t>
+              </a:r>
+            </a:p>
+          </p:txBody>
+        </p:sp>
+      </p:grpSp>
+      <p:sp>
+        <p:nvSpPr>
+          <p:cNvPr id="33" name="CAPTION BAR"/>
+          <p:cNvSpPr/>
+          <p:nvPr/>
+        </p:nvSpPr>
+        <p:spPr>
+          <a:xfrm>
+            <a:off x="548640" y="5760720"/>
+            <a:ext cx="11091672" cy="731520"/>
+          </a:xfrm>
+          <a:prstGeom prst="roundRect">
+            <a:avLst>
+              <a:gd name="adj" fmla="val 10000"/>
+            </a:avLst>
+          </a:prstGeom>
+          <a:solidFill>
+            <a:srgbClr val="2B2F36"/>
+          </a:solidFill>
+          <a:ln>
+            <a:noFill/>
+          </a:ln>
+        </p:spPr>
+        <p:txBody>
+          <a:bodyPr rtlCol="0" anchor="ctr"/>
+          <a:lstStyle/>
+          <a:p>
+            <a:pPr algn="ctr"/>
+          </a:p>
+        </p:txBody>
+      </p:sp>
+      <p:sp>
+        <p:nvSpPr>
+          <p:cNvPr id="34" name="CAPTION RULE"/>
+          <p:cNvSpPr/>
+          <p:nvPr/>
+        </p:nvSpPr>
+        <p:spPr>
+          <a:xfrm>
+            <a:off x="548640" y="5815583"/>
+            <a:ext cx="73152" cy="621792"/>
+          </a:xfrm>
+          <a:prstGeom prst="rect">
+            <a:avLst/>
+          </a:prstGeom>
+          <a:solidFill>
+            <a:srgbClr val="F28C28"/>
+          </a:solidFill>
+          <a:ln>
+            <a:noFill/>
+          </a:ln>
+        </p:spPr>
+        <p:txBody>
+          <a:bodyPr rtlCol="0" anchor="ctr"/>
+          <a:lstStyle/>
+          <a:p>
+            <a:pPr algn="ctr"/>
+          </a:p>
+        </p:txBody>
+      </p:sp>
+      <p:sp>
+        <p:nvSpPr>
+          <p:cNvPr id="35" name="CAPTION"/>
+          <p:cNvSpPr txBox="1"/>
+          <p:nvPr/>
+        </p:nvSpPr>
+        <p:spPr>
+          <a:xfrm>
+            <a:off x="777240" y="5760720"/>
+            <a:ext cx="10744200" cy="731520"/>
+          </a:xfrm>
+          <a:prstGeom prst="rect">
+            <a:avLst/>
+          </a:prstGeom>
+          <a:noFill/>
+        </p:spPr>
+        <p:txBody>
+          <a:bodyPr wrap="square" anchor="ctr" lIns="18288" tIns="9144" rIns="18288" bIns="9144">
+            <a:noAutofit/>
+          </a:bodyPr>
+          <a:lstStyle/>
+          <a:p>
+            <a:pPr algn="l">
+              <a:lnSpc>
+                <a:spcPct val="95000"/>
+              </a:lnSpc>
+            </a:pPr>
+            <a:r>
+              <a:rPr sz="2000" b="0" i="0" lang="en-GB">
+                <a:solidFill>
+                  <a:srgbClr val="F2F2F2"/>
+                </a:solidFill>
+                <a:latin typeface="Arial"/>
+              </a:rPr>
+              <a:t>Steam starts early. The monorail arrives in a later tier.</a:t>
+            </a:r>
+          </a:p>
+        </p:txBody>
+      </p:sp>
+      <p:sp>
+        <p:nvSpPr>
+          <p:cNvPr id="36" name="NUM"/>
+          <p:cNvSpPr txBox="1"/>
+          <p:nvPr/>
+        </p:nvSpPr>
+        <p:spPr>
+          <a:xfrm>
+            <a:off x="10728655" y="6528816"/>
+            <a:ext cx="914400" cy="274320"/>
+          </a:xfrm>
+          <a:prstGeom prst="rect">
+            <a:avLst/>
+          </a:prstGeom>
+          <a:noFill/>
+        </p:spPr>
+        <p:txBody>
+          <a:bodyPr wrap="square" anchor="ctr" lIns="18288" tIns="9144" rIns="18288" bIns="9144">
+            <a:noAutofit/>
+          </a:bodyPr>
+          <a:lstStyle/>
+          <a:p>
+            <a:pPr algn="r"/>
+            <a:r>
+              <a:rPr sz="1400" b="0" i="0" lang="en-GB">
+                <a:solidFill>
+                  <a:srgbClr val="A9B0B8"/>
+                </a:solidFill>
+                <a:latin typeface="Arial"/>
+              </a:rPr>
+              <a:t>18</a:t>
+            </a:r>
+          </a:p>
+        </p:txBody>
+      </p:sp>
+    </p:spTree>
+  </p:cSld>
+  <p:clrMapOvr>
+    <a:masterClrMapping/>
+  </p:clrMapOvr>
+</p:sld>
+</file>
+
+<file path=ppt/slides/slide19.xml><?xml version="1.0" encoding="utf-8"?>
+<p:sld xmlns:a="http://schemas.openxmlformats.org/drawingml/2006/main" xmlns:p="http://schemas.openxmlformats.org/presentationml/2006/main" xmlns:r="http://schemas.openxmlformats.org/officeDocument/2006/relationships">
+  <p:cSld>
+    <p:bg>
+      <p:bgPr>
+        <a:solidFill>
+          <a:srgbClr val="1E2126"/>
+        </a:solidFill>
+        <a:effectLst/>
+      </p:bgPr>
+    </p:bg>
+    <p:spTree>
+      <p:nvGrpSpPr>
+        <p:cNvPr id="1" name=""/>
+        <p:cNvGrpSpPr/>
+        <p:nvPr/>
+      </p:nvGrpSpPr>
+      <p:grpSpPr/>
+      <p:sp>
+        <p:nvSpPr>
+          <p:cNvPr id="2" name="TITLE"/>
+          <p:cNvSpPr>
+            <a:spLocks noGrp="1"/>
+          </p:cNvSpPr>
+          <p:nvPr>
+            <p:ph type="title"/>
+          </p:nvPr>
+        </p:nvSpPr>
+        <p:spPr>
+          <a:xfrm>
+            <a:off x="548640" y="365760"/>
+            <a:ext cx="9326880" cy="731520"/>
+          </a:xfrm>
+        </p:spPr>
+        <p:txBody>
+          <a:bodyPr wrap="square" anchor="ctr" lIns="0" rIns="0" tIns="0" bIns="0">
+            <a:noAutofit/>
+          </a:bodyPr>
+          <a:lstStyle/>
+          <a:p>
+            <a:pPr algn="l"/>
+            <a:r>
+              <a:rPr sz="3600" b="1" i="0" lang="en-GB">
+                <a:solidFill>
+                  <a:srgbClr val="F2F2F2"/>
+                </a:solidFill>
+                <a:latin typeface="Arial"/>
+              </a:rPr>
+              <a:t>Every transport has a job</a:t>
+            </a:r>
+          </a:p>
+        </p:txBody>
+      </p:sp>
+      <p:sp>
+        <p:nvSpPr>
+          <p:cNvPr id="3" name="CHIP"/>
+          <p:cNvSpPr/>
+          <p:nvPr/>
+        </p:nvSpPr>
+        <p:spPr>
+          <a:xfrm>
+            <a:off x="10088575" y="548640"/>
+            <a:ext cx="1554480" cy="365760"/>
+          </a:xfrm>
+          <a:prstGeom prst="roundRect">
+            <a:avLst>
+              <a:gd name="adj" fmla="val 50000"/>
+            </a:avLst>
+          </a:prstGeom>
+          <a:solidFill>
+            <a:srgbClr val="3FB950"/>
+          </a:solidFill>
+          <a:ln>
+            <a:noFill/>
+          </a:ln>
+        </p:spPr>
+        <p:txBody>
+          <a:bodyPr rtlCol="0" anchor="ctr" wrap="square" lIns="36576" tIns="0" rIns="36576" bIns="0">
+            <a:noAutofit/>
+          </a:bodyPr>
+          <a:lstStyle/>
+          <a:p>
+            <a:pPr algn="ctr"/>
+            <a:r>
+              <a:rPr sz="1400" b="1" i="0" lang="en-GB">
+                <a:solidFill>
+                  <a:srgbClr val="101418"/>
+                </a:solidFill>
+                <a:latin typeface="Arial"/>
+              </a:rPr>
+              <a:t>AGREED</a:t>
+            </a:r>
+          </a:p>
+        </p:txBody>
+      </p:sp>
+      <p:grpSp>
+        <p:nvGrpSpPr>
+          <p:cNvPr id="4" name="LANE 1" descr="Lane: belts, with a conveyor belt icon."/>
+          <p:cNvGrpSpPr/>
+          <p:nvPr/>
+        </p:nvGrpSpPr>
+        <p:grpSpPr>
+          <a:xfrm>
+            <a:off x="548640" y="1371600"/>
+            <a:ext cx="11091672" cy="932688"/>
+            <a:chOff x="548640" y="1371600"/>
+            <a:chExt cx="11091672" cy="932688"/>
+          </a:xfrm>
+        </p:grpSpPr>
+        <p:sp>
+          <p:nvSpPr>
+            <p:cNvPr id="5" name="Rounded Rectangle 4"/>
+            <p:cNvSpPr/>
+            <p:nvPr/>
+          </p:nvSpPr>
+          <p:spPr>
+            <a:xfrm>
+              <a:off x="548640" y="1371600"/>
+              <a:ext cx="11091672" cy="932688"/>
+            </a:xfrm>
+            <a:prstGeom prst="roundRect">
+              <a:avLst>
+                <a:gd name="adj" fmla="val 7843"/>
+              </a:avLst>
+            </a:prstGeom>
+            <a:solidFill>
+              <a:srgbClr val="2B2F36"/>
+            </a:solidFill>
+            <a:ln>
+              <a:noFill/>
+            </a:ln>
+          </p:spPr>
+          <p:txBody>
+            <a:bodyPr rtlCol="0" anchor="ctr"/>
+            <a:lstStyle/>
+            <a:p>
+              <a:pPr algn="ctr"/>
+            </a:p>
+          </p:txBody>
+        </p:sp>
+        <p:sp>
+          <p:nvSpPr>
+            <p:cNvPr id="6" name="Rectangle 5"/>
+            <p:cNvSpPr/>
+            <p:nvPr/>
+          </p:nvSpPr>
+          <p:spPr>
+            <a:xfrm>
+              <a:off x="548640" y="1444752"/>
+              <a:ext cx="73152" cy="786384"/>
+            </a:xfrm>
+            <a:prstGeom prst="rect">
+              <a:avLst/>
+            </a:prstGeom>
+            <a:solidFill>
+              <a:srgbClr val="F2F2F2"/>
+            </a:solidFill>
+            <a:ln>
+              <a:noFill/>
+            </a:ln>
+          </p:spPr>
+          <p:txBody>
+            <a:bodyPr rtlCol="0" anchor="ctr"/>
+            <a:lstStyle/>
+            <a:p>
+              <a:pPr algn="ctr"/>
+            </a:p>
+          </p:txBody>
+        </p:sp>
+        <p:sp>
+          <p:nvSpPr>
+            <p:cNvPr id="7" name="Rounded Rectangle 6"/>
+            <p:cNvSpPr/>
+            <p:nvPr/>
+          </p:nvSpPr>
+          <p:spPr>
+            <a:xfrm>
+              <a:off x="914400" y="1847088"/>
+              <a:ext cx="1554480" cy="182880"/>
+            </a:xfrm>
+            <a:prstGeom prst="roundRect">
+              <a:avLst>
+                <a:gd name="adj" fmla="val 50000"/>
+              </a:avLst>
+            </a:prstGeom>
+            <a:solidFill>
+              <a:srgbClr val="59616C"/>
+            </a:solidFill>
+            <a:ln>
+              <a:noFill/>
+            </a:ln>
+          </p:spPr>
+          <p:txBody>
+            <a:bodyPr rtlCol="0" anchor="ctr"/>
+            <a:lstStyle/>
+            <a:p>
+              <a:pPr algn="ctr"/>
+            </a:p>
+          </p:txBody>
+        </p:sp>
+        <p:sp>
+          <p:nvSpPr>
+            <p:cNvPr id="8" name="Freeform 7"/>
+            <p:cNvSpPr/>
+            <p:nvPr/>
+          </p:nvSpPr>
+          <p:spPr>
+            <a:xfrm>
+              <a:off x="1097280" y="1874520"/>
+              <a:ext cx="91440" cy="128016"/>
+            </a:xfrm>
+            <a:custGeom>
+              <a:avLst/>
+              <a:gdLst/>
+              <a:ahLst/>
+              <a:cxnLst/>
+              <a:rect l="l" t="t" r="r" b="b"/>
+              <a:pathLst>
+                <a:path w="91440" h="128016">
+                  <a:moveTo>
+                    <a:pt x="0" y="0"/>
+                  </a:moveTo>
+                  <a:lnTo>
+                    <a:pt x="91440" y="64008"/>
+                  </a:lnTo>
+                  <a:lnTo>
+                    <a:pt x="0" y="128016"/>
+                  </a:lnTo>
+                </a:path>
+              </a:pathLst>
+            </a:custGeom>
+            <a:noFill/>
+            <a:ln w="25400">
+              <a:solidFill>
+                <a:srgbClr val="E8E8E8"/>
+              </a:solidFill>
+            </a:ln>
+          </p:spPr>
+          <p:txBody>
+            <a:bodyPr rtlCol="0" anchor="ctr"/>
+            <a:lstStyle/>
+            <a:p>
+              <a:pPr algn="ctr"/>
+            </a:p>
+          </p:txBody>
+        </p:sp>
+        <p:sp>
+          <p:nvSpPr>
+            <p:cNvPr id="9" name="Freeform 8"/>
+            <p:cNvSpPr/>
+            <p:nvPr/>
+          </p:nvSpPr>
+          <p:spPr>
+            <a:xfrm>
+              <a:off x="1389888" y="1874520"/>
+              <a:ext cx="91440" cy="128016"/>
+            </a:xfrm>
+            <a:custGeom>
+              <a:avLst/>
+              <a:gdLst/>
+              <a:ahLst/>
+              <a:cxnLst/>
+              <a:rect l="l" t="t" r="r" b="b"/>
+              <a:pathLst>
+                <a:path w="91440" h="128016">
+                  <a:moveTo>
+                    <a:pt x="0" y="0"/>
+                  </a:moveTo>
+                  <a:lnTo>
+                    <a:pt x="91440" y="64008"/>
+                  </a:lnTo>
+                  <a:lnTo>
+                    <a:pt x="0" y="128016"/>
+                  </a:lnTo>
+                </a:path>
+              </a:pathLst>
+            </a:custGeom>
+            <a:noFill/>
+            <a:ln w="25400">
+              <a:solidFill>
+                <a:srgbClr val="E8E8E8"/>
+              </a:solidFill>
+            </a:ln>
+          </p:spPr>
+          <p:txBody>
+            <a:bodyPr rtlCol="0" anchor="ctr"/>
+            <a:lstStyle/>
+            <a:p>
+              <a:pPr algn="ctr"/>
+            </a:p>
+          </p:txBody>
+        </p:sp>
+        <p:sp>
+          <p:nvSpPr>
+            <p:cNvPr id="10" name="Freeform 9"/>
+            <p:cNvSpPr/>
+            <p:nvPr/>
+          </p:nvSpPr>
+          <p:spPr>
+            <a:xfrm>
+              <a:off x="1682495" y="1874520"/>
+              <a:ext cx="91441" cy="128016"/>
+            </a:xfrm>
+            <a:custGeom>
+              <a:avLst/>
+              <a:gdLst/>
+              <a:ahLst/>
+              <a:cxnLst/>
+              <a:rect l="l" t="t" r="r" b="b"/>
+              <a:pathLst>
+                <a:path w="91441" h="128016">
+                  <a:moveTo>
+                    <a:pt x="0" y="0"/>
+                  </a:moveTo>
+                  <a:lnTo>
+                    <a:pt x="91441" y="64008"/>
+                  </a:lnTo>
+                  <a:lnTo>
+                    <a:pt x="0" y="128016"/>
+                  </a:lnTo>
+                </a:path>
+              </a:pathLst>
+            </a:custGeom>
+            <a:noFill/>
+            <a:ln w="25400">
+              <a:solidFill>
+                <a:srgbClr val="E8E8E8"/>
+              </a:solidFill>
+            </a:ln>
+          </p:spPr>
+          <p:txBody>
+            <a:bodyPr rtlCol="0" anchor="ctr"/>
+            <a:lstStyle/>
+            <a:p>
+              <a:pPr algn="ctr"/>
+            </a:p>
+          </p:txBody>
+        </p:sp>
+        <p:sp>
+          <p:nvSpPr>
+            <p:cNvPr id="11" name="Freeform 10"/>
+            <p:cNvSpPr/>
+            <p:nvPr/>
+          </p:nvSpPr>
+          <p:spPr>
+            <a:xfrm>
+              <a:off x="1975104" y="1874520"/>
+              <a:ext cx="91440" cy="128016"/>
+            </a:xfrm>
+            <a:custGeom>
+              <a:avLst/>
+              <a:gdLst/>
+              <a:ahLst/>
+              <a:cxnLst/>
+              <a:rect l="l" t="t" r="r" b="b"/>
+              <a:pathLst>
+                <a:path w="91440" h="128016">
+                  <a:moveTo>
+                    <a:pt x="0" y="0"/>
+                  </a:moveTo>
+                  <a:lnTo>
+                    <a:pt x="91440" y="64008"/>
+                  </a:lnTo>
+                  <a:lnTo>
+                    <a:pt x="0" y="128016"/>
+                  </a:lnTo>
+                </a:path>
+              </a:pathLst>
+            </a:custGeom>
+            <a:noFill/>
+            <a:ln w="25400">
+              <a:solidFill>
+                <a:srgbClr val="E8E8E8"/>
+              </a:solidFill>
+            </a:ln>
+          </p:spPr>
+          <p:txBody>
+            <a:bodyPr rtlCol="0" anchor="ctr"/>
+            <a:lstStyle/>
+            <a:p>
+              <a:pPr algn="ctr"/>
+            </a:p>
+          </p:txBody>
+        </p:sp>
+        <p:sp>
+          <p:nvSpPr>
+            <p:cNvPr id="12" name="Freeform 11"/>
+            <p:cNvSpPr/>
+            <p:nvPr/>
+          </p:nvSpPr>
+          <p:spPr>
+            <a:xfrm>
+              <a:off x="2267712" y="1874520"/>
+              <a:ext cx="91440" cy="128016"/>
+            </a:xfrm>
+            <a:custGeom>
+              <a:avLst/>
+              <a:gdLst/>
+              <a:ahLst/>
+              <a:cxnLst/>
+              <a:rect l="l" t="t" r="r" b="b"/>
+              <a:pathLst>
+                <a:path w="91440" h="128016">
+                  <a:moveTo>
+                    <a:pt x="0" y="0"/>
+                  </a:moveTo>
+                  <a:lnTo>
+                    <a:pt x="91440" y="64008"/>
+                  </a:lnTo>
+                  <a:lnTo>
+                    <a:pt x="0" y="128016"/>
+                  </a:lnTo>
+                </a:path>
+              </a:pathLst>
+            </a:custGeom>
+            <a:noFill/>
+            <a:ln w="25400">
+              <a:solidFill>
+                <a:srgbClr val="E8E8E8"/>
+              </a:solidFill>
+            </a:ln>
+          </p:spPr>
+          <p:txBody>
+            <a:bodyPr rtlCol="0" anchor="ctr"/>
+            <a:lstStyle/>
+            <a:p>
+              <a:pPr algn="ctr"/>
+            </a:p>
+          </p:txBody>
+        </p:sp>
+        <p:sp>
+          <p:nvSpPr>
+            <p:cNvPr id="13" name="Oval 12"/>
+            <p:cNvSpPr/>
+            <p:nvPr/>
+          </p:nvSpPr>
+          <p:spPr>
+            <a:xfrm>
+              <a:off x="868680" y="1801368"/>
+              <a:ext cx="274320" cy="274320"/>
+            </a:xfrm>
+            <a:prstGeom prst="ellipse">
+              <a:avLst/>
+            </a:prstGeom>
+            <a:solidFill>
+              <a:srgbClr val="9AA0A6"/>
+            </a:solidFill>
+            <a:ln>
+              <a:noFill/>
+            </a:ln>
+          </p:spPr>
+          <p:txBody>
+            <a:bodyPr rtlCol="0" anchor="ctr"/>
+            <a:lstStyle/>
+            <a:p>
+              <a:pPr algn="ctr"/>
+            </a:p>
+          </p:txBody>
+        </p:sp>
+        <p:sp>
+          <p:nvSpPr>
+            <p:cNvPr id="14" name="Oval 13"/>
+            <p:cNvSpPr/>
+            <p:nvPr/>
+          </p:nvSpPr>
+          <p:spPr>
+            <a:xfrm>
+              <a:off x="2240280" y="1801368"/>
+              <a:ext cx="274320" cy="274320"/>
+            </a:xfrm>
+            <a:prstGeom prst="ellipse">
+              <a:avLst/>
+            </a:prstGeom>
+            <a:solidFill>
+              <a:srgbClr val="9AA0A6"/>
+            </a:solidFill>
+            <a:ln>
+              <a:noFill/>
+            </a:ln>
+          </p:spPr>
+          <p:txBody>
+            <a:bodyPr rtlCol="0" anchor="ctr"/>
+            <a:lstStyle/>
+            <a:p>
+              <a:pPr algn="ctr"/>
+            </a:p>
+          </p:txBody>
+        </p:sp>
+        <p:sp>
+          <p:nvSpPr>
+            <p:cNvPr id="15" name="Rectangle 14"/>
+            <p:cNvSpPr/>
+            <p:nvPr/>
+          </p:nvSpPr>
+          <p:spPr>
+            <a:xfrm>
+              <a:off x="1463040" y="1554480"/>
+              <a:ext cx="310896" cy="274320"/>
+            </a:xfrm>
+            <a:prstGeom prst="rect">
+              <a:avLst/>
+            </a:prstGeom>
+            <a:solidFill>
+              <a:srgbClr val="E8E8E8"/>
+            </a:solidFill>
+            <a:ln w="19050">
+              <a:solidFill>
+                <a:srgbClr val="101418"/>
+              </a:solidFill>
+            </a:ln>
+          </p:spPr>
+          <p:txBody>
+            <a:bodyPr rtlCol="0" anchor="ctr"/>
+            <a:lstStyle/>
+            <a:p>
+              <a:pPr algn="ctr"/>
+            </a:p>
+          </p:txBody>
+        </p:sp>
+        <p:sp>
+          <p:nvSpPr>
+            <p:cNvPr id="16" name="Rectangle 15"/>
+            <p:cNvSpPr/>
+            <p:nvPr/>
+          </p:nvSpPr>
+          <p:spPr>
+            <a:xfrm>
+              <a:off x="1874519" y="1554480"/>
+              <a:ext cx="310896" cy="274320"/>
+            </a:xfrm>
+            <a:prstGeom prst="rect">
+              <a:avLst/>
+            </a:prstGeom>
+            <a:solidFill>
+              <a:srgbClr val="E8E8E8"/>
+            </a:solidFill>
+            <a:ln w="19050">
+              <a:solidFill>
+                <a:srgbClr val="101418"/>
+              </a:solidFill>
+            </a:ln>
+          </p:spPr>
+          <p:txBody>
+            <a:bodyPr rtlCol="0" anchor="ctr"/>
+            <a:lstStyle/>
+            <a:p>
+              <a:pPr algn="ctr"/>
+            </a:p>
+          </p:txBody>
+        </p:sp>
+        <p:sp>
+          <p:nvSpPr>
+            <p:cNvPr id="17" name="TextBox 16"/>
+            <p:cNvSpPr txBox="1"/>
+            <p:nvPr/>
+          </p:nvSpPr>
+          <p:spPr>
+            <a:xfrm>
+              <a:off x="2926080" y="1371600"/>
+              <a:ext cx="8503920" cy="932688"/>
+            </a:xfrm>
+            <a:prstGeom prst="rect">
+              <a:avLst/>
+            </a:prstGeom>
+            <a:noFill/>
+          </p:spPr>
+          <p:txBody>
+            <a:bodyPr wrap="square" anchor="ctr" lIns="18288" tIns="9144" rIns="18288" bIns="9144">
+              <a:noAutofit/>
+            </a:bodyPr>
+            <a:lstStyle/>
+            <a:p>
+              <a:pPr algn="l"/>
+              <a:r>
+                <a:rPr sz="2400" b="1" i="0" lang="en-GB">
+                  <a:solidFill>
+                    <a:srgbClr val="F2F2F2"/>
+                  </a:solidFill>
+                  <a:latin typeface="Arial"/>
+                </a:rPr>
+                <a:t>Belts:</a:t>
+              </a:r>
+              <a:r>
+                <a:rPr sz="2000" b="0" i="0" lang="en-GB">
+                  <a:solidFill>
+                    <a:srgbClr val="F2F2F2"/>
+                  </a:solidFill>
+                  <a:latin typeface="Arial"/>
+                </a:rPr>
+                <a:t> permanent short and medium links</a:t>
+              </a:r>
+            </a:p>
+          </p:txBody>
+        </p:sp>
+      </p:grpSp>
+      <p:grpSp>
+        <p:nvGrpSpPr>
+          <p:cNvPr id="18" name="LANE 2" descr="Lane: tractors, with a tractor icon."/>
+          <p:cNvGrpSpPr/>
+          <p:nvPr/>
+        </p:nvGrpSpPr>
+        <p:grpSpPr>
+          <a:xfrm>
+            <a:off x="548640" y="2414015"/>
+            <a:ext cx="11091672" cy="932689"/>
+            <a:chOff x="548640" y="2414015"/>
+            <a:chExt cx="11091672" cy="932689"/>
+          </a:xfrm>
+        </p:grpSpPr>
+        <p:sp>
+          <p:nvSpPr>
+            <p:cNvPr id="19" name="Rounded Rectangle 18"/>
+            <p:cNvSpPr/>
+            <p:nvPr/>
+          </p:nvSpPr>
+          <p:spPr>
+            <a:xfrm>
+              <a:off x="548640" y="2414015"/>
+              <a:ext cx="11091672" cy="932688"/>
+            </a:xfrm>
+            <a:prstGeom prst="roundRect">
+              <a:avLst>
+                <a:gd name="adj" fmla="val 7843"/>
+              </a:avLst>
+            </a:prstGeom>
+            <a:solidFill>
+              <a:srgbClr val="2B2F36"/>
+            </a:solidFill>
+            <a:ln>
+              <a:noFill/>
+            </a:ln>
+          </p:spPr>
+          <p:txBody>
+            <a:bodyPr rtlCol="0" anchor="ctr"/>
+            <a:lstStyle/>
+            <a:p>
+              <a:pPr algn="ctr"/>
+            </a:p>
+          </p:txBody>
+        </p:sp>
+        <p:sp>
+          <p:nvSpPr>
+            <p:cNvPr id="20" name="Rectangle 19"/>
+            <p:cNvSpPr/>
+            <p:nvPr/>
+          </p:nvSpPr>
+          <p:spPr>
+            <a:xfrm>
+              <a:off x="548640" y="2487168"/>
+              <a:ext cx="73152" cy="786384"/>
+            </a:xfrm>
+            <a:prstGeom prst="rect">
+              <a:avLst/>
+            </a:prstGeom>
+            <a:solidFill>
+              <a:srgbClr val="F2C14E"/>
+            </a:solidFill>
+            <a:ln>
+              <a:noFill/>
+            </a:ln>
+          </p:spPr>
+          <p:txBody>
+            <a:bodyPr rtlCol="0" anchor="ctr"/>
+            <a:lstStyle/>
+            <a:p>
+              <a:pPr algn="ctr"/>
+            </a:p>
+          </p:txBody>
+        </p:sp>
+        <p:sp>
+          <p:nvSpPr>
+            <p:cNvPr id="21" name="Rounded Rectangle 20"/>
+            <p:cNvSpPr/>
+            <p:nvPr/>
+          </p:nvSpPr>
+          <p:spPr>
+            <a:xfrm>
+              <a:off x="1005840" y="2734056"/>
+              <a:ext cx="1005840" cy="274320"/>
+            </a:xfrm>
+            <a:prstGeom prst="roundRect">
+              <a:avLst>
+                <a:gd name="adj" fmla="val 20000"/>
+              </a:avLst>
+            </a:prstGeom>
+            <a:solidFill>
+              <a:srgbClr val="F2C14E"/>
+            </a:solidFill>
+            <a:ln>
+              <a:noFill/>
+            </a:ln>
+          </p:spPr>
+          <p:txBody>
+            <a:bodyPr rtlCol="0" anchor="ctr"/>
+            <a:lstStyle/>
+            <a:p>
+              <a:pPr algn="ctr"/>
+            </a:p>
+          </p:txBody>
+        </p:sp>
+        <p:sp>
+          <p:nvSpPr>
+            <p:cNvPr id="22" name="Rounded Rectangle 21"/>
+            <p:cNvSpPr/>
+            <p:nvPr/>
+          </p:nvSpPr>
+          <p:spPr>
+            <a:xfrm>
+              <a:off x="1600200" y="2487168"/>
+              <a:ext cx="457200" cy="320040"/>
+            </a:xfrm>
+            <a:prstGeom prst="roundRect">
+              <a:avLst>
+                <a:gd name="adj" fmla="val 14285"/>
+              </a:avLst>
+            </a:prstGeom>
+            <a:solidFill>
+              <a:srgbClr val="F2C14E"/>
+            </a:solidFill>
+            <a:ln>
+              <a:noFill/>
+            </a:ln>
+          </p:spPr>
+          <p:txBody>
+            <a:bodyPr rtlCol="0" anchor="ctr"/>
+            <a:lstStyle/>
+            <a:p>
+              <a:pPr algn="ctr"/>
+            </a:p>
+          </p:txBody>
+        </p:sp>
+        <p:sp>
+          <p:nvSpPr>
+            <p:cNvPr id="23" name="Rectangle 22"/>
+            <p:cNvSpPr/>
+            <p:nvPr/>
+          </p:nvSpPr>
+          <p:spPr>
+            <a:xfrm>
+              <a:off x="1691640" y="2551176"/>
+              <a:ext cx="274320" cy="164592"/>
+            </a:xfrm>
+            <a:prstGeom prst="rect">
+              <a:avLst/>
+            </a:prstGeom>
+            <a:solidFill>
+              <a:srgbClr val="1E2126"/>
+            </a:solidFill>
+            <a:ln>
+              <a:noFill/>
+            </a:ln>
+          </p:spPr>
+          <p:txBody>
+            <a:bodyPr rtlCol="0" anchor="ctr"/>
+            <a:lstStyle/>
+            <a:p>
+              <a:pPr algn="ctr"/>
+            </a:p>
+          </p:txBody>
+        </p:sp>
+        <p:cxnSp>
+          <p:nvCxnSpPr>
+            <p:cNvPr id="24" name="Connector 23"/>
+            <p:cNvCxnSpPr/>
+            <p:nvPr/>
+          </p:nvCxnSpPr>
+          <p:spPr>
+            <a:xfrm flipV="1">
+              <a:off x="1188720" y="2505456"/>
+              <a:ext cx="0" cy="228600"/>
+            </a:xfrm>
+            <a:prstGeom prst="line">
+              <a:avLst/>
+            </a:prstGeom>
+            <a:ln w="38100">
+              <a:solidFill>
+                <a:srgbClr val="9AA0A6"/>
+              </a:solidFill>
+            </a:ln>
+          </p:spPr>
+        </p:cxnSp>
+        <p:sp>
+          <p:nvSpPr>
+            <p:cNvPr id="25" name="Oval 24"/>
+            <p:cNvSpPr/>
+            <p:nvPr/>
+          </p:nvSpPr>
+          <p:spPr>
+            <a:xfrm>
+              <a:off x="1691640" y="2779776"/>
+              <a:ext cx="566928" cy="566928"/>
+            </a:xfrm>
+            <a:prstGeom prst="ellipse">
+              <a:avLst/>
+            </a:prstGeom>
+            <a:solidFill>
+              <a:srgbClr val="101418"/>
+            </a:solidFill>
+            <a:ln w="38100">
+              <a:solidFill>
+                <a:srgbClr val="9AA0A6"/>
+              </a:solidFill>
+            </a:ln>
+          </p:spPr>
+          <p:txBody>
+            <a:bodyPr rtlCol="0" anchor="ctr"/>
+            <a:lstStyle/>
+            <a:p>
+              <a:pPr algn="ctr"/>
+            </a:p>
+          </p:txBody>
+        </p:sp>
+        <p:sp>
+          <p:nvSpPr>
+            <p:cNvPr id="26" name="Oval 25"/>
+            <p:cNvSpPr/>
+            <p:nvPr/>
+          </p:nvSpPr>
+          <p:spPr>
+            <a:xfrm>
+              <a:off x="960120" y="2935224"/>
+              <a:ext cx="365760" cy="365760"/>
+            </a:xfrm>
+            <a:prstGeom prst="ellipse">
+              <a:avLst/>
+            </a:prstGeom>
+            <a:solidFill>
+              <a:srgbClr val="101418"/>
+            </a:solidFill>
+            <a:ln w="38100">
+              <a:solidFill>
+                <a:srgbClr val="9AA0A6"/>
+              </a:solidFill>
+            </a:ln>
+          </p:spPr>
+          <p:txBody>
+            <a:bodyPr rtlCol="0" anchor="ctr"/>
+            <a:lstStyle/>
+            <a:p>
+              <a:pPr algn="ctr"/>
+            </a:p>
+          </p:txBody>
+        </p:sp>
+        <p:sp>
+          <p:nvSpPr>
+            <p:cNvPr id="27" name="TextBox 26"/>
+            <p:cNvSpPr txBox="1"/>
+            <p:nvPr/>
+          </p:nvSpPr>
+          <p:spPr>
+            <a:xfrm>
+              <a:off x="2926080" y="2414015"/>
+              <a:ext cx="8503920" cy="932688"/>
+            </a:xfrm>
+            <a:prstGeom prst="rect">
+              <a:avLst/>
+            </a:prstGeom>
+            <a:noFill/>
+          </p:spPr>
+          <p:txBody>
+            <a:bodyPr wrap="square" anchor="ctr" lIns="18288" tIns="9144" rIns="18288" bIns="9144">
+              <a:noAutofit/>
+            </a:bodyPr>
+            <a:lstStyle/>
+            <a:p>
+              <a:pPr algn="l"/>
+              <a:r>
+                <a:rPr sz="2400" b="1" i="0" lang="en-GB">
+                  <a:solidFill>
+                    <a:srgbClr val="F2C14E"/>
+                  </a:solidFill>
+                  <a:latin typeface="Arial"/>
+                </a:rPr>
+                <a:t>Tractors:</a:t>
+              </a:r>
+              <a:r>
+                <a:rPr sz="2000" b="0" i="0" lang="en-GB">
+                  <a:solidFill>
+                    <a:srgbClr val="F2F2F2"/>
+                  </a:solidFill>
+                  <a:latin typeface="Arial"/>
+                </a:rPr>
+                <a:t> flexible, little infrastructure</a:t>
+              </a:r>
+            </a:p>
+          </p:txBody>
+        </p:sp>
+      </p:grpSp>
+      <p:grpSp>
+        <p:nvGrpSpPr>
+          <p:cNvPr id="28" name="LANE 3" descr="Lane: steam, with a small steam engine icon."/>
+          <p:cNvGrpSpPr/>
+          <p:nvPr/>
+        </p:nvGrpSpPr>
+        <p:grpSpPr>
+          <a:xfrm>
+            <a:off x="548640" y="3456432"/>
+            <a:ext cx="11091672" cy="932688"/>
+            <a:chOff x="548640" y="3456432"/>
+            <a:chExt cx="11091672" cy="932688"/>
+          </a:xfrm>
+        </p:grpSpPr>
+        <p:sp>
+          <p:nvSpPr>
+            <p:cNvPr id="29" name="Rounded Rectangle 28"/>
+            <p:cNvSpPr/>
+            <p:nvPr/>
+          </p:nvSpPr>
+          <p:spPr>
+            <a:xfrm>
+              <a:off x="548640" y="3456432"/>
+              <a:ext cx="11091672" cy="932688"/>
+            </a:xfrm>
+            <a:prstGeom prst="roundRect">
+              <a:avLst>
+                <a:gd name="adj" fmla="val 7843"/>
+              </a:avLst>
+            </a:prstGeom>
+            <a:solidFill>
+              <a:srgbClr val="2B2F36"/>
+            </a:solidFill>
+            <a:ln>
+              <a:noFill/>
+            </a:ln>
+          </p:spPr>
+          <p:txBody>
+            <a:bodyPr rtlCol="0" anchor="ctr"/>
+            <a:lstStyle/>
+            <a:p>
+              <a:pPr algn="ctr"/>
+            </a:p>
+          </p:txBody>
+        </p:sp>
+        <p:sp>
+          <p:nvSpPr>
+            <p:cNvPr id="30" name="Rectangle 29"/>
+            <p:cNvSpPr/>
+            <p:nvPr/>
+          </p:nvSpPr>
+          <p:spPr>
+            <a:xfrm>
+              <a:off x="548640" y="3529584"/>
+              <a:ext cx="73152" cy="786384"/>
+            </a:xfrm>
+            <a:prstGeom prst="rect">
+              <a:avLst/>
+            </a:prstGeom>
+            <a:solidFill>
+              <a:srgbClr val="F28C28"/>
+            </a:solidFill>
+            <a:ln>
+              <a:noFill/>
+            </a:ln>
+          </p:spPr>
+          <p:txBody>
+            <a:bodyPr rtlCol="0" anchor="ctr"/>
+            <a:lstStyle/>
+            <a:p>
+              <a:pPr algn="ctr"/>
+            </a:p>
+          </p:txBody>
+        </p:sp>
+        <p:sp>
+          <p:nvSpPr>
+            <p:cNvPr id="31" name="Rounded Rectangle 30"/>
+            <p:cNvSpPr/>
+            <p:nvPr/>
+          </p:nvSpPr>
+          <p:spPr>
+            <a:xfrm>
+              <a:off x="1417320" y="3794759"/>
+              <a:ext cx="960120" cy="411480"/>
+            </a:xfrm>
+            <a:prstGeom prst="roundRect">
+              <a:avLst>
+                <a:gd name="adj" fmla="val 17777"/>
+              </a:avLst>
+            </a:prstGeom>
+            <a:solidFill>
+              <a:srgbClr val="F28C28"/>
+            </a:solidFill>
+            <a:ln>
+              <a:noFill/>
+            </a:ln>
+          </p:spPr>
+          <p:txBody>
+            <a:bodyPr rtlCol="0" anchor="ctr"/>
+            <a:lstStyle/>
+            <a:p>
+              <a:pPr algn="ctr"/>
+            </a:p>
+          </p:txBody>
+        </p:sp>
+        <p:sp>
+          <p:nvSpPr>
+            <p:cNvPr id="32" name="Rounded Rectangle 31"/>
+            <p:cNvSpPr/>
+            <p:nvPr/>
+          </p:nvSpPr>
+          <p:spPr>
+            <a:xfrm>
+              <a:off x="914400" y="3511296"/>
+              <a:ext cx="457200" cy="713232"/>
+            </a:xfrm>
+            <a:prstGeom prst="roundRect">
+              <a:avLst>
+                <a:gd name="adj" fmla="val 10000"/>
+              </a:avLst>
+            </a:prstGeom>
+            <a:solidFill>
+              <a:srgbClr val="F28C28"/>
+            </a:solidFill>
+            <a:ln>
+              <a:noFill/>
+            </a:ln>
+          </p:spPr>
+          <p:txBody>
+            <a:bodyPr rtlCol="0" anchor="ctr"/>
+            <a:lstStyle/>
+            <a:p>
+              <a:pPr algn="ctr"/>
+            </a:p>
+          </p:txBody>
+        </p:sp>
+        <p:sp>
+          <p:nvSpPr>
+            <p:cNvPr id="33" name="Rectangle 32"/>
+            <p:cNvSpPr/>
+            <p:nvPr/>
+          </p:nvSpPr>
+          <p:spPr>
+            <a:xfrm>
+              <a:off x="987552" y="3602736"/>
+              <a:ext cx="274320" cy="237744"/>
+            </a:xfrm>
+            <a:prstGeom prst="rect">
+              <a:avLst/>
+            </a:prstGeom>
+            <a:solidFill>
+              <a:srgbClr val="1B1D21"/>
+            </a:solidFill>
+            <a:ln>
+              <a:noFill/>
+            </a:ln>
+          </p:spPr>
+          <p:txBody>
+            <a:bodyPr rtlCol="0" anchor="ctr"/>
+            <a:lstStyle/>
+            <a:p>
+              <a:pPr algn="ctr"/>
+            </a:p>
+          </p:txBody>
+        </p:sp>
+        <p:sp>
+          <p:nvSpPr>
+            <p:cNvPr id="34" name="Rectangle 33"/>
+            <p:cNvSpPr/>
+            <p:nvPr/>
+          </p:nvSpPr>
+          <p:spPr>
+            <a:xfrm>
+              <a:off x="2194560" y="3511296"/>
+              <a:ext cx="146304" cy="310896"/>
+            </a:xfrm>
+            <a:prstGeom prst="rect">
+              <a:avLst/>
+            </a:prstGeom>
+            <a:solidFill>
+              <a:srgbClr val="1B1D21"/>
+            </a:solidFill>
+            <a:ln>
+              <a:noFill/>
+            </a:ln>
+          </p:spPr>
+          <p:txBody>
+            <a:bodyPr rtlCol="0" anchor="ctr"/>
+            <a:lstStyle/>
+            <a:p>
+              <a:pPr algn="ctr"/>
+            </a:p>
+          </p:txBody>
+        </p:sp>
+        <p:sp>
+          <p:nvSpPr>
+            <p:cNvPr id="35" name="Oval 34"/>
+            <p:cNvSpPr/>
+            <p:nvPr/>
+          </p:nvSpPr>
+          <p:spPr>
+            <a:xfrm>
+              <a:off x="1691640" y="3694176"/>
+              <a:ext cx="237744" cy="182880"/>
+            </a:xfrm>
+            <a:prstGeom prst="ellipse">
+              <a:avLst/>
+            </a:prstGeom>
+            <a:solidFill>
+              <a:srgbClr val="F28C28"/>
+            </a:solidFill>
+            <a:ln>
+              <a:noFill/>
+            </a:ln>
+          </p:spPr>
+          <p:txBody>
+            <a:bodyPr rtlCol="0" anchor="ctr"/>
+            <a:lstStyle/>
+            <a:p>
+              <a:pPr algn="ctr"/>
+            </a:p>
+          </p:txBody>
+        </p:sp>
+        <p:sp>
+          <p:nvSpPr>
+            <p:cNvPr id="36" name="Rectangle 35"/>
+            <p:cNvSpPr/>
+            <p:nvPr/>
+          </p:nvSpPr>
+          <p:spPr>
+            <a:xfrm>
+              <a:off x="914400" y="4151376"/>
+              <a:ext cx="1554480" cy="82296"/>
+            </a:xfrm>
+            <a:prstGeom prst="rect">
+              <a:avLst/>
+            </a:prstGeom>
+            <a:solidFill>
+              <a:srgbClr val="1B1D21"/>
+            </a:solidFill>
+            <a:ln>
+              <a:noFill/>
+            </a:ln>
+          </p:spPr>
+          <p:txBody>
+            <a:bodyPr rtlCol="0" anchor="ctr"/>
+            <a:lstStyle/>
+            <a:p>
+              <a:pPr algn="ctr"/>
+            </a:p>
+          </p:txBody>
+        </p:sp>
+        <p:sp>
+          <p:nvSpPr>
+            <p:cNvPr id="37" name="Oval 36"/>
+            <p:cNvSpPr/>
+            <p:nvPr/>
+          </p:nvSpPr>
+          <p:spPr>
+            <a:xfrm>
+              <a:off x="1261872" y="4059935"/>
+              <a:ext cx="310896" cy="310896"/>
+            </a:xfrm>
+            <a:prstGeom prst="ellipse">
+              <a:avLst/>
+            </a:prstGeom>
+            <a:solidFill>
+              <a:srgbClr val="101418"/>
+            </a:solidFill>
+            <a:ln w="19050">
+              <a:solidFill>
+                <a:srgbClr val="9AA0A6"/>
+              </a:solidFill>
+            </a:ln>
+          </p:spPr>
+          <p:txBody>
+            <a:bodyPr rtlCol="0" anchor="ctr"/>
+            <a:lstStyle/>
+            <a:p>
+              <a:pPr algn="ctr"/>
+            </a:p>
+          </p:txBody>
+        </p:sp>
+        <p:sp>
+          <p:nvSpPr>
+            <p:cNvPr id="38" name="Oval 37"/>
+            <p:cNvSpPr/>
+            <p:nvPr/>
+          </p:nvSpPr>
+          <p:spPr>
+            <a:xfrm>
+              <a:off x="1627632" y="4059935"/>
+              <a:ext cx="310896" cy="310896"/>
+            </a:xfrm>
+            <a:prstGeom prst="ellipse">
+              <a:avLst/>
+            </a:prstGeom>
+            <a:solidFill>
+              <a:srgbClr val="101418"/>
+            </a:solidFill>
+            <a:ln w="19050">
+              <a:solidFill>
+                <a:srgbClr val="9AA0A6"/>
+              </a:solidFill>
+            </a:ln>
+          </p:spPr>
+          <p:txBody>
+            <a:bodyPr rtlCol="0" anchor="ctr"/>
+            <a:lstStyle/>
+            <a:p>
+              <a:pPr algn="ctr"/>
+            </a:p>
+          </p:txBody>
+        </p:sp>
+        <p:sp>
+          <p:nvSpPr>
+            <p:cNvPr id="39" name="Oval 38"/>
+            <p:cNvSpPr/>
+            <p:nvPr/>
+          </p:nvSpPr>
+          <p:spPr>
+            <a:xfrm>
+              <a:off x="1993391" y="4059935"/>
+              <a:ext cx="310896" cy="310896"/>
+            </a:xfrm>
+            <a:prstGeom prst="ellipse">
+              <a:avLst/>
+            </a:prstGeom>
+            <a:solidFill>
+              <a:srgbClr val="101418"/>
+            </a:solidFill>
+            <a:ln w="19050">
+              <a:solidFill>
+                <a:srgbClr val="9AA0A6"/>
+              </a:solidFill>
+            </a:ln>
+          </p:spPr>
+          <p:txBody>
+            <a:bodyPr rtlCol="0" anchor="ctr"/>
+            <a:lstStyle/>
+            <a:p>
+              <a:pPr algn="ctr"/>
+            </a:p>
+          </p:txBody>
+        </p:sp>
+        <p:sp>
+          <p:nvSpPr>
+            <p:cNvPr id="40" name="TextBox 39"/>
+            <p:cNvSpPr txBox="1"/>
+            <p:nvPr/>
+          </p:nvSpPr>
+          <p:spPr>
+            <a:xfrm>
+              <a:off x="2926080" y="3456432"/>
+              <a:ext cx="8503920" cy="932688"/>
+            </a:xfrm>
+            <a:prstGeom prst="rect">
+              <a:avLst/>
+            </a:prstGeom>
+            <a:noFill/>
+          </p:spPr>
+          <p:txBody>
+            <a:bodyPr wrap="square" anchor="ctr" lIns="18288" tIns="9144" rIns="18288" bIns="9144">
+              <a:noAutofit/>
+            </a:bodyPr>
+            <a:lstStyle/>
+            <a:p>
+              <a:pPr algn="l"/>
+              <a:r>
+                <a:rPr sz="2400" b="1" i="0" lang="en-GB">
+                  <a:solidFill>
+                    <a:srgbClr val="F28C28"/>
+                  </a:solidFill>
+                  <a:latin typeface="Arial"/>
+                </a:rPr>
+                <a:t>Steam:</a:t>
+              </a:r>
+              <a:r>
+                <a:rPr sz="2000" b="0" i="0" lang="en-GB">
+                  <a:solidFill>
+                    <a:srgbClr val="F2F2F2"/>
+                  </a:solidFill>
+                  <a:latin typeface="Arial"/>
+                </a:rPr>
+                <a:t> early long-distance bulk</a:t>
+              </a:r>
+            </a:p>
+          </p:txBody>
+        </p:sp>
+      </p:grpSp>
+      <p:grpSp>
+        <p:nvGrpSpPr>
+          <p:cNvPr id="41" name="LANE 4" descr="Lane: electric, with a blue monorail carriage on a beam."/>
+          <p:cNvGrpSpPr/>
+          <p:nvPr/>
+        </p:nvGrpSpPr>
+        <p:grpSpPr>
+          <a:xfrm>
+            <a:off x="548640" y="4498848"/>
+            <a:ext cx="11091672" cy="932688"/>
+            <a:chOff x="548640" y="4498848"/>
+            <a:chExt cx="11091672" cy="932688"/>
+          </a:xfrm>
+        </p:grpSpPr>
+        <p:sp>
+          <p:nvSpPr>
+            <p:cNvPr id="42" name="Rounded Rectangle 41"/>
+            <p:cNvSpPr/>
+            <p:nvPr/>
+          </p:nvSpPr>
+          <p:spPr>
+            <a:xfrm>
+              <a:off x="548640" y="4498848"/>
+              <a:ext cx="11091672" cy="932688"/>
+            </a:xfrm>
+            <a:prstGeom prst="roundRect">
+              <a:avLst>
+                <a:gd name="adj" fmla="val 7843"/>
+              </a:avLst>
+            </a:prstGeom>
+            <a:solidFill>
+              <a:srgbClr val="2B2F36"/>
+            </a:solidFill>
+            <a:ln>
+              <a:noFill/>
+            </a:ln>
+          </p:spPr>
+          <p:txBody>
+            <a:bodyPr rtlCol="0" anchor="ctr"/>
+            <a:lstStyle/>
+            <a:p>
+              <a:pPr algn="ctr"/>
+            </a:p>
+          </p:txBody>
+        </p:sp>
+        <p:sp>
+          <p:nvSpPr>
+            <p:cNvPr id="43" name="Rectangle 42"/>
+            <p:cNvSpPr/>
+            <p:nvPr/>
+          </p:nvSpPr>
+          <p:spPr>
+            <a:xfrm>
+              <a:off x="548640" y="4572000"/>
+              <a:ext cx="73152" cy="786384"/>
+            </a:xfrm>
+            <a:prstGeom prst="rect">
+              <a:avLst/>
+            </a:prstGeom>
+            <a:solidFill>
+              <a:srgbClr val="6CA0DC"/>
+            </a:solidFill>
+            <a:ln>
+              <a:noFill/>
+            </a:ln>
+          </p:spPr>
+          <p:txBody>
+            <a:bodyPr rtlCol="0" anchor="ctr"/>
+            <a:lstStyle/>
+            <a:p>
+              <a:pPr algn="ctr"/>
+            </a:p>
+          </p:txBody>
+        </p:sp>
+        <p:sp>
+          <p:nvSpPr>
+            <p:cNvPr id="44" name="Rectangle 43"/>
+            <p:cNvSpPr/>
+            <p:nvPr/>
+          </p:nvSpPr>
+          <p:spPr>
+            <a:xfrm>
+              <a:off x="868680" y="5248656"/>
+              <a:ext cx="1645920" cy="109728"/>
+            </a:xfrm>
+            <a:prstGeom prst="rect">
+              <a:avLst/>
+            </a:prstGeom>
+            <a:solidFill>
+              <a:srgbClr val="E8E8E8"/>
+            </a:solidFill>
+            <a:ln>
+              <a:noFill/>
+            </a:ln>
+          </p:spPr>
+          <p:txBody>
+            <a:bodyPr rtlCol="0" anchor="ctr"/>
+            <a:lstStyle/>
+            <a:p>
+              <a:pPr algn="ctr"/>
+            </a:p>
+          </p:txBody>
+        </p:sp>
+        <p:sp>
+          <p:nvSpPr>
+            <p:cNvPr id="45" name="Rounded Rectangle 44"/>
+            <p:cNvSpPr/>
+            <p:nvPr/>
+          </p:nvSpPr>
+          <p:spPr>
+            <a:xfrm>
+              <a:off x="914400" y="4700016"/>
+              <a:ext cx="1554480" cy="566928"/>
+            </a:xfrm>
+            <a:prstGeom prst="roundRect">
+              <a:avLst>
+                <a:gd name="adj" fmla="val 25806"/>
+              </a:avLst>
+            </a:prstGeom>
+            <a:solidFill>
+              <a:srgbClr val="6CA0DC"/>
+            </a:solidFill>
+            <a:ln>
+              <a:noFill/>
+            </a:ln>
+          </p:spPr>
+          <p:txBody>
+            <a:bodyPr rtlCol="0" anchor="ctr"/>
+            <a:lstStyle/>
+            <a:p>
+              <a:pPr algn="ctr"/>
+            </a:p>
+          </p:txBody>
+        </p:sp>
+        <p:sp>
+          <p:nvSpPr>
+            <p:cNvPr id="46" name="Rounded Rectangle 45"/>
+            <p:cNvSpPr/>
+            <p:nvPr/>
+          </p:nvSpPr>
+          <p:spPr>
+            <a:xfrm>
+              <a:off x="1088136" y="4809744"/>
+              <a:ext cx="246887" cy="201168"/>
+            </a:xfrm>
+            <a:prstGeom prst="roundRect">
+              <a:avLst>
+                <a:gd name="adj" fmla="val 18181"/>
+              </a:avLst>
+            </a:prstGeom>
+            <a:solidFill>
+              <a:srgbClr val="1E2126"/>
+            </a:solidFill>
+            <a:ln>
+              <a:noFill/>
+            </a:ln>
+          </p:spPr>
+          <p:txBody>
+            <a:bodyPr rtlCol="0" anchor="ctr"/>
+            <a:lstStyle/>
+            <a:p>
+              <a:pPr algn="ctr"/>
+            </a:p>
+          </p:txBody>
+        </p:sp>
+        <p:sp>
+          <p:nvSpPr>
+            <p:cNvPr id="47" name="Rounded Rectangle 46"/>
+            <p:cNvSpPr/>
+            <p:nvPr/>
+          </p:nvSpPr>
+          <p:spPr>
+            <a:xfrm>
+              <a:off x="1408176" y="4809744"/>
+              <a:ext cx="246887" cy="201168"/>
+            </a:xfrm>
+            <a:prstGeom prst="roundRect">
+              <a:avLst>
+                <a:gd name="adj" fmla="val 18181"/>
+              </a:avLst>
+            </a:prstGeom>
+            <a:solidFill>
+              <a:srgbClr val="1E2126"/>
+            </a:solidFill>
+            <a:ln>
+              <a:noFill/>
+            </a:ln>
+          </p:spPr>
+          <p:txBody>
+            <a:bodyPr rtlCol="0" anchor="ctr"/>
+            <a:lstStyle/>
+            <a:p>
+              <a:pPr algn="ctr"/>
+            </a:p>
+          </p:txBody>
+        </p:sp>
+        <p:sp>
+          <p:nvSpPr>
+            <p:cNvPr id="48" name="Rounded Rectangle 47"/>
+            <p:cNvSpPr/>
+            <p:nvPr/>
+          </p:nvSpPr>
+          <p:spPr>
+            <a:xfrm>
+              <a:off x="1728216" y="4809744"/>
+              <a:ext cx="246887" cy="201168"/>
+            </a:xfrm>
+            <a:prstGeom prst="roundRect">
+              <a:avLst>
+                <a:gd name="adj" fmla="val 18181"/>
+              </a:avLst>
+            </a:prstGeom>
+            <a:solidFill>
+              <a:srgbClr val="1E2126"/>
+            </a:solidFill>
+            <a:ln>
+              <a:noFill/>
+            </a:ln>
+          </p:spPr>
+          <p:txBody>
+            <a:bodyPr rtlCol="0" anchor="ctr"/>
+            <a:lstStyle/>
+            <a:p>
+              <a:pPr algn="ctr"/>
+            </a:p>
+          </p:txBody>
+        </p:sp>
+        <p:sp>
+          <p:nvSpPr>
+            <p:cNvPr id="49" name="Rounded Rectangle 48"/>
+            <p:cNvSpPr/>
+            <p:nvPr/>
+          </p:nvSpPr>
+          <p:spPr>
+            <a:xfrm>
+              <a:off x="2048255" y="4809744"/>
+              <a:ext cx="246887" cy="201168"/>
+            </a:xfrm>
+            <a:prstGeom prst="roundRect">
+              <a:avLst>
+                <a:gd name="adj" fmla="val 18181"/>
+              </a:avLst>
+            </a:prstGeom>
+            <a:solidFill>
+              <a:srgbClr val="1E2126"/>
+            </a:solidFill>
+            <a:ln>
+              <a:noFill/>
+            </a:ln>
+          </p:spPr>
+          <p:txBody>
+            <a:bodyPr rtlCol="0" anchor="ctr"/>
+            <a:lstStyle/>
+            <a:p>
+              <a:pPr algn="ctr"/>
+            </a:p>
+          </p:txBody>
+        </p:sp>
+        <p:sp>
+          <p:nvSpPr>
+            <p:cNvPr id="50" name="TextBox 49"/>
+            <p:cNvSpPr txBox="1"/>
+            <p:nvPr/>
+          </p:nvSpPr>
+          <p:spPr>
+            <a:xfrm>
+              <a:off x="2926080" y="4498848"/>
+              <a:ext cx="8503920" cy="932688"/>
+            </a:xfrm>
+            <a:prstGeom prst="rect">
+              <a:avLst/>
+            </a:prstGeom>
+            <a:noFill/>
+          </p:spPr>
+          <p:txBody>
+            <a:bodyPr wrap="square" anchor="ctr" lIns="18288" tIns="9144" rIns="18288" bIns="9144">
+              <a:noAutofit/>
+            </a:bodyPr>
+            <a:lstStyle/>
+            <a:p>
+              <a:pPr algn="l"/>
+              <a:r>
+                <a:rPr sz="2400" b="1" i="0" lang="en-GB">
+                  <a:solidFill>
+                    <a:srgbClr val="6CA0DC"/>
+                  </a:solidFill>
+                  <a:latin typeface="Arial"/>
+                </a:rPr>
+                <a:t>Electric:</a:t>
+              </a:r>
+              <a:r>
+                <a:rPr sz="2000" b="0" i="0" lang="en-GB">
+                  <a:solidFill>
+                    <a:srgbClr val="F2F2F2"/>
+                  </a:solidFill>
+                  <a:latin typeface="Arial"/>
+                </a:rPr>
+                <a:t> mature speed and throughput</a:t>
+              </a:r>
+            </a:p>
+          </p:txBody>
+        </p:sp>
+      </p:grpSp>
+      <p:sp>
+        <p:nvSpPr>
+          <p:cNvPr id="51" name="CAPTION BAR"/>
+          <p:cNvSpPr/>
+          <p:nvPr/>
+        </p:nvSpPr>
+        <p:spPr>
+          <a:xfrm>
+            <a:off x="548640" y="5760720"/>
+            <a:ext cx="11091672" cy="731520"/>
+          </a:xfrm>
+          <a:prstGeom prst="roundRect">
+            <a:avLst>
+              <a:gd name="adj" fmla="val 10000"/>
+            </a:avLst>
+          </a:prstGeom>
+          <a:solidFill>
+            <a:srgbClr val="2B2F36"/>
+          </a:solidFill>
+          <a:ln>
+            <a:noFill/>
+          </a:ln>
+        </p:spPr>
+        <p:txBody>
+          <a:bodyPr rtlCol="0" anchor="ctr"/>
+          <a:lstStyle/>
+          <a:p>
+            <a:pPr algn="ctr"/>
+          </a:p>
+        </p:txBody>
+      </p:sp>
+      <p:sp>
+        <p:nvSpPr>
+          <p:cNvPr id="52" name="CAPTION RULE"/>
+          <p:cNvSpPr/>
+          <p:nvPr/>
+        </p:nvSpPr>
+        <p:spPr>
+          <a:xfrm>
+            <a:off x="548640" y="5815583"/>
+            <a:ext cx="73152" cy="621792"/>
+          </a:xfrm>
+          <a:prstGeom prst="rect">
+            <a:avLst/>
+          </a:prstGeom>
+          <a:solidFill>
+            <a:srgbClr val="F28C28"/>
+          </a:solidFill>
+          <a:ln>
+            <a:noFill/>
+          </a:ln>
+        </p:spPr>
+        <p:txBody>
+          <a:bodyPr rtlCol="0" anchor="ctr"/>
+          <a:lstStyle/>
+          <a:p>
+            <a:pPr algn="ctr"/>
+          </a:p>
+        </p:txBody>
+      </p:sp>
+      <p:sp>
+        <p:nvSpPr>
+          <p:cNvPr id="53" name="CAPTION"/>
+          <p:cNvSpPr txBox="1"/>
+          <p:nvPr/>
+        </p:nvSpPr>
+        <p:spPr>
+          <a:xfrm>
+            <a:off x="777240" y="5760720"/>
+            <a:ext cx="10744200" cy="731520"/>
+          </a:xfrm>
+          <a:prstGeom prst="rect">
+            <a:avLst/>
+          </a:prstGeom>
+          <a:noFill/>
+        </p:spPr>
+        <p:txBody>
+          <a:bodyPr wrap="square" anchor="ctr" lIns="18288" tIns="9144" rIns="18288" bIns="9144">
+            <a:noAutofit/>
+          </a:bodyPr>
+          <a:lstStyle/>
+          <a:p>
+            <a:pPr algn="l">
+              <a:lnSpc>
+                <a:spcPct val="95000"/>
+              </a:lnSpc>
+            </a:pPr>
+            <a:r>
+              <a:rPr sz="2000" b="0" i="0" lang="en-GB">
+                <a:solidFill>
+                  <a:srgbClr val="F2F2F2"/>
+                </a:solidFill>
+                <a:latin typeface="Arial"/>
+              </a:rPr>
+              <a:t>Belts, tractors, steam and electric rail each have a job. Electric leads when the factory matures.</a:t>
+            </a:r>
+          </a:p>
+        </p:txBody>
+      </p:sp>
+      <p:sp>
+        <p:nvSpPr>
+          <p:cNvPr id="54" name="NUM"/>
+          <p:cNvSpPr txBox="1"/>
+          <p:nvPr/>
+        </p:nvSpPr>
+        <p:spPr>
+          <a:xfrm>
+            <a:off x="10728655" y="6528816"/>
+            <a:ext cx="914400" cy="274320"/>
+          </a:xfrm>
+          <a:prstGeom prst="rect">
+            <a:avLst/>
+          </a:prstGeom>
+          <a:noFill/>
+        </p:spPr>
+        <p:txBody>
+          <a:bodyPr wrap="square" anchor="ctr" lIns="18288" tIns="9144" rIns="18288" bIns="9144">
+            <a:noAutofit/>
+          </a:bodyPr>
+          <a:lstStyle/>
+          <a:p>
+            <a:pPr algn="r"/>
+            <a:r>
+              <a:rPr sz="1400" b="0" i="0" lang="en-GB">
+                <a:solidFill>
+                  <a:srgbClr val="A9B0B8"/>
+                </a:solidFill>
+                <a:latin typeface="Arial"/>
+              </a:rPr>
+              <a:t>19</a:t>
             </a:r>
           </a:p>
         </p:txBody>
@@ -11271,7 +17299,11 @@
           </a:bodyPr>
           <a:lstStyle/>
           <a:p>
-            <a:pPr algn="l"/>
+            <a:pPr algn="l">
+              <a:lnSpc>
+                <a:spcPct val="95000"/>
+              </a:lnSpc>
+            </a:pPr>
             <a:r>
               <a:rPr sz="2000" b="0" i="0" lang="en-GB">
                 <a:solidFill>
@@ -11315,6 +17347,2905 @@
                 <a:latin typeface="Arial"/>
               </a:rPr>
               <a:t>2</a:t>
+            </a:r>
+          </a:p>
+        </p:txBody>
+      </p:sp>
+    </p:spTree>
+  </p:cSld>
+  <p:clrMapOvr>
+    <a:masterClrMapping/>
+  </p:clrMapOvr>
+</p:sld>
+</file>
+
+<file path=ppt/slides/slide20.xml><?xml version="1.0" encoding="utf-8"?>
+<p:sld xmlns:a="http://schemas.openxmlformats.org/drawingml/2006/main" xmlns:p="http://schemas.openxmlformats.org/presentationml/2006/main" xmlns:r="http://schemas.openxmlformats.org/officeDocument/2006/relationships">
+  <p:cSld>
+    <p:bg>
+      <p:bgPr>
+        <a:solidFill>
+          <a:srgbClr val="1E2126"/>
+        </a:solidFill>
+        <a:effectLst/>
+      </p:bgPr>
+    </p:bg>
+    <p:spTree>
+      <p:nvGrpSpPr>
+        <p:cNvPr id="1" name=""/>
+        <p:cNvGrpSpPr/>
+        <p:nvPr/>
+      </p:nvGrpSpPr>
+      <p:grpSpPr/>
+      <p:sp>
+        <p:nvSpPr>
+          <p:cNvPr id="2" name="TITLE"/>
+          <p:cNvSpPr>
+            <a:spLocks noGrp="1"/>
+          </p:cNvSpPr>
+          <p:nvPr>
+            <p:ph type="title"/>
+          </p:nvPr>
+        </p:nvSpPr>
+        <p:spPr>
+          <a:xfrm>
+            <a:off x="548640" y="365760"/>
+            <a:ext cx="9326880" cy="731520"/>
+          </a:xfrm>
+        </p:spPr>
+        <p:txBody>
+          <a:bodyPr wrap="square" anchor="ctr" lIns="0" rIns="0" tIns="0" bIns="0">
+            <a:noAutofit/>
+          </a:bodyPr>
+          <a:lstStyle/>
+          <a:p>
+            <a:pPr algn="l"/>
+            <a:r>
+              <a:rPr sz="3600" b="1" i="0" lang="en-GB">
+                <a:solidFill>
+                  <a:srgbClr val="F2F2F2"/>
+                </a:solidFill>
+                <a:latin typeface="Arial"/>
+              </a:rPr>
+              <a:t>Where this stands</a:t>
+            </a:r>
+          </a:p>
+        </p:txBody>
+      </p:sp>
+      <p:sp>
+        <p:nvSpPr>
+          <p:cNvPr id="3" name="CHIP"/>
+          <p:cNvSpPr/>
+          <p:nvPr/>
+        </p:nvSpPr>
+        <p:spPr>
+          <a:xfrm>
+            <a:off x="10088575" y="548640"/>
+            <a:ext cx="1554480" cy="365760"/>
+          </a:xfrm>
+          <a:prstGeom prst="roundRect">
+            <a:avLst>
+              <a:gd name="adj" fmla="val 50000"/>
+            </a:avLst>
+          </a:prstGeom>
+          <a:solidFill>
+            <a:srgbClr val="4DA3FF"/>
+          </a:solidFill>
+          <a:ln>
+            <a:noFill/>
+          </a:ln>
+        </p:spPr>
+        <p:txBody>
+          <a:bodyPr rtlCol="0" anchor="ctr" wrap="square" lIns="36576" tIns="0" rIns="36576" bIns="0">
+            <a:noAutofit/>
+          </a:bodyPr>
+          <a:lstStyle/>
+          <a:p>
+            <a:pPr algn="ctr"/>
+            <a:r>
+              <a:rPr sz="1400" b="1" i="0" lang="en-GB">
+                <a:solidFill>
+                  <a:srgbClr val="101418"/>
+                </a:solidFill>
+                <a:latin typeface="Arial"/>
+              </a:rPr>
+              <a:t>PROVISIONAL</a:t>
+            </a:r>
+          </a:p>
+        </p:txBody>
+      </p:sp>
+      <p:pic>
+        <p:nvPicPr>
+          <p:cNvPr id="4" name="PICTURE R01" descr="Early test model of a tank engine (a yellow 'visual probe') on a short length of track. Not final art."/>
+          <p:cNvPicPr>
+            <a:picLocks noChangeAspect="1"/>
+          </p:cNvPicPr>
+          <p:nvPr/>
+        </p:nvPicPr>
+        <p:blipFill>
+          <a:blip r:embed="rId2"/>
+          <a:srcRect l="625" r="625"/>
+          <a:stretch>
+            <a:fillRect/>
+          </a:stretch>
+        </p:blipFill>
+        <p:spPr>
+          <a:xfrm>
+            <a:off x="548640" y="1371600"/>
+            <a:ext cx="2194560" cy="1234440"/>
+          </a:xfrm>
+          <a:prstGeom prst="roundRect">
+            <a:avLst>
+              <a:gd name="adj" fmla="val 5925"/>
+            </a:avLst>
+          </a:prstGeom>
+        </p:spPr>
+      </p:pic>
+      <p:sp>
+        <p:nvSpPr>
+          <p:cNvPr id="5" name="CREDIT"/>
+          <p:cNvSpPr txBox="1"/>
+          <p:nvPr/>
+        </p:nvSpPr>
+        <p:spPr>
+          <a:xfrm>
+            <a:off x="548640" y="2633472"/>
+            <a:ext cx="2194560" cy="201168"/>
+          </a:xfrm>
+          <a:prstGeom prst="rect">
+            <a:avLst/>
+          </a:prstGeom>
+          <a:noFill/>
+        </p:spPr>
+        <p:txBody>
+          <a:bodyPr wrap="square" anchor="t" lIns="0" tIns="0" rIns="0" bIns="0">
+            <a:noAutofit/>
+          </a:bodyPr>
+          <a:lstStyle/>
+          <a:p>
+            <a:pPr algn="l"/>
+            <a:r>
+              <a:rPr sz="1000" b="0" i="0" lang="en-GB">
+                <a:solidFill>
+                  <a:srgbClr val="A9B0B8"/>
+                </a:solidFill>
+                <a:latin typeface="Arial"/>
+              </a:rPr>
+              <a:t>Early test model, not final art.</a:t>
+            </a:r>
+          </a:p>
+        </p:txBody>
+      </p:sp>
+      <p:grpSp>
+        <p:nvGrpSpPr>
+          <p:cNvPr id="6" name="NOTE" descr="Note: Plans can change. (Provisional)."/>
+          <p:cNvGrpSpPr/>
+          <p:nvPr/>
+        </p:nvGrpSpPr>
+        <p:grpSpPr>
+          <a:xfrm>
+            <a:off x="3108960" y="1691640"/>
+            <a:ext cx="8531352" cy="594360"/>
+            <a:chOff x="3108960" y="1691640"/>
+            <a:chExt cx="8531352" cy="594360"/>
+          </a:xfrm>
+        </p:grpSpPr>
+        <p:sp>
+          <p:nvSpPr>
+            <p:cNvPr id="7" name="Rounded Rectangle 6"/>
+            <p:cNvSpPr/>
+            <p:nvPr/>
+          </p:nvSpPr>
+          <p:spPr>
+            <a:xfrm>
+              <a:off x="3108960" y="1691640"/>
+              <a:ext cx="8531352" cy="594360"/>
+            </a:xfrm>
+            <a:prstGeom prst="roundRect">
+              <a:avLst>
+                <a:gd name="adj" fmla="val 12307"/>
+              </a:avLst>
+            </a:prstGeom>
+            <a:solidFill>
+              <a:srgbClr val="2B2F36"/>
+            </a:solidFill>
+            <a:ln>
+              <a:noFill/>
+            </a:ln>
+          </p:spPr>
+          <p:txBody>
+            <a:bodyPr rtlCol="0" anchor="ctr"/>
+            <a:lstStyle/>
+            <a:p>
+              <a:pPr algn="ctr"/>
+            </a:p>
+          </p:txBody>
+        </p:sp>
+        <p:sp>
+          <p:nvSpPr>
+            <p:cNvPr id="8" name="ICHIP"/>
+            <p:cNvSpPr/>
+            <p:nvPr/>
+          </p:nvSpPr>
+          <p:spPr>
+            <a:xfrm>
+              <a:off x="3337560" y="1833372"/>
+              <a:ext cx="1682200" cy="310896"/>
+            </a:xfrm>
+            <a:prstGeom prst="roundRect">
+              <a:avLst>
+                <a:gd name="adj" fmla="val 50000"/>
+              </a:avLst>
+            </a:prstGeom>
+            <a:solidFill>
+              <a:srgbClr val="4DA3FF"/>
+            </a:solidFill>
+            <a:ln>
+              <a:noFill/>
+            </a:ln>
+          </p:spPr>
+          <p:txBody>
+            <a:bodyPr rtlCol="0" anchor="ctr" wrap="square" lIns="36576" tIns="0" rIns="36576" bIns="0">
+              <a:noAutofit/>
+            </a:bodyPr>
+            <a:lstStyle/>
+            <a:p>
+              <a:pPr algn="ctr"/>
+              <a:r>
+                <a:rPr sz="1400" b="1" i="0" lang="en-GB">
+                  <a:solidFill>
+                    <a:srgbClr val="101418"/>
+                  </a:solidFill>
+                  <a:latin typeface="Arial"/>
+                </a:rPr>
+                <a:t>PROVISIONAL</a:t>
+              </a:r>
+            </a:p>
+          </p:txBody>
+        </p:sp>
+        <p:sp>
+          <p:nvSpPr>
+            <p:cNvPr id="9" name="TextBox 8"/>
+            <p:cNvSpPr txBox="1"/>
+            <p:nvPr/>
+          </p:nvSpPr>
+          <p:spPr>
+            <a:xfrm>
+              <a:off x="5248360" y="1691640"/>
+              <a:ext cx="6117631" cy="594360"/>
+            </a:xfrm>
+            <a:prstGeom prst="rect">
+              <a:avLst/>
+            </a:prstGeom>
+            <a:noFill/>
+          </p:spPr>
+          <p:txBody>
+            <a:bodyPr wrap="square" anchor="ctr" lIns="18288" tIns="9144" rIns="18288" bIns="9144">
+              <a:noAutofit/>
+            </a:bodyPr>
+            <a:lstStyle/>
+            <a:p>
+              <a:pPr algn="l"/>
+              <a:r>
+                <a:rPr sz="2000" b="0" i="0" lang="en-GB">
+                  <a:solidFill>
+                    <a:srgbClr val="F2F2F2"/>
+                  </a:solidFill>
+                  <a:latin typeface="Arial"/>
+                </a:rPr>
+                <a:t>Plans can change.</a:t>
+              </a:r>
+            </a:p>
+          </p:txBody>
+        </p:sp>
+      </p:grpSp>
+      <p:grpSp>
+        <p:nvGrpSpPr>
+          <p:cNvPr id="10" name="ROADMAP" descr="Five steps. The test engine on the game's rails is under way. The other four steps are planned."/>
+          <p:cNvGrpSpPr/>
+          <p:nvPr/>
+        </p:nvGrpSpPr>
+        <p:grpSpPr>
+          <a:xfrm>
+            <a:off x="548640" y="3108960"/>
+            <a:ext cx="11091672" cy="2331720"/>
+            <a:chOff x="548640" y="3108960"/>
+            <a:chExt cx="11091672" cy="2331720"/>
+          </a:xfrm>
+        </p:grpSpPr>
+        <p:sp>
+          <p:nvSpPr>
+            <p:cNvPr id="11" name="Rounded Rectangle 10"/>
+            <p:cNvSpPr/>
+            <p:nvPr/>
+          </p:nvSpPr>
+          <p:spPr>
+            <a:xfrm>
+              <a:off x="548640" y="3108960"/>
+              <a:ext cx="2103120" cy="2331720"/>
+            </a:xfrm>
+            <a:prstGeom prst="roundRect">
+              <a:avLst>
+                <a:gd name="adj" fmla="val 3478"/>
+              </a:avLst>
+            </a:prstGeom>
+            <a:solidFill>
+              <a:srgbClr val="2B2F36"/>
+            </a:solidFill>
+            <a:ln w="31750">
+              <a:solidFill>
+                <a:srgbClr val="F28C28"/>
+              </a:solidFill>
+            </a:ln>
+          </p:spPr>
+          <p:txBody>
+            <a:bodyPr rtlCol="0" anchor="ctr"/>
+            <a:lstStyle/>
+            <a:p>
+              <a:pPr algn="ctr"/>
+            </a:p>
+          </p:txBody>
+        </p:sp>
+        <p:sp>
+          <p:nvSpPr>
+            <p:cNvPr id="12" name="BADGE"/>
+            <p:cNvSpPr/>
+            <p:nvPr/>
+          </p:nvSpPr>
+          <p:spPr>
+            <a:xfrm>
+              <a:off x="704088" y="3264408"/>
+              <a:ext cx="420624" cy="420624"/>
+            </a:xfrm>
+            <a:prstGeom prst="ellipse">
+              <a:avLst/>
+            </a:prstGeom>
+            <a:solidFill>
+              <a:srgbClr val="F28C28"/>
+            </a:solidFill>
+            <a:ln>
+              <a:noFill/>
+            </a:ln>
+          </p:spPr>
+          <p:txBody>
+            <a:bodyPr rtlCol="0" anchor="ctr" wrap="square" lIns="0" tIns="0" rIns="0" bIns="0">
+              <a:noAutofit/>
+            </a:bodyPr>
+            <a:lstStyle/>
+            <a:p>
+              <a:pPr algn="ctr"/>
+              <a:r>
+                <a:rPr sz="1600" b="1" i="0" lang="en-GB">
+                  <a:solidFill>
+                    <a:srgbClr val="101418"/>
+                  </a:solidFill>
+                  <a:latin typeface="Arial"/>
+                </a:rPr>
+                <a:t>1</a:t>
+              </a:r>
+            </a:p>
+          </p:txBody>
+        </p:sp>
+        <p:sp>
+          <p:nvSpPr>
+            <p:cNvPr id="13" name="TextBox 12"/>
+            <p:cNvSpPr txBox="1"/>
+            <p:nvPr/>
+          </p:nvSpPr>
+          <p:spPr>
+            <a:xfrm>
+              <a:off x="658368" y="3794760"/>
+              <a:ext cx="1883663" cy="914400"/>
+            </a:xfrm>
+            <a:prstGeom prst="rect">
+              <a:avLst/>
+            </a:prstGeom>
+            <a:noFill/>
+          </p:spPr>
+          <p:txBody>
+            <a:bodyPr wrap="square" anchor="t" lIns="18288" tIns="9144" rIns="18288" bIns="9144">
+              <a:noAutofit/>
+            </a:bodyPr>
+            <a:lstStyle/>
+            <a:p>
+              <a:pPr algn="l"/>
+              <a:r>
+                <a:rPr sz="1800" b="1" i="0" lang="en-GB">
+                  <a:solidFill>
+                    <a:srgbClr val="F2F2F2"/>
+                  </a:solidFill>
+                  <a:latin typeface="Arial"/>
+                </a:rPr>
+                <a:t>Test engine on the game's rails</a:t>
+              </a:r>
+            </a:p>
+          </p:txBody>
+        </p:sp>
+        <p:sp>
+          <p:nvSpPr>
+            <p:cNvPr id="14" name="Rounded Rectangle 13"/>
+            <p:cNvSpPr/>
+            <p:nvPr/>
+          </p:nvSpPr>
+          <p:spPr>
+            <a:xfrm>
+              <a:off x="685800" y="4800600"/>
+              <a:ext cx="1828799" cy="411480"/>
+            </a:xfrm>
+            <a:prstGeom prst="roundRect">
+              <a:avLst>
+                <a:gd name="adj" fmla="val 48888"/>
+              </a:avLst>
+            </a:prstGeom>
+            <a:solidFill>
+              <a:srgbClr val="F28C28"/>
+            </a:solidFill>
+            <a:ln>
+              <a:noFill/>
+            </a:ln>
+          </p:spPr>
+          <p:txBody>
+            <a:bodyPr rtlCol="0" anchor="ctr" wrap="square" lIns="54864" tIns="27432" rIns="54864" bIns="27432">
+              <a:noAutofit/>
+            </a:bodyPr>
+            <a:lstStyle/>
+            <a:p>
+              <a:pPr algn="ctr"/>
+              <a:r>
+                <a:rPr sz="1600" b="1" i="0" lang="en-GB">
+                  <a:solidFill>
+                    <a:srgbClr val="101418"/>
+                  </a:solidFill>
+                  <a:latin typeface="Arial"/>
+                </a:rPr>
+                <a:t>Under way</a:t>
+              </a:r>
+            </a:p>
+          </p:txBody>
+        </p:sp>
+        <p:sp>
+          <p:nvSpPr>
+            <p:cNvPr id="15" name="Rounded Rectangle 14"/>
+            <p:cNvSpPr/>
+            <p:nvPr/>
+          </p:nvSpPr>
+          <p:spPr>
+            <a:xfrm>
+              <a:off x="2795778" y="3108960"/>
+              <a:ext cx="2103120" cy="2331720"/>
+            </a:xfrm>
+            <a:prstGeom prst="roundRect">
+              <a:avLst>
+                <a:gd name="adj" fmla="val 3478"/>
+              </a:avLst>
+            </a:prstGeom>
+            <a:solidFill>
+              <a:srgbClr val="2B2F36"/>
+            </a:solidFill>
+            <a:ln>
+              <a:noFill/>
+            </a:ln>
+          </p:spPr>
+          <p:txBody>
+            <a:bodyPr rtlCol="0" anchor="ctr"/>
+            <a:lstStyle/>
+            <a:p>
+              <a:pPr algn="ctr"/>
+            </a:p>
+          </p:txBody>
+        </p:sp>
+        <p:sp>
+          <p:nvSpPr>
+            <p:cNvPr id="16" name="BADGE"/>
+            <p:cNvSpPr/>
+            <p:nvPr/>
+          </p:nvSpPr>
+          <p:spPr>
+            <a:xfrm>
+              <a:off x="2951226" y="3264408"/>
+              <a:ext cx="420624" cy="420624"/>
+            </a:xfrm>
+            <a:prstGeom prst="ellipse">
+              <a:avLst/>
+            </a:prstGeom>
+            <a:solidFill>
+              <a:srgbClr val="F28C28"/>
+            </a:solidFill>
+            <a:ln>
+              <a:noFill/>
+            </a:ln>
+          </p:spPr>
+          <p:txBody>
+            <a:bodyPr rtlCol="0" anchor="ctr" wrap="square" lIns="0" tIns="0" rIns="0" bIns="0">
+              <a:noAutofit/>
+            </a:bodyPr>
+            <a:lstStyle/>
+            <a:p>
+              <a:pPr algn="ctr"/>
+              <a:r>
+                <a:rPr sz="1600" b="1" i="0" lang="en-GB">
+                  <a:solidFill>
+                    <a:srgbClr val="101418"/>
+                  </a:solidFill>
+                  <a:latin typeface="Arial"/>
+                </a:rPr>
+                <a:t>2</a:t>
+              </a:r>
+            </a:p>
+          </p:txBody>
+        </p:sp>
+        <p:sp>
+          <p:nvSpPr>
+            <p:cNvPr id="17" name="TextBox 16"/>
+            <p:cNvSpPr txBox="1"/>
+            <p:nvPr/>
+          </p:nvSpPr>
+          <p:spPr>
+            <a:xfrm>
+              <a:off x="2905506" y="3794760"/>
+              <a:ext cx="1883663" cy="914400"/>
+            </a:xfrm>
+            <a:prstGeom prst="rect">
+              <a:avLst/>
+            </a:prstGeom>
+            <a:noFill/>
+          </p:spPr>
+          <p:txBody>
+            <a:bodyPr wrap="square" anchor="t" lIns="18288" tIns="9144" rIns="18288" bIns="9144">
+              <a:noAutofit/>
+            </a:bodyPr>
+            <a:lstStyle/>
+            <a:p>
+              <a:pPr algn="l"/>
+              <a:r>
+                <a:rPr sz="1800" b="1" i="0" lang="en-GB">
+                  <a:solidFill>
+                    <a:srgbClr val="F2F2F2"/>
+                  </a:solidFill>
+                  <a:latin typeface="Arial"/>
+                </a:rPr>
+                <a:t>Upgrade in place</a:t>
+              </a:r>
+            </a:p>
+          </p:txBody>
+        </p:sp>
+        <p:sp>
+          <p:nvSpPr>
+            <p:cNvPr id="18" name="Rounded Rectangle 17"/>
+            <p:cNvSpPr/>
+            <p:nvPr/>
+          </p:nvSpPr>
+          <p:spPr>
+            <a:xfrm>
+              <a:off x="2932938" y="4800600"/>
+              <a:ext cx="1828799" cy="411480"/>
+            </a:xfrm>
+            <a:prstGeom prst="roundRect">
+              <a:avLst>
+                <a:gd name="adj" fmla="val 48888"/>
+              </a:avLst>
+            </a:prstGeom>
+            <a:noFill/>
+            <a:ln w="25400">
+              <a:solidFill>
+                <a:srgbClr val="A9B0B8"/>
+              </a:solidFill>
+            </a:ln>
+          </p:spPr>
+          <p:txBody>
+            <a:bodyPr rtlCol="0" anchor="ctr" wrap="square" lIns="54864" tIns="27432" rIns="54864" bIns="27432">
+              <a:noAutofit/>
+            </a:bodyPr>
+            <a:lstStyle/>
+            <a:p>
+              <a:pPr algn="ctr"/>
+              <a:r>
+                <a:rPr sz="1600" b="1" i="0" lang="en-GB">
+                  <a:solidFill>
+                    <a:srgbClr val="F2F2F2"/>
+                  </a:solidFill>
+                  <a:latin typeface="Arial"/>
+                </a:rPr>
+                <a:t>Planned</a:t>
+              </a:r>
+            </a:p>
+          </p:txBody>
+        </p:sp>
+        <p:sp>
+          <p:nvSpPr>
+            <p:cNvPr id="19" name="Rounded Rectangle 18"/>
+            <p:cNvSpPr/>
+            <p:nvPr/>
+          </p:nvSpPr>
+          <p:spPr>
+            <a:xfrm>
+              <a:off x="5042916" y="3108960"/>
+              <a:ext cx="2103120" cy="2331720"/>
+            </a:xfrm>
+            <a:prstGeom prst="roundRect">
+              <a:avLst>
+                <a:gd name="adj" fmla="val 3478"/>
+              </a:avLst>
+            </a:prstGeom>
+            <a:solidFill>
+              <a:srgbClr val="2B2F36"/>
+            </a:solidFill>
+            <a:ln>
+              <a:noFill/>
+            </a:ln>
+          </p:spPr>
+          <p:txBody>
+            <a:bodyPr rtlCol="0" anchor="ctr"/>
+            <a:lstStyle/>
+            <a:p>
+              <a:pPr algn="ctr"/>
+            </a:p>
+          </p:txBody>
+        </p:sp>
+        <p:sp>
+          <p:nvSpPr>
+            <p:cNvPr id="20" name="BADGE"/>
+            <p:cNvSpPr/>
+            <p:nvPr/>
+          </p:nvSpPr>
+          <p:spPr>
+            <a:xfrm>
+              <a:off x="5198364" y="3264408"/>
+              <a:ext cx="420624" cy="420624"/>
+            </a:xfrm>
+            <a:prstGeom prst="ellipse">
+              <a:avLst/>
+            </a:prstGeom>
+            <a:solidFill>
+              <a:srgbClr val="F28C28"/>
+            </a:solidFill>
+            <a:ln>
+              <a:noFill/>
+            </a:ln>
+          </p:spPr>
+          <p:txBody>
+            <a:bodyPr rtlCol="0" anchor="ctr" wrap="square" lIns="0" tIns="0" rIns="0" bIns="0">
+              <a:noAutofit/>
+            </a:bodyPr>
+            <a:lstStyle/>
+            <a:p>
+              <a:pPr algn="ctr"/>
+              <a:r>
+                <a:rPr sz="1600" b="1" i="0" lang="en-GB">
+                  <a:solidFill>
+                    <a:srgbClr val="101418"/>
+                  </a:solidFill>
+                  <a:latin typeface="Arial"/>
+                </a:rPr>
+                <a:t>3</a:t>
+              </a:r>
+            </a:p>
+          </p:txBody>
+        </p:sp>
+        <p:sp>
+          <p:nvSpPr>
+            <p:cNvPr id="21" name="TextBox 20"/>
+            <p:cNvSpPr txBox="1"/>
+            <p:nvPr/>
+          </p:nvSpPr>
+          <p:spPr>
+            <a:xfrm>
+              <a:off x="5152644" y="3794760"/>
+              <a:ext cx="1883663" cy="914400"/>
+            </a:xfrm>
+            <a:prstGeom prst="rect">
+              <a:avLst/>
+            </a:prstGeom>
+            <a:noFill/>
+          </p:spPr>
+          <p:txBody>
+            <a:bodyPr wrap="square" anchor="t" lIns="18288" tIns="9144" rIns="18288" bIns="9144">
+              <a:noAutofit/>
+            </a:bodyPr>
+            <a:lstStyle/>
+            <a:p>
+              <a:pPr algn="l"/>
+              <a:r>
+                <a:rPr sz="1800" b="1" i="0" lang="en-GB">
+                  <a:solidFill>
+                    <a:srgbClr val="F2F2F2"/>
+                  </a:solidFill>
+                  <a:latin typeface="Arial"/>
+                </a:rPr>
+                <a:t>Station replacement</a:t>
+              </a:r>
+            </a:p>
+          </p:txBody>
+        </p:sp>
+        <p:sp>
+          <p:nvSpPr>
+            <p:cNvPr id="22" name="Rounded Rectangle 21"/>
+            <p:cNvSpPr/>
+            <p:nvPr/>
+          </p:nvSpPr>
+          <p:spPr>
+            <a:xfrm>
+              <a:off x="5180076" y="4800600"/>
+              <a:ext cx="1828799" cy="411480"/>
+            </a:xfrm>
+            <a:prstGeom prst="roundRect">
+              <a:avLst>
+                <a:gd name="adj" fmla="val 48888"/>
+              </a:avLst>
+            </a:prstGeom>
+            <a:noFill/>
+            <a:ln w="25400">
+              <a:solidFill>
+                <a:srgbClr val="A9B0B8"/>
+              </a:solidFill>
+            </a:ln>
+          </p:spPr>
+          <p:txBody>
+            <a:bodyPr rtlCol="0" anchor="ctr" wrap="square" lIns="54864" tIns="27432" rIns="54864" bIns="27432">
+              <a:noAutofit/>
+            </a:bodyPr>
+            <a:lstStyle/>
+            <a:p>
+              <a:pPr algn="ctr"/>
+              <a:r>
+                <a:rPr sz="1600" b="1" i="0" lang="en-GB">
+                  <a:solidFill>
+                    <a:srgbClr val="F2F2F2"/>
+                  </a:solidFill>
+                  <a:latin typeface="Arial"/>
+                </a:rPr>
+                <a:t>Planned</a:t>
+              </a:r>
+            </a:p>
+          </p:txBody>
+        </p:sp>
+        <p:sp>
+          <p:nvSpPr>
+            <p:cNvPr id="23" name="Rounded Rectangle 22"/>
+            <p:cNvSpPr/>
+            <p:nvPr/>
+          </p:nvSpPr>
+          <p:spPr>
+            <a:xfrm>
+              <a:off x="7290054" y="3108960"/>
+              <a:ext cx="2103120" cy="2331720"/>
+            </a:xfrm>
+            <a:prstGeom prst="roundRect">
+              <a:avLst>
+                <a:gd name="adj" fmla="val 3478"/>
+              </a:avLst>
+            </a:prstGeom>
+            <a:solidFill>
+              <a:srgbClr val="2B2F36"/>
+            </a:solidFill>
+            <a:ln>
+              <a:noFill/>
+            </a:ln>
+          </p:spPr>
+          <p:txBody>
+            <a:bodyPr rtlCol="0" anchor="ctr"/>
+            <a:lstStyle/>
+            <a:p>
+              <a:pPr algn="ctr"/>
+            </a:p>
+          </p:txBody>
+        </p:sp>
+        <p:sp>
+          <p:nvSpPr>
+            <p:cNvPr id="24" name="BADGE"/>
+            <p:cNvSpPr/>
+            <p:nvPr/>
+          </p:nvSpPr>
+          <p:spPr>
+            <a:xfrm>
+              <a:off x="7445502" y="3264408"/>
+              <a:ext cx="420624" cy="420624"/>
+            </a:xfrm>
+            <a:prstGeom prst="ellipse">
+              <a:avLst/>
+            </a:prstGeom>
+            <a:solidFill>
+              <a:srgbClr val="F28C28"/>
+            </a:solidFill>
+            <a:ln>
+              <a:noFill/>
+            </a:ln>
+          </p:spPr>
+          <p:txBody>
+            <a:bodyPr rtlCol="0" anchor="ctr" wrap="square" lIns="0" tIns="0" rIns="0" bIns="0">
+              <a:noAutofit/>
+            </a:bodyPr>
+            <a:lstStyle/>
+            <a:p>
+              <a:pPr algn="ctr"/>
+              <a:r>
+                <a:rPr sz="1600" b="1" i="0" lang="en-GB">
+                  <a:solidFill>
+                    <a:srgbClr val="101418"/>
+                  </a:solidFill>
+                  <a:latin typeface="Arial"/>
+                </a:rPr>
+                <a:t>4</a:t>
+              </a:r>
+            </a:p>
+          </p:txBody>
+        </p:sp>
+        <p:sp>
+          <p:nvSpPr>
+            <p:cNvPr id="25" name="TextBox 24"/>
+            <p:cNvSpPr txBox="1"/>
+            <p:nvPr/>
+          </p:nvSpPr>
+          <p:spPr>
+            <a:xfrm>
+              <a:off x="7399781" y="3794760"/>
+              <a:ext cx="1883663" cy="914400"/>
+            </a:xfrm>
+            <a:prstGeom prst="rect">
+              <a:avLst/>
+            </a:prstGeom>
+            <a:noFill/>
+          </p:spPr>
+          <p:txBody>
+            <a:bodyPr wrap="square" anchor="t" lIns="18288" tIns="9144" rIns="18288" bIns="9144">
+              <a:noAutofit/>
+            </a:bodyPr>
+            <a:lstStyle/>
+            <a:p>
+              <a:pPr algn="l"/>
+              <a:r>
+                <a:rPr sz="1800" b="1" i="0" lang="en-GB">
+                  <a:solidFill>
+                    <a:srgbClr val="F2F2F2"/>
+                  </a:solidFill>
+                  <a:latin typeface="Arial"/>
+                </a:rPr>
+                <a:t>Mixed networks</a:t>
+              </a:r>
+            </a:p>
+          </p:txBody>
+        </p:sp>
+        <p:sp>
+          <p:nvSpPr>
+            <p:cNvPr id="26" name="Rounded Rectangle 25"/>
+            <p:cNvSpPr/>
+            <p:nvPr/>
+          </p:nvSpPr>
+          <p:spPr>
+            <a:xfrm>
+              <a:off x="7427214" y="4800600"/>
+              <a:ext cx="1828799" cy="411480"/>
+            </a:xfrm>
+            <a:prstGeom prst="roundRect">
+              <a:avLst>
+                <a:gd name="adj" fmla="val 48888"/>
+              </a:avLst>
+            </a:prstGeom>
+            <a:noFill/>
+            <a:ln w="25400">
+              <a:solidFill>
+                <a:srgbClr val="A9B0B8"/>
+              </a:solidFill>
+            </a:ln>
+          </p:spPr>
+          <p:txBody>
+            <a:bodyPr rtlCol="0" anchor="ctr" wrap="square" lIns="54864" tIns="27432" rIns="54864" bIns="27432">
+              <a:noAutofit/>
+            </a:bodyPr>
+            <a:lstStyle/>
+            <a:p>
+              <a:pPr algn="ctr"/>
+              <a:r>
+                <a:rPr sz="1600" b="1" i="0" lang="en-GB">
+                  <a:solidFill>
+                    <a:srgbClr val="F2F2F2"/>
+                  </a:solidFill>
+                  <a:latin typeface="Arial"/>
+                </a:rPr>
+                <a:t>Planned</a:t>
+              </a:r>
+            </a:p>
+          </p:txBody>
+        </p:sp>
+        <p:sp>
+          <p:nvSpPr>
+            <p:cNvPr id="27" name="Rounded Rectangle 26"/>
+            <p:cNvSpPr/>
+            <p:nvPr/>
+          </p:nvSpPr>
+          <p:spPr>
+            <a:xfrm>
+              <a:off x="9537192" y="3108960"/>
+              <a:ext cx="2103120" cy="2331720"/>
+            </a:xfrm>
+            <a:prstGeom prst="roundRect">
+              <a:avLst>
+                <a:gd name="adj" fmla="val 3478"/>
+              </a:avLst>
+            </a:prstGeom>
+            <a:solidFill>
+              <a:srgbClr val="2B2F36"/>
+            </a:solidFill>
+            <a:ln>
+              <a:noFill/>
+            </a:ln>
+          </p:spPr>
+          <p:txBody>
+            <a:bodyPr rtlCol="0" anchor="ctr"/>
+            <a:lstStyle/>
+            <a:p>
+              <a:pPr algn="ctr"/>
+            </a:p>
+          </p:txBody>
+        </p:sp>
+        <p:sp>
+          <p:nvSpPr>
+            <p:cNvPr id="28" name="BADGE"/>
+            <p:cNvSpPr/>
+            <p:nvPr/>
+          </p:nvSpPr>
+          <p:spPr>
+            <a:xfrm>
+              <a:off x="9692640" y="3264408"/>
+              <a:ext cx="420624" cy="420624"/>
+            </a:xfrm>
+            <a:prstGeom prst="ellipse">
+              <a:avLst/>
+            </a:prstGeom>
+            <a:solidFill>
+              <a:srgbClr val="F28C28"/>
+            </a:solidFill>
+            <a:ln>
+              <a:noFill/>
+            </a:ln>
+          </p:spPr>
+          <p:txBody>
+            <a:bodyPr rtlCol="0" anchor="ctr" wrap="square" lIns="0" tIns="0" rIns="0" bIns="0">
+              <a:noAutofit/>
+            </a:bodyPr>
+            <a:lstStyle/>
+            <a:p>
+              <a:pPr algn="ctr"/>
+              <a:r>
+                <a:rPr sz="1600" b="1" i="0" lang="en-GB">
+                  <a:solidFill>
+                    <a:srgbClr val="101418"/>
+                  </a:solidFill>
+                  <a:latin typeface="Arial"/>
+                </a:rPr>
+                <a:t>5</a:t>
+              </a:r>
+            </a:p>
+          </p:txBody>
+        </p:sp>
+        <p:sp>
+          <p:nvSpPr>
+            <p:cNvPr id="29" name="TextBox 28"/>
+            <p:cNvSpPr txBox="1"/>
+            <p:nvPr/>
+          </p:nvSpPr>
+          <p:spPr>
+            <a:xfrm>
+              <a:off x="9646919" y="3794760"/>
+              <a:ext cx="1883663" cy="914400"/>
+            </a:xfrm>
+            <a:prstGeom prst="rect">
+              <a:avLst/>
+            </a:prstGeom>
+            <a:noFill/>
+          </p:spPr>
+          <p:txBody>
+            <a:bodyPr wrap="square" anchor="t" lIns="18288" tIns="9144" rIns="18288" bIns="9144">
+              <a:noAutofit/>
+            </a:bodyPr>
+            <a:lstStyle/>
+            <a:p>
+              <a:pPr algn="l"/>
+              <a:r>
+                <a:rPr sz="1800" b="1" i="0" lang="en-GB">
+                  <a:solidFill>
+                    <a:srgbClr val="F2F2F2"/>
+                  </a:solidFill>
+                  <a:latin typeface="Arial"/>
+                </a:rPr>
+                <a:t>Interchange</a:t>
+              </a:r>
+            </a:p>
+          </p:txBody>
+        </p:sp>
+        <p:sp>
+          <p:nvSpPr>
+            <p:cNvPr id="30" name="Rounded Rectangle 29"/>
+            <p:cNvSpPr/>
+            <p:nvPr/>
+          </p:nvSpPr>
+          <p:spPr>
+            <a:xfrm>
+              <a:off x="9674352" y="4800600"/>
+              <a:ext cx="1828799" cy="411480"/>
+            </a:xfrm>
+            <a:prstGeom prst="roundRect">
+              <a:avLst>
+                <a:gd name="adj" fmla="val 48888"/>
+              </a:avLst>
+            </a:prstGeom>
+            <a:noFill/>
+            <a:ln w="25400">
+              <a:solidFill>
+                <a:srgbClr val="A9B0B8"/>
+              </a:solidFill>
+            </a:ln>
+          </p:spPr>
+          <p:txBody>
+            <a:bodyPr rtlCol="0" anchor="ctr" wrap="square" lIns="54864" tIns="27432" rIns="54864" bIns="27432">
+              <a:noAutofit/>
+            </a:bodyPr>
+            <a:lstStyle/>
+            <a:p>
+              <a:pPr algn="ctr"/>
+              <a:r>
+                <a:rPr sz="1600" b="1" i="0" lang="en-GB">
+                  <a:solidFill>
+                    <a:srgbClr val="F2F2F2"/>
+                  </a:solidFill>
+                  <a:latin typeface="Arial"/>
+                </a:rPr>
+                <a:t>Planned</a:t>
+              </a:r>
+            </a:p>
+          </p:txBody>
+        </p:sp>
+      </p:grpSp>
+      <p:sp>
+        <p:nvSpPr>
+          <p:cNvPr id="31" name="CAPTION BAR"/>
+          <p:cNvSpPr/>
+          <p:nvPr/>
+        </p:nvSpPr>
+        <p:spPr>
+          <a:xfrm>
+            <a:off x="548640" y="5760720"/>
+            <a:ext cx="11091672" cy="731520"/>
+          </a:xfrm>
+          <a:prstGeom prst="roundRect">
+            <a:avLst>
+              <a:gd name="adj" fmla="val 10000"/>
+            </a:avLst>
+          </a:prstGeom>
+          <a:solidFill>
+            <a:srgbClr val="2B2F36"/>
+          </a:solidFill>
+          <a:ln>
+            <a:noFill/>
+          </a:ln>
+        </p:spPr>
+        <p:txBody>
+          <a:bodyPr rtlCol="0" anchor="ctr"/>
+          <a:lstStyle/>
+          <a:p>
+            <a:pPr algn="ctr"/>
+          </a:p>
+        </p:txBody>
+      </p:sp>
+      <p:sp>
+        <p:nvSpPr>
+          <p:cNvPr id="32" name="CAPTION RULE"/>
+          <p:cNvSpPr/>
+          <p:nvPr/>
+        </p:nvSpPr>
+        <p:spPr>
+          <a:xfrm>
+            <a:off x="548640" y="5815583"/>
+            <a:ext cx="73152" cy="621792"/>
+          </a:xfrm>
+          <a:prstGeom prst="rect">
+            <a:avLst/>
+          </a:prstGeom>
+          <a:solidFill>
+            <a:srgbClr val="F28C28"/>
+          </a:solidFill>
+          <a:ln>
+            <a:noFill/>
+          </a:ln>
+        </p:spPr>
+        <p:txBody>
+          <a:bodyPr rtlCol="0" anchor="ctr"/>
+          <a:lstStyle/>
+          <a:p>
+            <a:pPr algn="ctr"/>
+          </a:p>
+        </p:txBody>
+      </p:sp>
+      <p:sp>
+        <p:nvSpPr>
+          <p:cNvPr id="33" name="CAPTION"/>
+          <p:cNvSpPr txBox="1"/>
+          <p:nvPr/>
+        </p:nvSpPr>
+        <p:spPr>
+          <a:xfrm>
+            <a:off x="777240" y="5760720"/>
+            <a:ext cx="10744200" cy="731520"/>
+          </a:xfrm>
+          <a:prstGeom prst="rect">
+            <a:avLst/>
+          </a:prstGeom>
+          <a:noFill/>
+        </p:spPr>
+        <p:txBody>
+          <a:bodyPr wrap="square" anchor="ctr" lIns="18288" tIns="9144" rIns="18288" bIns="9144">
+            <a:noAutofit/>
+          </a:bodyPr>
+          <a:lstStyle/>
+          <a:p>
+            <a:pPr algn="l">
+              <a:lnSpc>
+                <a:spcPct val="95000"/>
+              </a:lnSpc>
+            </a:pPr>
+            <a:r>
+              <a:rPr sz="2000" b="0" i="0" lang="en-GB">
+                <a:solidFill>
+                  <a:srgbClr val="F2F2F2"/>
+                </a:solidFill>
+                <a:latin typeface="Arial"/>
+              </a:rPr>
+              <a:t>Conversion is planned. It is not built yet.</a:t>
+            </a:r>
+          </a:p>
+        </p:txBody>
+      </p:sp>
+      <p:sp>
+        <p:nvSpPr>
+          <p:cNvPr id="34" name="NUM"/>
+          <p:cNvSpPr txBox="1"/>
+          <p:nvPr/>
+        </p:nvSpPr>
+        <p:spPr>
+          <a:xfrm>
+            <a:off x="10728655" y="6528816"/>
+            <a:ext cx="914400" cy="274320"/>
+          </a:xfrm>
+          <a:prstGeom prst="rect">
+            <a:avLst/>
+          </a:prstGeom>
+          <a:noFill/>
+        </p:spPr>
+        <p:txBody>
+          <a:bodyPr wrap="square" anchor="ctr" lIns="18288" tIns="9144" rIns="18288" bIns="9144">
+            <a:noAutofit/>
+          </a:bodyPr>
+          <a:lstStyle/>
+          <a:p>
+            <a:pPr algn="r"/>
+            <a:r>
+              <a:rPr sz="1400" b="0" i="0" lang="en-GB">
+                <a:solidFill>
+                  <a:srgbClr val="A9B0B8"/>
+                </a:solidFill>
+                <a:latin typeface="Arial"/>
+              </a:rPr>
+              <a:t>20</a:t>
+            </a:r>
+          </a:p>
+        </p:txBody>
+      </p:sp>
+    </p:spTree>
+  </p:cSld>
+  <p:clrMapOvr>
+    <a:masterClrMapping/>
+  </p:clrMapOvr>
+</p:sld>
+</file>
+
+<file path=ppt/slides/slide21.xml><?xml version="1.0" encoding="utf-8"?>
+<p:sld xmlns:a="http://schemas.openxmlformats.org/drawingml/2006/main" xmlns:p="http://schemas.openxmlformats.org/presentationml/2006/main" xmlns:r="http://schemas.openxmlformats.org/officeDocument/2006/relationships">
+  <p:cSld>
+    <p:bg>
+      <p:bgPr>
+        <a:solidFill>
+          <a:srgbClr val="1E2126"/>
+        </a:solidFill>
+        <a:effectLst/>
+      </p:bgPr>
+    </p:bg>
+    <p:spTree>
+      <p:nvGrpSpPr>
+        <p:cNvPr id="1" name=""/>
+        <p:cNvGrpSpPr/>
+        <p:nvPr/>
+      </p:nvGrpSpPr>
+      <p:grpSpPr/>
+      <p:sp>
+        <p:nvSpPr>
+          <p:cNvPr id="2" name="TITLE"/>
+          <p:cNvSpPr>
+            <a:spLocks noGrp="1"/>
+          </p:cNvSpPr>
+          <p:nvPr>
+            <p:ph type="title"/>
+          </p:nvPr>
+        </p:nvSpPr>
+        <p:spPr>
+          <a:xfrm>
+            <a:off x="548640" y="365760"/>
+            <a:ext cx="9326880" cy="731520"/>
+          </a:xfrm>
+        </p:spPr>
+        <p:txBody>
+          <a:bodyPr wrap="square" anchor="ctr" lIns="0" rIns="0" tIns="0" bIns="0">
+            <a:noAutofit/>
+          </a:bodyPr>
+          <a:lstStyle/>
+          <a:p>
+            <a:pPr algn="l"/>
+            <a:r>
+              <a:rPr sz="3600" b="1" i="0" lang="en-GB">
+                <a:solidFill>
+                  <a:srgbClr val="F2F2F2"/>
+                </a:solidFill>
+                <a:latin typeface="Arial"/>
+              </a:rPr>
+              <a:t>Still undecided</a:t>
+            </a:r>
+          </a:p>
+        </p:txBody>
+      </p:sp>
+      <p:sp>
+        <p:nvSpPr>
+          <p:cNvPr id="3" name="CHIP"/>
+          <p:cNvSpPr/>
+          <p:nvPr/>
+        </p:nvSpPr>
+        <p:spPr>
+          <a:xfrm>
+            <a:off x="10088575" y="548640"/>
+            <a:ext cx="1554480" cy="365760"/>
+          </a:xfrm>
+          <a:prstGeom prst="roundRect">
+            <a:avLst>
+              <a:gd name="adj" fmla="val 50000"/>
+            </a:avLst>
+          </a:prstGeom>
+          <a:noFill/>
+          <a:ln w="25400">
+            <a:solidFill>
+              <a:srgbClr val="A9B0B8"/>
+            </a:solidFill>
+          </a:ln>
+        </p:spPr>
+        <p:txBody>
+          <a:bodyPr rtlCol="0" anchor="ctr" wrap="square" lIns="36576" tIns="0" rIns="36576" bIns="0">
+            <a:noAutofit/>
+          </a:bodyPr>
+          <a:lstStyle/>
+          <a:p>
+            <a:pPr algn="ctr"/>
+            <a:r>
+              <a:rPr sz="1400" b="1" i="0" lang="en-GB">
+                <a:solidFill>
+                  <a:srgbClr val="F2F2F2"/>
+                </a:solidFill>
+                <a:latin typeface="Arial"/>
+              </a:rPr>
+              <a:t>UNDECIDED</a:t>
+            </a:r>
+          </a:p>
+        </p:txBody>
+      </p:sp>
+      <p:grpSp>
+        <p:nvGrpSpPr>
+          <p:cNvPr id="4" name="QUESTION GRID" descr="Eight open questions, each marked Undecided with its open-question code."/>
+          <p:cNvGrpSpPr/>
+          <p:nvPr/>
+        </p:nvGrpSpPr>
+        <p:grpSpPr>
+          <a:xfrm>
+            <a:off x="548640" y="1371600"/>
+            <a:ext cx="11091672" cy="4069080"/>
+            <a:chOff x="548640" y="1371600"/>
+            <a:chExt cx="11091672" cy="4069080"/>
+          </a:xfrm>
+        </p:grpSpPr>
+        <p:sp>
+          <p:nvSpPr>
+            <p:cNvPr id="5" name="Rounded Rectangle 4"/>
+            <p:cNvSpPr/>
+            <p:nvPr/>
+          </p:nvSpPr>
+          <p:spPr>
+            <a:xfrm>
+              <a:off x="548640" y="1371600"/>
+              <a:ext cx="2651760" cy="1920240"/>
+            </a:xfrm>
+            <a:prstGeom prst="roundRect">
+              <a:avLst>
+                <a:gd name="adj" fmla="val 3809"/>
+              </a:avLst>
+            </a:prstGeom>
+            <a:solidFill>
+              <a:srgbClr val="2B2F36"/>
+            </a:solidFill>
+            <a:ln>
+              <a:noFill/>
+            </a:ln>
+          </p:spPr>
+          <p:txBody>
+            <a:bodyPr rtlCol="0" anchor="ctr"/>
+            <a:lstStyle/>
+            <a:p>
+              <a:pPr algn="ctr"/>
+            </a:p>
+          </p:txBody>
+        </p:sp>
+        <p:sp>
+          <p:nvSpPr>
+            <p:cNvPr id="6" name="ICHIP"/>
+            <p:cNvSpPr/>
+            <p:nvPr/>
+          </p:nvSpPr>
+          <p:spPr>
+            <a:xfrm>
+              <a:off x="685800" y="1527048"/>
+              <a:ext cx="2146591" cy="310896"/>
+            </a:xfrm>
+            <a:prstGeom prst="roundRect">
+              <a:avLst>
+                <a:gd name="adj" fmla="val 50000"/>
+              </a:avLst>
+            </a:prstGeom>
+            <a:noFill/>
+            <a:ln w="25400">
+              <a:solidFill>
+                <a:srgbClr val="A9B0B8"/>
+              </a:solidFill>
+            </a:ln>
+          </p:spPr>
+          <p:txBody>
+            <a:bodyPr rtlCol="0" anchor="ctr" wrap="square" lIns="36576" tIns="0" rIns="36576" bIns="0">
+              <a:noAutofit/>
+            </a:bodyPr>
+            <a:lstStyle/>
+            <a:p>
+              <a:pPr algn="ctr"/>
+              <a:r>
+                <a:rPr sz="1400" b="1" i="0" lang="en-GB">
+                  <a:solidFill>
+                    <a:srgbClr val="F2F2F2"/>
+                  </a:solidFill>
+                  <a:latin typeface="Arial"/>
+                </a:rPr>
+                <a:t>UNDECIDED · OQ12</a:t>
+              </a:r>
+            </a:p>
+          </p:txBody>
+        </p:sp>
+        <p:sp>
+          <p:nvSpPr>
+            <p:cNvPr id="7" name="TextBox 6"/>
+            <p:cNvSpPr txBox="1"/>
+            <p:nvPr/>
+          </p:nvSpPr>
+          <p:spPr>
+            <a:xfrm>
+              <a:off x="685800" y="1965960"/>
+              <a:ext cx="2377440" cy="1261872"/>
+            </a:xfrm>
+            <a:prstGeom prst="rect">
+              <a:avLst/>
+            </a:prstGeom>
+            <a:noFill/>
+          </p:spPr>
+          <p:txBody>
+            <a:bodyPr wrap="square" anchor="t" lIns="18288" tIns="9144" rIns="18288" bIns="9144">
+              <a:noAutofit/>
+            </a:bodyPr>
+            <a:lstStyle/>
+            <a:p>
+              <a:pPr algn="l"/>
+              <a:r>
+                <a:rPr sz="2000" b="0" i="0" lang="en-GB">
+                  <a:solidFill>
+                    <a:srgbClr val="F2F2F2"/>
+                  </a:solidFill>
+                  <a:latin typeface="Arial"/>
+                </a:rPr>
+                <a:t>Exact copies of shapes</a:t>
+              </a:r>
+            </a:p>
+          </p:txBody>
+        </p:sp>
+        <p:sp>
+          <p:nvSpPr>
+            <p:cNvPr id="8" name="Rounded Rectangle 7"/>
+            <p:cNvSpPr/>
+            <p:nvPr/>
+          </p:nvSpPr>
+          <p:spPr>
+            <a:xfrm>
+              <a:off x="3361944" y="1371600"/>
+              <a:ext cx="2651760" cy="1920240"/>
+            </a:xfrm>
+            <a:prstGeom prst="roundRect">
+              <a:avLst>
+                <a:gd name="adj" fmla="val 3809"/>
+              </a:avLst>
+            </a:prstGeom>
+            <a:solidFill>
+              <a:srgbClr val="2B2F36"/>
+            </a:solidFill>
+            <a:ln>
+              <a:noFill/>
+            </a:ln>
+          </p:spPr>
+          <p:txBody>
+            <a:bodyPr rtlCol="0" anchor="ctr"/>
+            <a:lstStyle/>
+            <a:p>
+              <a:pPr algn="ctr"/>
+            </a:p>
+          </p:txBody>
+        </p:sp>
+        <p:sp>
+          <p:nvSpPr>
+            <p:cNvPr id="9" name="ICHIP"/>
+            <p:cNvSpPr/>
+            <p:nvPr/>
+          </p:nvSpPr>
+          <p:spPr>
+            <a:xfrm>
+              <a:off x="3499104" y="1527048"/>
+              <a:ext cx="2146591" cy="310896"/>
+            </a:xfrm>
+            <a:prstGeom prst="roundRect">
+              <a:avLst>
+                <a:gd name="adj" fmla="val 50000"/>
+              </a:avLst>
+            </a:prstGeom>
+            <a:noFill/>
+            <a:ln w="25400">
+              <a:solidFill>
+                <a:srgbClr val="A9B0B8"/>
+              </a:solidFill>
+            </a:ln>
+          </p:spPr>
+          <p:txBody>
+            <a:bodyPr rtlCol="0" anchor="ctr" wrap="square" lIns="36576" tIns="0" rIns="36576" bIns="0">
+              <a:noAutofit/>
+            </a:bodyPr>
+            <a:lstStyle/>
+            <a:p>
+              <a:pPr algn="ctr"/>
+              <a:r>
+                <a:rPr sz="1400" b="1" i="0" lang="en-GB">
+                  <a:solidFill>
+                    <a:srgbClr val="F2F2F2"/>
+                  </a:solidFill>
+                  <a:latin typeface="Arial"/>
+                </a:rPr>
+                <a:t>UNDECIDED · OQ12</a:t>
+              </a:r>
+            </a:p>
+          </p:txBody>
+        </p:sp>
+        <p:sp>
+          <p:nvSpPr>
+            <p:cNvPr id="10" name="TextBox 9"/>
+            <p:cNvSpPr txBox="1"/>
+            <p:nvPr/>
+          </p:nvSpPr>
+          <p:spPr>
+            <a:xfrm>
+              <a:off x="3499104" y="1965960"/>
+              <a:ext cx="2377440" cy="1261872"/>
+            </a:xfrm>
+            <a:prstGeom prst="rect">
+              <a:avLst/>
+            </a:prstGeom>
+            <a:noFill/>
+          </p:spPr>
+          <p:txBody>
+            <a:bodyPr wrap="square" anchor="t" lIns="18288" tIns="9144" rIns="18288" bIns="9144">
+              <a:noAutofit/>
+            </a:bodyPr>
+            <a:lstStyle/>
+            <a:p>
+              <a:pPr algn="l"/>
+              <a:r>
+                <a:rPr sz="2000" b="0" i="0" lang="en-GB">
+                  <a:solidFill>
+                    <a:srgbClr val="F2F2F2"/>
+                  </a:solidFill>
+                  <a:latin typeface="Arial"/>
+                </a:rPr>
+                <a:t>Costs and refunds</a:t>
+              </a:r>
+            </a:p>
+          </p:txBody>
+        </p:sp>
+        <p:sp>
+          <p:nvSpPr>
+            <p:cNvPr id="11" name="Rounded Rectangle 10"/>
+            <p:cNvSpPr/>
+            <p:nvPr/>
+          </p:nvSpPr>
+          <p:spPr>
+            <a:xfrm>
+              <a:off x="6175248" y="1371600"/>
+              <a:ext cx="2651760" cy="1920240"/>
+            </a:xfrm>
+            <a:prstGeom prst="roundRect">
+              <a:avLst>
+                <a:gd name="adj" fmla="val 3809"/>
+              </a:avLst>
+            </a:prstGeom>
+            <a:solidFill>
+              <a:srgbClr val="2B2F36"/>
+            </a:solidFill>
+            <a:ln>
+              <a:noFill/>
+            </a:ln>
+          </p:spPr>
+          <p:txBody>
+            <a:bodyPr rtlCol="0" anchor="ctr"/>
+            <a:lstStyle/>
+            <a:p>
+              <a:pPr algn="ctr"/>
+            </a:p>
+          </p:txBody>
+        </p:sp>
+        <p:sp>
+          <p:nvSpPr>
+            <p:cNvPr id="12" name="ICHIP"/>
+            <p:cNvSpPr/>
+            <p:nvPr/>
+          </p:nvSpPr>
+          <p:spPr>
+            <a:xfrm>
+              <a:off x="6312408" y="1527048"/>
+              <a:ext cx="2146591" cy="310896"/>
+            </a:xfrm>
+            <a:prstGeom prst="roundRect">
+              <a:avLst>
+                <a:gd name="adj" fmla="val 50000"/>
+              </a:avLst>
+            </a:prstGeom>
+            <a:noFill/>
+            <a:ln w="25400">
+              <a:solidFill>
+                <a:srgbClr val="A9B0B8"/>
+              </a:solidFill>
+            </a:ln>
+          </p:spPr>
+          <p:txBody>
+            <a:bodyPr rtlCol="0" anchor="ctr" wrap="square" lIns="36576" tIns="0" rIns="36576" bIns="0">
+              <a:noAutofit/>
+            </a:bodyPr>
+            <a:lstStyle/>
+            <a:p>
+              <a:pPr algn="ctr"/>
+              <a:r>
+                <a:rPr sz="1400" b="1" i="0" lang="en-GB">
+                  <a:solidFill>
+                    <a:srgbClr val="F2F2F2"/>
+                  </a:solidFill>
+                  <a:latin typeface="Arial"/>
+                </a:rPr>
+                <a:t>UNDECIDED · OQ12</a:t>
+              </a:r>
+            </a:p>
+          </p:txBody>
+        </p:sp>
+        <p:sp>
+          <p:nvSpPr>
+            <p:cNvPr id="13" name="TextBox 12"/>
+            <p:cNvSpPr txBox="1"/>
+            <p:nvPr/>
+          </p:nvSpPr>
+          <p:spPr>
+            <a:xfrm>
+              <a:off x="6312408" y="1965960"/>
+              <a:ext cx="2377440" cy="1261872"/>
+            </a:xfrm>
+            <a:prstGeom prst="rect">
+              <a:avLst/>
+            </a:prstGeom>
+            <a:noFill/>
+          </p:spPr>
+          <p:txBody>
+            <a:bodyPr wrap="square" anchor="t" lIns="18288" tIns="9144" rIns="18288" bIns="9144">
+              <a:noAutofit/>
+            </a:bodyPr>
+            <a:lstStyle/>
+            <a:p>
+              <a:pPr algn="l"/>
+              <a:r>
+                <a:rPr sz="2000" b="0" i="0" lang="en-GB">
+                  <a:solidFill>
+                    <a:srgbClr val="F2F2F2"/>
+                  </a:solidFill>
+                  <a:latin typeface="Arial"/>
+                </a:rPr>
+                <a:t>Undo and recovery</a:t>
+              </a:r>
+            </a:p>
+          </p:txBody>
+        </p:sp>
+        <p:sp>
+          <p:nvSpPr>
+            <p:cNvPr id="14" name="Rounded Rectangle 13"/>
+            <p:cNvSpPr/>
+            <p:nvPr/>
+          </p:nvSpPr>
+          <p:spPr>
+            <a:xfrm>
+              <a:off x="8988552" y="1371600"/>
+              <a:ext cx="2651760" cy="1920240"/>
+            </a:xfrm>
+            <a:prstGeom prst="roundRect">
+              <a:avLst>
+                <a:gd name="adj" fmla="val 3809"/>
+              </a:avLst>
+            </a:prstGeom>
+            <a:solidFill>
+              <a:srgbClr val="2B2F36"/>
+            </a:solidFill>
+            <a:ln>
+              <a:noFill/>
+            </a:ln>
+          </p:spPr>
+          <p:txBody>
+            <a:bodyPr rtlCol="0" anchor="ctr"/>
+            <a:lstStyle/>
+            <a:p>
+              <a:pPr algn="ctr"/>
+            </a:p>
+          </p:txBody>
+        </p:sp>
+        <p:sp>
+          <p:nvSpPr>
+            <p:cNvPr id="15" name="ICHIP"/>
+            <p:cNvSpPr/>
+            <p:nvPr/>
+          </p:nvSpPr>
+          <p:spPr>
+            <a:xfrm>
+              <a:off x="9125712" y="1527048"/>
+              <a:ext cx="2146591" cy="310896"/>
+            </a:xfrm>
+            <a:prstGeom prst="roundRect">
+              <a:avLst>
+                <a:gd name="adj" fmla="val 50000"/>
+              </a:avLst>
+            </a:prstGeom>
+            <a:noFill/>
+            <a:ln w="25400">
+              <a:solidFill>
+                <a:srgbClr val="A9B0B8"/>
+              </a:solidFill>
+            </a:ln>
+          </p:spPr>
+          <p:txBody>
+            <a:bodyPr rtlCol="0" anchor="ctr" wrap="square" lIns="36576" tIns="0" rIns="36576" bIns="0">
+              <a:noAutofit/>
+            </a:bodyPr>
+            <a:lstStyle/>
+            <a:p>
+              <a:pPr algn="ctr"/>
+              <a:r>
+                <a:rPr sz="1400" b="1" i="0" lang="en-GB">
+                  <a:solidFill>
+                    <a:srgbClr val="F2F2F2"/>
+                  </a:solidFill>
+                  <a:latin typeface="Arial"/>
+                </a:rPr>
+                <a:t>UNDECIDED · OQ12</a:t>
+              </a:r>
+            </a:p>
+          </p:txBody>
+        </p:sp>
+        <p:sp>
+          <p:nvSpPr>
+            <p:cNvPr id="16" name="TextBox 15"/>
+            <p:cNvSpPr txBox="1"/>
+            <p:nvPr/>
+          </p:nvSpPr>
+          <p:spPr>
+            <a:xfrm>
+              <a:off x="9125712" y="1965960"/>
+              <a:ext cx="2377440" cy="1261872"/>
+            </a:xfrm>
+            <a:prstGeom prst="rect">
+              <a:avLst/>
+            </a:prstGeom>
+            <a:noFill/>
+          </p:spPr>
+          <p:txBody>
+            <a:bodyPr wrap="square" anchor="t" lIns="18288" tIns="9144" rIns="18288" bIns="9144">
+              <a:noAutofit/>
+            </a:bodyPr>
+            <a:lstStyle/>
+            <a:p>
+              <a:pPr algn="l"/>
+              <a:r>
+                <a:rPr sz="2000" b="0" i="0" lang="en-GB">
+                  <a:solidFill>
+                    <a:srgbClr val="F2F2F2"/>
+                  </a:solidFill>
+                  <a:latin typeface="Arial"/>
+                </a:rPr>
+                <a:t>Occupied and stranded trains</a:t>
+              </a:r>
+            </a:p>
+          </p:txBody>
+        </p:sp>
+        <p:sp>
+          <p:nvSpPr>
+            <p:cNvPr id="17" name="Rounded Rectangle 16"/>
+            <p:cNvSpPr/>
+            <p:nvPr/>
+          </p:nvSpPr>
+          <p:spPr>
+            <a:xfrm>
+              <a:off x="548640" y="3520440"/>
+              <a:ext cx="2651760" cy="1920240"/>
+            </a:xfrm>
+            <a:prstGeom prst="roundRect">
+              <a:avLst>
+                <a:gd name="adj" fmla="val 3809"/>
+              </a:avLst>
+            </a:prstGeom>
+            <a:solidFill>
+              <a:srgbClr val="2B2F36"/>
+            </a:solidFill>
+            <a:ln>
+              <a:noFill/>
+            </a:ln>
+          </p:spPr>
+          <p:txBody>
+            <a:bodyPr rtlCol="0" anchor="ctr"/>
+            <a:lstStyle/>
+            <a:p>
+              <a:pPr algn="ctr"/>
+            </a:p>
+          </p:txBody>
+        </p:sp>
+        <p:sp>
+          <p:nvSpPr>
+            <p:cNvPr id="18" name="ICHIP"/>
+            <p:cNvSpPr/>
+            <p:nvPr/>
+          </p:nvSpPr>
+          <p:spPr>
+            <a:xfrm>
+              <a:off x="685800" y="3675888"/>
+              <a:ext cx="2146591" cy="310896"/>
+            </a:xfrm>
+            <a:prstGeom prst="roundRect">
+              <a:avLst>
+                <a:gd name="adj" fmla="val 50000"/>
+              </a:avLst>
+            </a:prstGeom>
+            <a:noFill/>
+            <a:ln w="25400">
+              <a:solidFill>
+                <a:srgbClr val="A9B0B8"/>
+              </a:solidFill>
+            </a:ln>
+          </p:spPr>
+          <p:txBody>
+            <a:bodyPr rtlCol="0" anchor="ctr" wrap="square" lIns="36576" tIns="0" rIns="36576" bIns="0">
+              <a:noAutofit/>
+            </a:bodyPr>
+            <a:lstStyle/>
+            <a:p>
+              <a:pPr algn="ctr"/>
+              <a:r>
+                <a:rPr sz="1400" b="1" i="0" lang="en-GB">
+                  <a:solidFill>
+                    <a:srgbClr val="F2F2F2"/>
+                  </a:solidFill>
+                  <a:latin typeface="Arial"/>
+                </a:rPr>
+                <a:t>UNDECIDED · OQ12</a:t>
+              </a:r>
+            </a:p>
+          </p:txBody>
+        </p:sp>
+        <p:sp>
+          <p:nvSpPr>
+            <p:cNvPr id="19" name="TextBox 18"/>
+            <p:cNvSpPr txBox="1"/>
+            <p:nvPr/>
+          </p:nvSpPr>
+          <p:spPr>
+            <a:xfrm>
+              <a:off x="685800" y="4114800"/>
+              <a:ext cx="2377440" cy="1261872"/>
+            </a:xfrm>
+            <a:prstGeom prst="rect">
+              <a:avLst/>
+            </a:prstGeom>
+            <a:noFill/>
+          </p:spPr>
+          <p:txBody>
+            <a:bodyPr wrap="square" anchor="t" lIns="18288" tIns="9144" rIns="18288" bIns="9144">
+              <a:noAutofit/>
+            </a:bodyPr>
+            <a:lstStyle/>
+            <a:p>
+              <a:pPr algn="l"/>
+              <a:r>
+                <a:rPr sz="2000" b="0" i="0" lang="en-GB">
+                  <a:solidFill>
+                    <a:srgbClr val="F2F2F2"/>
+                  </a:solidFill>
+                  <a:latin typeface="Arial"/>
+                </a:rPr>
+                <a:t>Station and timetable carry-over</a:t>
+              </a:r>
+            </a:p>
+          </p:txBody>
+        </p:sp>
+        <p:sp>
+          <p:nvSpPr>
+            <p:cNvPr id="20" name="Rounded Rectangle 19"/>
+            <p:cNvSpPr/>
+            <p:nvPr/>
+          </p:nvSpPr>
+          <p:spPr>
+            <a:xfrm>
+              <a:off x="3361944" y="3520440"/>
+              <a:ext cx="2651760" cy="1920240"/>
+            </a:xfrm>
+            <a:prstGeom prst="roundRect">
+              <a:avLst>
+                <a:gd name="adj" fmla="val 3809"/>
+              </a:avLst>
+            </a:prstGeom>
+            <a:solidFill>
+              <a:srgbClr val="2B2F36"/>
+            </a:solidFill>
+            <a:ln>
+              <a:noFill/>
+            </a:ln>
+          </p:spPr>
+          <p:txBody>
+            <a:bodyPr rtlCol="0" anchor="ctr"/>
+            <a:lstStyle/>
+            <a:p>
+              <a:pPr algn="ctr"/>
+            </a:p>
+          </p:txBody>
+        </p:sp>
+        <p:sp>
+          <p:nvSpPr>
+            <p:cNvPr id="21" name="ICHIP"/>
+            <p:cNvSpPr/>
+            <p:nvPr/>
+          </p:nvSpPr>
+          <p:spPr>
+            <a:xfrm>
+              <a:off x="3499104" y="3675888"/>
+              <a:ext cx="2146591" cy="310896"/>
+            </a:xfrm>
+            <a:prstGeom prst="roundRect">
+              <a:avLst>
+                <a:gd name="adj" fmla="val 50000"/>
+              </a:avLst>
+            </a:prstGeom>
+            <a:noFill/>
+            <a:ln w="25400">
+              <a:solidFill>
+                <a:srgbClr val="A9B0B8"/>
+              </a:solidFill>
+            </a:ln>
+          </p:spPr>
+          <p:txBody>
+            <a:bodyPr rtlCol="0" anchor="ctr" wrap="square" lIns="36576" tIns="0" rIns="36576" bIns="0">
+              <a:noAutofit/>
+            </a:bodyPr>
+            <a:lstStyle/>
+            <a:p>
+              <a:pPr algn="ctr"/>
+              <a:r>
+                <a:rPr sz="1400" b="1" i="0" lang="en-GB">
+                  <a:solidFill>
+                    <a:srgbClr val="F2F2F2"/>
+                  </a:solidFill>
+                  <a:latin typeface="Arial"/>
+                </a:rPr>
+                <a:t>UNDECIDED · OQ03</a:t>
+              </a:r>
+            </a:p>
+          </p:txBody>
+        </p:sp>
+        <p:sp>
+          <p:nvSpPr>
+            <p:cNvPr id="22" name="TextBox 21"/>
+            <p:cNvSpPr txBox="1"/>
+            <p:nvPr/>
+          </p:nvSpPr>
+          <p:spPr>
+            <a:xfrm>
+              <a:off x="3499104" y="4114800"/>
+              <a:ext cx="2377440" cy="1261872"/>
+            </a:xfrm>
+            <a:prstGeom prst="rect">
+              <a:avLst/>
+            </a:prstGeom>
+            <a:noFill/>
+          </p:spPr>
+          <p:txBody>
+            <a:bodyPr wrap="square" anchor="t" lIns="18288" tIns="9144" rIns="18288" bIns="9144">
+              <a:noAutofit/>
+            </a:bodyPr>
+            <a:lstStyle/>
+            <a:p>
+              <a:pPr algn="l"/>
+              <a:r>
+                <a:rPr sz="2000" b="0" i="0" lang="en-GB">
+                  <a:solidFill>
+                    <a:srgbClr val="F2F2F2"/>
+                  </a:solidFill>
+                  <a:latin typeface="Arial"/>
+                </a:rPr>
+                <a:t>Signal upgrades</a:t>
+              </a:r>
+            </a:p>
+          </p:txBody>
+        </p:sp>
+        <p:sp>
+          <p:nvSpPr>
+            <p:cNvPr id="23" name="Rounded Rectangle 22"/>
+            <p:cNvSpPr/>
+            <p:nvPr/>
+          </p:nvSpPr>
+          <p:spPr>
+            <a:xfrm>
+              <a:off x="6175248" y="3520440"/>
+              <a:ext cx="2651760" cy="1920240"/>
+            </a:xfrm>
+            <a:prstGeom prst="roundRect">
+              <a:avLst>
+                <a:gd name="adj" fmla="val 3809"/>
+              </a:avLst>
+            </a:prstGeom>
+            <a:solidFill>
+              <a:srgbClr val="2B2F36"/>
+            </a:solidFill>
+            <a:ln>
+              <a:noFill/>
+            </a:ln>
+          </p:spPr>
+          <p:txBody>
+            <a:bodyPr rtlCol="0" anchor="ctr"/>
+            <a:lstStyle/>
+            <a:p>
+              <a:pPr algn="ctr"/>
+            </a:p>
+          </p:txBody>
+        </p:sp>
+        <p:sp>
+          <p:nvSpPr>
+            <p:cNvPr id="24" name="ICHIP"/>
+            <p:cNvSpPr/>
+            <p:nvPr/>
+          </p:nvSpPr>
+          <p:spPr>
+            <a:xfrm>
+              <a:off x="6312408" y="3675888"/>
+              <a:ext cx="2146591" cy="310896"/>
+            </a:xfrm>
+            <a:prstGeom prst="roundRect">
+              <a:avLst>
+                <a:gd name="adj" fmla="val 50000"/>
+              </a:avLst>
+            </a:prstGeom>
+            <a:noFill/>
+            <a:ln w="25400">
+              <a:solidFill>
+                <a:srgbClr val="A9B0B8"/>
+              </a:solidFill>
+            </a:ln>
+          </p:spPr>
+          <p:txBody>
+            <a:bodyPr rtlCol="0" anchor="ctr" wrap="square" lIns="36576" tIns="0" rIns="36576" bIns="0">
+              <a:noAutofit/>
+            </a:bodyPr>
+            <a:lstStyle/>
+            <a:p>
+              <a:pPr algn="ctr"/>
+              <a:r>
+                <a:rPr sz="1400" b="1" i="0" lang="en-GB">
+                  <a:solidFill>
+                    <a:srgbClr val="F2F2F2"/>
+                  </a:solidFill>
+                  <a:latin typeface="Arial"/>
+                </a:rPr>
+                <a:t>UNDECIDED · OQ13</a:t>
+              </a:r>
+            </a:p>
+          </p:txBody>
+        </p:sp>
+        <p:sp>
+          <p:nvSpPr>
+            <p:cNvPr id="25" name="TextBox 24"/>
+            <p:cNvSpPr txBox="1"/>
+            <p:nvPr/>
+          </p:nvSpPr>
+          <p:spPr>
+            <a:xfrm>
+              <a:off x="6312408" y="4114800"/>
+              <a:ext cx="2377440" cy="1261872"/>
+            </a:xfrm>
+            <a:prstGeom prst="rect">
+              <a:avLst/>
+            </a:prstGeom>
+            <a:noFill/>
+          </p:spPr>
+          <p:txBody>
+            <a:bodyPr wrap="square" anchor="t" lIns="18288" tIns="9144" rIns="18288" bIns="9144">
+              <a:noAutofit/>
+            </a:bodyPr>
+            <a:lstStyle/>
+            <a:p>
+              <a:pPr algn="l"/>
+              <a:r>
+                <a:rPr sz="2000" b="0" i="0" lang="en-GB">
+                  <a:solidFill>
+                    <a:srgbClr val="F2F2F2"/>
+                  </a:solidFill>
+                  <a:latin typeface="Arial"/>
+                </a:rPr>
+                <a:t>Transfer buildings in or out of Core?</a:t>
+              </a:r>
+            </a:p>
+          </p:txBody>
+        </p:sp>
+        <p:sp>
+          <p:nvSpPr>
+            <p:cNvPr id="26" name="Rounded Rectangle 25"/>
+            <p:cNvSpPr/>
+            <p:nvPr/>
+          </p:nvSpPr>
+          <p:spPr>
+            <a:xfrm>
+              <a:off x="8988552" y="3520440"/>
+              <a:ext cx="2651760" cy="1920240"/>
+            </a:xfrm>
+            <a:prstGeom prst="roundRect">
+              <a:avLst>
+                <a:gd name="adj" fmla="val 3809"/>
+              </a:avLst>
+            </a:prstGeom>
+            <a:solidFill>
+              <a:srgbClr val="2B2F36"/>
+            </a:solidFill>
+            <a:ln>
+              <a:noFill/>
+            </a:ln>
+          </p:spPr>
+          <p:txBody>
+            <a:bodyPr rtlCol="0" anchor="ctr"/>
+            <a:lstStyle/>
+            <a:p>
+              <a:pPr algn="ctr"/>
+            </a:p>
+          </p:txBody>
+        </p:sp>
+        <p:sp>
+          <p:nvSpPr>
+            <p:cNvPr id="27" name="ICHIP"/>
+            <p:cNvSpPr/>
+            <p:nvPr/>
+          </p:nvSpPr>
+          <p:spPr>
+            <a:xfrm>
+              <a:off x="9125712" y="3675888"/>
+              <a:ext cx="2146591" cy="310896"/>
+            </a:xfrm>
+            <a:prstGeom prst="roundRect">
+              <a:avLst>
+                <a:gd name="adj" fmla="val 50000"/>
+              </a:avLst>
+            </a:prstGeom>
+            <a:noFill/>
+            <a:ln w="25400">
+              <a:solidFill>
+                <a:srgbClr val="A9B0B8"/>
+              </a:solidFill>
+            </a:ln>
+          </p:spPr>
+          <p:txBody>
+            <a:bodyPr rtlCol="0" anchor="ctr" wrap="square" lIns="36576" tIns="0" rIns="36576" bIns="0">
+              <a:noAutofit/>
+            </a:bodyPr>
+            <a:lstStyle/>
+            <a:p>
+              <a:pPr algn="ctr"/>
+              <a:r>
+                <a:rPr sz="1400" b="1" i="0" lang="en-GB">
+                  <a:solidFill>
+                    <a:srgbClr val="F2F2F2"/>
+                  </a:solidFill>
+                  <a:latin typeface="Arial"/>
+                </a:rPr>
+                <a:t>UNDECIDED · OQ01</a:t>
+              </a:r>
+            </a:p>
+          </p:txBody>
+        </p:sp>
+        <p:sp>
+          <p:nvSpPr>
+            <p:cNvPr id="28" name="TextBox 27"/>
+            <p:cNvSpPr txBox="1"/>
+            <p:nvPr/>
+          </p:nvSpPr>
+          <p:spPr>
+            <a:xfrm>
+              <a:off x="9125712" y="4114800"/>
+              <a:ext cx="2377440" cy="1261872"/>
+            </a:xfrm>
+            <a:prstGeom prst="rect">
+              <a:avLst/>
+            </a:prstGeom>
+            <a:noFill/>
+          </p:spPr>
+          <p:txBody>
+            <a:bodyPr wrap="square" anchor="t" lIns="18288" tIns="9144" rIns="18288" bIns="9144">
+              <a:noAutofit/>
+            </a:bodyPr>
+            <a:lstStyle/>
+            <a:p>
+              <a:pPr algn="l"/>
+              <a:r>
+                <a:rPr sz="2000" b="0" i="0" lang="en-GB">
+                  <a:solidFill>
+                    <a:srgbClr val="F2F2F2"/>
+                  </a:solidFill>
+                  <a:latin typeface="Arial"/>
+                </a:rPr>
+                <a:t>Which tier unlocks the upgrade?</a:t>
+              </a:r>
+            </a:p>
+          </p:txBody>
+        </p:sp>
+      </p:grpSp>
+      <p:sp>
+        <p:nvSpPr>
+          <p:cNvPr id="29" name="CAPTION BAR"/>
+          <p:cNvSpPr/>
+          <p:nvPr/>
+        </p:nvSpPr>
+        <p:spPr>
+          <a:xfrm>
+            <a:off x="548640" y="5760720"/>
+            <a:ext cx="11091672" cy="731520"/>
+          </a:xfrm>
+          <a:prstGeom prst="roundRect">
+            <a:avLst>
+              <a:gd name="adj" fmla="val 10000"/>
+            </a:avLst>
+          </a:prstGeom>
+          <a:solidFill>
+            <a:srgbClr val="2B2F36"/>
+          </a:solidFill>
+          <a:ln>
+            <a:noFill/>
+          </a:ln>
+        </p:spPr>
+        <p:txBody>
+          <a:bodyPr rtlCol="0" anchor="ctr"/>
+          <a:lstStyle/>
+          <a:p>
+            <a:pPr algn="ctr"/>
+          </a:p>
+        </p:txBody>
+      </p:sp>
+      <p:sp>
+        <p:nvSpPr>
+          <p:cNvPr id="30" name="CAPTION RULE"/>
+          <p:cNvSpPr/>
+          <p:nvPr/>
+        </p:nvSpPr>
+        <p:spPr>
+          <a:xfrm>
+            <a:off x="548640" y="5815583"/>
+            <a:ext cx="73152" cy="621792"/>
+          </a:xfrm>
+          <a:prstGeom prst="rect">
+            <a:avLst/>
+          </a:prstGeom>
+          <a:solidFill>
+            <a:srgbClr val="F28C28"/>
+          </a:solidFill>
+          <a:ln>
+            <a:noFill/>
+          </a:ln>
+        </p:spPr>
+        <p:txBody>
+          <a:bodyPr rtlCol="0" anchor="ctr"/>
+          <a:lstStyle/>
+          <a:p>
+            <a:pPr algn="ctr"/>
+          </a:p>
+        </p:txBody>
+      </p:sp>
+      <p:sp>
+        <p:nvSpPr>
+          <p:cNvPr id="31" name="CAPTION"/>
+          <p:cNvSpPr txBox="1"/>
+          <p:nvPr/>
+        </p:nvSpPr>
+        <p:spPr>
+          <a:xfrm>
+            <a:off x="777240" y="5760720"/>
+            <a:ext cx="10744200" cy="731520"/>
+          </a:xfrm>
+          <a:prstGeom prst="rect">
+            <a:avLst/>
+          </a:prstGeom>
+          <a:noFill/>
+        </p:spPr>
+        <p:txBody>
+          <a:bodyPr wrap="square" anchor="ctr" lIns="18288" tIns="9144" rIns="18288" bIns="9144">
+            <a:noAutofit/>
+          </a:bodyPr>
+          <a:lstStyle/>
+          <a:p>
+            <a:pPr algn="l">
+              <a:lnSpc>
+                <a:spcPct val="95000"/>
+              </a:lnSpc>
+            </a:pPr>
+            <a:r>
+              <a:rPr sz="2000" b="0" i="0" lang="en-GB">
+                <a:solidFill>
+                  <a:srgbClr val="F2F2F2"/>
+                </a:solidFill>
+                <a:latin typeface="Arial"/>
+              </a:rPr>
+              <a:t>These questions are open. Nothing here has been chosen yet.</a:t>
+            </a:r>
+          </a:p>
+        </p:txBody>
+      </p:sp>
+      <p:sp>
+        <p:nvSpPr>
+          <p:cNvPr id="32" name="NUM"/>
+          <p:cNvSpPr txBox="1"/>
+          <p:nvPr/>
+        </p:nvSpPr>
+        <p:spPr>
+          <a:xfrm>
+            <a:off x="10728655" y="6528816"/>
+            <a:ext cx="914400" cy="274320"/>
+          </a:xfrm>
+          <a:prstGeom prst="rect">
+            <a:avLst/>
+          </a:prstGeom>
+          <a:noFill/>
+        </p:spPr>
+        <p:txBody>
+          <a:bodyPr wrap="square" anchor="ctr" lIns="18288" tIns="9144" rIns="18288" bIns="9144">
+            <a:noAutofit/>
+          </a:bodyPr>
+          <a:lstStyle/>
+          <a:p>
+            <a:pPr algn="r"/>
+            <a:r>
+              <a:rPr sz="1400" b="0" i="0" lang="en-GB">
+                <a:solidFill>
+                  <a:srgbClr val="A9B0B8"/>
+                </a:solidFill>
+                <a:latin typeface="Arial"/>
+              </a:rPr>
+              <a:t>21</a:t>
+            </a:r>
+          </a:p>
+        </p:txBody>
+      </p:sp>
+    </p:spTree>
+  </p:cSld>
+  <p:clrMapOvr>
+    <a:masterClrMapping/>
+  </p:clrMapOvr>
+</p:sld>
+</file>
+
+<file path=ppt/slides/slide22.xml><?xml version="1.0" encoding="utf-8"?>
+<p:sld xmlns:a="http://schemas.openxmlformats.org/drawingml/2006/main" xmlns:p="http://schemas.openxmlformats.org/presentationml/2006/main" xmlns:r="http://schemas.openxmlformats.org/officeDocument/2006/relationships">
+  <p:cSld>
+    <p:bg>
+      <p:bgPr>
+        <a:solidFill>
+          <a:srgbClr val="1E2126"/>
+        </a:solidFill>
+        <a:effectLst/>
+      </p:bgPr>
+    </p:bg>
+    <p:spTree>
+      <p:nvGrpSpPr>
+        <p:cNvPr id="1" name=""/>
+        <p:cNvGrpSpPr/>
+        <p:nvPr/>
+      </p:nvGrpSpPr>
+      <p:grpSpPr/>
+      <p:sp>
+        <p:nvSpPr>
+          <p:cNvPr id="2" name="TITLE"/>
+          <p:cNvSpPr>
+            <a:spLocks noGrp="1"/>
+          </p:cNvSpPr>
+          <p:nvPr>
+            <p:ph type="title"/>
+          </p:nvPr>
+        </p:nvSpPr>
+        <p:spPr>
+          <a:xfrm>
+            <a:off x="548640" y="365760"/>
+            <a:ext cx="9326880" cy="731520"/>
+          </a:xfrm>
+        </p:spPr>
+        <p:txBody>
+          <a:bodyPr wrap="square" anchor="ctr" lIns="0" rIns="0" tIns="0" bIns="0">
+            <a:noAutofit/>
+          </a:bodyPr>
+          <a:lstStyle/>
+          <a:p>
+            <a:pPr algn="l"/>
+            <a:r>
+              <a:rPr sz="3600" b="1" i="0" lang="en-GB">
+                <a:solidFill>
+                  <a:srgbClr val="F2F2F2"/>
+                </a:solidFill>
+                <a:latin typeface="Arial"/>
+              </a:rPr>
+              <a:t>Image credits</a:t>
+            </a:r>
+          </a:p>
+        </p:txBody>
+      </p:sp>
+      <p:graphicFrame>
+        <p:nvGraphicFramePr>
+          <p:cNvPr id="3" name="CREDITS TABLE" descr="Image credits table: R01 on slide 20 and R02 on slide 1, both Early Locomotion project renders, not final art."/>
+          <p:cNvGraphicFramePr>
+            <a:graphicFrameLocks noGrp="1"/>
+          </p:cNvGraphicFramePr>
+          <p:nvPr/>
+        </p:nvGraphicFramePr>
+        <p:xfrm>
+          <a:off x="548640" y="1463040"/>
+          <a:ext cx="11091672" cy="1371600"/>
+        </p:xfrm>
+        <a:graphic>
+          <a:graphicData uri="http://schemas.openxmlformats.org/drawingml/2006/table">
+            <a:tbl>
+              <a:tblPr/>
+              <a:tblGrid>
+                <a:gridCol w="1188720"/>
+                <a:gridCol w="1188720"/>
+                <a:gridCol w="8714232"/>
+              </a:tblGrid>
+              <a:tr h="457200">
+                <a:tc>
+                  <a:txBody>
+                    <a:bodyPr wrap="square"/>
+                    <a:lstStyle/>
+                    <a:p>
+                      <a:r>
+                        <a:rPr sz="1100" b="1" i="0" lang="en-GB">
+                          <a:solidFill>
+                            <a:srgbClr val="F2F2F2"/>
+                          </a:solidFill>
+                          <a:latin typeface="Arial"/>
+                        </a:rPr>
+                        <a:t>Slot</a:t>
+                      </a:r>
+                    </a:p>
+                  </a:txBody>
+                  <a:tcPr marL="91440" marR="91440" marT="36576" marB="36576" anchor="ctr">
+                    <a:lnL w="9525">
+                      <a:solidFill>
+                        <a:srgbClr val="4A515B"/>
+                      </a:solidFill>
+                    </a:lnL>
+                    <a:lnR w="9525">
+                      <a:solidFill>
+                        <a:srgbClr val="4A515B"/>
+                      </a:solidFill>
+                    </a:lnR>
+                    <a:lnT w="9525">
+                      <a:solidFill>
+                        <a:srgbClr val="4A515B"/>
+                      </a:solidFill>
+                    </a:lnT>
+                    <a:lnB w="9525">
+                      <a:solidFill>
+                        <a:srgbClr val="4A515B"/>
+                      </a:solidFill>
+                    </a:lnB>
+                    <a:solidFill>
+                      <a:srgbClr val="343A43"/>
+                    </a:solidFill>
+                  </a:tcPr>
+                </a:tc>
+                <a:tc>
+                  <a:txBody>
+                    <a:bodyPr wrap="square"/>
+                    <a:lstStyle/>
+                    <a:p>
+                      <a:r>
+                        <a:rPr sz="1100" b="1" i="0" lang="en-GB">
+                          <a:solidFill>
+                            <a:srgbClr val="F2F2F2"/>
+                          </a:solidFill>
+                          <a:latin typeface="Arial"/>
+                        </a:rPr>
+                        <a:t>Slide</a:t>
+                      </a:r>
+                    </a:p>
+                  </a:txBody>
+                  <a:tcPr marL="91440" marR="91440" marT="36576" marB="36576" anchor="ctr">
+                    <a:lnL w="9525">
+                      <a:solidFill>
+                        <a:srgbClr val="4A515B"/>
+                      </a:solidFill>
+                    </a:lnL>
+                    <a:lnR w="9525">
+                      <a:solidFill>
+                        <a:srgbClr val="4A515B"/>
+                      </a:solidFill>
+                    </a:lnR>
+                    <a:lnT w="9525">
+                      <a:solidFill>
+                        <a:srgbClr val="4A515B"/>
+                      </a:solidFill>
+                    </a:lnT>
+                    <a:lnB w="9525">
+                      <a:solidFill>
+                        <a:srgbClr val="4A515B"/>
+                      </a:solidFill>
+                    </a:lnB>
+                    <a:solidFill>
+                      <a:srgbClr val="343A43"/>
+                    </a:solidFill>
+                  </a:tcPr>
+                </a:tc>
+                <a:tc>
+                  <a:txBody>
+                    <a:bodyPr wrap="square"/>
+                    <a:lstStyle/>
+                    <a:p>
+                      <a:r>
+                        <a:rPr sz="1100" b="1" i="0" lang="en-GB">
+                          <a:solidFill>
+                            <a:srgbClr val="F2F2F2"/>
+                          </a:solidFill>
+                          <a:latin typeface="Arial"/>
+                        </a:rPr>
+                        <a:t>Credit</a:t>
+                      </a:r>
+                    </a:p>
+                  </a:txBody>
+                  <a:tcPr marL="91440" marR="91440" marT="36576" marB="36576" anchor="ctr">
+                    <a:lnL w="9525">
+                      <a:solidFill>
+                        <a:srgbClr val="4A515B"/>
+                      </a:solidFill>
+                    </a:lnL>
+                    <a:lnR w="9525">
+                      <a:solidFill>
+                        <a:srgbClr val="4A515B"/>
+                      </a:solidFill>
+                    </a:lnR>
+                    <a:lnT w="9525">
+                      <a:solidFill>
+                        <a:srgbClr val="4A515B"/>
+                      </a:solidFill>
+                    </a:lnT>
+                    <a:lnB w="9525">
+                      <a:solidFill>
+                        <a:srgbClr val="4A515B"/>
+                      </a:solidFill>
+                    </a:lnB>
+                    <a:solidFill>
+                      <a:srgbClr val="343A43"/>
+                    </a:solidFill>
+                  </a:tcPr>
+                </a:tc>
+              </a:tr>
+              <a:tr h="457200">
+                <a:tc>
+                  <a:txBody>
+                    <a:bodyPr wrap="square"/>
+                    <a:lstStyle/>
+                    <a:p>
+                      <a:r>
+                        <a:rPr sz="1100" b="0" i="0" lang="en-GB">
+                          <a:solidFill>
+                            <a:srgbClr val="F2F2F2"/>
+                          </a:solidFill>
+                          <a:latin typeface="Arial"/>
+                        </a:rPr>
+                        <a:t>R01</a:t>
+                      </a:r>
+                    </a:p>
+                  </a:txBody>
+                  <a:tcPr marL="91440" marR="91440" marT="36576" marB="36576" anchor="ctr">
+                    <a:lnL w="9525">
+                      <a:solidFill>
+                        <a:srgbClr val="4A515B"/>
+                      </a:solidFill>
+                    </a:lnL>
+                    <a:lnR w="9525">
+                      <a:solidFill>
+                        <a:srgbClr val="4A515B"/>
+                      </a:solidFill>
+                    </a:lnR>
+                    <a:lnT w="9525">
+                      <a:solidFill>
+                        <a:srgbClr val="4A515B"/>
+                      </a:solidFill>
+                    </a:lnT>
+                    <a:lnB w="9525">
+                      <a:solidFill>
+                        <a:srgbClr val="4A515B"/>
+                      </a:solidFill>
+                    </a:lnB>
+                    <a:solidFill>
+                      <a:srgbClr val="2B2F36"/>
+                    </a:solidFill>
+                  </a:tcPr>
+                </a:tc>
+                <a:tc>
+                  <a:txBody>
+                    <a:bodyPr wrap="square"/>
+                    <a:lstStyle/>
+                    <a:p>
+                      <a:r>
+                        <a:rPr sz="1100" b="0" i="0" lang="en-GB">
+                          <a:solidFill>
+                            <a:srgbClr val="F2F2F2"/>
+                          </a:solidFill>
+                          <a:latin typeface="Arial"/>
+                        </a:rPr>
+                        <a:t>20</a:t>
+                      </a:r>
+                    </a:p>
+                  </a:txBody>
+                  <a:tcPr marL="91440" marR="91440" marT="36576" marB="36576" anchor="ctr">
+                    <a:lnL w="9525">
+                      <a:solidFill>
+                        <a:srgbClr val="4A515B"/>
+                      </a:solidFill>
+                    </a:lnL>
+                    <a:lnR w="9525">
+                      <a:solidFill>
+                        <a:srgbClr val="4A515B"/>
+                      </a:solidFill>
+                    </a:lnR>
+                    <a:lnT w="9525">
+                      <a:solidFill>
+                        <a:srgbClr val="4A515B"/>
+                      </a:solidFill>
+                    </a:lnT>
+                    <a:lnB w="9525">
+                      <a:solidFill>
+                        <a:srgbClr val="4A515B"/>
+                      </a:solidFill>
+                    </a:lnB>
+                    <a:solidFill>
+                      <a:srgbClr val="2B2F36"/>
+                    </a:solidFill>
+                  </a:tcPr>
+                </a:tc>
+                <a:tc>
+                  <a:txBody>
+                    <a:bodyPr wrap="square"/>
+                    <a:lstStyle/>
+                    <a:p>
+                      <a:r>
+                        <a:rPr sz="1100" b="0" i="0" lang="en-GB">
+                          <a:solidFill>
+                            <a:srgbClr val="F2F2F2"/>
+                          </a:solidFill>
+                          <a:latin typeface="Arial"/>
+                        </a:rPr>
+                        <a:t>Early Locomotion project (test model, not final art).</a:t>
+                      </a:r>
+                    </a:p>
+                  </a:txBody>
+                  <a:tcPr marL="91440" marR="91440" marT="36576" marB="36576" anchor="ctr">
+                    <a:lnL w="9525">
+                      <a:solidFill>
+                        <a:srgbClr val="4A515B"/>
+                      </a:solidFill>
+                    </a:lnL>
+                    <a:lnR w="9525">
+                      <a:solidFill>
+                        <a:srgbClr val="4A515B"/>
+                      </a:solidFill>
+                    </a:lnR>
+                    <a:lnT w="9525">
+                      <a:solidFill>
+                        <a:srgbClr val="4A515B"/>
+                      </a:solidFill>
+                    </a:lnT>
+                    <a:lnB w="9525">
+                      <a:solidFill>
+                        <a:srgbClr val="4A515B"/>
+                      </a:solidFill>
+                    </a:lnB>
+                    <a:solidFill>
+                      <a:srgbClr val="2B2F36"/>
+                    </a:solidFill>
+                  </a:tcPr>
+                </a:tc>
+              </a:tr>
+              <a:tr h="457200">
+                <a:tc>
+                  <a:txBody>
+                    <a:bodyPr wrap="square"/>
+                    <a:lstStyle/>
+                    <a:p>
+                      <a:r>
+                        <a:rPr sz="1100" b="0" i="0" lang="en-GB">
+                          <a:solidFill>
+                            <a:srgbClr val="F2F2F2"/>
+                          </a:solidFill>
+                          <a:latin typeface="Arial"/>
+                        </a:rPr>
+                        <a:t>R02</a:t>
+                      </a:r>
+                    </a:p>
+                  </a:txBody>
+                  <a:tcPr marL="91440" marR="91440" marT="36576" marB="36576" anchor="ctr">
+                    <a:lnL w="9525">
+                      <a:solidFill>
+                        <a:srgbClr val="4A515B"/>
+                      </a:solidFill>
+                    </a:lnL>
+                    <a:lnR w="9525">
+                      <a:solidFill>
+                        <a:srgbClr val="4A515B"/>
+                      </a:solidFill>
+                    </a:lnR>
+                    <a:lnT w="9525">
+                      <a:solidFill>
+                        <a:srgbClr val="4A515B"/>
+                      </a:solidFill>
+                    </a:lnT>
+                    <a:lnB w="9525">
+                      <a:solidFill>
+                        <a:srgbClr val="4A515B"/>
+                      </a:solidFill>
+                    </a:lnB>
+                    <a:solidFill>
+                      <a:srgbClr val="1E2126"/>
+                    </a:solidFill>
+                  </a:tcPr>
+                </a:tc>
+                <a:tc>
+                  <a:txBody>
+                    <a:bodyPr wrap="square"/>
+                    <a:lstStyle/>
+                    <a:p>
+                      <a:r>
+                        <a:rPr sz="1100" b="0" i="0" lang="en-GB">
+                          <a:solidFill>
+                            <a:srgbClr val="F2F2F2"/>
+                          </a:solidFill>
+                          <a:latin typeface="Arial"/>
+                        </a:rPr>
+                        <a:t>1</a:t>
+                      </a:r>
+                    </a:p>
+                  </a:txBody>
+                  <a:tcPr marL="91440" marR="91440" marT="36576" marB="36576" anchor="ctr">
+                    <a:lnL w="9525">
+                      <a:solidFill>
+                        <a:srgbClr val="4A515B"/>
+                      </a:solidFill>
+                    </a:lnL>
+                    <a:lnR w="9525">
+                      <a:solidFill>
+                        <a:srgbClr val="4A515B"/>
+                      </a:solidFill>
+                    </a:lnR>
+                    <a:lnT w="9525">
+                      <a:solidFill>
+                        <a:srgbClr val="4A515B"/>
+                      </a:solidFill>
+                    </a:lnT>
+                    <a:lnB w="9525">
+                      <a:solidFill>
+                        <a:srgbClr val="4A515B"/>
+                      </a:solidFill>
+                    </a:lnB>
+                    <a:solidFill>
+                      <a:srgbClr val="1E2126"/>
+                    </a:solidFill>
+                  </a:tcPr>
+                </a:tc>
+                <a:tc>
+                  <a:txBody>
+                    <a:bodyPr wrap="square"/>
+                    <a:lstStyle/>
+                    <a:p>
+                      <a:r>
+                        <a:rPr sz="1100" b="0" i="0" lang="en-GB">
+                          <a:solidFill>
+                            <a:srgbClr val="F2F2F2"/>
+                          </a:solidFill>
+                          <a:latin typeface="Arial"/>
+                        </a:rPr>
+                        <a:t>Early Locomotion project (visual development, not final art).</a:t>
+                      </a:r>
+                    </a:p>
+                  </a:txBody>
+                  <a:tcPr marL="91440" marR="91440" marT="36576" marB="36576" anchor="ctr">
+                    <a:lnL w="9525">
+                      <a:solidFill>
+                        <a:srgbClr val="4A515B"/>
+                      </a:solidFill>
+                    </a:lnL>
+                    <a:lnR w="9525">
+                      <a:solidFill>
+                        <a:srgbClr val="4A515B"/>
+                      </a:solidFill>
+                    </a:lnR>
+                    <a:lnT w="9525">
+                      <a:solidFill>
+                        <a:srgbClr val="4A515B"/>
+                      </a:solidFill>
+                    </a:lnT>
+                    <a:lnB w="9525">
+                      <a:solidFill>
+                        <a:srgbClr val="4A515B"/>
+                      </a:solidFill>
+                    </a:lnB>
+                    <a:solidFill>
+                      <a:srgbClr val="1E2126"/>
+                    </a:solidFill>
+                  </a:tcPr>
+                </a:tc>
+              </a:tr>
+            </a:tbl>
+          </a:graphicData>
+        </a:graphic>
+      </p:graphicFrame>
+      <p:sp>
+        <p:nvSpPr>
+          <p:cNvPr id="4" name="CAPTION BAR"/>
+          <p:cNvSpPr/>
+          <p:nvPr/>
+        </p:nvSpPr>
+        <p:spPr>
+          <a:xfrm>
+            <a:off x="548640" y="5760720"/>
+            <a:ext cx="11091672" cy="731520"/>
+          </a:xfrm>
+          <a:prstGeom prst="roundRect">
+            <a:avLst>
+              <a:gd name="adj" fmla="val 10000"/>
+            </a:avLst>
+          </a:prstGeom>
+          <a:solidFill>
+            <a:srgbClr val="2B2F36"/>
+          </a:solidFill>
+          <a:ln>
+            <a:noFill/>
+          </a:ln>
+        </p:spPr>
+        <p:txBody>
+          <a:bodyPr rtlCol="0" anchor="ctr"/>
+          <a:lstStyle/>
+          <a:p>
+            <a:pPr algn="ctr"/>
+          </a:p>
+        </p:txBody>
+      </p:sp>
+      <p:sp>
+        <p:nvSpPr>
+          <p:cNvPr id="5" name="CAPTION RULE"/>
+          <p:cNvSpPr/>
+          <p:nvPr/>
+        </p:nvSpPr>
+        <p:spPr>
+          <a:xfrm>
+            <a:off x="548640" y="5815583"/>
+            <a:ext cx="73152" cy="621792"/>
+          </a:xfrm>
+          <a:prstGeom prst="rect">
+            <a:avLst/>
+          </a:prstGeom>
+          <a:solidFill>
+            <a:srgbClr val="F28C28"/>
+          </a:solidFill>
+          <a:ln>
+            <a:noFill/>
+          </a:ln>
+        </p:spPr>
+        <p:txBody>
+          <a:bodyPr rtlCol="0" anchor="ctr"/>
+          <a:lstStyle/>
+          <a:p>
+            <a:pPr algn="ctr"/>
+          </a:p>
+        </p:txBody>
+      </p:sp>
+      <p:sp>
+        <p:nvSpPr>
+          <p:cNvPr id="6" name="CAPTION"/>
+          <p:cNvSpPr txBox="1"/>
+          <p:nvPr/>
+        </p:nvSpPr>
+        <p:spPr>
+          <a:xfrm>
+            <a:off x="777240" y="5760720"/>
+            <a:ext cx="10744200" cy="731520"/>
+          </a:xfrm>
+          <a:prstGeom prst="rect">
+            <a:avLst/>
+          </a:prstGeom>
+          <a:noFill/>
+        </p:spPr>
+        <p:txBody>
+          <a:bodyPr wrap="square" anchor="ctr" lIns="18288" tIns="9144" rIns="18288" bIns="9144">
+            <a:noAutofit/>
+          </a:bodyPr>
+          <a:lstStyle/>
+          <a:p>
+            <a:pPr algn="l">
+              <a:lnSpc>
+                <a:spcPct val="95000"/>
+              </a:lnSpc>
+            </a:pPr>
+            <a:r>
+              <a:rPr sz="2000" b="0" i="0" lang="en-GB">
+                <a:solidFill>
+                  <a:srgbClr val="F2F2F2"/>
+                </a:solidFill>
+                <a:latin typeface="Arial"/>
+              </a:rPr>
+              <a:t>This deck uses no photographs.</a:t>
+            </a:r>
+          </a:p>
+        </p:txBody>
+      </p:sp>
+      <p:sp>
+        <p:nvSpPr>
+          <p:cNvPr id="7" name="NUM"/>
+          <p:cNvSpPr txBox="1"/>
+          <p:nvPr/>
+        </p:nvSpPr>
+        <p:spPr>
+          <a:xfrm>
+            <a:off x="10728655" y="6528816"/>
+            <a:ext cx="914400" cy="274320"/>
+          </a:xfrm>
+          <a:prstGeom prst="rect">
+            <a:avLst/>
+          </a:prstGeom>
+          <a:noFill/>
+        </p:spPr>
+        <p:txBody>
+          <a:bodyPr wrap="square" anchor="ctr" lIns="18288" tIns="9144" rIns="18288" bIns="9144">
+            <a:noAutofit/>
+          </a:bodyPr>
+          <a:lstStyle/>
+          <a:p>
+            <a:pPr algn="r"/>
+            <a:r>
+              <a:rPr sz="1400" b="0" i="0" lang="en-GB">
+                <a:solidFill>
+                  <a:srgbClr val="A9B0B8"/>
+                </a:solidFill>
+                <a:latin typeface="Arial"/>
+              </a:rPr>
+              <a:t>22</a:t>
             </a:r>
           </a:p>
         </p:txBody>
@@ -12206,7 +21137,11 @@
           </a:bodyPr>
           <a:lstStyle/>
           <a:p>
-            <a:pPr algn="l"/>
+            <a:pPr algn="l">
+              <a:lnSpc>
+                <a:spcPct val="95000"/>
+              </a:lnSpc>
+            </a:pPr>
             <a:r>
               <a:rPr sz="2000" b="0" i="0" lang="en-GB">
                 <a:solidFill>
@@ -12922,7 +21857,7 @@
                   </a:solidFill>
                   <a:latin typeface="Arial"/>
                 </a:rPr>
-                <a:t>Steam wheel on a rail</a:t>
+                <a:t>Steam wheel</a:t>
               </a:r>
             </a:p>
           </p:txBody>
@@ -13322,7 +22257,7 @@
                   </a:solidFill>
                   <a:latin typeface="Arial"/>
                 </a:rPr>
-                <a:t>Clamp wheel on a beam</a:t>
+                <a:t>Clamp wheel</a:t>
               </a:r>
             </a:p>
           </p:txBody>
@@ -13540,7 +22475,11 @@
           </a:bodyPr>
           <a:lstStyle/>
           <a:p>
-            <a:pPr algn="l"/>
+            <a:pPr algn="l">
+              <a:lnSpc>
+                <a:spcPct val="95000"/>
+              </a:lnSpc>
+            </a:pPr>
             <a:r>
               <a:rPr sz="2000" b="0" i="0" lang="en-GB">
                 <a:solidFill>
@@ -14737,7 +23676,11 @@
           </a:bodyPr>
           <a:lstStyle/>
           <a:p>
-            <a:pPr algn="l"/>
+            <a:pPr algn="l">
+              <a:lnSpc>
+                <a:spcPct val="95000"/>
+              </a:lnSpc>
+            </a:pPr>
             <a:r>
               <a:rPr sz="2000" b="0" i="0" lang="en-GB">
                 <a:solidFill>
@@ -16065,7 +25008,11 @@
           </a:bodyPr>
           <a:lstStyle/>
           <a:p>
-            <a:pPr algn="l"/>
+            <a:pPr algn="l">
+              <a:lnSpc>
+                <a:spcPct val="95000"/>
+              </a:lnSpc>
+            </a:pPr>
             <a:r>
               <a:rPr sz="2000" b="0" i="0" lang="en-GB">
                 <a:solidFill>
@@ -18482,7 +27429,11 @@
           </a:bodyPr>
           <a:lstStyle/>
           <a:p>
-            <a:pPr algn="l"/>
+            <a:pPr algn="l">
+              <a:lnSpc>
+                <a:spcPct val="95000"/>
+              </a:lnSpc>
+            </a:pPr>
             <a:r>
               <a:rPr sz="2000" b="0" i="0" lang="en-GB">
                 <a:solidFill>
@@ -19761,7 +28712,11 @@
           </a:bodyPr>
           <a:lstStyle/>
           <a:p>
-            <a:pPr algn="l"/>
+            <a:pPr algn="l">
+              <a:lnSpc>
+                <a:spcPct val="95000"/>
+              </a:lnSpc>
+            </a:pPr>
             <a:r>
               <a:rPr sz="2000" b="0" i="0" lang="en-GB">
                 <a:solidFill>
@@ -22593,7 +31548,11 @@
           </a:bodyPr>
           <a:lstStyle/>
           <a:p>
-            <a:pPr algn="l"/>
+            <a:pPr algn="l">
+              <a:lnSpc>
+                <a:spcPct val="95000"/>
+              </a:lnSpc>
+            </a:pPr>
             <a:r>
               <a:rPr sz="2000" b="0" i="0" lang="en-GB">
                 <a:solidFill>

--- a/Reporting/Claude Presents/Deck4_Monorail/The_Monorail_Transition_Explained.pptx
+++ b/Reporting/Claude Presents/Deck4_Monorail/The_Monorail_Transition_Explained.pptx
@@ -3287,6 +3287,174 @@
   <p:clrMapOvr>
     <a:masterClrMapping/>
   </p:clrMapOvr>
+  <mc:AlternateContent xmlns:mc="http://schemas.openxmlformats.org/markup-compatibility/2006">
+    <mc:Choice xmlns:p14="http://schemas.microsoft.com/office/powerpoint/2010/main" Requires="p14">
+      <p:transition spd="med" p14:dur="700">
+        <p:fade/>
+      </p:transition>
+    </mc:Choice>
+    <mc:Fallback>
+      <p:transition spd="med">
+        <p:fade/>
+      </p:transition>
+    </mc:Fallback>
+  </mc:AlternateContent>
+  <p:timing>
+    <p:tnLst>
+      <p:par>
+        <p:cTn id="1" dur="indefinite" restart="never" nodeType="tmRoot">
+          <p:childTnLst>
+            <p:seq concurrent="1" nextAc="seek">
+              <p:cTn id="2" dur="indefinite" nodeType="mainSeq">
+                <p:childTnLst>
+                  <p:par>
+                    <p:cTn id="3" fill="hold">
+                      <p:stCondLst>
+                        <p:cond delay="indefinite"/>
+                        <p:cond evt="onBegin" delay="0">
+                          <p:tn val="2"/>
+                        </p:cond>
+                      </p:stCondLst>
+                      <p:childTnLst>
+                        <p:par>
+                          <p:cTn id="4" fill="hold">
+                            <p:stCondLst>
+                              <p:cond delay="0"/>
+                            </p:stCondLst>
+                            <p:childTnLst>
+                              <p:par>
+                                <p:cTn id="5" presetID="10" presetClass="entr" presetSubtype="0" fill="hold" nodeType="afterEffect">
+                                  <p:stCondLst>
+                                    <p:cond delay="0"/>
+                                  </p:stCondLst>
+                                  <p:childTnLst>
+                                    <p:set>
+                                      <p:cBhvr>
+                                        <p:cTn id="6" dur="1" fill="hold">
+                                          <p:stCondLst>
+                                            <p:cond delay="0"/>
+                                          </p:stCondLst>
+                                        </p:cTn>
+                                        <p:tgtEl>
+                                          <p:spTgt spid="3"/>
+                                        </p:tgtEl>
+                                        <p:attrNameLst>
+                                          <p:attrName>style.visibility</p:attrName>
+                                        </p:attrNameLst>
+                                      </p:cBhvr>
+                                      <p:to>
+                                        <p:strVal val="visible"/>
+                                      </p:to>
+                                    </p:set>
+                                    <p:animEffect transition="in" filter="fade">
+                                      <p:cBhvr>
+                                        <p:cTn id="7" dur="500"/>
+                                        <p:tgtEl>
+                                          <p:spTgt spid="3"/>
+                                        </p:tgtEl>
+                                      </p:cBhvr>
+                                    </p:animEffect>
+                                  </p:childTnLst>
+                                </p:cTn>
+                              </p:par>
+                              <p:par>
+                                <p:cTn id="8" presetID="10" presetClass="entr" presetSubtype="0" fill="hold" nodeType="withEffect">
+                                  <p:stCondLst>
+                                    <p:cond delay="300"/>
+                                  </p:stCondLst>
+                                  <p:childTnLst>
+                                    <p:set>
+                                      <p:cBhvr>
+                                        <p:cTn id="9" dur="1" fill="hold">
+                                          <p:stCondLst>
+                                            <p:cond delay="0"/>
+                                          </p:stCondLst>
+                                        </p:cTn>
+                                        <p:tgtEl>
+                                          <p:spTgt spid="5"/>
+                                        </p:tgtEl>
+                                        <p:attrNameLst>
+                                          <p:attrName>style.visibility</p:attrName>
+                                        </p:attrNameLst>
+                                      </p:cBhvr>
+                                      <p:to>
+                                        <p:strVal val="visible"/>
+                                      </p:to>
+                                    </p:set>
+                                    <p:animEffect transition="in" filter="fade">
+                                      <p:cBhvr>
+                                        <p:cTn id="10" dur="500"/>
+                                        <p:tgtEl>
+                                          <p:spTgt spid="5"/>
+                                        </p:tgtEl>
+                                      </p:cBhvr>
+                                    </p:animEffect>
+                                  </p:childTnLst>
+                                </p:cTn>
+                              </p:par>
+                              <p:par>
+                                <p:cTn id="11" presetID="10" presetClass="entr" presetSubtype="0" fill="hold" nodeType="withEffect">
+                                  <p:stCondLst>
+                                    <p:cond delay="600"/>
+                                  </p:stCondLst>
+                                  <p:childTnLst>
+                                    <p:set>
+                                      <p:cBhvr>
+                                        <p:cTn id="12" dur="1" fill="hold">
+                                          <p:stCondLst>
+                                            <p:cond delay="0"/>
+                                          </p:stCondLst>
+                                        </p:cTn>
+                                        <p:tgtEl>
+                                          <p:spTgt spid="6"/>
+                                        </p:tgtEl>
+                                        <p:attrNameLst>
+                                          <p:attrName>style.visibility</p:attrName>
+                                        </p:attrNameLst>
+                                      </p:cBhvr>
+                                      <p:to>
+                                        <p:strVal val="visible"/>
+                                      </p:to>
+                                    </p:set>
+                                    <p:animEffect transition="in" filter="fade">
+                                      <p:cBhvr>
+                                        <p:cTn id="13" dur="500"/>
+                                        <p:tgtEl>
+                                          <p:spTgt spid="6"/>
+                                        </p:tgtEl>
+                                      </p:cBhvr>
+                                    </p:animEffect>
+                                  </p:childTnLst>
+                                </p:cTn>
+                              </p:par>
+                            </p:childTnLst>
+                          </p:cTn>
+                        </p:par>
+                      </p:childTnLst>
+                    </p:cTn>
+                  </p:par>
+                </p:childTnLst>
+              </p:cTn>
+              <p:prevCondLst>
+                <p:cond evt="onPrev" delay="0">
+                  <p:tgtEl>
+                    <p:sldTgt/>
+                  </p:tgtEl>
+                </p:cond>
+              </p:prevCondLst>
+              <p:nextCondLst>
+                <p:cond evt="onNext" delay="0">
+                  <p:tgtEl>
+                    <p:sldTgt/>
+                  </p:tgtEl>
+                </p:cond>
+              </p:nextCondLst>
+            </p:seq>
+          </p:childTnLst>
+        </p:cTn>
+      </p:par>
+    </p:tnLst>
+  </p:timing>
 </p:sld>
 </file>
 
@@ -5103,6 +5271,209 @@
   <p:clrMapOvr>
     <a:masterClrMapping/>
   </p:clrMapOvr>
+  <mc:AlternateContent xmlns:mc="http://schemas.openxmlformats.org/markup-compatibility/2006">
+    <mc:Choice xmlns:p14="http://schemas.microsoft.com/office/powerpoint/2010/main" Requires="p14">
+      <p:transition spd="med" p14:dur="700">
+        <p:fade/>
+      </p:transition>
+    </mc:Choice>
+    <mc:Fallback>
+      <p:transition spd="med">
+        <p:fade/>
+      </p:transition>
+    </mc:Fallback>
+  </mc:AlternateContent>
+  <p:timing>
+    <p:tnLst>
+      <p:par>
+        <p:cTn id="1" dur="indefinite" restart="never" nodeType="tmRoot">
+          <p:childTnLst>
+            <p:seq concurrent="1" nextAc="seek">
+              <p:cTn id="2" dur="indefinite" nodeType="mainSeq">
+                <p:childTnLst>
+                  <p:par>
+                    <p:cTn id="3" fill="hold">
+                      <p:stCondLst>
+                        <p:cond delay="indefinite"/>
+                        <p:cond evt="onBegin" delay="0">
+                          <p:tn val="2"/>
+                        </p:cond>
+                      </p:stCondLst>
+                      <p:childTnLst>
+                        <p:par>
+                          <p:cTn id="4" fill="hold">
+                            <p:stCondLst>
+                              <p:cond delay="0"/>
+                            </p:stCondLst>
+                            <p:childTnLst>
+                              <p:par>
+                                <p:cTn id="5" presetID="10" presetClass="entr" presetSubtype="0" fill="hold" nodeType="afterEffect">
+                                  <p:stCondLst>
+                                    <p:cond delay="0"/>
+                                  </p:stCondLst>
+                                  <p:childTnLst>
+                                    <p:set>
+                                      <p:cBhvr>
+                                        <p:cTn id="6" dur="1" fill="hold">
+                                          <p:stCondLst>
+                                            <p:cond delay="0"/>
+                                          </p:stCondLst>
+                                        </p:cTn>
+                                        <p:tgtEl>
+                                          <p:spTgt spid="4"/>
+                                        </p:tgtEl>
+                                        <p:attrNameLst>
+                                          <p:attrName>style.visibility</p:attrName>
+                                        </p:attrNameLst>
+                                      </p:cBhvr>
+                                      <p:to>
+                                        <p:strVal val="visible"/>
+                                      </p:to>
+                                    </p:set>
+                                    <p:animEffect transition="in" filter="fade">
+                                      <p:cBhvr>
+                                        <p:cTn id="7" dur="500"/>
+                                        <p:tgtEl>
+                                          <p:spTgt spid="4"/>
+                                        </p:tgtEl>
+                                      </p:cBhvr>
+                                    </p:animEffect>
+                                  </p:childTnLst>
+                                </p:cTn>
+                              </p:par>
+                              <p:par>
+                                <p:cTn id="8" presetID="10" presetClass="entr" presetSubtype="0" fill="hold" nodeType="withEffect">
+                                  <p:stCondLst>
+                                    <p:cond delay="300"/>
+                                  </p:stCondLst>
+                                  <p:childTnLst>
+                                    <p:set>
+                                      <p:cBhvr>
+                                        <p:cTn id="9" dur="1" fill="hold">
+                                          <p:stCondLst>
+                                            <p:cond delay="0"/>
+                                          </p:stCondLst>
+                                        </p:cTn>
+                                        <p:tgtEl>
+                                          <p:spTgt spid="56"/>
+                                        </p:tgtEl>
+                                        <p:attrNameLst>
+                                          <p:attrName>style.visibility</p:attrName>
+                                        </p:attrNameLst>
+                                      </p:cBhvr>
+                                      <p:to>
+                                        <p:strVal val="visible"/>
+                                      </p:to>
+                                    </p:set>
+                                    <p:animEffect transition="in" filter="fade">
+                                      <p:cBhvr>
+                                        <p:cTn id="10" dur="500"/>
+                                        <p:tgtEl>
+                                          <p:spTgt spid="56"/>
+                                        </p:tgtEl>
+                                      </p:cBhvr>
+                                    </p:animEffect>
+                                  </p:childTnLst>
+                                </p:cTn>
+                              </p:par>
+                              <p:par>
+                                <p:cTn id="11" presetID="10" presetClass="entr" presetSubtype="0" fill="hold" nodeType="withEffect">
+                                  <p:stCondLst>
+                                    <p:cond delay="600"/>
+                                  </p:stCondLst>
+                                  <p:childTnLst>
+                                    <p:set>
+                                      <p:cBhvr>
+                                        <p:cTn id="12" dur="1" fill="hold">
+                                          <p:stCondLst>
+                                            <p:cond delay="0"/>
+                                          </p:stCondLst>
+                                        </p:cTn>
+                                        <p:tgtEl>
+                                          <p:spTgt spid="57"/>
+                                        </p:tgtEl>
+                                        <p:attrNameLst>
+                                          <p:attrName>style.visibility</p:attrName>
+                                        </p:attrNameLst>
+                                      </p:cBhvr>
+                                      <p:to>
+                                        <p:strVal val="visible"/>
+                                      </p:to>
+                                    </p:set>
+                                    <p:animEffect transition="in" filter="fade">
+                                      <p:cBhvr>
+                                        <p:cTn id="13" dur="500"/>
+                                        <p:tgtEl>
+                                          <p:spTgt spid="57"/>
+                                        </p:tgtEl>
+                                      </p:cBhvr>
+                                    </p:animEffect>
+                                  </p:childTnLst>
+                                </p:cTn>
+                              </p:par>
+                              <p:par>
+                                <p:cTn id="14" presetID="10" presetClass="entr" presetSubtype="0" fill="hold" nodeType="withEffect">
+                                  <p:stCondLst>
+                                    <p:cond delay="900"/>
+                                  </p:stCondLst>
+                                  <p:childTnLst>
+                                    <p:set>
+                                      <p:cBhvr>
+                                        <p:cTn id="15" dur="1" fill="hold">
+                                          <p:stCondLst>
+                                            <p:cond delay="0"/>
+                                          </p:stCondLst>
+                                        </p:cTn>
+                                        <p:tgtEl>
+                                          <p:spTgt spid="58"/>
+                                        </p:tgtEl>
+                                        <p:attrNameLst>
+                                          <p:attrName>style.visibility</p:attrName>
+                                        </p:attrNameLst>
+                                      </p:cBhvr>
+                                      <p:to>
+                                        <p:strVal val="visible"/>
+                                      </p:to>
+                                    </p:set>
+                                    <p:animEffect transition="in" filter="fade">
+                                      <p:cBhvr>
+                                        <p:cTn id="16" dur="500"/>
+                                        <p:tgtEl>
+                                          <p:spTgt spid="58"/>
+                                        </p:tgtEl>
+                                      </p:cBhvr>
+                                    </p:animEffect>
+                                  </p:childTnLst>
+                                </p:cTn>
+                              </p:par>
+                            </p:childTnLst>
+                          </p:cTn>
+                        </p:par>
+                      </p:childTnLst>
+                    </p:cTn>
+                  </p:par>
+                </p:childTnLst>
+              </p:cTn>
+              <p:prevCondLst>
+                <p:cond evt="onPrev" delay="0">
+                  <p:tgtEl>
+                    <p:sldTgt/>
+                  </p:tgtEl>
+                </p:cond>
+              </p:prevCondLst>
+              <p:nextCondLst>
+                <p:cond evt="onNext" delay="0">
+                  <p:tgtEl>
+                    <p:sldTgt/>
+                  </p:tgtEl>
+                </p:cond>
+              </p:nextCondLst>
+            </p:seq>
+          </p:childTnLst>
+        </p:cTn>
+      </p:par>
+    </p:tnLst>
+  </p:timing>
 </p:sld>
 </file>
 
@@ -6667,6 +7038,244 @@
   <p:clrMapOvr>
     <a:masterClrMapping/>
   </p:clrMapOvr>
+  <mc:AlternateContent xmlns:mc="http://schemas.openxmlformats.org/markup-compatibility/2006">
+    <mc:Choice xmlns:p14="http://schemas.microsoft.com/office/powerpoint/2010/main" Requires="p14">
+      <p:transition spd="med" p14:dur="700">
+        <p:fade/>
+      </p:transition>
+    </mc:Choice>
+    <mc:Fallback>
+      <p:transition spd="med">
+        <p:fade/>
+      </p:transition>
+    </mc:Fallback>
+  </mc:AlternateContent>
+  <p:timing>
+    <p:tnLst>
+      <p:par>
+        <p:cTn id="1" dur="indefinite" restart="never" nodeType="tmRoot">
+          <p:childTnLst>
+            <p:seq concurrent="1" nextAc="seek">
+              <p:cTn id="2" dur="indefinite" nodeType="mainSeq">
+                <p:childTnLst>
+                  <p:par>
+                    <p:cTn id="3" fill="hold">
+                      <p:stCondLst>
+                        <p:cond delay="indefinite"/>
+                        <p:cond evt="onBegin" delay="0">
+                          <p:tn val="2"/>
+                        </p:cond>
+                      </p:stCondLst>
+                      <p:childTnLst>
+                        <p:par>
+                          <p:cTn id="4" fill="hold">
+                            <p:stCondLst>
+                              <p:cond delay="0"/>
+                            </p:stCondLst>
+                            <p:childTnLst>
+                              <p:par>
+                                <p:cTn id="5" presetID="10" presetClass="entr" presetSubtype="0" fill="hold" nodeType="afterEffect">
+                                  <p:stCondLst>
+                                    <p:cond delay="0"/>
+                                  </p:stCondLst>
+                                  <p:childTnLst>
+                                    <p:set>
+                                      <p:cBhvr>
+                                        <p:cTn id="6" dur="1" fill="hold">
+                                          <p:stCondLst>
+                                            <p:cond delay="0"/>
+                                          </p:stCondLst>
+                                        </p:cTn>
+                                        <p:tgtEl>
+                                          <p:spTgt spid="4"/>
+                                        </p:tgtEl>
+                                        <p:attrNameLst>
+                                          <p:attrName>style.visibility</p:attrName>
+                                        </p:attrNameLst>
+                                      </p:cBhvr>
+                                      <p:to>
+                                        <p:strVal val="visible"/>
+                                      </p:to>
+                                    </p:set>
+                                    <p:animEffect transition="in" filter="fade">
+                                      <p:cBhvr>
+                                        <p:cTn id="7" dur="500"/>
+                                        <p:tgtEl>
+                                          <p:spTgt spid="4"/>
+                                        </p:tgtEl>
+                                      </p:cBhvr>
+                                    </p:animEffect>
+                                  </p:childTnLst>
+                                </p:cTn>
+                              </p:par>
+                              <p:par>
+                                <p:cTn id="8" presetID="10" presetClass="entr" presetSubtype="0" fill="hold" nodeType="withEffect">
+                                  <p:stCondLst>
+                                    <p:cond delay="300"/>
+                                  </p:stCondLst>
+                                  <p:childTnLst>
+                                    <p:set>
+                                      <p:cBhvr>
+                                        <p:cTn id="9" dur="1" fill="hold">
+                                          <p:stCondLst>
+                                            <p:cond delay="0"/>
+                                          </p:stCondLst>
+                                        </p:cTn>
+                                        <p:tgtEl>
+                                          <p:spTgt spid="31"/>
+                                        </p:tgtEl>
+                                        <p:attrNameLst>
+                                          <p:attrName>style.visibility</p:attrName>
+                                        </p:attrNameLst>
+                                      </p:cBhvr>
+                                      <p:to>
+                                        <p:strVal val="visible"/>
+                                      </p:to>
+                                    </p:set>
+                                    <p:animEffect transition="in" filter="fade">
+                                      <p:cBhvr>
+                                        <p:cTn id="10" dur="500"/>
+                                        <p:tgtEl>
+                                          <p:spTgt spid="31"/>
+                                        </p:tgtEl>
+                                      </p:cBhvr>
+                                    </p:animEffect>
+                                  </p:childTnLst>
+                                </p:cTn>
+                              </p:par>
+                              <p:par>
+                                <p:cTn id="11" presetID="10" presetClass="entr" presetSubtype="0" fill="hold" nodeType="withEffect">
+                                  <p:stCondLst>
+                                    <p:cond delay="600"/>
+                                  </p:stCondLst>
+                                  <p:childTnLst>
+                                    <p:set>
+                                      <p:cBhvr>
+                                        <p:cTn id="12" dur="1" fill="hold">
+                                          <p:stCondLst>
+                                            <p:cond delay="0"/>
+                                          </p:stCondLst>
+                                        </p:cTn>
+                                        <p:tgtEl>
+                                          <p:spTgt spid="45"/>
+                                        </p:tgtEl>
+                                        <p:attrNameLst>
+                                          <p:attrName>style.visibility</p:attrName>
+                                        </p:attrNameLst>
+                                      </p:cBhvr>
+                                      <p:to>
+                                        <p:strVal val="visible"/>
+                                      </p:to>
+                                    </p:set>
+                                    <p:animEffect transition="in" filter="fade">
+                                      <p:cBhvr>
+                                        <p:cTn id="13" dur="500"/>
+                                        <p:tgtEl>
+                                          <p:spTgt spid="45"/>
+                                        </p:tgtEl>
+                                      </p:cBhvr>
+                                    </p:animEffect>
+                                  </p:childTnLst>
+                                </p:cTn>
+                              </p:par>
+                              <p:par>
+                                <p:cTn id="14" presetID="10" presetClass="entr" presetSubtype="0" fill="hold" nodeType="withEffect">
+                                  <p:stCondLst>
+                                    <p:cond delay="900"/>
+                                  </p:stCondLst>
+                                  <p:childTnLst>
+                                    <p:set>
+                                      <p:cBhvr>
+                                        <p:cTn id="15" dur="1" fill="hold">
+                                          <p:stCondLst>
+                                            <p:cond delay="0"/>
+                                          </p:stCondLst>
+                                        </p:cTn>
+                                        <p:tgtEl>
+                                          <p:spTgt spid="46"/>
+                                        </p:tgtEl>
+                                        <p:attrNameLst>
+                                          <p:attrName>style.visibility</p:attrName>
+                                        </p:attrNameLst>
+                                      </p:cBhvr>
+                                      <p:to>
+                                        <p:strVal val="visible"/>
+                                      </p:to>
+                                    </p:set>
+                                    <p:animEffect transition="in" filter="fade">
+                                      <p:cBhvr>
+                                        <p:cTn id="16" dur="500"/>
+                                        <p:tgtEl>
+                                          <p:spTgt spid="46"/>
+                                        </p:tgtEl>
+                                      </p:cBhvr>
+                                    </p:animEffect>
+                                  </p:childTnLst>
+                                </p:cTn>
+                              </p:par>
+                              <p:par>
+                                <p:cTn id="17" presetID="10" presetClass="entr" presetSubtype="0" fill="hold" nodeType="withEffect">
+                                  <p:stCondLst>
+                                    <p:cond delay="1200"/>
+                                  </p:stCondLst>
+                                  <p:childTnLst>
+                                    <p:set>
+                                      <p:cBhvr>
+                                        <p:cTn id="18" dur="1" fill="hold">
+                                          <p:stCondLst>
+                                            <p:cond delay="0"/>
+                                          </p:stCondLst>
+                                        </p:cTn>
+                                        <p:tgtEl>
+                                          <p:spTgt spid="47"/>
+                                        </p:tgtEl>
+                                        <p:attrNameLst>
+                                          <p:attrName>style.visibility</p:attrName>
+                                        </p:attrNameLst>
+                                      </p:cBhvr>
+                                      <p:to>
+                                        <p:strVal val="visible"/>
+                                      </p:to>
+                                    </p:set>
+                                    <p:animEffect transition="in" filter="fade">
+                                      <p:cBhvr>
+                                        <p:cTn id="19" dur="500"/>
+                                        <p:tgtEl>
+                                          <p:spTgt spid="47"/>
+                                        </p:tgtEl>
+                                      </p:cBhvr>
+                                    </p:animEffect>
+                                  </p:childTnLst>
+                                </p:cTn>
+                              </p:par>
+                            </p:childTnLst>
+                          </p:cTn>
+                        </p:par>
+                      </p:childTnLst>
+                    </p:cTn>
+                  </p:par>
+                </p:childTnLst>
+              </p:cTn>
+              <p:prevCondLst>
+                <p:cond evt="onPrev" delay="0">
+                  <p:tgtEl>
+                    <p:sldTgt/>
+                  </p:tgtEl>
+                </p:cond>
+              </p:prevCondLst>
+              <p:nextCondLst>
+                <p:cond evt="onNext" delay="0">
+                  <p:tgtEl>
+                    <p:sldTgt/>
+                  </p:tgtEl>
+                </p:cond>
+              </p:nextCondLst>
+            </p:seq>
+          </p:childTnLst>
+        </p:cTn>
+      </p:par>
+    </p:tnLst>
+  </p:timing>
 </p:sld>
 </file>
 
@@ -7438,6 +8047,279 @@
   <p:clrMapOvr>
     <a:masterClrMapping/>
   </p:clrMapOvr>
+  <mc:AlternateContent xmlns:mc="http://schemas.openxmlformats.org/markup-compatibility/2006">
+    <mc:Choice xmlns:p14="http://schemas.microsoft.com/office/powerpoint/2010/main" Requires="p14">
+      <p:transition spd="med" p14:dur="700">
+        <p:fade/>
+      </p:transition>
+    </mc:Choice>
+    <mc:Fallback>
+      <p:transition spd="med">
+        <p:fade/>
+      </p:transition>
+    </mc:Fallback>
+  </mc:AlternateContent>
+  <p:timing>
+    <p:tnLst>
+      <p:par>
+        <p:cTn id="1" dur="indefinite" restart="never" nodeType="tmRoot">
+          <p:childTnLst>
+            <p:seq concurrent="1" nextAc="seek">
+              <p:cTn id="2" dur="indefinite" nodeType="mainSeq">
+                <p:childTnLst>
+                  <p:par>
+                    <p:cTn id="3" fill="hold">
+                      <p:stCondLst>
+                        <p:cond delay="indefinite"/>
+                        <p:cond evt="onBegin" delay="0">
+                          <p:tn val="2"/>
+                        </p:cond>
+                      </p:stCondLst>
+                      <p:childTnLst>
+                        <p:par>
+                          <p:cTn id="4" fill="hold">
+                            <p:stCondLst>
+                              <p:cond delay="0"/>
+                            </p:stCondLst>
+                            <p:childTnLst>
+                              <p:par>
+                                <p:cTn id="5" presetID="10" presetClass="entr" presetSubtype="0" fill="hold" nodeType="afterEffect">
+                                  <p:stCondLst>
+                                    <p:cond delay="0"/>
+                                  </p:stCondLst>
+                                  <p:childTnLst>
+                                    <p:set>
+                                      <p:cBhvr>
+                                        <p:cTn id="6" dur="1" fill="hold">
+                                          <p:stCondLst>
+                                            <p:cond delay="0"/>
+                                          </p:stCondLst>
+                                        </p:cTn>
+                                        <p:tgtEl>
+                                          <p:spTgt spid="4"/>
+                                        </p:tgtEl>
+                                        <p:attrNameLst>
+                                          <p:attrName>style.visibility</p:attrName>
+                                        </p:attrNameLst>
+                                      </p:cBhvr>
+                                      <p:to>
+                                        <p:strVal val="visible"/>
+                                      </p:to>
+                                    </p:set>
+                                    <p:animEffect transition="in" filter="fade">
+                                      <p:cBhvr>
+                                        <p:cTn id="7" dur="500"/>
+                                        <p:tgtEl>
+                                          <p:spTgt spid="4"/>
+                                        </p:tgtEl>
+                                      </p:cBhvr>
+                                    </p:animEffect>
+                                  </p:childTnLst>
+                                </p:cTn>
+                              </p:par>
+                              <p:par>
+                                <p:cTn id="8" presetID="10" presetClass="entr" presetSubtype="0" fill="hold" nodeType="withEffect">
+                                  <p:stCondLst>
+                                    <p:cond delay="300"/>
+                                  </p:stCondLst>
+                                  <p:childTnLst>
+                                    <p:set>
+                                      <p:cBhvr>
+                                        <p:cTn id="9" dur="1" fill="hold">
+                                          <p:stCondLst>
+                                            <p:cond delay="0"/>
+                                          </p:stCondLst>
+                                        </p:cTn>
+                                        <p:tgtEl>
+                                          <p:spTgt spid="11"/>
+                                        </p:tgtEl>
+                                        <p:attrNameLst>
+                                          <p:attrName>style.visibility</p:attrName>
+                                        </p:attrNameLst>
+                                      </p:cBhvr>
+                                      <p:to>
+                                        <p:strVal val="visible"/>
+                                      </p:to>
+                                    </p:set>
+                                    <p:animEffect transition="in" filter="fade">
+                                      <p:cBhvr>
+                                        <p:cTn id="10" dur="500"/>
+                                        <p:tgtEl>
+                                          <p:spTgt spid="11"/>
+                                        </p:tgtEl>
+                                      </p:cBhvr>
+                                    </p:animEffect>
+                                  </p:childTnLst>
+                                </p:cTn>
+                              </p:par>
+                              <p:par>
+                                <p:cTn id="11" presetID="10" presetClass="entr" presetSubtype="0" fill="hold" nodeType="withEffect">
+                                  <p:stCondLst>
+                                    <p:cond delay="600"/>
+                                  </p:stCondLst>
+                                  <p:childTnLst>
+                                    <p:set>
+                                      <p:cBhvr>
+                                        <p:cTn id="12" dur="1" fill="hold">
+                                          <p:stCondLst>
+                                            <p:cond delay="0"/>
+                                          </p:stCondLst>
+                                        </p:cTn>
+                                        <p:tgtEl>
+                                          <p:spTgt spid="20"/>
+                                        </p:tgtEl>
+                                        <p:attrNameLst>
+                                          <p:attrName>style.visibility</p:attrName>
+                                        </p:attrNameLst>
+                                      </p:cBhvr>
+                                      <p:to>
+                                        <p:strVal val="visible"/>
+                                      </p:to>
+                                    </p:set>
+                                    <p:animEffect transition="in" filter="fade">
+                                      <p:cBhvr>
+                                        <p:cTn id="13" dur="500"/>
+                                        <p:tgtEl>
+                                          <p:spTgt spid="20"/>
+                                        </p:tgtEl>
+                                      </p:cBhvr>
+                                    </p:animEffect>
+                                  </p:childTnLst>
+                                </p:cTn>
+                              </p:par>
+                              <p:par>
+                                <p:cTn id="14" presetID="10" presetClass="entr" presetSubtype="0" fill="hold" nodeType="withEffect">
+                                  <p:stCondLst>
+                                    <p:cond delay="900"/>
+                                  </p:stCondLst>
+                                  <p:childTnLst>
+                                    <p:set>
+                                      <p:cBhvr>
+                                        <p:cTn id="15" dur="1" fill="hold">
+                                          <p:stCondLst>
+                                            <p:cond delay="0"/>
+                                          </p:stCondLst>
+                                        </p:cTn>
+                                        <p:tgtEl>
+                                          <p:spTgt spid="23"/>
+                                        </p:tgtEl>
+                                        <p:attrNameLst>
+                                          <p:attrName>style.visibility</p:attrName>
+                                        </p:attrNameLst>
+                                      </p:cBhvr>
+                                      <p:to>
+                                        <p:strVal val="visible"/>
+                                      </p:to>
+                                    </p:set>
+                                    <p:animEffect transition="in" filter="fade">
+                                      <p:cBhvr>
+                                        <p:cTn id="16" dur="500"/>
+                                        <p:tgtEl>
+                                          <p:spTgt spid="23"/>
+                                        </p:tgtEl>
+                                      </p:cBhvr>
+                                    </p:animEffect>
+                                  </p:childTnLst>
+                                </p:cTn>
+                              </p:par>
+                              <p:par>
+                                <p:cTn id="17" presetID="10" presetClass="entr" presetSubtype="0" fill="hold" nodeType="withEffect">
+                                  <p:stCondLst>
+                                    <p:cond delay="1200"/>
+                                  </p:stCondLst>
+                                  <p:childTnLst>
+                                    <p:set>
+                                      <p:cBhvr>
+                                        <p:cTn id="18" dur="1" fill="hold">
+                                          <p:stCondLst>
+                                            <p:cond delay="0"/>
+                                          </p:stCondLst>
+                                        </p:cTn>
+                                        <p:tgtEl>
+                                          <p:spTgt spid="24"/>
+                                        </p:tgtEl>
+                                        <p:attrNameLst>
+                                          <p:attrName>style.visibility</p:attrName>
+                                        </p:attrNameLst>
+                                      </p:cBhvr>
+                                      <p:to>
+                                        <p:strVal val="visible"/>
+                                      </p:to>
+                                    </p:set>
+                                    <p:animEffect transition="in" filter="fade">
+                                      <p:cBhvr>
+                                        <p:cTn id="19" dur="500"/>
+                                        <p:tgtEl>
+                                          <p:spTgt spid="24"/>
+                                        </p:tgtEl>
+                                      </p:cBhvr>
+                                    </p:animEffect>
+                                  </p:childTnLst>
+                                </p:cTn>
+                              </p:par>
+                              <p:par>
+                                <p:cTn id="20" presetID="10" presetClass="entr" presetSubtype="0" fill="hold" nodeType="withEffect">
+                                  <p:stCondLst>
+                                    <p:cond delay="1500"/>
+                                  </p:stCondLst>
+                                  <p:childTnLst>
+                                    <p:set>
+                                      <p:cBhvr>
+                                        <p:cTn id="21" dur="1" fill="hold">
+                                          <p:stCondLst>
+                                            <p:cond delay="0"/>
+                                          </p:stCondLst>
+                                        </p:cTn>
+                                        <p:tgtEl>
+                                          <p:spTgt spid="25"/>
+                                        </p:tgtEl>
+                                        <p:attrNameLst>
+                                          <p:attrName>style.visibility</p:attrName>
+                                        </p:attrNameLst>
+                                      </p:cBhvr>
+                                      <p:to>
+                                        <p:strVal val="visible"/>
+                                      </p:to>
+                                    </p:set>
+                                    <p:animEffect transition="in" filter="fade">
+                                      <p:cBhvr>
+                                        <p:cTn id="22" dur="500"/>
+                                        <p:tgtEl>
+                                          <p:spTgt spid="25"/>
+                                        </p:tgtEl>
+                                      </p:cBhvr>
+                                    </p:animEffect>
+                                  </p:childTnLst>
+                                </p:cTn>
+                              </p:par>
+                            </p:childTnLst>
+                          </p:cTn>
+                        </p:par>
+                      </p:childTnLst>
+                    </p:cTn>
+                  </p:par>
+                </p:childTnLst>
+              </p:cTn>
+              <p:prevCondLst>
+                <p:cond evt="onPrev" delay="0">
+                  <p:tgtEl>
+                    <p:sldTgt/>
+                  </p:tgtEl>
+                </p:cond>
+              </p:prevCondLst>
+              <p:nextCondLst>
+                <p:cond evt="onNext" delay="0">
+                  <p:tgtEl>
+                    <p:sldTgt/>
+                  </p:tgtEl>
+                </p:cond>
+              </p:nextCondLst>
+            </p:seq>
+          </p:childTnLst>
+        </p:cTn>
+      </p:par>
+    </p:tnLst>
+  </p:timing>
 </p:sld>
 </file>
 
@@ -8220,6 +9102,209 @@
   <p:clrMapOvr>
     <a:masterClrMapping/>
   </p:clrMapOvr>
+  <mc:AlternateContent xmlns:mc="http://schemas.openxmlformats.org/markup-compatibility/2006">
+    <mc:Choice xmlns:p14="http://schemas.microsoft.com/office/powerpoint/2010/main" Requires="p14">
+      <p:transition spd="med" p14:dur="700">
+        <p:fade/>
+      </p:transition>
+    </mc:Choice>
+    <mc:Fallback>
+      <p:transition spd="med">
+        <p:fade/>
+      </p:transition>
+    </mc:Fallback>
+  </mc:AlternateContent>
+  <p:timing>
+    <p:tnLst>
+      <p:par>
+        <p:cTn id="1" dur="indefinite" restart="never" nodeType="tmRoot">
+          <p:childTnLst>
+            <p:seq concurrent="1" nextAc="seek">
+              <p:cTn id="2" dur="indefinite" nodeType="mainSeq">
+                <p:childTnLst>
+                  <p:par>
+                    <p:cTn id="3" fill="hold">
+                      <p:stCondLst>
+                        <p:cond delay="indefinite"/>
+                        <p:cond evt="onBegin" delay="0">
+                          <p:tn val="2"/>
+                        </p:cond>
+                      </p:stCondLst>
+                      <p:childTnLst>
+                        <p:par>
+                          <p:cTn id="4" fill="hold">
+                            <p:stCondLst>
+                              <p:cond delay="0"/>
+                            </p:stCondLst>
+                            <p:childTnLst>
+                              <p:par>
+                                <p:cTn id="5" presetID="10" presetClass="entr" presetSubtype="0" fill="hold" nodeType="afterEffect">
+                                  <p:stCondLst>
+                                    <p:cond delay="0"/>
+                                  </p:stCondLst>
+                                  <p:childTnLst>
+                                    <p:set>
+                                      <p:cBhvr>
+                                        <p:cTn id="6" dur="1" fill="hold">
+                                          <p:stCondLst>
+                                            <p:cond delay="0"/>
+                                          </p:stCondLst>
+                                        </p:cTn>
+                                        <p:tgtEl>
+                                          <p:spTgt spid="4"/>
+                                        </p:tgtEl>
+                                        <p:attrNameLst>
+                                          <p:attrName>style.visibility</p:attrName>
+                                        </p:attrNameLst>
+                                      </p:cBhvr>
+                                      <p:to>
+                                        <p:strVal val="visible"/>
+                                      </p:to>
+                                    </p:set>
+                                    <p:animEffect transition="in" filter="fade">
+                                      <p:cBhvr>
+                                        <p:cTn id="7" dur="500"/>
+                                        <p:tgtEl>
+                                          <p:spTgt spid="4"/>
+                                        </p:tgtEl>
+                                      </p:cBhvr>
+                                    </p:animEffect>
+                                  </p:childTnLst>
+                                </p:cTn>
+                              </p:par>
+                              <p:par>
+                                <p:cTn id="8" presetID="10" presetClass="entr" presetSubtype="0" fill="hold" nodeType="withEffect">
+                                  <p:stCondLst>
+                                    <p:cond delay="300"/>
+                                  </p:stCondLst>
+                                  <p:childTnLst>
+                                    <p:set>
+                                      <p:cBhvr>
+                                        <p:cTn id="9" dur="1" fill="hold">
+                                          <p:stCondLst>
+                                            <p:cond delay="0"/>
+                                          </p:stCondLst>
+                                        </p:cTn>
+                                        <p:tgtEl>
+                                          <p:spTgt spid="20"/>
+                                        </p:tgtEl>
+                                        <p:attrNameLst>
+                                          <p:attrName>style.visibility</p:attrName>
+                                        </p:attrNameLst>
+                                      </p:cBhvr>
+                                      <p:to>
+                                        <p:strVal val="visible"/>
+                                      </p:to>
+                                    </p:set>
+                                    <p:animEffect transition="in" filter="fade">
+                                      <p:cBhvr>
+                                        <p:cTn id="10" dur="500"/>
+                                        <p:tgtEl>
+                                          <p:spTgt spid="20"/>
+                                        </p:tgtEl>
+                                      </p:cBhvr>
+                                    </p:animEffect>
+                                  </p:childTnLst>
+                                </p:cTn>
+                              </p:par>
+                              <p:par>
+                                <p:cTn id="11" presetID="10" presetClass="entr" presetSubtype="0" fill="hold" nodeType="withEffect">
+                                  <p:stCondLst>
+                                    <p:cond delay="600"/>
+                                  </p:stCondLst>
+                                  <p:childTnLst>
+                                    <p:set>
+                                      <p:cBhvr>
+                                        <p:cTn id="12" dur="1" fill="hold">
+                                          <p:stCondLst>
+                                            <p:cond delay="0"/>
+                                          </p:stCondLst>
+                                        </p:cTn>
+                                        <p:tgtEl>
+                                          <p:spTgt spid="21"/>
+                                        </p:tgtEl>
+                                        <p:attrNameLst>
+                                          <p:attrName>style.visibility</p:attrName>
+                                        </p:attrNameLst>
+                                      </p:cBhvr>
+                                      <p:to>
+                                        <p:strVal val="visible"/>
+                                      </p:to>
+                                    </p:set>
+                                    <p:animEffect transition="in" filter="fade">
+                                      <p:cBhvr>
+                                        <p:cTn id="13" dur="500"/>
+                                        <p:tgtEl>
+                                          <p:spTgt spid="21"/>
+                                        </p:tgtEl>
+                                      </p:cBhvr>
+                                    </p:animEffect>
+                                  </p:childTnLst>
+                                </p:cTn>
+                              </p:par>
+                              <p:par>
+                                <p:cTn id="14" presetID="10" presetClass="entr" presetSubtype="0" fill="hold" nodeType="withEffect">
+                                  <p:stCondLst>
+                                    <p:cond delay="900"/>
+                                  </p:stCondLst>
+                                  <p:childTnLst>
+                                    <p:set>
+                                      <p:cBhvr>
+                                        <p:cTn id="15" dur="1" fill="hold">
+                                          <p:stCondLst>
+                                            <p:cond delay="0"/>
+                                          </p:stCondLst>
+                                        </p:cTn>
+                                        <p:tgtEl>
+                                          <p:spTgt spid="22"/>
+                                        </p:tgtEl>
+                                        <p:attrNameLst>
+                                          <p:attrName>style.visibility</p:attrName>
+                                        </p:attrNameLst>
+                                      </p:cBhvr>
+                                      <p:to>
+                                        <p:strVal val="visible"/>
+                                      </p:to>
+                                    </p:set>
+                                    <p:animEffect transition="in" filter="fade">
+                                      <p:cBhvr>
+                                        <p:cTn id="16" dur="500"/>
+                                        <p:tgtEl>
+                                          <p:spTgt spid="22"/>
+                                        </p:tgtEl>
+                                      </p:cBhvr>
+                                    </p:animEffect>
+                                  </p:childTnLst>
+                                </p:cTn>
+                              </p:par>
+                            </p:childTnLst>
+                          </p:cTn>
+                        </p:par>
+                      </p:childTnLst>
+                    </p:cTn>
+                  </p:par>
+                </p:childTnLst>
+              </p:cTn>
+              <p:prevCondLst>
+                <p:cond evt="onPrev" delay="0">
+                  <p:tgtEl>
+                    <p:sldTgt/>
+                  </p:tgtEl>
+                </p:cond>
+              </p:prevCondLst>
+              <p:nextCondLst>
+                <p:cond evt="onNext" delay="0">
+                  <p:tgtEl>
+                    <p:sldTgt/>
+                  </p:tgtEl>
+                </p:cond>
+              </p:nextCondLst>
+            </p:seq>
+          </p:childTnLst>
+        </p:cTn>
+      </p:par>
+    </p:tnLst>
+  </p:timing>
 </p:sld>
 </file>
 
@@ -9974,6 +11059,314 @@
   <p:clrMapOvr>
     <a:masterClrMapping/>
   </p:clrMapOvr>
+  <mc:AlternateContent xmlns:mc="http://schemas.openxmlformats.org/markup-compatibility/2006">
+    <mc:Choice xmlns:p14="http://schemas.microsoft.com/office/powerpoint/2010/main" Requires="p14">
+      <p:transition spd="med" p14:dur="700">
+        <p:fade/>
+      </p:transition>
+    </mc:Choice>
+    <mc:Fallback>
+      <p:transition spd="med">
+        <p:fade/>
+      </p:transition>
+    </mc:Fallback>
+  </mc:AlternateContent>
+  <p:timing>
+    <p:tnLst>
+      <p:par>
+        <p:cTn id="1" dur="indefinite" restart="never" nodeType="tmRoot">
+          <p:childTnLst>
+            <p:seq concurrent="1" nextAc="seek">
+              <p:cTn id="2" dur="indefinite" nodeType="mainSeq">
+                <p:childTnLst>
+                  <p:par>
+                    <p:cTn id="3" fill="hold">
+                      <p:stCondLst>
+                        <p:cond delay="indefinite"/>
+                        <p:cond evt="onBegin" delay="0">
+                          <p:tn val="2"/>
+                        </p:cond>
+                      </p:stCondLst>
+                      <p:childTnLst>
+                        <p:par>
+                          <p:cTn id="4" fill="hold">
+                            <p:stCondLst>
+                              <p:cond delay="0"/>
+                            </p:stCondLst>
+                            <p:childTnLst>
+                              <p:par>
+                                <p:cTn id="5" presetID="10" presetClass="entr" presetSubtype="0" fill="hold" nodeType="afterEffect">
+                                  <p:stCondLst>
+                                    <p:cond delay="0"/>
+                                  </p:stCondLst>
+                                  <p:childTnLst>
+                                    <p:set>
+                                      <p:cBhvr>
+                                        <p:cTn id="6" dur="1" fill="hold">
+                                          <p:stCondLst>
+                                            <p:cond delay="0"/>
+                                          </p:stCondLst>
+                                        </p:cTn>
+                                        <p:tgtEl>
+                                          <p:spTgt spid="4"/>
+                                        </p:tgtEl>
+                                        <p:attrNameLst>
+                                          <p:attrName>style.visibility</p:attrName>
+                                        </p:attrNameLst>
+                                      </p:cBhvr>
+                                      <p:to>
+                                        <p:strVal val="visible"/>
+                                      </p:to>
+                                    </p:set>
+                                    <p:animEffect transition="in" filter="fade">
+                                      <p:cBhvr>
+                                        <p:cTn id="7" dur="500"/>
+                                        <p:tgtEl>
+                                          <p:spTgt spid="4"/>
+                                        </p:tgtEl>
+                                      </p:cBhvr>
+                                    </p:animEffect>
+                                  </p:childTnLst>
+                                </p:cTn>
+                              </p:par>
+                              <p:par>
+                                <p:cTn id="8" presetID="10" presetClass="entr" presetSubtype="0" fill="hold" nodeType="withEffect">
+                                  <p:stCondLst>
+                                    <p:cond delay="257"/>
+                                  </p:stCondLst>
+                                  <p:childTnLst>
+                                    <p:set>
+                                      <p:cBhvr>
+                                        <p:cTn id="9" dur="1" fill="hold">
+                                          <p:stCondLst>
+                                            <p:cond delay="0"/>
+                                          </p:stCondLst>
+                                        </p:cTn>
+                                        <p:tgtEl>
+                                          <p:spTgt spid="21"/>
+                                        </p:tgtEl>
+                                        <p:attrNameLst>
+                                          <p:attrName>style.visibility</p:attrName>
+                                        </p:attrNameLst>
+                                      </p:cBhvr>
+                                      <p:to>
+                                        <p:strVal val="visible"/>
+                                      </p:to>
+                                    </p:set>
+                                    <p:animEffect transition="in" filter="fade">
+                                      <p:cBhvr>
+                                        <p:cTn id="10" dur="500"/>
+                                        <p:tgtEl>
+                                          <p:spTgt spid="21"/>
+                                        </p:tgtEl>
+                                      </p:cBhvr>
+                                    </p:animEffect>
+                                  </p:childTnLst>
+                                </p:cTn>
+                              </p:par>
+                              <p:par>
+                                <p:cTn id="11" presetID="10" presetClass="entr" presetSubtype="0" fill="hold" nodeType="withEffect">
+                                  <p:stCondLst>
+                                    <p:cond delay="514"/>
+                                  </p:stCondLst>
+                                  <p:childTnLst>
+                                    <p:set>
+                                      <p:cBhvr>
+                                        <p:cTn id="12" dur="1" fill="hold">
+                                          <p:stCondLst>
+                                            <p:cond delay="0"/>
+                                          </p:stCondLst>
+                                        </p:cTn>
+                                        <p:tgtEl>
+                                          <p:spTgt spid="36"/>
+                                        </p:tgtEl>
+                                        <p:attrNameLst>
+                                          <p:attrName>style.visibility</p:attrName>
+                                        </p:attrNameLst>
+                                      </p:cBhvr>
+                                      <p:to>
+                                        <p:strVal val="visible"/>
+                                      </p:to>
+                                    </p:set>
+                                    <p:animEffect transition="in" filter="fade">
+                                      <p:cBhvr>
+                                        <p:cTn id="13" dur="500"/>
+                                        <p:tgtEl>
+                                          <p:spTgt spid="36"/>
+                                        </p:tgtEl>
+                                      </p:cBhvr>
+                                    </p:animEffect>
+                                  </p:childTnLst>
+                                </p:cTn>
+                              </p:par>
+                              <p:par>
+                                <p:cTn id="14" presetID="10" presetClass="entr" presetSubtype="0" fill="hold" nodeType="withEffect">
+                                  <p:stCondLst>
+                                    <p:cond delay="771"/>
+                                  </p:stCondLst>
+                                  <p:childTnLst>
+                                    <p:set>
+                                      <p:cBhvr>
+                                        <p:cTn id="15" dur="1" fill="hold">
+                                          <p:stCondLst>
+                                            <p:cond delay="0"/>
+                                          </p:stCondLst>
+                                        </p:cTn>
+                                        <p:tgtEl>
+                                          <p:spTgt spid="52"/>
+                                        </p:tgtEl>
+                                        <p:attrNameLst>
+                                          <p:attrName>style.visibility</p:attrName>
+                                        </p:attrNameLst>
+                                      </p:cBhvr>
+                                      <p:to>
+                                        <p:strVal val="visible"/>
+                                      </p:to>
+                                    </p:set>
+                                    <p:animEffect transition="in" filter="fade">
+                                      <p:cBhvr>
+                                        <p:cTn id="16" dur="500"/>
+                                        <p:tgtEl>
+                                          <p:spTgt spid="52"/>
+                                        </p:tgtEl>
+                                      </p:cBhvr>
+                                    </p:animEffect>
+                                  </p:childTnLst>
+                                </p:cTn>
+                              </p:par>
+                              <p:par>
+                                <p:cTn id="17" presetID="10" presetClass="entr" presetSubtype="0" fill="hold" nodeType="withEffect">
+                                  <p:stCondLst>
+                                    <p:cond delay="1028"/>
+                                  </p:stCondLst>
+                                  <p:childTnLst>
+                                    <p:set>
+                                      <p:cBhvr>
+                                        <p:cTn id="18" dur="1" fill="hold">
+                                          <p:stCondLst>
+                                            <p:cond delay="0"/>
+                                          </p:stCondLst>
+                                        </p:cTn>
+                                        <p:tgtEl>
+                                          <p:spTgt spid="56"/>
+                                        </p:tgtEl>
+                                        <p:attrNameLst>
+                                          <p:attrName>style.visibility</p:attrName>
+                                        </p:attrNameLst>
+                                      </p:cBhvr>
+                                      <p:to>
+                                        <p:strVal val="visible"/>
+                                      </p:to>
+                                    </p:set>
+                                    <p:animEffect transition="in" filter="fade">
+                                      <p:cBhvr>
+                                        <p:cTn id="19" dur="500"/>
+                                        <p:tgtEl>
+                                          <p:spTgt spid="56"/>
+                                        </p:tgtEl>
+                                      </p:cBhvr>
+                                    </p:animEffect>
+                                  </p:childTnLst>
+                                </p:cTn>
+                              </p:par>
+                              <p:par>
+                                <p:cTn id="20" presetID="10" presetClass="entr" presetSubtype="0" fill="hold" nodeType="withEffect">
+                                  <p:stCondLst>
+                                    <p:cond delay="1285"/>
+                                  </p:stCondLst>
+                                  <p:childTnLst>
+                                    <p:set>
+                                      <p:cBhvr>
+                                        <p:cTn id="21" dur="1" fill="hold">
+                                          <p:stCondLst>
+                                            <p:cond delay="0"/>
+                                          </p:stCondLst>
+                                        </p:cTn>
+                                        <p:tgtEl>
+                                          <p:spTgt spid="57"/>
+                                        </p:tgtEl>
+                                        <p:attrNameLst>
+                                          <p:attrName>style.visibility</p:attrName>
+                                        </p:attrNameLst>
+                                      </p:cBhvr>
+                                      <p:to>
+                                        <p:strVal val="visible"/>
+                                      </p:to>
+                                    </p:set>
+                                    <p:animEffect transition="in" filter="fade">
+                                      <p:cBhvr>
+                                        <p:cTn id="22" dur="500"/>
+                                        <p:tgtEl>
+                                          <p:spTgt spid="57"/>
+                                        </p:tgtEl>
+                                      </p:cBhvr>
+                                    </p:animEffect>
+                                  </p:childTnLst>
+                                </p:cTn>
+                              </p:par>
+                              <p:par>
+                                <p:cTn id="23" presetID="10" presetClass="entr" presetSubtype="0" fill="hold" nodeType="withEffect">
+                                  <p:stCondLst>
+                                    <p:cond delay="1542"/>
+                                  </p:stCondLst>
+                                  <p:childTnLst>
+                                    <p:set>
+                                      <p:cBhvr>
+                                        <p:cTn id="24" dur="1" fill="hold">
+                                          <p:stCondLst>
+                                            <p:cond delay="0"/>
+                                          </p:stCondLst>
+                                        </p:cTn>
+                                        <p:tgtEl>
+                                          <p:spTgt spid="58"/>
+                                        </p:tgtEl>
+                                        <p:attrNameLst>
+                                          <p:attrName>style.visibility</p:attrName>
+                                        </p:attrNameLst>
+                                      </p:cBhvr>
+                                      <p:to>
+                                        <p:strVal val="visible"/>
+                                      </p:to>
+                                    </p:set>
+                                    <p:animEffect transition="in" filter="fade">
+                                      <p:cBhvr>
+                                        <p:cTn id="25" dur="500"/>
+                                        <p:tgtEl>
+                                          <p:spTgt spid="58"/>
+                                        </p:tgtEl>
+                                      </p:cBhvr>
+                                    </p:animEffect>
+                                  </p:childTnLst>
+                                </p:cTn>
+                              </p:par>
+                            </p:childTnLst>
+                          </p:cTn>
+                        </p:par>
+                      </p:childTnLst>
+                    </p:cTn>
+                  </p:par>
+                </p:childTnLst>
+              </p:cTn>
+              <p:prevCondLst>
+                <p:cond evt="onPrev" delay="0">
+                  <p:tgtEl>
+                    <p:sldTgt/>
+                  </p:tgtEl>
+                </p:cond>
+              </p:prevCondLst>
+              <p:nextCondLst>
+                <p:cond evt="onNext" delay="0">
+                  <p:tgtEl>
+                    <p:sldTgt/>
+                  </p:tgtEl>
+                </p:cond>
+              </p:nextCondLst>
+            </p:seq>
+          </p:childTnLst>
+        </p:cTn>
+      </p:par>
+    </p:tnLst>
+  </p:timing>
 </p:sld>
 </file>
 
@@ -10406,6 +11799,209 @@
   <p:clrMapOvr>
     <a:masterClrMapping/>
   </p:clrMapOvr>
+  <mc:AlternateContent xmlns:mc="http://schemas.openxmlformats.org/markup-compatibility/2006">
+    <mc:Choice xmlns:p14="http://schemas.microsoft.com/office/powerpoint/2010/main" Requires="p14">
+      <p:transition spd="med" p14:dur="700">
+        <p:fade/>
+      </p:transition>
+    </mc:Choice>
+    <mc:Fallback>
+      <p:transition spd="med">
+        <p:fade/>
+      </p:transition>
+    </mc:Fallback>
+  </mc:AlternateContent>
+  <p:timing>
+    <p:tnLst>
+      <p:par>
+        <p:cTn id="1" dur="indefinite" restart="never" nodeType="tmRoot">
+          <p:childTnLst>
+            <p:seq concurrent="1" nextAc="seek">
+              <p:cTn id="2" dur="indefinite" nodeType="mainSeq">
+                <p:childTnLst>
+                  <p:par>
+                    <p:cTn id="3" fill="hold">
+                      <p:stCondLst>
+                        <p:cond delay="indefinite"/>
+                        <p:cond evt="onBegin" delay="0">
+                          <p:tn val="2"/>
+                        </p:cond>
+                      </p:stCondLst>
+                      <p:childTnLst>
+                        <p:par>
+                          <p:cTn id="4" fill="hold">
+                            <p:stCondLst>
+                              <p:cond delay="0"/>
+                            </p:stCondLst>
+                            <p:childTnLst>
+                              <p:par>
+                                <p:cTn id="5" presetID="10" presetClass="entr" presetSubtype="0" fill="hold" nodeType="afterEffect">
+                                  <p:stCondLst>
+                                    <p:cond delay="0"/>
+                                  </p:stCondLst>
+                                  <p:childTnLst>
+                                    <p:set>
+                                      <p:cBhvr>
+                                        <p:cTn id="6" dur="1" fill="hold">
+                                          <p:stCondLst>
+                                            <p:cond delay="0"/>
+                                          </p:stCondLst>
+                                        </p:cTn>
+                                        <p:tgtEl>
+                                          <p:spTgt spid="4"/>
+                                        </p:tgtEl>
+                                        <p:attrNameLst>
+                                          <p:attrName>style.visibility</p:attrName>
+                                        </p:attrNameLst>
+                                      </p:cBhvr>
+                                      <p:to>
+                                        <p:strVal val="visible"/>
+                                      </p:to>
+                                    </p:set>
+                                    <p:animEffect transition="in" filter="fade">
+                                      <p:cBhvr>
+                                        <p:cTn id="7" dur="500"/>
+                                        <p:tgtEl>
+                                          <p:spTgt spid="4"/>
+                                        </p:tgtEl>
+                                      </p:cBhvr>
+                                    </p:animEffect>
+                                  </p:childTnLst>
+                                </p:cTn>
+                              </p:par>
+                              <p:par>
+                                <p:cTn id="8" presetID="10" presetClass="entr" presetSubtype="0" fill="hold" nodeType="withEffect">
+                                  <p:stCondLst>
+                                    <p:cond delay="300"/>
+                                  </p:stCondLst>
+                                  <p:childTnLst>
+                                    <p:set>
+                                      <p:cBhvr>
+                                        <p:cTn id="9" dur="1" fill="hold">
+                                          <p:stCondLst>
+                                            <p:cond delay="0"/>
+                                          </p:stCondLst>
+                                        </p:cTn>
+                                        <p:tgtEl>
+                                          <p:spTgt spid="10"/>
+                                        </p:tgtEl>
+                                        <p:attrNameLst>
+                                          <p:attrName>style.visibility</p:attrName>
+                                        </p:attrNameLst>
+                                      </p:cBhvr>
+                                      <p:to>
+                                        <p:strVal val="visible"/>
+                                      </p:to>
+                                    </p:set>
+                                    <p:animEffect transition="in" filter="fade">
+                                      <p:cBhvr>
+                                        <p:cTn id="10" dur="500"/>
+                                        <p:tgtEl>
+                                          <p:spTgt spid="10"/>
+                                        </p:tgtEl>
+                                      </p:cBhvr>
+                                    </p:animEffect>
+                                  </p:childTnLst>
+                                </p:cTn>
+                              </p:par>
+                              <p:par>
+                                <p:cTn id="11" presetID="10" presetClass="entr" presetSubtype="0" fill="hold" nodeType="withEffect">
+                                  <p:stCondLst>
+                                    <p:cond delay="600"/>
+                                  </p:stCondLst>
+                                  <p:childTnLst>
+                                    <p:set>
+                                      <p:cBhvr>
+                                        <p:cTn id="12" dur="1" fill="hold">
+                                          <p:stCondLst>
+                                            <p:cond delay="0"/>
+                                          </p:stCondLst>
+                                        </p:cTn>
+                                        <p:tgtEl>
+                                          <p:spTgt spid="11"/>
+                                        </p:tgtEl>
+                                        <p:attrNameLst>
+                                          <p:attrName>style.visibility</p:attrName>
+                                        </p:attrNameLst>
+                                      </p:cBhvr>
+                                      <p:to>
+                                        <p:strVal val="visible"/>
+                                      </p:to>
+                                    </p:set>
+                                    <p:animEffect transition="in" filter="fade">
+                                      <p:cBhvr>
+                                        <p:cTn id="13" dur="500"/>
+                                        <p:tgtEl>
+                                          <p:spTgt spid="11"/>
+                                        </p:tgtEl>
+                                      </p:cBhvr>
+                                    </p:animEffect>
+                                  </p:childTnLst>
+                                </p:cTn>
+                              </p:par>
+                              <p:par>
+                                <p:cTn id="14" presetID="10" presetClass="entr" presetSubtype="0" fill="hold" nodeType="withEffect">
+                                  <p:stCondLst>
+                                    <p:cond delay="900"/>
+                                  </p:stCondLst>
+                                  <p:childTnLst>
+                                    <p:set>
+                                      <p:cBhvr>
+                                        <p:cTn id="15" dur="1" fill="hold">
+                                          <p:stCondLst>
+                                            <p:cond delay="0"/>
+                                          </p:stCondLst>
+                                        </p:cTn>
+                                        <p:tgtEl>
+                                          <p:spTgt spid="12"/>
+                                        </p:tgtEl>
+                                        <p:attrNameLst>
+                                          <p:attrName>style.visibility</p:attrName>
+                                        </p:attrNameLst>
+                                      </p:cBhvr>
+                                      <p:to>
+                                        <p:strVal val="visible"/>
+                                      </p:to>
+                                    </p:set>
+                                    <p:animEffect transition="in" filter="fade">
+                                      <p:cBhvr>
+                                        <p:cTn id="16" dur="500"/>
+                                        <p:tgtEl>
+                                          <p:spTgt spid="12"/>
+                                        </p:tgtEl>
+                                      </p:cBhvr>
+                                    </p:animEffect>
+                                  </p:childTnLst>
+                                </p:cTn>
+                              </p:par>
+                            </p:childTnLst>
+                          </p:cTn>
+                        </p:par>
+                      </p:childTnLst>
+                    </p:cTn>
+                  </p:par>
+                </p:childTnLst>
+              </p:cTn>
+              <p:prevCondLst>
+                <p:cond evt="onPrev" delay="0">
+                  <p:tgtEl>
+                    <p:sldTgt/>
+                  </p:tgtEl>
+                </p:cond>
+              </p:prevCondLst>
+              <p:nextCondLst>
+                <p:cond evt="onNext" delay="0">
+                  <p:tgtEl>
+                    <p:sldTgt/>
+                  </p:tgtEl>
+                </p:cond>
+              </p:nextCondLst>
+            </p:seq>
+          </p:childTnLst>
+        </p:cTn>
+      </p:par>
+    </p:tnLst>
+  </p:timing>
 </p:sld>
 </file>
 
@@ -12323,6 +13919,349 @@
   <p:clrMapOvr>
     <a:masterClrMapping/>
   </p:clrMapOvr>
+  <mc:AlternateContent xmlns:mc="http://schemas.openxmlformats.org/markup-compatibility/2006">
+    <mc:Choice xmlns:p14="http://schemas.microsoft.com/office/powerpoint/2010/main" Requires="p14">
+      <p:transition spd="med" p14:dur="700">
+        <p:fade/>
+      </p:transition>
+    </mc:Choice>
+    <mc:Fallback>
+      <p:transition spd="med">
+        <p:fade/>
+      </p:transition>
+    </mc:Fallback>
+  </mc:AlternateContent>
+  <p:timing>
+    <p:tnLst>
+      <p:par>
+        <p:cTn id="1" dur="indefinite" restart="never" nodeType="tmRoot">
+          <p:childTnLst>
+            <p:seq concurrent="1" nextAc="seek">
+              <p:cTn id="2" dur="indefinite" nodeType="mainSeq">
+                <p:childTnLst>
+                  <p:par>
+                    <p:cTn id="3" fill="hold">
+                      <p:stCondLst>
+                        <p:cond delay="indefinite"/>
+                        <p:cond evt="onBegin" delay="0">
+                          <p:tn val="2"/>
+                        </p:cond>
+                      </p:stCondLst>
+                      <p:childTnLst>
+                        <p:par>
+                          <p:cTn id="4" fill="hold">
+                            <p:stCondLst>
+                              <p:cond delay="0"/>
+                            </p:stCondLst>
+                            <p:childTnLst>
+                              <p:par>
+                                <p:cTn id="5" presetID="10" presetClass="entr" presetSubtype="0" fill="hold" nodeType="afterEffect">
+                                  <p:stCondLst>
+                                    <p:cond delay="0"/>
+                                  </p:stCondLst>
+                                  <p:childTnLst>
+                                    <p:set>
+                                      <p:cBhvr>
+                                        <p:cTn id="6" dur="1" fill="hold">
+                                          <p:stCondLst>
+                                            <p:cond delay="0"/>
+                                          </p:stCondLst>
+                                        </p:cTn>
+                                        <p:tgtEl>
+                                          <p:spTgt spid="4"/>
+                                        </p:tgtEl>
+                                        <p:attrNameLst>
+                                          <p:attrName>style.visibility</p:attrName>
+                                        </p:attrNameLst>
+                                      </p:cBhvr>
+                                      <p:to>
+                                        <p:strVal val="visible"/>
+                                      </p:to>
+                                    </p:set>
+                                    <p:animEffect transition="in" filter="fade">
+                                      <p:cBhvr>
+                                        <p:cTn id="7" dur="500"/>
+                                        <p:tgtEl>
+                                          <p:spTgt spid="4"/>
+                                        </p:tgtEl>
+                                      </p:cBhvr>
+                                    </p:animEffect>
+                                  </p:childTnLst>
+                                </p:cTn>
+                              </p:par>
+                              <p:par>
+                                <p:cTn id="8" presetID="10" presetClass="entr" presetSubtype="0" fill="hold" nodeType="withEffect">
+                                  <p:stCondLst>
+                                    <p:cond delay="225"/>
+                                  </p:stCondLst>
+                                  <p:childTnLst>
+                                    <p:set>
+                                      <p:cBhvr>
+                                        <p:cTn id="9" dur="1" fill="hold">
+                                          <p:stCondLst>
+                                            <p:cond delay="0"/>
+                                          </p:stCondLst>
+                                        </p:cTn>
+                                        <p:tgtEl>
+                                          <p:spTgt spid="23"/>
+                                        </p:tgtEl>
+                                        <p:attrNameLst>
+                                          <p:attrName>style.visibility</p:attrName>
+                                        </p:attrNameLst>
+                                      </p:cBhvr>
+                                      <p:to>
+                                        <p:strVal val="visible"/>
+                                      </p:to>
+                                    </p:set>
+                                    <p:animEffect transition="in" filter="fade">
+                                      <p:cBhvr>
+                                        <p:cTn id="10" dur="500"/>
+                                        <p:tgtEl>
+                                          <p:spTgt spid="23"/>
+                                        </p:tgtEl>
+                                      </p:cBhvr>
+                                    </p:animEffect>
+                                  </p:childTnLst>
+                                </p:cTn>
+                              </p:par>
+                              <p:par>
+                                <p:cTn id="11" presetID="10" presetClass="entr" presetSubtype="0" fill="hold" nodeType="withEffect">
+                                  <p:stCondLst>
+                                    <p:cond delay="450"/>
+                                  </p:stCondLst>
+                                  <p:childTnLst>
+                                    <p:set>
+                                      <p:cBhvr>
+                                        <p:cTn id="12" dur="1" fill="hold">
+                                          <p:stCondLst>
+                                            <p:cond delay="0"/>
+                                          </p:stCondLst>
+                                        </p:cTn>
+                                        <p:tgtEl>
+                                          <p:spTgt spid="36"/>
+                                        </p:tgtEl>
+                                        <p:attrNameLst>
+                                          <p:attrName>style.visibility</p:attrName>
+                                        </p:attrNameLst>
+                                      </p:cBhvr>
+                                      <p:to>
+                                        <p:strVal val="visible"/>
+                                      </p:to>
+                                    </p:set>
+                                    <p:animEffect transition="in" filter="fade">
+                                      <p:cBhvr>
+                                        <p:cTn id="13" dur="500"/>
+                                        <p:tgtEl>
+                                          <p:spTgt spid="36"/>
+                                        </p:tgtEl>
+                                      </p:cBhvr>
+                                    </p:animEffect>
+                                  </p:childTnLst>
+                                </p:cTn>
+                              </p:par>
+                              <p:par>
+                                <p:cTn id="14" presetID="10" presetClass="entr" presetSubtype="0" fill="hold" nodeType="withEffect">
+                                  <p:stCondLst>
+                                    <p:cond delay="675"/>
+                                  </p:stCondLst>
+                                  <p:childTnLst>
+                                    <p:set>
+                                      <p:cBhvr>
+                                        <p:cTn id="15" dur="1" fill="hold">
+                                          <p:stCondLst>
+                                            <p:cond delay="0"/>
+                                          </p:stCondLst>
+                                        </p:cTn>
+                                        <p:tgtEl>
+                                          <p:spTgt spid="49"/>
+                                        </p:tgtEl>
+                                        <p:attrNameLst>
+                                          <p:attrName>style.visibility</p:attrName>
+                                        </p:attrNameLst>
+                                      </p:cBhvr>
+                                      <p:to>
+                                        <p:strVal val="visible"/>
+                                      </p:to>
+                                    </p:set>
+                                    <p:animEffect transition="in" filter="fade">
+                                      <p:cBhvr>
+                                        <p:cTn id="16" dur="500"/>
+                                        <p:tgtEl>
+                                          <p:spTgt spid="49"/>
+                                        </p:tgtEl>
+                                      </p:cBhvr>
+                                    </p:animEffect>
+                                  </p:childTnLst>
+                                </p:cTn>
+                              </p:par>
+                              <p:par>
+                                <p:cTn id="17" presetID="10" presetClass="entr" presetSubtype="0" fill="hold" nodeType="withEffect">
+                                  <p:stCondLst>
+                                    <p:cond delay="900"/>
+                                  </p:stCondLst>
+                                  <p:childTnLst>
+                                    <p:set>
+                                      <p:cBhvr>
+                                        <p:cTn id="18" dur="1" fill="hold">
+                                          <p:stCondLst>
+                                            <p:cond delay="0"/>
+                                          </p:stCondLst>
+                                        </p:cTn>
+                                        <p:tgtEl>
+                                          <p:spTgt spid="58"/>
+                                        </p:tgtEl>
+                                        <p:attrNameLst>
+                                          <p:attrName>style.visibility</p:attrName>
+                                        </p:attrNameLst>
+                                      </p:cBhvr>
+                                      <p:to>
+                                        <p:strVal val="visible"/>
+                                      </p:to>
+                                    </p:set>
+                                    <p:animEffect transition="in" filter="fade">
+                                      <p:cBhvr>
+                                        <p:cTn id="19" dur="500"/>
+                                        <p:tgtEl>
+                                          <p:spTgt spid="58"/>
+                                        </p:tgtEl>
+                                      </p:cBhvr>
+                                    </p:animEffect>
+                                  </p:childTnLst>
+                                </p:cTn>
+                              </p:par>
+                              <p:par>
+                                <p:cTn id="20" presetID="10" presetClass="entr" presetSubtype="0" fill="hold" nodeType="withEffect">
+                                  <p:stCondLst>
+                                    <p:cond delay="1125"/>
+                                  </p:stCondLst>
+                                  <p:childTnLst>
+                                    <p:set>
+                                      <p:cBhvr>
+                                        <p:cTn id="21" dur="1" fill="hold">
+                                          <p:stCondLst>
+                                            <p:cond delay="0"/>
+                                          </p:stCondLst>
+                                        </p:cTn>
+                                        <p:tgtEl>
+                                          <p:spTgt spid="59"/>
+                                        </p:tgtEl>
+                                        <p:attrNameLst>
+                                          <p:attrName>style.visibility</p:attrName>
+                                        </p:attrNameLst>
+                                      </p:cBhvr>
+                                      <p:to>
+                                        <p:strVal val="visible"/>
+                                      </p:to>
+                                    </p:set>
+                                    <p:animEffect transition="in" filter="fade">
+                                      <p:cBhvr>
+                                        <p:cTn id="22" dur="500"/>
+                                        <p:tgtEl>
+                                          <p:spTgt spid="59"/>
+                                        </p:tgtEl>
+                                      </p:cBhvr>
+                                    </p:animEffect>
+                                  </p:childTnLst>
+                                </p:cTn>
+                              </p:par>
+                              <p:par>
+                                <p:cTn id="23" presetID="10" presetClass="entr" presetSubtype="0" fill="hold" nodeType="withEffect">
+                                  <p:stCondLst>
+                                    <p:cond delay="1350"/>
+                                  </p:stCondLst>
+                                  <p:childTnLst>
+                                    <p:set>
+                                      <p:cBhvr>
+                                        <p:cTn id="24" dur="1" fill="hold">
+                                          <p:stCondLst>
+                                            <p:cond delay="0"/>
+                                          </p:stCondLst>
+                                        </p:cTn>
+                                        <p:tgtEl>
+                                          <p:spTgt spid="60"/>
+                                        </p:tgtEl>
+                                        <p:attrNameLst>
+                                          <p:attrName>style.visibility</p:attrName>
+                                        </p:attrNameLst>
+                                      </p:cBhvr>
+                                      <p:to>
+                                        <p:strVal val="visible"/>
+                                      </p:to>
+                                    </p:set>
+                                    <p:animEffect transition="in" filter="fade">
+                                      <p:cBhvr>
+                                        <p:cTn id="25" dur="500"/>
+                                        <p:tgtEl>
+                                          <p:spTgt spid="60"/>
+                                        </p:tgtEl>
+                                      </p:cBhvr>
+                                    </p:animEffect>
+                                  </p:childTnLst>
+                                </p:cTn>
+                              </p:par>
+                              <p:par>
+                                <p:cTn id="26" presetID="10" presetClass="entr" presetSubtype="0" fill="hold" nodeType="withEffect">
+                                  <p:stCondLst>
+                                    <p:cond delay="1575"/>
+                                  </p:stCondLst>
+                                  <p:childTnLst>
+                                    <p:set>
+                                      <p:cBhvr>
+                                        <p:cTn id="27" dur="1" fill="hold">
+                                          <p:stCondLst>
+                                            <p:cond delay="0"/>
+                                          </p:stCondLst>
+                                        </p:cTn>
+                                        <p:tgtEl>
+                                          <p:spTgt spid="61"/>
+                                        </p:tgtEl>
+                                        <p:attrNameLst>
+                                          <p:attrName>style.visibility</p:attrName>
+                                        </p:attrNameLst>
+                                      </p:cBhvr>
+                                      <p:to>
+                                        <p:strVal val="visible"/>
+                                      </p:to>
+                                    </p:set>
+                                    <p:animEffect transition="in" filter="fade">
+                                      <p:cBhvr>
+                                        <p:cTn id="28" dur="500"/>
+                                        <p:tgtEl>
+                                          <p:spTgt spid="61"/>
+                                        </p:tgtEl>
+                                      </p:cBhvr>
+                                    </p:animEffect>
+                                  </p:childTnLst>
+                                </p:cTn>
+                              </p:par>
+                            </p:childTnLst>
+                          </p:cTn>
+                        </p:par>
+                      </p:childTnLst>
+                    </p:cTn>
+                  </p:par>
+                </p:childTnLst>
+              </p:cTn>
+              <p:prevCondLst>
+                <p:cond evt="onPrev" delay="0">
+                  <p:tgtEl>
+                    <p:sldTgt/>
+                  </p:tgtEl>
+                </p:cond>
+              </p:prevCondLst>
+              <p:nextCondLst>
+                <p:cond evt="onNext" delay="0">
+                  <p:tgtEl>
+                    <p:sldTgt/>
+                  </p:tgtEl>
+                </p:cond>
+              </p:nextCondLst>
+            </p:seq>
+          </p:childTnLst>
+        </p:cTn>
+      </p:par>
+    </p:tnLst>
+  </p:timing>
 </p:sld>
 </file>
 
@@ -13572,6 +15511,314 @@
   <p:clrMapOvr>
     <a:masterClrMapping/>
   </p:clrMapOvr>
+  <mc:AlternateContent xmlns:mc="http://schemas.openxmlformats.org/markup-compatibility/2006">
+    <mc:Choice xmlns:p14="http://schemas.microsoft.com/office/powerpoint/2010/main" Requires="p14">
+      <p:transition spd="med" p14:dur="700">
+        <p:fade/>
+      </p:transition>
+    </mc:Choice>
+    <mc:Fallback>
+      <p:transition spd="med">
+        <p:fade/>
+      </p:transition>
+    </mc:Fallback>
+  </mc:AlternateContent>
+  <p:timing>
+    <p:tnLst>
+      <p:par>
+        <p:cTn id="1" dur="indefinite" restart="never" nodeType="tmRoot">
+          <p:childTnLst>
+            <p:seq concurrent="1" nextAc="seek">
+              <p:cTn id="2" dur="indefinite" nodeType="mainSeq">
+                <p:childTnLst>
+                  <p:par>
+                    <p:cTn id="3" fill="hold">
+                      <p:stCondLst>
+                        <p:cond delay="indefinite"/>
+                        <p:cond evt="onBegin" delay="0">
+                          <p:tn val="2"/>
+                        </p:cond>
+                      </p:stCondLst>
+                      <p:childTnLst>
+                        <p:par>
+                          <p:cTn id="4" fill="hold">
+                            <p:stCondLst>
+                              <p:cond delay="0"/>
+                            </p:stCondLst>
+                            <p:childTnLst>
+                              <p:par>
+                                <p:cTn id="5" presetID="10" presetClass="entr" presetSubtype="0" fill="hold" nodeType="afterEffect">
+                                  <p:stCondLst>
+                                    <p:cond delay="0"/>
+                                  </p:stCondLst>
+                                  <p:childTnLst>
+                                    <p:set>
+                                      <p:cBhvr>
+                                        <p:cTn id="6" dur="1" fill="hold">
+                                          <p:stCondLst>
+                                            <p:cond delay="0"/>
+                                          </p:stCondLst>
+                                        </p:cTn>
+                                        <p:tgtEl>
+                                          <p:spTgt spid="4"/>
+                                        </p:tgtEl>
+                                        <p:attrNameLst>
+                                          <p:attrName>style.visibility</p:attrName>
+                                        </p:attrNameLst>
+                                      </p:cBhvr>
+                                      <p:to>
+                                        <p:strVal val="visible"/>
+                                      </p:to>
+                                    </p:set>
+                                    <p:animEffect transition="in" filter="fade">
+                                      <p:cBhvr>
+                                        <p:cTn id="7" dur="500"/>
+                                        <p:tgtEl>
+                                          <p:spTgt spid="4"/>
+                                        </p:tgtEl>
+                                      </p:cBhvr>
+                                    </p:animEffect>
+                                  </p:childTnLst>
+                                </p:cTn>
+                              </p:par>
+                              <p:par>
+                                <p:cTn id="8" presetID="10" presetClass="entr" presetSubtype="0" fill="hold" nodeType="withEffect">
+                                  <p:stCondLst>
+                                    <p:cond delay="257"/>
+                                  </p:stCondLst>
+                                  <p:childTnLst>
+                                    <p:set>
+                                      <p:cBhvr>
+                                        <p:cTn id="9" dur="1" fill="hold">
+                                          <p:stCondLst>
+                                            <p:cond delay="0"/>
+                                          </p:stCondLst>
+                                        </p:cTn>
+                                        <p:tgtEl>
+                                          <p:spTgt spid="15"/>
+                                        </p:tgtEl>
+                                        <p:attrNameLst>
+                                          <p:attrName>style.visibility</p:attrName>
+                                        </p:attrNameLst>
+                                      </p:cBhvr>
+                                      <p:to>
+                                        <p:strVal val="visible"/>
+                                      </p:to>
+                                    </p:set>
+                                    <p:animEffect transition="in" filter="fade">
+                                      <p:cBhvr>
+                                        <p:cTn id="10" dur="500"/>
+                                        <p:tgtEl>
+                                          <p:spTgt spid="15"/>
+                                        </p:tgtEl>
+                                      </p:cBhvr>
+                                    </p:animEffect>
+                                  </p:childTnLst>
+                                </p:cTn>
+                              </p:par>
+                              <p:par>
+                                <p:cTn id="11" presetID="10" presetClass="entr" presetSubtype="0" fill="hold" nodeType="withEffect">
+                                  <p:stCondLst>
+                                    <p:cond delay="514"/>
+                                  </p:stCondLst>
+                                  <p:childTnLst>
+                                    <p:set>
+                                      <p:cBhvr>
+                                        <p:cTn id="12" dur="1" fill="hold">
+                                          <p:stCondLst>
+                                            <p:cond delay="0"/>
+                                          </p:stCondLst>
+                                        </p:cTn>
+                                        <p:tgtEl>
+                                          <p:spTgt spid="19"/>
+                                        </p:tgtEl>
+                                        <p:attrNameLst>
+                                          <p:attrName>style.visibility</p:attrName>
+                                        </p:attrNameLst>
+                                      </p:cBhvr>
+                                      <p:to>
+                                        <p:strVal val="visible"/>
+                                      </p:to>
+                                    </p:set>
+                                    <p:animEffect transition="in" filter="fade">
+                                      <p:cBhvr>
+                                        <p:cTn id="13" dur="500"/>
+                                        <p:tgtEl>
+                                          <p:spTgt spid="19"/>
+                                        </p:tgtEl>
+                                      </p:cBhvr>
+                                    </p:animEffect>
+                                  </p:childTnLst>
+                                </p:cTn>
+                              </p:par>
+                              <p:par>
+                                <p:cTn id="14" presetID="10" presetClass="entr" presetSubtype="0" fill="hold" nodeType="withEffect">
+                                  <p:stCondLst>
+                                    <p:cond delay="771"/>
+                                  </p:stCondLst>
+                                  <p:childTnLst>
+                                    <p:set>
+                                      <p:cBhvr>
+                                        <p:cTn id="15" dur="1" fill="hold">
+                                          <p:stCondLst>
+                                            <p:cond delay="0"/>
+                                          </p:stCondLst>
+                                        </p:cTn>
+                                        <p:tgtEl>
+                                          <p:spTgt spid="35"/>
+                                        </p:tgtEl>
+                                        <p:attrNameLst>
+                                          <p:attrName>style.visibility</p:attrName>
+                                        </p:attrNameLst>
+                                      </p:cBhvr>
+                                      <p:to>
+                                        <p:strVal val="visible"/>
+                                      </p:to>
+                                    </p:set>
+                                    <p:animEffect transition="in" filter="fade">
+                                      <p:cBhvr>
+                                        <p:cTn id="16" dur="500"/>
+                                        <p:tgtEl>
+                                          <p:spTgt spid="35"/>
+                                        </p:tgtEl>
+                                      </p:cBhvr>
+                                    </p:animEffect>
+                                  </p:childTnLst>
+                                </p:cTn>
+                              </p:par>
+                              <p:par>
+                                <p:cTn id="17" presetID="10" presetClass="entr" presetSubtype="0" fill="hold" nodeType="withEffect">
+                                  <p:stCondLst>
+                                    <p:cond delay="1028"/>
+                                  </p:stCondLst>
+                                  <p:childTnLst>
+                                    <p:set>
+                                      <p:cBhvr>
+                                        <p:cTn id="18" dur="1" fill="hold">
+                                          <p:stCondLst>
+                                            <p:cond delay="0"/>
+                                          </p:stCondLst>
+                                        </p:cTn>
+                                        <p:tgtEl>
+                                          <p:spTgt spid="36"/>
+                                        </p:tgtEl>
+                                        <p:attrNameLst>
+                                          <p:attrName>style.visibility</p:attrName>
+                                        </p:attrNameLst>
+                                      </p:cBhvr>
+                                      <p:to>
+                                        <p:strVal val="visible"/>
+                                      </p:to>
+                                    </p:set>
+                                    <p:animEffect transition="in" filter="fade">
+                                      <p:cBhvr>
+                                        <p:cTn id="19" dur="500"/>
+                                        <p:tgtEl>
+                                          <p:spTgt spid="36"/>
+                                        </p:tgtEl>
+                                      </p:cBhvr>
+                                    </p:animEffect>
+                                  </p:childTnLst>
+                                </p:cTn>
+                              </p:par>
+                              <p:par>
+                                <p:cTn id="20" presetID="10" presetClass="entr" presetSubtype="0" fill="hold" nodeType="withEffect">
+                                  <p:stCondLst>
+                                    <p:cond delay="1285"/>
+                                  </p:stCondLst>
+                                  <p:childTnLst>
+                                    <p:set>
+                                      <p:cBhvr>
+                                        <p:cTn id="21" dur="1" fill="hold">
+                                          <p:stCondLst>
+                                            <p:cond delay="0"/>
+                                          </p:stCondLst>
+                                        </p:cTn>
+                                        <p:tgtEl>
+                                          <p:spTgt spid="37"/>
+                                        </p:tgtEl>
+                                        <p:attrNameLst>
+                                          <p:attrName>style.visibility</p:attrName>
+                                        </p:attrNameLst>
+                                      </p:cBhvr>
+                                      <p:to>
+                                        <p:strVal val="visible"/>
+                                      </p:to>
+                                    </p:set>
+                                    <p:animEffect transition="in" filter="fade">
+                                      <p:cBhvr>
+                                        <p:cTn id="22" dur="500"/>
+                                        <p:tgtEl>
+                                          <p:spTgt spid="37"/>
+                                        </p:tgtEl>
+                                      </p:cBhvr>
+                                    </p:animEffect>
+                                  </p:childTnLst>
+                                </p:cTn>
+                              </p:par>
+                              <p:par>
+                                <p:cTn id="23" presetID="10" presetClass="entr" presetSubtype="0" fill="hold" nodeType="withEffect">
+                                  <p:stCondLst>
+                                    <p:cond delay="1542"/>
+                                  </p:stCondLst>
+                                  <p:childTnLst>
+                                    <p:set>
+                                      <p:cBhvr>
+                                        <p:cTn id="24" dur="1" fill="hold">
+                                          <p:stCondLst>
+                                            <p:cond delay="0"/>
+                                          </p:stCondLst>
+                                        </p:cTn>
+                                        <p:tgtEl>
+                                          <p:spTgt spid="38"/>
+                                        </p:tgtEl>
+                                        <p:attrNameLst>
+                                          <p:attrName>style.visibility</p:attrName>
+                                        </p:attrNameLst>
+                                      </p:cBhvr>
+                                      <p:to>
+                                        <p:strVal val="visible"/>
+                                      </p:to>
+                                    </p:set>
+                                    <p:animEffect transition="in" filter="fade">
+                                      <p:cBhvr>
+                                        <p:cTn id="25" dur="500"/>
+                                        <p:tgtEl>
+                                          <p:spTgt spid="38"/>
+                                        </p:tgtEl>
+                                      </p:cBhvr>
+                                    </p:animEffect>
+                                  </p:childTnLst>
+                                </p:cTn>
+                              </p:par>
+                            </p:childTnLst>
+                          </p:cTn>
+                        </p:par>
+                      </p:childTnLst>
+                    </p:cTn>
+                  </p:par>
+                </p:childTnLst>
+              </p:cTn>
+              <p:prevCondLst>
+                <p:cond evt="onPrev" delay="0">
+                  <p:tgtEl>
+                    <p:sldTgt/>
+                  </p:tgtEl>
+                </p:cond>
+              </p:prevCondLst>
+              <p:nextCondLst>
+                <p:cond evt="onNext" delay="0">
+                  <p:tgtEl>
+                    <p:sldTgt/>
+                  </p:tgtEl>
+                </p:cond>
+              </p:nextCondLst>
+            </p:seq>
+          </p:childTnLst>
+        </p:cTn>
+      </p:par>
+    </p:tnLst>
+  </p:timing>
 </p:sld>
 </file>
 
@@ -14680,6 +16927,244 @@
   <p:clrMapOvr>
     <a:masterClrMapping/>
   </p:clrMapOvr>
+  <mc:AlternateContent xmlns:mc="http://schemas.openxmlformats.org/markup-compatibility/2006">
+    <mc:Choice xmlns:p14="http://schemas.microsoft.com/office/powerpoint/2010/main" Requires="p14">
+      <p:transition spd="med" p14:dur="700">
+        <p:fade/>
+      </p:transition>
+    </mc:Choice>
+    <mc:Fallback>
+      <p:transition spd="med">
+        <p:fade/>
+      </p:transition>
+    </mc:Fallback>
+  </mc:AlternateContent>
+  <p:timing>
+    <p:tnLst>
+      <p:par>
+        <p:cTn id="1" dur="indefinite" restart="never" nodeType="tmRoot">
+          <p:childTnLst>
+            <p:seq concurrent="1" nextAc="seek">
+              <p:cTn id="2" dur="indefinite" nodeType="mainSeq">
+                <p:childTnLst>
+                  <p:par>
+                    <p:cTn id="3" fill="hold">
+                      <p:stCondLst>
+                        <p:cond delay="indefinite"/>
+                        <p:cond evt="onBegin" delay="0">
+                          <p:tn val="2"/>
+                        </p:cond>
+                      </p:stCondLst>
+                      <p:childTnLst>
+                        <p:par>
+                          <p:cTn id="4" fill="hold">
+                            <p:stCondLst>
+                              <p:cond delay="0"/>
+                            </p:stCondLst>
+                            <p:childTnLst>
+                              <p:par>
+                                <p:cTn id="5" presetID="10" presetClass="entr" presetSubtype="0" fill="hold" nodeType="afterEffect">
+                                  <p:stCondLst>
+                                    <p:cond delay="0"/>
+                                  </p:stCondLst>
+                                  <p:childTnLst>
+                                    <p:set>
+                                      <p:cBhvr>
+                                        <p:cTn id="6" dur="1" fill="hold">
+                                          <p:stCondLst>
+                                            <p:cond delay="0"/>
+                                          </p:stCondLst>
+                                        </p:cTn>
+                                        <p:tgtEl>
+                                          <p:spTgt spid="4"/>
+                                        </p:tgtEl>
+                                        <p:attrNameLst>
+                                          <p:attrName>style.visibility</p:attrName>
+                                        </p:attrNameLst>
+                                      </p:cBhvr>
+                                      <p:to>
+                                        <p:strVal val="visible"/>
+                                      </p:to>
+                                    </p:set>
+                                    <p:animEffect transition="in" filter="fade">
+                                      <p:cBhvr>
+                                        <p:cTn id="7" dur="500"/>
+                                        <p:tgtEl>
+                                          <p:spTgt spid="4"/>
+                                        </p:tgtEl>
+                                      </p:cBhvr>
+                                    </p:animEffect>
+                                  </p:childTnLst>
+                                </p:cTn>
+                              </p:par>
+                              <p:par>
+                                <p:cTn id="8" presetID="10" presetClass="entr" presetSubtype="0" fill="hold" nodeType="withEffect">
+                                  <p:stCondLst>
+                                    <p:cond delay="300"/>
+                                  </p:stCondLst>
+                                  <p:childTnLst>
+                                    <p:set>
+                                      <p:cBhvr>
+                                        <p:cTn id="9" dur="1" fill="hold">
+                                          <p:stCondLst>
+                                            <p:cond delay="0"/>
+                                          </p:stCondLst>
+                                        </p:cTn>
+                                        <p:tgtEl>
+                                          <p:spTgt spid="29"/>
+                                        </p:tgtEl>
+                                        <p:attrNameLst>
+                                          <p:attrName>style.visibility</p:attrName>
+                                        </p:attrNameLst>
+                                      </p:cBhvr>
+                                      <p:to>
+                                        <p:strVal val="visible"/>
+                                      </p:to>
+                                    </p:set>
+                                    <p:animEffect transition="in" filter="fade">
+                                      <p:cBhvr>
+                                        <p:cTn id="10" dur="500"/>
+                                        <p:tgtEl>
+                                          <p:spTgt spid="29"/>
+                                        </p:tgtEl>
+                                      </p:cBhvr>
+                                    </p:animEffect>
+                                  </p:childTnLst>
+                                </p:cTn>
+                              </p:par>
+                              <p:par>
+                                <p:cTn id="11" presetID="10" presetClass="entr" presetSubtype="0" fill="hold" nodeType="withEffect">
+                                  <p:stCondLst>
+                                    <p:cond delay="600"/>
+                                  </p:stCondLst>
+                                  <p:childTnLst>
+                                    <p:set>
+                                      <p:cBhvr>
+                                        <p:cTn id="12" dur="1" fill="hold">
+                                          <p:stCondLst>
+                                            <p:cond delay="0"/>
+                                          </p:stCondLst>
+                                        </p:cTn>
+                                        <p:tgtEl>
+                                          <p:spTgt spid="33"/>
+                                        </p:tgtEl>
+                                        <p:attrNameLst>
+                                          <p:attrName>style.visibility</p:attrName>
+                                        </p:attrNameLst>
+                                      </p:cBhvr>
+                                      <p:to>
+                                        <p:strVal val="visible"/>
+                                      </p:to>
+                                    </p:set>
+                                    <p:animEffect transition="in" filter="fade">
+                                      <p:cBhvr>
+                                        <p:cTn id="13" dur="500"/>
+                                        <p:tgtEl>
+                                          <p:spTgt spid="33"/>
+                                        </p:tgtEl>
+                                      </p:cBhvr>
+                                    </p:animEffect>
+                                  </p:childTnLst>
+                                </p:cTn>
+                              </p:par>
+                              <p:par>
+                                <p:cTn id="14" presetID="10" presetClass="entr" presetSubtype="0" fill="hold" nodeType="withEffect">
+                                  <p:stCondLst>
+                                    <p:cond delay="900"/>
+                                  </p:stCondLst>
+                                  <p:childTnLst>
+                                    <p:set>
+                                      <p:cBhvr>
+                                        <p:cTn id="15" dur="1" fill="hold">
+                                          <p:stCondLst>
+                                            <p:cond delay="0"/>
+                                          </p:stCondLst>
+                                        </p:cTn>
+                                        <p:tgtEl>
+                                          <p:spTgt spid="34"/>
+                                        </p:tgtEl>
+                                        <p:attrNameLst>
+                                          <p:attrName>style.visibility</p:attrName>
+                                        </p:attrNameLst>
+                                      </p:cBhvr>
+                                      <p:to>
+                                        <p:strVal val="visible"/>
+                                      </p:to>
+                                    </p:set>
+                                    <p:animEffect transition="in" filter="fade">
+                                      <p:cBhvr>
+                                        <p:cTn id="16" dur="500"/>
+                                        <p:tgtEl>
+                                          <p:spTgt spid="34"/>
+                                        </p:tgtEl>
+                                      </p:cBhvr>
+                                    </p:animEffect>
+                                  </p:childTnLst>
+                                </p:cTn>
+                              </p:par>
+                              <p:par>
+                                <p:cTn id="17" presetID="10" presetClass="entr" presetSubtype="0" fill="hold" nodeType="withEffect">
+                                  <p:stCondLst>
+                                    <p:cond delay="1200"/>
+                                  </p:stCondLst>
+                                  <p:childTnLst>
+                                    <p:set>
+                                      <p:cBhvr>
+                                        <p:cTn id="18" dur="1" fill="hold">
+                                          <p:stCondLst>
+                                            <p:cond delay="0"/>
+                                          </p:stCondLst>
+                                        </p:cTn>
+                                        <p:tgtEl>
+                                          <p:spTgt spid="35"/>
+                                        </p:tgtEl>
+                                        <p:attrNameLst>
+                                          <p:attrName>style.visibility</p:attrName>
+                                        </p:attrNameLst>
+                                      </p:cBhvr>
+                                      <p:to>
+                                        <p:strVal val="visible"/>
+                                      </p:to>
+                                    </p:set>
+                                    <p:animEffect transition="in" filter="fade">
+                                      <p:cBhvr>
+                                        <p:cTn id="19" dur="500"/>
+                                        <p:tgtEl>
+                                          <p:spTgt spid="35"/>
+                                        </p:tgtEl>
+                                      </p:cBhvr>
+                                    </p:animEffect>
+                                  </p:childTnLst>
+                                </p:cTn>
+                              </p:par>
+                            </p:childTnLst>
+                          </p:cTn>
+                        </p:par>
+                      </p:childTnLst>
+                    </p:cTn>
+                  </p:par>
+                </p:childTnLst>
+              </p:cTn>
+              <p:prevCondLst>
+                <p:cond evt="onPrev" delay="0">
+                  <p:tgtEl>
+                    <p:sldTgt/>
+                  </p:tgtEl>
+                </p:cond>
+              </p:prevCondLst>
+              <p:nextCondLst>
+                <p:cond evt="onNext" delay="0">
+                  <p:tgtEl>
+                    <p:sldTgt/>
+                  </p:tgtEl>
+                </p:cond>
+              </p:nextCondLst>
+            </p:seq>
+          </p:childTnLst>
+        </p:cTn>
+      </p:par>
+    </p:tnLst>
+  </p:timing>
 </p:sld>
 </file>
 
@@ -16403,6 +18888,314 @@
   <p:clrMapOvr>
     <a:masterClrMapping/>
   </p:clrMapOvr>
+  <mc:AlternateContent xmlns:mc="http://schemas.openxmlformats.org/markup-compatibility/2006">
+    <mc:Choice xmlns:p14="http://schemas.microsoft.com/office/powerpoint/2010/main" Requires="p14">
+      <p:transition spd="med" p14:dur="700">
+        <p:fade/>
+      </p:transition>
+    </mc:Choice>
+    <mc:Fallback>
+      <p:transition spd="med">
+        <p:fade/>
+      </p:transition>
+    </mc:Fallback>
+  </mc:AlternateContent>
+  <p:timing>
+    <p:tnLst>
+      <p:par>
+        <p:cTn id="1" dur="indefinite" restart="never" nodeType="tmRoot">
+          <p:childTnLst>
+            <p:seq concurrent="1" nextAc="seek">
+              <p:cTn id="2" dur="indefinite" nodeType="mainSeq">
+                <p:childTnLst>
+                  <p:par>
+                    <p:cTn id="3" fill="hold">
+                      <p:stCondLst>
+                        <p:cond delay="indefinite"/>
+                        <p:cond evt="onBegin" delay="0">
+                          <p:tn val="2"/>
+                        </p:cond>
+                      </p:stCondLst>
+                      <p:childTnLst>
+                        <p:par>
+                          <p:cTn id="4" fill="hold">
+                            <p:stCondLst>
+                              <p:cond delay="0"/>
+                            </p:stCondLst>
+                            <p:childTnLst>
+                              <p:par>
+                                <p:cTn id="5" presetID="10" presetClass="entr" presetSubtype="0" fill="hold" nodeType="afterEffect">
+                                  <p:stCondLst>
+                                    <p:cond delay="0"/>
+                                  </p:stCondLst>
+                                  <p:childTnLst>
+                                    <p:set>
+                                      <p:cBhvr>
+                                        <p:cTn id="6" dur="1" fill="hold">
+                                          <p:stCondLst>
+                                            <p:cond delay="0"/>
+                                          </p:stCondLst>
+                                        </p:cTn>
+                                        <p:tgtEl>
+                                          <p:spTgt spid="4"/>
+                                        </p:tgtEl>
+                                        <p:attrNameLst>
+                                          <p:attrName>style.visibility</p:attrName>
+                                        </p:attrNameLst>
+                                      </p:cBhvr>
+                                      <p:to>
+                                        <p:strVal val="visible"/>
+                                      </p:to>
+                                    </p:set>
+                                    <p:animEffect transition="in" filter="fade">
+                                      <p:cBhvr>
+                                        <p:cTn id="7" dur="500"/>
+                                        <p:tgtEl>
+                                          <p:spTgt spid="4"/>
+                                        </p:tgtEl>
+                                      </p:cBhvr>
+                                    </p:animEffect>
+                                  </p:childTnLst>
+                                </p:cTn>
+                              </p:par>
+                              <p:par>
+                                <p:cTn id="8" presetID="10" presetClass="entr" presetSubtype="0" fill="hold" nodeType="withEffect">
+                                  <p:stCondLst>
+                                    <p:cond delay="257"/>
+                                  </p:stCondLst>
+                                  <p:childTnLst>
+                                    <p:set>
+                                      <p:cBhvr>
+                                        <p:cTn id="9" dur="1" fill="hold">
+                                          <p:stCondLst>
+                                            <p:cond delay="0"/>
+                                          </p:stCondLst>
+                                        </p:cTn>
+                                        <p:tgtEl>
+                                          <p:spTgt spid="18"/>
+                                        </p:tgtEl>
+                                        <p:attrNameLst>
+                                          <p:attrName>style.visibility</p:attrName>
+                                        </p:attrNameLst>
+                                      </p:cBhvr>
+                                      <p:to>
+                                        <p:strVal val="visible"/>
+                                      </p:to>
+                                    </p:set>
+                                    <p:animEffect transition="in" filter="fade">
+                                      <p:cBhvr>
+                                        <p:cTn id="10" dur="500"/>
+                                        <p:tgtEl>
+                                          <p:spTgt spid="18"/>
+                                        </p:tgtEl>
+                                      </p:cBhvr>
+                                    </p:animEffect>
+                                  </p:childTnLst>
+                                </p:cTn>
+                              </p:par>
+                              <p:par>
+                                <p:cTn id="11" presetID="10" presetClass="entr" presetSubtype="0" fill="hold" nodeType="withEffect">
+                                  <p:stCondLst>
+                                    <p:cond delay="514"/>
+                                  </p:stCondLst>
+                                  <p:childTnLst>
+                                    <p:set>
+                                      <p:cBhvr>
+                                        <p:cTn id="12" dur="1" fill="hold">
+                                          <p:stCondLst>
+                                            <p:cond delay="0"/>
+                                          </p:stCondLst>
+                                        </p:cTn>
+                                        <p:tgtEl>
+                                          <p:spTgt spid="28"/>
+                                        </p:tgtEl>
+                                        <p:attrNameLst>
+                                          <p:attrName>style.visibility</p:attrName>
+                                        </p:attrNameLst>
+                                      </p:cBhvr>
+                                      <p:to>
+                                        <p:strVal val="visible"/>
+                                      </p:to>
+                                    </p:set>
+                                    <p:animEffect transition="in" filter="fade">
+                                      <p:cBhvr>
+                                        <p:cTn id="13" dur="500"/>
+                                        <p:tgtEl>
+                                          <p:spTgt spid="28"/>
+                                        </p:tgtEl>
+                                      </p:cBhvr>
+                                    </p:animEffect>
+                                  </p:childTnLst>
+                                </p:cTn>
+                              </p:par>
+                              <p:par>
+                                <p:cTn id="14" presetID="10" presetClass="entr" presetSubtype="0" fill="hold" nodeType="withEffect">
+                                  <p:stCondLst>
+                                    <p:cond delay="771"/>
+                                  </p:stCondLst>
+                                  <p:childTnLst>
+                                    <p:set>
+                                      <p:cBhvr>
+                                        <p:cTn id="15" dur="1" fill="hold">
+                                          <p:stCondLst>
+                                            <p:cond delay="0"/>
+                                          </p:stCondLst>
+                                        </p:cTn>
+                                        <p:tgtEl>
+                                          <p:spTgt spid="41"/>
+                                        </p:tgtEl>
+                                        <p:attrNameLst>
+                                          <p:attrName>style.visibility</p:attrName>
+                                        </p:attrNameLst>
+                                      </p:cBhvr>
+                                      <p:to>
+                                        <p:strVal val="visible"/>
+                                      </p:to>
+                                    </p:set>
+                                    <p:animEffect transition="in" filter="fade">
+                                      <p:cBhvr>
+                                        <p:cTn id="16" dur="500"/>
+                                        <p:tgtEl>
+                                          <p:spTgt spid="41"/>
+                                        </p:tgtEl>
+                                      </p:cBhvr>
+                                    </p:animEffect>
+                                  </p:childTnLst>
+                                </p:cTn>
+                              </p:par>
+                              <p:par>
+                                <p:cTn id="17" presetID="10" presetClass="entr" presetSubtype="0" fill="hold" nodeType="withEffect">
+                                  <p:stCondLst>
+                                    <p:cond delay="1028"/>
+                                  </p:stCondLst>
+                                  <p:childTnLst>
+                                    <p:set>
+                                      <p:cBhvr>
+                                        <p:cTn id="18" dur="1" fill="hold">
+                                          <p:stCondLst>
+                                            <p:cond delay="0"/>
+                                          </p:stCondLst>
+                                        </p:cTn>
+                                        <p:tgtEl>
+                                          <p:spTgt spid="51"/>
+                                        </p:tgtEl>
+                                        <p:attrNameLst>
+                                          <p:attrName>style.visibility</p:attrName>
+                                        </p:attrNameLst>
+                                      </p:cBhvr>
+                                      <p:to>
+                                        <p:strVal val="visible"/>
+                                      </p:to>
+                                    </p:set>
+                                    <p:animEffect transition="in" filter="fade">
+                                      <p:cBhvr>
+                                        <p:cTn id="19" dur="500"/>
+                                        <p:tgtEl>
+                                          <p:spTgt spid="51"/>
+                                        </p:tgtEl>
+                                      </p:cBhvr>
+                                    </p:animEffect>
+                                  </p:childTnLst>
+                                </p:cTn>
+                              </p:par>
+                              <p:par>
+                                <p:cTn id="20" presetID="10" presetClass="entr" presetSubtype="0" fill="hold" nodeType="withEffect">
+                                  <p:stCondLst>
+                                    <p:cond delay="1285"/>
+                                  </p:stCondLst>
+                                  <p:childTnLst>
+                                    <p:set>
+                                      <p:cBhvr>
+                                        <p:cTn id="21" dur="1" fill="hold">
+                                          <p:stCondLst>
+                                            <p:cond delay="0"/>
+                                          </p:stCondLst>
+                                        </p:cTn>
+                                        <p:tgtEl>
+                                          <p:spTgt spid="52"/>
+                                        </p:tgtEl>
+                                        <p:attrNameLst>
+                                          <p:attrName>style.visibility</p:attrName>
+                                        </p:attrNameLst>
+                                      </p:cBhvr>
+                                      <p:to>
+                                        <p:strVal val="visible"/>
+                                      </p:to>
+                                    </p:set>
+                                    <p:animEffect transition="in" filter="fade">
+                                      <p:cBhvr>
+                                        <p:cTn id="22" dur="500"/>
+                                        <p:tgtEl>
+                                          <p:spTgt spid="52"/>
+                                        </p:tgtEl>
+                                      </p:cBhvr>
+                                    </p:animEffect>
+                                  </p:childTnLst>
+                                </p:cTn>
+                              </p:par>
+                              <p:par>
+                                <p:cTn id="23" presetID="10" presetClass="entr" presetSubtype="0" fill="hold" nodeType="withEffect">
+                                  <p:stCondLst>
+                                    <p:cond delay="1542"/>
+                                  </p:stCondLst>
+                                  <p:childTnLst>
+                                    <p:set>
+                                      <p:cBhvr>
+                                        <p:cTn id="24" dur="1" fill="hold">
+                                          <p:stCondLst>
+                                            <p:cond delay="0"/>
+                                          </p:stCondLst>
+                                        </p:cTn>
+                                        <p:tgtEl>
+                                          <p:spTgt spid="53"/>
+                                        </p:tgtEl>
+                                        <p:attrNameLst>
+                                          <p:attrName>style.visibility</p:attrName>
+                                        </p:attrNameLst>
+                                      </p:cBhvr>
+                                      <p:to>
+                                        <p:strVal val="visible"/>
+                                      </p:to>
+                                    </p:set>
+                                    <p:animEffect transition="in" filter="fade">
+                                      <p:cBhvr>
+                                        <p:cTn id="25" dur="500"/>
+                                        <p:tgtEl>
+                                          <p:spTgt spid="53"/>
+                                        </p:tgtEl>
+                                      </p:cBhvr>
+                                    </p:animEffect>
+                                  </p:childTnLst>
+                                </p:cTn>
+                              </p:par>
+                            </p:childTnLst>
+                          </p:cTn>
+                        </p:par>
+                      </p:childTnLst>
+                    </p:cTn>
+                  </p:par>
+                </p:childTnLst>
+              </p:cTn>
+              <p:prevCondLst>
+                <p:cond evt="onPrev" delay="0">
+                  <p:tgtEl>
+                    <p:sldTgt/>
+                  </p:tgtEl>
+                </p:cond>
+              </p:prevCondLst>
+              <p:nextCondLst>
+                <p:cond evt="onNext" delay="0">
+                  <p:tgtEl>
+                    <p:sldTgt/>
+                  </p:tgtEl>
+                </p:cond>
+              </p:nextCondLst>
+            </p:seq>
+          </p:childTnLst>
+        </p:cTn>
+      </p:par>
+    </p:tnLst>
+  </p:timing>
 </p:sld>
 </file>
 
@@ -17356,6 +20149,244 @@
   <p:clrMapOvr>
     <a:masterClrMapping/>
   </p:clrMapOvr>
+  <mc:AlternateContent xmlns:mc="http://schemas.openxmlformats.org/markup-compatibility/2006">
+    <mc:Choice xmlns:p14="http://schemas.microsoft.com/office/powerpoint/2010/main" Requires="p14">
+      <p:transition spd="med" p14:dur="700">
+        <p:fade/>
+      </p:transition>
+    </mc:Choice>
+    <mc:Fallback>
+      <p:transition spd="med">
+        <p:fade/>
+      </p:transition>
+    </mc:Fallback>
+  </mc:AlternateContent>
+  <p:timing>
+    <p:tnLst>
+      <p:par>
+        <p:cTn id="1" dur="indefinite" restart="never" nodeType="tmRoot">
+          <p:childTnLst>
+            <p:seq concurrent="1" nextAc="seek">
+              <p:cTn id="2" dur="indefinite" nodeType="mainSeq">
+                <p:childTnLst>
+                  <p:par>
+                    <p:cTn id="3" fill="hold">
+                      <p:stCondLst>
+                        <p:cond delay="indefinite"/>
+                        <p:cond evt="onBegin" delay="0">
+                          <p:tn val="2"/>
+                        </p:cond>
+                      </p:stCondLst>
+                      <p:childTnLst>
+                        <p:par>
+                          <p:cTn id="4" fill="hold">
+                            <p:stCondLst>
+                              <p:cond delay="0"/>
+                            </p:stCondLst>
+                            <p:childTnLst>
+                              <p:par>
+                                <p:cTn id="5" presetID="10" presetClass="entr" presetSubtype="0" fill="hold" nodeType="afterEffect">
+                                  <p:stCondLst>
+                                    <p:cond delay="0"/>
+                                  </p:stCondLst>
+                                  <p:childTnLst>
+                                    <p:set>
+                                      <p:cBhvr>
+                                        <p:cTn id="6" dur="1" fill="hold">
+                                          <p:stCondLst>
+                                            <p:cond delay="0"/>
+                                          </p:stCondLst>
+                                        </p:cTn>
+                                        <p:tgtEl>
+                                          <p:spTgt spid="3"/>
+                                        </p:tgtEl>
+                                        <p:attrNameLst>
+                                          <p:attrName>style.visibility</p:attrName>
+                                        </p:attrNameLst>
+                                      </p:cBhvr>
+                                      <p:to>
+                                        <p:strVal val="visible"/>
+                                      </p:to>
+                                    </p:set>
+                                    <p:animEffect transition="in" filter="fade">
+                                      <p:cBhvr>
+                                        <p:cTn id="7" dur="500"/>
+                                        <p:tgtEl>
+                                          <p:spTgt spid="3"/>
+                                        </p:tgtEl>
+                                      </p:cBhvr>
+                                    </p:animEffect>
+                                  </p:childTnLst>
+                                </p:cTn>
+                              </p:par>
+                              <p:par>
+                                <p:cTn id="8" presetID="10" presetClass="entr" presetSubtype="0" fill="hold" nodeType="withEffect">
+                                  <p:stCondLst>
+                                    <p:cond delay="300"/>
+                                  </p:stCondLst>
+                                  <p:childTnLst>
+                                    <p:set>
+                                      <p:cBhvr>
+                                        <p:cTn id="9" dur="1" fill="hold">
+                                          <p:stCondLst>
+                                            <p:cond delay="0"/>
+                                          </p:stCondLst>
+                                        </p:cTn>
+                                        <p:tgtEl>
+                                          <p:spTgt spid="19"/>
+                                        </p:tgtEl>
+                                        <p:attrNameLst>
+                                          <p:attrName>style.visibility</p:attrName>
+                                        </p:attrNameLst>
+                                      </p:cBhvr>
+                                      <p:to>
+                                        <p:strVal val="visible"/>
+                                      </p:to>
+                                    </p:set>
+                                    <p:animEffect transition="in" filter="fade">
+                                      <p:cBhvr>
+                                        <p:cTn id="10" dur="500"/>
+                                        <p:tgtEl>
+                                          <p:spTgt spid="19"/>
+                                        </p:tgtEl>
+                                      </p:cBhvr>
+                                    </p:animEffect>
+                                  </p:childTnLst>
+                                </p:cTn>
+                              </p:par>
+                              <p:par>
+                                <p:cTn id="11" presetID="10" presetClass="entr" presetSubtype="0" fill="hold" nodeType="withEffect">
+                                  <p:stCondLst>
+                                    <p:cond delay="600"/>
+                                  </p:stCondLst>
+                                  <p:childTnLst>
+                                    <p:set>
+                                      <p:cBhvr>
+                                        <p:cTn id="12" dur="1" fill="hold">
+                                          <p:stCondLst>
+                                            <p:cond delay="0"/>
+                                          </p:stCondLst>
+                                        </p:cTn>
+                                        <p:tgtEl>
+                                          <p:spTgt spid="26"/>
+                                        </p:tgtEl>
+                                        <p:attrNameLst>
+                                          <p:attrName>style.visibility</p:attrName>
+                                        </p:attrNameLst>
+                                      </p:cBhvr>
+                                      <p:to>
+                                        <p:strVal val="visible"/>
+                                      </p:to>
+                                    </p:set>
+                                    <p:animEffect transition="in" filter="fade">
+                                      <p:cBhvr>
+                                        <p:cTn id="13" dur="500"/>
+                                        <p:tgtEl>
+                                          <p:spTgt spid="26"/>
+                                        </p:tgtEl>
+                                      </p:cBhvr>
+                                    </p:animEffect>
+                                  </p:childTnLst>
+                                </p:cTn>
+                              </p:par>
+                              <p:par>
+                                <p:cTn id="14" presetID="10" presetClass="entr" presetSubtype="0" fill="hold" nodeType="withEffect">
+                                  <p:stCondLst>
+                                    <p:cond delay="900"/>
+                                  </p:stCondLst>
+                                  <p:childTnLst>
+                                    <p:set>
+                                      <p:cBhvr>
+                                        <p:cTn id="15" dur="1" fill="hold">
+                                          <p:stCondLst>
+                                            <p:cond delay="0"/>
+                                          </p:stCondLst>
+                                        </p:cTn>
+                                        <p:tgtEl>
+                                          <p:spTgt spid="27"/>
+                                        </p:tgtEl>
+                                        <p:attrNameLst>
+                                          <p:attrName>style.visibility</p:attrName>
+                                        </p:attrNameLst>
+                                      </p:cBhvr>
+                                      <p:to>
+                                        <p:strVal val="visible"/>
+                                      </p:to>
+                                    </p:set>
+                                    <p:animEffect transition="in" filter="fade">
+                                      <p:cBhvr>
+                                        <p:cTn id="16" dur="500"/>
+                                        <p:tgtEl>
+                                          <p:spTgt spid="27"/>
+                                        </p:tgtEl>
+                                      </p:cBhvr>
+                                    </p:animEffect>
+                                  </p:childTnLst>
+                                </p:cTn>
+                              </p:par>
+                              <p:par>
+                                <p:cTn id="17" presetID="10" presetClass="entr" presetSubtype="0" fill="hold" nodeType="withEffect">
+                                  <p:stCondLst>
+                                    <p:cond delay="1200"/>
+                                  </p:stCondLst>
+                                  <p:childTnLst>
+                                    <p:set>
+                                      <p:cBhvr>
+                                        <p:cTn id="18" dur="1" fill="hold">
+                                          <p:stCondLst>
+                                            <p:cond delay="0"/>
+                                          </p:stCondLst>
+                                        </p:cTn>
+                                        <p:tgtEl>
+                                          <p:spTgt spid="28"/>
+                                        </p:tgtEl>
+                                        <p:attrNameLst>
+                                          <p:attrName>style.visibility</p:attrName>
+                                        </p:attrNameLst>
+                                      </p:cBhvr>
+                                      <p:to>
+                                        <p:strVal val="visible"/>
+                                      </p:to>
+                                    </p:set>
+                                    <p:animEffect transition="in" filter="fade">
+                                      <p:cBhvr>
+                                        <p:cTn id="19" dur="500"/>
+                                        <p:tgtEl>
+                                          <p:spTgt spid="28"/>
+                                        </p:tgtEl>
+                                      </p:cBhvr>
+                                    </p:animEffect>
+                                  </p:childTnLst>
+                                </p:cTn>
+                              </p:par>
+                            </p:childTnLst>
+                          </p:cTn>
+                        </p:par>
+                      </p:childTnLst>
+                    </p:cTn>
+                  </p:par>
+                </p:childTnLst>
+              </p:cTn>
+              <p:prevCondLst>
+                <p:cond evt="onPrev" delay="0">
+                  <p:tgtEl>
+                    <p:sldTgt/>
+                  </p:tgtEl>
+                </p:cond>
+              </p:prevCondLst>
+              <p:nextCondLst>
+                <p:cond evt="onNext" delay="0">
+                  <p:tgtEl>
+                    <p:sldTgt/>
+                  </p:tgtEl>
+                </p:cond>
+              </p:nextCondLst>
+            </p:seq>
+          </p:childTnLst>
+        </p:cTn>
+      </p:par>
+    </p:tnLst>
+  </p:timing>
 </p:sld>
 </file>
 
@@ -18535,6 +21566,279 @@
   <p:clrMapOvr>
     <a:masterClrMapping/>
   </p:clrMapOvr>
+  <mc:AlternateContent xmlns:mc="http://schemas.openxmlformats.org/markup-compatibility/2006">
+    <mc:Choice xmlns:p14="http://schemas.microsoft.com/office/powerpoint/2010/main" Requires="p14">
+      <p:transition spd="med" p14:dur="700">
+        <p:fade/>
+      </p:transition>
+    </mc:Choice>
+    <mc:Fallback>
+      <p:transition spd="med">
+        <p:fade/>
+      </p:transition>
+    </mc:Fallback>
+  </mc:AlternateContent>
+  <p:timing>
+    <p:tnLst>
+      <p:par>
+        <p:cTn id="1" dur="indefinite" restart="never" nodeType="tmRoot">
+          <p:childTnLst>
+            <p:seq concurrent="1" nextAc="seek">
+              <p:cTn id="2" dur="indefinite" nodeType="mainSeq">
+                <p:childTnLst>
+                  <p:par>
+                    <p:cTn id="3" fill="hold">
+                      <p:stCondLst>
+                        <p:cond delay="indefinite"/>
+                        <p:cond evt="onBegin" delay="0">
+                          <p:tn val="2"/>
+                        </p:cond>
+                      </p:stCondLst>
+                      <p:childTnLst>
+                        <p:par>
+                          <p:cTn id="4" fill="hold">
+                            <p:stCondLst>
+                              <p:cond delay="0"/>
+                            </p:stCondLst>
+                            <p:childTnLst>
+                              <p:par>
+                                <p:cTn id="5" presetID="10" presetClass="entr" presetSubtype="0" fill="hold" nodeType="afterEffect">
+                                  <p:stCondLst>
+                                    <p:cond delay="0"/>
+                                  </p:stCondLst>
+                                  <p:childTnLst>
+                                    <p:set>
+                                      <p:cBhvr>
+                                        <p:cTn id="6" dur="1" fill="hold">
+                                          <p:stCondLst>
+                                            <p:cond delay="0"/>
+                                          </p:stCondLst>
+                                        </p:cTn>
+                                        <p:tgtEl>
+                                          <p:spTgt spid="4"/>
+                                        </p:tgtEl>
+                                        <p:attrNameLst>
+                                          <p:attrName>style.visibility</p:attrName>
+                                        </p:attrNameLst>
+                                      </p:cBhvr>
+                                      <p:to>
+                                        <p:strVal val="visible"/>
+                                      </p:to>
+                                    </p:set>
+                                    <p:animEffect transition="in" filter="fade">
+                                      <p:cBhvr>
+                                        <p:cTn id="7" dur="500"/>
+                                        <p:tgtEl>
+                                          <p:spTgt spid="4"/>
+                                        </p:tgtEl>
+                                      </p:cBhvr>
+                                    </p:animEffect>
+                                  </p:childTnLst>
+                                </p:cTn>
+                              </p:par>
+                              <p:par>
+                                <p:cTn id="8" presetID="10" presetClass="entr" presetSubtype="0" fill="hold" nodeType="withEffect">
+                                  <p:stCondLst>
+                                    <p:cond delay="300"/>
+                                  </p:stCondLst>
+                                  <p:childTnLst>
+                                    <p:set>
+                                      <p:cBhvr>
+                                        <p:cTn id="9" dur="1" fill="hold">
+                                          <p:stCondLst>
+                                            <p:cond delay="0"/>
+                                          </p:stCondLst>
+                                        </p:cTn>
+                                        <p:tgtEl>
+                                          <p:spTgt spid="6"/>
+                                        </p:tgtEl>
+                                        <p:attrNameLst>
+                                          <p:attrName>style.visibility</p:attrName>
+                                        </p:attrNameLst>
+                                      </p:cBhvr>
+                                      <p:to>
+                                        <p:strVal val="visible"/>
+                                      </p:to>
+                                    </p:set>
+                                    <p:animEffect transition="in" filter="fade">
+                                      <p:cBhvr>
+                                        <p:cTn id="10" dur="500"/>
+                                        <p:tgtEl>
+                                          <p:spTgt spid="6"/>
+                                        </p:tgtEl>
+                                      </p:cBhvr>
+                                    </p:animEffect>
+                                  </p:childTnLst>
+                                </p:cTn>
+                              </p:par>
+                              <p:par>
+                                <p:cTn id="11" presetID="10" presetClass="entr" presetSubtype="0" fill="hold" nodeType="withEffect">
+                                  <p:stCondLst>
+                                    <p:cond delay="600"/>
+                                  </p:stCondLst>
+                                  <p:childTnLst>
+                                    <p:set>
+                                      <p:cBhvr>
+                                        <p:cTn id="12" dur="1" fill="hold">
+                                          <p:stCondLst>
+                                            <p:cond delay="0"/>
+                                          </p:stCondLst>
+                                        </p:cTn>
+                                        <p:tgtEl>
+                                          <p:spTgt spid="10"/>
+                                        </p:tgtEl>
+                                        <p:attrNameLst>
+                                          <p:attrName>style.visibility</p:attrName>
+                                        </p:attrNameLst>
+                                      </p:cBhvr>
+                                      <p:to>
+                                        <p:strVal val="visible"/>
+                                      </p:to>
+                                    </p:set>
+                                    <p:animEffect transition="in" filter="fade">
+                                      <p:cBhvr>
+                                        <p:cTn id="13" dur="500"/>
+                                        <p:tgtEl>
+                                          <p:spTgt spid="10"/>
+                                        </p:tgtEl>
+                                      </p:cBhvr>
+                                    </p:animEffect>
+                                  </p:childTnLst>
+                                </p:cTn>
+                              </p:par>
+                              <p:par>
+                                <p:cTn id="14" presetID="10" presetClass="entr" presetSubtype="0" fill="hold" nodeType="withEffect">
+                                  <p:stCondLst>
+                                    <p:cond delay="900"/>
+                                  </p:stCondLst>
+                                  <p:childTnLst>
+                                    <p:set>
+                                      <p:cBhvr>
+                                        <p:cTn id="15" dur="1" fill="hold">
+                                          <p:stCondLst>
+                                            <p:cond delay="0"/>
+                                          </p:stCondLst>
+                                        </p:cTn>
+                                        <p:tgtEl>
+                                          <p:spTgt spid="31"/>
+                                        </p:tgtEl>
+                                        <p:attrNameLst>
+                                          <p:attrName>style.visibility</p:attrName>
+                                        </p:attrNameLst>
+                                      </p:cBhvr>
+                                      <p:to>
+                                        <p:strVal val="visible"/>
+                                      </p:to>
+                                    </p:set>
+                                    <p:animEffect transition="in" filter="fade">
+                                      <p:cBhvr>
+                                        <p:cTn id="16" dur="500"/>
+                                        <p:tgtEl>
+                                          <p:spTgt spid="31"/>
+                                        </p:tgtEl>
+                                      </p:cBhvr>
+                                    </p:animEffect>
+                                  </p:childTnLst>
+                                </p:cTn>
+                              </p:par>
+                              <p:par>
+                                <p:cTn id="17" presetID="10" presetClass="entr" presetSubtype="0" fill="hold" nodeType="withEffect">
+                                  <p:stCondLst>
+                                    <p:cond delay="1200"/>
+                                  </p:stCondLst>
+                                  <p:childTnLst>
+                                    <p:set>
+                                      <p:cBhvr>
+                                        <p:cTn id="18" dur="1" fill="hold">
+                                          <p:stCondLst>
+                                            <p:cond delay="0"/>
+                                          </p:stCondLst>
+                                        </p:cTn>
+                                        <p:tgtEl>
+                                          <p:spTgt spid="32"/>
+                                        </p:tgtEl>
+                                        <p:attrNameLst>
+                                          <p:attrName>style.visibility</p:attrName>
+                                        </p:attrNameLst>
+                                      </p:cBhvr>
+                                      <p:to>
+                                        <p:strVal val="visible"/>
+                                      </p:to>
+                                    </p:set>
+                                    <p:animEffect transition="in" filter="fade">
+                                      <p:cBhvr>
+                                        <p:cTn id="19" dur="500"/>
+                                        <p:tgtEl>
+                                          <p:spTgt spid="32"/>
+                                        </p:tgtEl>
+                                      </p:cBhvr>
+                                    </p:animEffect>
+                                  </p:childTnLst>
+                                </p:cTn>
+                              </p:par>
+                              <p:par>
+                                <p:cTn id="20" presetID="10" presetClass="entr" presetSubtype="0" fill="hold" nodeType="withEffect">
+                                  <p:stCondLst>
+                                    <p:cond delay="1500"/>
+                                  </p:stCondLst>
+                                  <p:childTnLst>
+                                    <p:set>
+                                      <p:cBhvr>
+                                        <p:cTn id="21" dur="1" fill="hold">
+                                          <p:stCondLst>
+                                            <p:cond delay="0"/>
+                                          </p:stCondLst>
+                                        </p:cTn>
+                                        <p:tgtEl>
+                                          <p:spTgt spid="33"/>
+                                        </p:tgtEl>
+                                        <p:attrNameLst>
+                                          <p:attrName>style.visibility</p:attrName>
+                                        </p:attrNameLst>
+                                      </p:cBhvr>
+                                      <p:to>
+                                        <p:strVal val="visible"/>
+                                      </p:to>
+                                    </p:set>
+                                    <p:animEffect transition="in" filter="fade">
+                                      <p:cBhvr>
+                                        <p:cTn id="22" dur="500"/>
+                                        <p:tgtEl>
+                                          <p:spTgt spid="33"/>
+                                        </p:tgtEl>
+                                      </p:cBhvr>
+                                    </p:animEffect>
+                                  </p:childTnLst>
+                                </p:cTn>
+                              </p:par>
+                            </p:childTnLst>
+                          </p:cTn>
+                        </p:par>
+                      </p:childTnLst>
+                    </p:cTn>
+                  </p:par>
+                </p:childTnLst>
+              </p:cTn>
+              <p:prevCondLst>
+                <p:cond evt="onPrev" delay="0">
+                  <p:tgtEl>
+                    <p:sldTgt/>
+                  </p:tgtEl>
+                </p:cond>
+              </p:prevCondLst>
+              <p:nextCondLst>
+                <p:cond evt="onNext" delay="0">
+                  <p:tgtEl>
+                    <p:sldTgt/>
+                  </p:tgtEl>
+                </p:cond>
+              </p:nextCondLst>
+            </p:seq>
+          </p:childTnLst>
+        </p:cTn>
+      </p:par>
+    </p:tnLst>
+  </p:timing>
 </p:sld>
 </file>
 
@@ -19651,6 +22955,209 @@
   <p:clrMapOvr>
     <a:masterClrMapping/>
   </p:clrMapOvr>
+  <mc:AlternateContent xmlns:mc="http://schemas.openxmlformats.org/markup-compatibility/2006">
+    <mc:Choice xmlns:p14="http://schemas.microsoft.com/office/powerpoint/2010/main" Requires="p14">
+      <p:transition spd="med" p14:dur="700">
+        <p:fade/>
+      </p:transition>
+    </mc:Choice>
+    <mc:Fallback>
+      <p:transition spd="med">
+        <p:fade/>
+      </p:transition>
+    </mc:Fallback>
+  </mc:AlternateContent>
+  <p:timing>
+    <p:tnLst>
+      <p:par>
+        <p:cTn id="1" dur="indefinite" restart="never" nodeType="tmRoot">
+          <p:childTnLst>
+            <p:seq concurrent="1" nextAc="seek">
+              <p:cTn id="2" dur="indefinite" nodeType="mainSeq">
+                <p:childTnLst>
+                  <p:par>
+                    <p:cTn id="3" fill="hold">
+                      <p:stCondLst>
+                        <p:cond delay="indefinite"/>
+                        <p:cond evt="onBegin" delay="0">
+                          <p:tn val="2"/>
+                        </p:cond>
+                      </p:stCondLst>
+                      <p:childTnLst>
+                        <p:par>
+                          <p:cTn id="4" fill="hold">
+                            <p:stCondLst>
+                              <p:cond delay="0"/>
+                            </p:stCondLst>
+                            <p:childTnLst>
+                              <p:par>
+                                <p:cTn id="5" presetID="10" presetClass="entr" presetSubtype="0" fill="hold" nodeType="afterEffect">
+                                  <p:stCondLst>
+                                    <p:cond delay="0"/>
+                                  </p:stCondLst>
+                                  <p:childTnLst>
+                                    <p:set>
+                                      <p:cBhvr>
+                                        <p:cTn id="6" dur="1" fill="hold">
+                                          <p:stCondLst>
+                                            <p:cond delay="0"/>
+                                          </p:stCondLst>
+                                        </p:cTn>
+                                        <p:tgtEl>
+                                          <p:spTgt spid="4"/>
+                                        </p:tgtEl>
+                                        <p:attrNameLst>
+                                          <p:attrName>style.visibility</p:attrName>
+                                        </p:attrNameLst>
+                                      </p:cBhvr>
+                                      <p:to>
+                                        <p:strVal val="visible"/>
+                                      </p:to>
+                                    </p:set>
+                                    <p:animEffect transition="in" filter="fade">
+                                      <p:cBhvr>
+                                        <p:cTn id="7" dur="500"/>
+                                        <p:tgtEl>
+                                          <p:spTgt spid="4"/>
+                                        </p:tgtEl>
+                                      </p:cBhvr>
+                                    </p:animEffect>
+                                  </p:childTnLst>
+                                </p:cTn>
+                              </p:par>
+                              <p:par>
+                                <p:cTn id="8" presetID="10" presetClass="entr" presetSubtype="0" fill="hold" nodeType="withEffect">
+                                  <p:stCondLst>
+                                    <p:cond delay="300"/>
+                                  </p:stCondLst>
+                                  <p:childTnLst>
+                                    <p:set>
+                                      <p:cBhvr>
+                                        <p:cTn id="9" dur="1" fill="hold">
+                                          <p:stCondLst>
+                                            <p:cond delay="0"/>
+                                          </p:stCondLst>
+                                        </p:cTn>
+                                        <p:tgtEl>
+                                          <p:spTgt spid="29"/>
+                                        </p:tgtEl>
+                                        <p:attrNameLst>
+                                          <p:attrName>style.visibility</p:attrName>
+                                        </p:attrNameLst>
+                                      </p:cBhvr>
+                                      <p:to>
+                                        <p:strVal val="visible"/>
+                                      </p:to>
+                                    </p:set>
+                                    <p:animEffect transition="in" filter="fade">
+                                      <p:cBhvr>
+                                        <p:cTn id="10" dur="500"/>
+                                        <p:tgtEl>
+                                          <p:spTgt spid="29"/>
+                                        </p:tgtEl>
+                                      </p:cBhvr>
+                                    </p:animEffect>
+                                  </p:childTnLst>
+                                </p:cTn>
+                              </p:par>
+                              <p:par>
+                                <p:cTn id="11" presetID="10" presetClass="entr" presetSubtype="0" fill="hold" nodeType="withEffect">
+                                  <p:stCondLst>
+                                    <p:cond delay="600"/>
+                                  </p:stCondLst>
+                                  <p:childTnLst>
+                                    <p:set>
+                                      <p:cBhvr>
+                                        <p:cTn id="12" dur="1" fill="hold">
+                                          <p:stCondLst>
+                                            <p:cond delay="0"/>
+                                          </p:stCondLst>
+                                        </p:cTn>
+                                        <p:tgtEl>
+                                          <p:spTgt spid="30"/>
+                                        </p:tgtEl>
+                                        <p:attrNameLst>
+                                          <p:attrName>style.visibility</p:attrName>
+                                        </p:attrNameLst>
+                                      </p:cBhvr>
+                                      <p:to>
+                                        <p:strVal val="visible"/>
+                                      </p:to>
+                                    </p:set>
+                                    <p:animEffect transition="in" filter="fade">
+                                      <p:cBhvr>
+                                        <p:cTn id="13" dur="500"/>
+                                        <p:tgtEl>
+                                          <p:spTgt spid="30"/>
+                                        </p:tgtEl>
+                                      </p:cBhvr>
+                                    </p:animEffect>
+                                  </p:childTnLst>
+                                </p:cTn>
+                              </p:par>
+                              <p:par>
+                                <p:cTn id="14" presetID="10" presetClass="entr" presetSubtype="0" fill="hold" nodeType="withEffect">
+                                  <p:stCondLst>
+                                    <p:cond delay="900"/>
+                                  </p:stCondLst>
+                                  <p:childTnLst>
+                                    <p:set>
+                                      <p:cBhvr>
+                                        <p:cTn id="15" dur="1" fill="hold">
+                                          <p:stCondLst>
+                                            <p:cond delay="0"/>
+                                          </p:stCondLst>
+                                        </p:cTn>
+                                        <p:tgtEl>
+                                          <p:spTgt spid="31"/>
+                                        </p:tgtEl>
+                                        <p:attrNameLst>
+                                          <p:attrName>style.visibility</p:attrName>
+                                        </p:attrNameLst>
+                                      </p:cBhvr>
+                                      <p:to>
+                                        <p:strVal val="visible"/>
+                                      </p:to>
+                                    </p:set>
+                                    <p:animEffect transition="in" filter="fade">
+                                      <p:cBhvr>
+                                        <p:cTn id="16" dur="500"/>
+                                        <p:tgtEl>
+                                          <p:spTgt spid="31"/>
+                                        </p:tgtEl>
+                                      </p:cBhvr>
+                                    </p:animEffect>
+                                  </p:childTnLst>
+                                </p:cTn>
+                              </p:par>
+                            </p:childTnLst>
+                          </p:cTn>
+                        </p:par>
+                      </p:childTnLst>
+                    </p:cTn>
+                  </p:par>
+                </p:childTnLst>
+              </p:cTn>
+              <p:prevCondLst>
+                <p:cond evt="onPrev" delay="0">
+                  <p:tgtEl>
+                    <p:sldTgt/>
+                  </p:tgtEl>
+                </p:cond>
+              </p:prevCondLst>
+              <p:nextCondLst>
+                <p:cond evt="onNext" delay="0">
+                  <p:tgtEl>
+                    <p:sldTgt/>
+                  </p:tgtEl>
+                </p:cond>
+              </p:nextCondLst>
+            </p:seq>
+          </p:childTnLst>
+        </p:cTn>
+      </p:par>
+    </p:tnLst>
+  </p:timing>
 </p:sld>
 </file>
 
@@ -20255,6 +23762,174 @@
   <p:clrMapOvr>
     <a:masterClrMapping/>
   </p:clrMapOvr>
+  <mc:AlternateContent xmlns:mc="http://schemas.openxmlformats.org/markup-compatibility/2006">
+    <mc:Choice xmlns:p14="http://schemas.microsoft.com/office/powerpoint/2010/main" Requires="p14">
+      <p:transition spd="med" p14:dur="700">
+        <p:fade/>
+      </p:transition>
+    </mc:Choice>
+    <mc:Fallback>
+      <p:transition spd="med">
+        <p:fade/>
+      </p:transition>
+    </mc:Fallback>
+  </mc:AlternateContent>
+  <p:timing>
+    <p:tnLst>
+      <p:par>
+        <p:cTn id="1" dur="indefinite" restart="never" nodeType="tmRoot">
+          <p:childTnLst>
+            <p:seq concurrent="1" nextAc="seek">
+              <p:cTn id="2" dur="indefinite" nodeType="mainSeq">
+                <p:childTnLst>
+                  <p:par>
+                    <p:cTn id="3" fill="hold">
+                      <p:stCondLst>
+                        <p:cond delay="indefinite"/>
+                        <p:cond evt="onBegin" delay="0">
+                          <p:tn val="2"/>
+                        </p:cond>
+                      </p:stCondLst>
+                      <p:childTnLst>
+                        <p:par>
+                          <p:cTn id="4" fill="hold">
+                            <p:stCondLst>
+                              <p:cond delay="0"/>
+                            </p:stCondLst>
+                            <p:childTnLst>
+                              <p:par>
+                                <p:cTn id="5" presetID="10" presetClass="entr" presetSubtype="0" fill="hold" nodeType="afterEffect">
+                                  <p:stCondLst>
+                                    <p:cond delay="0"/>
+                                  </p:stCondLst>
+                                  <p:childTnLst>
+                                    <p:set>
+                                      <p:cBhvr>
+                                        <p:cTn id="6" dur="1" fill="hold">
+                                          <p:stCondLst>
+                                            <p:cond delay="0"/>
+                                          </p:stCondLst>
+                                        </p:cTn>
+                                        <p:tgtEl>
+                                          <p:spTgt spid="4"/>
+                                        </p:tgtEl>
+                                        <p:attrNameLst>
+                                          <p:attrName>style.visibility</p:attrName>
+                                        </p:attrNameLst>
+                                      </p:cBhvr>
+                                      <p:to>
+                                        <p:strVal val="visible"/>
+                                      </p:to>
+                                    </p:set>
+                                    <p:animEffect transition="in" filter="fade">
+                                      <p:cBhvr>
+                                        <p:cTn id="7" dur="500"/>
+                                        <p:tgtEl>
+                                          <p:spTgt spid="4"/>
+                                        </p:tgtEl>
+                                      </p:cBhvr>
+                                    </p:animEffect>
+                                  </p:childTnLst>
+                                </p:cTn>
+                              </p:par>
+                              <p:par>
+                                <p:cTn id="8" presetID="10" presetClass="entr" presetSubtype="0" fill="hold" nodeType="withEffect">
+                                  <p:stCondLst>
+                                    <p:cond delay="300"/>
+                                  </p:stCondLst>
+                                  <p:childTnLst>
+                                    <p:set>
+                                      <p:cBhvr>
+                                        <p:cTn id="9" dur="1" fill="hold">
+                                          <p:stCondLst>
+                                            <p:cond delay="0"/>
+                                          </p:stCondLst>
+                                        </p:cTn>
+                                        <p:tgtEl>
+                                          <p:spTgt spid="5"/>
+                                        </p:tgtEl>
+                                        <p:attrNameLst>
+                                          <p:attrName>style.visibility</p:attrName>
+                                        </p:attrNameLst>
+                                      </p:cBhvr>
+                                      <p:to>
+                                        <p:strVal val="visible"/>
+                                      </p:to>
+                                    </p:set>
+                                    <p:animEffect transition="in" filter="fade">
+                                      <p:cBhvr>
+                                        <p:cTn id="10" dur="500"/>
+                                        <p:tgtEl>
+                                          <p:spTgt spid="5"/>
+                                        </p:tgtEl>
+                                      </p:cBhvr>
+                                    </p:animEffect>
+                                  </p:childTnLst>
+                                </p:cTn>
+                              </p:par>
+                              <p:par>
+                                <p:cTn id="11" presetID="10" presetClass="entr" presetSubtype="0" fill="hold" nodeType="withEffect">
+                                  <p:stCondLst>
+                                    <p:cond delay="600"/>
+                                  </p:stCondLst>
+                                  <p:childTnLst>
+                                    <p:set>
+                                      <p:cBhvr>
+                                        <p:cTn id="12" dur="1" fill="hold">
+                                          <p:stCondLst>
+                                            <p:cond delay="0"/>
+                                          </p:stCondLst>
+                                        </p:cTn>
+                                        <p:tgtEl>
+                                          <p:spTgt spid="6"/>
+                                        </p:tgtEl>
+                                        <p:attrNameLst>
+                                          <p:attrName>style.visibility</p:attrName>
+                                        </p:attrNameLst>
+                                      </p:cBhvr>
+                                      <p:to>
+                                        <p:strVal val="visible"/>
+                                      </p:to>
+                                    </p:set>
+                                    <p:animEffect transition="in" filter="fade">
+                                      <p:cBhvr>
+                                        <p:cTn id="13" dur="500"/>
+                                        <p:tgtEl>
+                                          <p:spTgt spid="6"/>
+                                        </p:tgtEl>
+                                      </p:cBhvr>
+                                    </p:animEffect>
+                                  </p:childTnLst>
+                                </p:cTn>
+                              </p:par>
+                            </p:childTnLst>
+                          </p:cTn>
+                        </p:par>
+                      </p:childTnLst>
+                    </p:cTn>
+                  </p:par>
+                </p:childTnLst>
+              </p:cTn>
+              <p:prevCondLst>
+                <p:cond evt="onPrev" delay="0">
+                  <p:tgtEl>
+                    <p:sldTgt/>
+                  </p:tgtEl>
+                </p:cond>
+              </p:prevCondLst>
+              <p:nextCondLst>
+                <p:cond evt="onNext" delay="0">
+                  <p:tgtEl>
+                    <p:sldTgt/>
+                  </p:tgtEl>
+                </p:cond>
+              </p:nextCondLst>
+            </p:seq>
+          </p:childTnLst>
+        </p:cTn>
+      </p:par>
+    </p:tnLst>
+  </p:timing>
 </p:sld>
 </file>
 
@@ -21194,6 +24869,244 @@
   <p:clrMapOvr>
     <a:masterClrMapping/>
   </p:clrMapOvr>
+  <mc:AlternateContent xmlns:mc="http://schemas.openxmlformats.org/markup-compatibility/2006">
+    <mc:Choice xmlns:p14="http://schemas.microsoft.com/office/powerpoint/2010/main" Requires="p14">
+      <p:transition spd="med" p14:dur="700">
+        <p:fade/>
+      </p:transition>
+    </mc:Choice>
+    <mc:Fallback>
+      <p:transition spd="med">
+        <p:fade/>
+      </p:transition>
+    </mc:Fallback>
+  </mc:AlternateContent>
+  <p:timing>
+    <p:tnLst>
+      <p:par>
+        <p:cTn id="1" dur="indefinite" restart="never" nodeType="tmRoot">
+          <p:childTnLst>
+            <p:seq concurrent="1" nextAc="seek">
+              <p:cTn id="2" dur="indefinite" nodeType="mainSeq">
+                <p:childTnLst>
+                  <p:par>
+                    <p:cTn id="3" fill="hold">
+                      <p:stCondLst>
+                        <p:cond delay="indefinite"/>
+                        <p:cond evt="onBegin" delay="0">
+                          <p:tn val="2"/>
+                        </p:cond>
+                      </p:stCondLst>
+                      <p:childTnLst>
+                        <p:par>
+                          <p:cTn id="4" fill="hold">
+                            <p:stCondLst>
+                              <p:cond delay="0"/>
+                            </p:stCondLst>
+                            <p:childTnLst>
+                              <p:par>
+                                <p:cTn id="5" presetID="10" presetClass="entr" presetSubtype="0" fill="hold" nodeType="afterEffect">
+                                  <p:stCondLst>
+                                    <p:cond delay="0"/>
+                                  </p:stCondLst>
+                                  <p:childTnLst>
+                                    <p:set>
+                                      <p:cBhvr>
+                                        <p:cTn id="6" dur="1" fill="hold">
+                                          <p:stCondLst>
+                                            <p:cond delay="0"/>
+                                          </p:stCondLst>
+                                        </p:cTn>
+                                        <p:tgtEl>
+                                          <p:spTgt spid="4"/>
+                                        </p:tgtEl>
+                                        <p:attrNameLst>
+                                          <p:attrName>style.visibility</p:attrName>
+                                        </p:attrNameLst>
+                                      </p:cBhvr>
+                                      <p:to>
+                                        <p:strVal val="visible"/>
+                                      </p:to>
+                                    </p:set>
+                                    <p:animEffect transition="in" filter="fade">
+                                      <p:cBhvr>
+                                        <p:cTn id="7" dur="500"/>
+                                        <p:tgtEl>
+                                          <p:spTgt spid="4"/>
+                                        </p:tgtEl>
+                                      </p:cBhvr>
+                                    </p:animEffect>
+                                  </p:childTnLst>
+                                </p:cTn>
+                              </p:par>
+                              <p:par>
+                                <p:cTn id="8" presetID="10" presetClass="entr" presetSubtype="0" fill="hold" nodeType="withEffect">
+                                  <p:stCondLst>
+                                    <p:cond delay="300"/>
+                                  </p:stCondLst>
+                                  <p:childTnLst>
+                                    <p:set>
+                                      <p:cBhvr>
+                                        <p:cTn id="9" dur="1" fill="hold">
+                                          <p:stCondLst>
+                                            <p:cond delay="0"/>
+                                          </p:stCondLst>
+                                        </p:cTn>
+                                        <p:tgtEl>
+                                          <p:spTgt spid="15"/>
+                                        </p:tgtEl>
+                                        <p:attrNameLst>
+                                          <p:attrName>style.visibility</p:attrName>
+                                        </p:attrNameLst>
+                                      </p:cBhvr>
+                                      <p:to>
+                                        <p:strVal val="visible"/>
+                                      </p:to>
+                                    </p:set>
+                                    <p:animEffect transition="in" filter="fade">
+                                      <p:cBhvr>
+                                        <p:cTn id="10" dur="500"/>
+                                        <p:tgtEl>
+                                          <p:spTgt spid="15"/>
+                                        </p:tgtEl>
+                                      </p:cBhvr>
+                                    </p:animEffect>
+                                  </p:childTnLst>
+                                </p:cTn>
+                              </p:par>
+                              <p:par>
+                                <p:cTn id="11" presetID="10" presetClass="entr" presetSubtype="0" fill="hold" nodeType="withEffect">
+                                  <p:stCondLst>
+                                    <p:cond delay="600"/>
+                                  </p:stCondLst>
+                                  <p:childTnLst>
+                                    <p:set>
+                                      <p:cBhvr>
+                                        <p:cTn id="12" dur="1" fill="hold">
+                                          <p:stCondLst>
+                                            <p:cond delay="0"/>
+                                          </p:stCondLst>
+                                        </p:cTn>
+                                        <p:tgtEl>
+                                          <p:spTgt spid="26"/>
+                                        </p:tgtEl>
+                                        <p:attrNameLst>
+                                          <p:attrName>style.visibility</p:attrName>
+                                        </p:attrNameLst>
+                                      </p:cBhvr>
+                                      <p:to>
+                                        <p:strVal val="visible"/>
+                                      </p:to>
+                                    </p:set>
+                                    <p:animEffect transition="in" filter="fade">
+                                      <p:cBhvr>
+                                        <p:cTn id="13" dur="500"/>
+                                        <p:tgtEl>
+                                          <p:spTgt spid="26"/>
+                                        </p:tgtEl>
+                                      </p:cBhvr>
+                                    </p:animEffect>
+                                  </p:childTnLst>
+                                </p:cTn>
+                              </p:par>
+                              <p:par>
+                                <p:cTn id="14" presetID="10" presetClass="entr" presetSubtype="0" fill="hold" nodeType="withEffect">
+                                  <p:stCondLst>
+                                    <p:cond delay="900"/>
+                                  </p:stCondLst>
+                                  <p:childTnLst>
+                                    <p:set>
+                                      <p:cBhvr>
+                                        <p:cTn id="15" dur="1" fill="hold">
+                                          <p:stCondLst>
+                                            <p:cond delay="0"/>
+                                          </p:stCondLst>
+                                        </p:cTn>
+                                        <p:tgtEl>
+                                          <p:spTgt spid="27"/>
+                                        </p:tgtEl>
+                                        <p:attrNameLst>
+                                          <p:attrName>style.visibility</p:attrName>
+                                        </p:attrNameLst>
+                                      </p:cBhvr>
+                                      <p:to>
+                                        <p:strVal val="visible"/>
+                                      </p:to>
+                                    </p:set>
+                                    <p:animEffect transition="in" filter="fade">
+                                      <p:cBhvr>
+                                        <p:cTn id="16" dur="500"/>
+                                        <p:tgtEl>
+                                          <p:spTgt spid="27"/>
+                                        </p:tgtEl>
+                                      </p:cBhvr>
+                                    </p:animEffect>
+                                  </p:childTnLst>
+                                </p:cTn>
+                              </p:par>
+                              <p:par>
+                                <p:cTn id="17" presetID="10" presetClass="entr" presetSubtype="0" fill="hold" nodeType="withEffect">
+                                  <p:stCondLst>
+                                    <p:cond delay="1200"/>
+                                  </p:stCondLst>
+                                  <p:childTnLst>
+                                    <p:set>
+                                      <p:cBhvr>
+                                        <p:cTn id="18" dur="1" fill="hold">
+                                          <p:stCondLst>
+                                            <p:cond delay="0"/>
+                                          </p:stCondLst>
+                                        </p:cTn>
+                                        <p:tgtEl>
+                                          <p:spTgt spid="28"/>
+                                        </p:tgtEl>
+                                        <p:attrNameLst>
+                                          <p:attrName>style.visibility</p:attrName>
+                                        </p:attrNameLst>
+                                      </p:cBhvr>
+                                      <p:to>
+                                        <p:strVal val="visible"/>
+                                      </p:to>
+                                    </p:set>
+                                    <p:animEffect transition="in" filter="fade">
+                                      <p:cBhvr>
+                                        <p:cTn id="19" dur="500"/>
+                                        <p:tgtEl>
+                                          <p:spTgt spid="28"/>
+                                        </p:tgtEl>
+                                      </p:cBhvr>
+                                    </p:animEffect>
+                                  </p:childTnLst>
+                                </p:cTn>
+                              </p:par>
+                            </p:childTnLst>
+                          </p:cTn>
+                        </p:par>
+                      </p:childTnLst>
+                    </p:cTn>
+                  </p:par>
+                </p:childTnLst>
+              </p:cTn>
+              <p:prevCondLst>
+                <p:cond evt="onPrev" delay="0">
+                  <p:tgtEl>
+                    <p:sldTgt/>
+                  </p:tgtEl>
+                </p:cond>
+              </p:prevCondLst>
+              <p:nextCondLst>
+                <p:cond evt="onNext" delay="0">
+                  <p:tgtEl>
+                    <p:sldTgt/>
+                  </p:tgtEl>
+                </p:cond>
+              </p:nextCondLst>
+            </p:seq>
+          </p:childTnLst>
+        </p:cTn>
+      </p:par>
+    </p:tnLst>
+  </p:timing>
 </p:sld>
 </file>
 
@@ -22532,6 +26445,279 @@
   <p:clrMapOvr>
     <a:masterClrMapping/>
   </p:clrMapOvr>
+  <mc:AlternateContent xmlns:mc="http://schemas.openxmlformats.org/markup-compatibility/2006">
+    <mc:Choice xmlns:p14="http://schemas.microsoft.com/office/powerpoint/2010/main" Requires="p14">
+      <p:transition spd="med" p14:dur="700">
+        <p:fade/>
+      </p:transition>
+    </mc:Choice>
+    <mc:Fallback>
+      <p:transition spd="med">
+        <p:fade/>
+      </p:transition>
+    </mc:Fallback>
+  </mc:AlternateContent>
+  <p:timing>
+    <p:tnLst>
+      <p:par>
+        <p:cTn id="1" dur="indefinite" restart="never" nodeType="tmRoot">
+          <p:childTnLst>
+            <p:seq concurrent="1" nextAc="seek">
+              <p:cTn id="2" dur="indefinite" nodeType="mainSeq">
+                <p:childTnLst>
+                  <p:par>
+                    <p:cTn id="3" fill="hold">
+                      <p:stCondLst>
+                        <p:cond delay="indefinite"/>
+                        <p:cond evt="onBegin" delay="0">
+                          <p:tn val="2"/>
+                        </p:cond>
+                      </p:stCondLst>
+                      <p:childTnLst>
+                        <p:par>
+                          <p:cTn id="4" fill="hold">
+                            <p:stCondLst>
+                              <p:cond delay="0"/>
+                            </p:stCondLst>
+                            <p:childTnLst>
+                              <p:par>
+                                <p:cTn id="5" presetID="10" presetClass="entr" presetSubtype="0" fill="hold" nodeType="afterEffect">
+                                  <p:stCondLst>
+                                    <p:cond delay="0"/>
+                                  </p:stCondLst>
+                                  <p:childTnLst>
+                                    <p:set>
+                                      <p:cBhvr>
+                                        <p:cTn id="6" dur="1" fill="hold">
+                                          <p:stCondLst>
+                                            <p:cond delay="0"/>
+                                          </p:stCondLst>
+                                        </p:cTn>
+                                        <p:tgtEl>
+                                          <p:spTgt spid="4"/>
+                                        </p:tgtEl>
+                                        <p:attrNameLst>
+                                          <p:attrName>style.visibility</p:attrName>
+                                        </p:attrNameLst>
+                                      </p:cBhvr>
+                                      <p:to>
+                                        <p:strVal val="visible"/>
+                                      </p:to>
+                                    </p:set>
+                                    <p:animEffect transition="in" filter="fade">
+                                      <p:cBhvr>
+                                        <p:cTn id="7" dur="500"/>
+                                        <p:tgtEl>
+                                          <p:spTgt spid="4"/>
+                                        </p:tgtEl>
+                                      </p:cBhvr>
+                                    </p:animEffect>
+                                  </p:childTnLst>
+                                </p:cTn>
+                              </p:par>
+                              <p:par>
+                                <p:cTn id="8" presetID="10" presetClass="entr" presetSubtype="0" fill="hold" nodeType="withEffect">
+                                  <p:stCondLst>
+                                    <p:cond delay="300"/>
+                                  </p:stCondLst>
+                                  <p:childTnLst>
+                                    <p:set>
+                                      <p:cBhvr>
+                                        <p:cTn id="9" dur="1" fill="hold">
+                                          <p:stCondLst>
+                                            <p:cond delay="0"/>
+                                          </p:stCondLst>
+                                        </p:cTn>
+                                        <p:tgtEl>
+                                          <p:spTgt spid="26"/>
+                                        </p:tgtEl>
+                                        <p:attrNameLst>
+                                          <p:attrName>style.visibility</p:attrName>
+                                        </p:attrNameLst>
+                                      </p:cBhvr>
+                                      <p:to>
+                                        <p:strVal val="visible"/>
+                                      </p:to>
+                                    </p:set>
+                                    <p:animEffect transition="in" filter="fade">
+                                      <p:cBhvr>
+                                        <p:cTn id="10" dur="500"/>
+                                        <p:tgtEl>
+                                          <p:spTgt spid="26"/>
+                                        </p:tgtEl>
+                                      </p:cBhvr>
+                                    </p:animEffect>
+                                  </p:childTnLst>
+                                </p:cTn>
+                              </p:par>
+                              <p:par>
+                                <p:cTn id="11" presetID="10" presetClass="entr" presetSubtype="0" fill="hold" nodeType="withEffect">
+                                  <p:stCondLst>
+                                    <p:cond delay="600"/>
+                                  </p:stCondLst>
+                                  <p:childTnLst>
+                                    <p:set>
+                                      <p:cBhvr>
+                                        <p:cTn id="12" dur="1" fill="hold">
+                                          <p:stCondLst>
+                                            <p:cond delay="0"/>
+                                          </p:stCondLst>
+                                        </p:cTn>
+                                        <p:tgtEl>
+                                          <p:spTgt spid="39"/>
+                                        </p:tgtEl>
+                                        <p:attrNameLst>
+                                          <p:attrName>style.visibility</p:attrName>
+                                        </p:attrNameLst>
+                                      </p:cBhvr>
+                                      <p:to>
+                                        <p:strVal val="visible"/>
+                                      </p:to>
+                                    </p:set>
+                                    <p:animEffect transition="in" filter="fade">
+                                      <p:cBhvr>
+                                        <p:cTn id="13" dur="500"/>
+                                        <p:tgtEl>
+                                          <p:spTgt spid="39"/>
+                                        </p:tgtEl>
+                                      </p:cBhvr>
+                                    </p:animEffect>
+                                  </p:childTnLst>
+                                </p:cTn>
+                              </p:par>
+                              <p:par>
+                                <p:cTn id="14" presetID="10" presetClass="entr" presetSubtype="0" fill="hold" nodeType="withEffect">
+                                  <p:stCondLst>
+                                    <p:cond delay="900"/>
+                                  </p:stCondLst>
+                                  <p:childTnLst>
+                                    <p:set>
+                                      <p:cBhvr>
+                                        <p:cTn id="15" dur="1" fill="hold">
+                                          <p:stCondLst>
+                                            <p:cond delay="0"/>
+                                          </p:stCondLst>
+                                        </p:cTn>
+                                        <p:tgtEl>
+                                          <p:spTgt spid="45"/>
+                                        </p:tgtEl>
+                                        <p:attrNameLst>
+                                          <p:attrName>style.visibility</p:attrName>
+                                        </p:attrNameLst>
+                                      </p:cBhvr>
+                                      <p:to>
+                                        <p:strVal val="visible"/>
+                                      </p:to>
+                                    </p:set>
+                                    <p:animEffect transition="in" filter="fade">
+                                      <p:cBhvr>
+                                        <p:cTn id="16" dur="500"/>
+                                        <p:tgtEl>
+                                          <p:spTgt spid="45"/>
+                                        </p:tgtEl>
+                                      </p:cBhvr>
+                                    </p:animEffect>
+                                  </p:childTnLst>
+                                </p:cTn>
+                              </p:par>
+                              <p:par>
+                                <p:cTn id="17" presetID="10" presetClass="entr" presetSubtype="0" fill="hold" nodeType="withEffect">
+                                  <p:stCondLst>
+                                    <p:cond delay="1200"/>
+                                  </p:stCondLst>
+                                  <p:childTnLst>
+                                    <p:set>
+                                      <p:cBhvr>
+                                        <p:cTn id="18" dur="1" fill="hold">
+                                          <p:stCondLst>
+                                            <p:cond delay="0"/>
+                                          </p:stCondLst>
+                                        </p:cTn>
+                                        <p:tgtEl>
+                                          <p:spTgt spid="46"/>
+                                        </p:tgtEl>
+                                        <p:attrNameLst>
+                                          <p:attrName>style.visibility</p:attrName>
+                                        </p:attrNameLst>
+                                      </p:cBhvr>
+                                      <p:to>
+                                        <p:strVal val="visible"/>
+                                      </p:to>
+                                    </p:set>
+                                    <p:animEffect transition="in" filter="fade">
+                                      <p:cBhvr>
+                                        <p:cTn id="19" dur="500"/>
+                                        <p:tgtEl>
+                                          <p:spTgt spid="46"/>
+                                        </p:tgtEl>
+                                      </p:cBhvr>
+                                    </p:animEffect>
+                                  </p:childTnLst>
+                                </p:cTn>
+                              </p:par>
+                              <p:par>
+                                <p:cTn id="20" presetID="10" presetClass="entr" presetSubtype="0" fill="hold" nodeType="withEffect">
+                                  <p:stCondLst>
+                                    <p:cond delay="1500"/>
+                                  </p:stCondLst>
+                                  <p:childTnLst>
+                                    <p:set>
+                                      <p:cBhvr>
+                                        <p:cTn id="21" dur="1" fill="hold">
+                                          <p:stCondLst>
+                                            <p:cond delay="0"/>
+                                          </p:stCondLst>
+                                        </p:cTn>
+                                        <p:tgtEl>
+                                          <p:spTgt spid="47"/>
+                                        </p:tgtEl>
+                                        <p:attrNameLst>
+                                          <p:attrName>style.visibility</p:attrName>
+                                        </p:attrNameLst>
+                                      </p:cBhvr>
+                                      <p:to>
+                                        <p:strVal val="visible"/>
+                                      </p:to>
+                                    </p:set>
+                                    <p:animEffect transition="in" filter="fade">
+                                      <p:cBhvr>
+                                        <p:cTn id="22" dur="500"/>
+                                        <p:tgtEl>
+                                          <p:spTgt spid="47"/>
+                                        </p:tgtEl>
+                                      </p:cBhvr>
+                                    </p:animEffect>
+                                  </p:childTnLst>
+                                </p:cTn>
+                              </p:par>
+                            </p:childTnLst>
+                          </p:cTn>
+                        </p:par>
+                      </p:childTnLst>
+                    </p:cTn>
+                  </p:par>
+                </p:childTnLst>
+              </p:cTn>
+              <p:prevCondLst>
+                <p:cond evt="onPrev" delay="0">
+                  <p:tgtEl>
+                    <p:sldTgt/>
+                  </p:tgtEl>
+                </p:cond>
+              </p:prevCondLst>
+              <p:nextCondLst>
+                <p:cond evt="onNext" delay="0">
+                  <p:tgtEl>
+                    <p:sldTgt/>
+                  </p:tgtEl>
+                </p:cond>
+              </p:nextCondLst>
+            </p:seq>
+          </p:childTnLst>
+        </p:cTn>
+      </p:par>
+    </p:tnLst>
+  </p:timing>
 </p:sld>
 </file>
 
@@ -23733,6 +27919,209 @@
   <p:clrMapOvr>
     <a:masterClrMapping/>
   </p:clrMapOvr>
+  <mc:AlternateContent xmlns:mc="http://schemas.openxmlformats.org/markup-compatibility/2006">
+    <mc:Choice xmlns:p14="http://schemas.microsoft.com/office/powerpoint/2010/main" Requires="p14">
+      <p:transition spd="med" p14:dur="700">
+        <p:fade/>
+      </p:transition>
+    </mc:Choice>
+    <mc:Fallback>
+      <p:transition spd="med">
+        <p:fade/>
+      </p:transition>
+    </mc:Fallback>
+  </mc:AlternateContent>
+  <p:timing>
+    <p:tnLst>
+      <p:par>
+        <p:cTn id="1" dur="indefinite" restart="never" nodeType="tmRoot">
+          <p:childTnLst>
+            <p:seq concurrent="1" nextAc="seek">
+              <p:cTn id="2" dur="indefinite" nodeType="mainSeq">
+                <p:childTnLst>
+                  <p:par>
+                    <p:cTn id="3" fill="hold">
+                      <p:stCondLst>
+                        <p:cond delay="indefinite"/>
+                        <p:cond evt="onBegin" delay="0">
+                          <p:tn val="2"/>
+                        </p:cond>
+                      </p:stCondLst>
+                      <p:childTnLst>
+                        <p:par>
+                          <p:cTn id="4" fill="hold">
+                            <p:stCondLst>
+                              <p:cond delay="0"/>
+                            </p:stCondLst>
+                            <p:childTnLst>
+                              <p:par>
+                                <p:cTn id="5" presetID="10" presetClass="entr" presetSubtype="0" fill="hold" nodeType="afterEffect">
+                                  <p:stCondLst>
+                                    <p:cond delay="0"/>
+                                  </p:stCondLst>
+                                  <p:childTnLst>
+                                    <p:set>
+                                      <p:cBhvr>
+                                        <p:cTn id="6" dur="1" fill="hold">
+                                          <p:stCondLst>
+                                            <p:cond delay="0"/>
+                                          </p:stCondLst>
+                                        </p:cTn>
+                                        <p:tgtEl>
+                                          <p:spTgt spid="4"/>
+                                        </p:tgtEl>
+                                        <p:attrNameLst>
+                                          <p:attrName>style.visibility</p:attrName>
+                                        </p:attrNameLst>
+                                      </p:cBhvr>
+                                      <p:to>
+                                        <p:strVal val="visible"/>
+                                      </p:to>
+                                    </p:set>
+                                    <p:animEffect transition="in" filter="fade">
+                                      <p:cBhvr>
+                                        <p:cTn id="7" dur="500"/>
+                                        <p:tgtEl>
+                                          <p:spTgt spid="4"/>
+                                        </p:tgtEl>
+                                      </p:cBhvr>
+                                    </p:animEffect>
+                                  </p:childTnLst>
+                                </p:cTn>
+                              </p:par>
+                              <p:par>
+                                <p:cTn id="8" presetID="10" presetClass="entr" presetSubtype="0" fill="hold" nodeType="withEffect">
+                                  <p:stCondLst>
+                                    <p:cond delay="300"/>
+                                  </p:stCondLst>
+                                  <p:childTnLst>
+                                    <p:set>
+                                      <p:cBhvr>
+                                        <p:cTn id="9" dur="1" fill="hold">
+                                          <p:stCondLst>
+                                            <p:cond delay="0"/>
+                                          </p:stCondLst>
+                                        </p:cTn>
+                                        <p:tgtEl>
+                                          <p:spTgt spid="36"/>
+                                        </p:tgtEl>
+                                        <p:attrNameLst>
+                                          <p:attrName>style.visibility</p:attrName>
+                                        </p:attrNameLst>
+                                      </p:cBhvr>
+                                      <p:to>
+                                        <p:strVal val="visible"/>
+                                      </p:to>
+                                    </p:set>
+                                    <p:animEffect transition="in" filter="fade">
+                                      <p:cBhvr>
+                                        <p:cTn id="10" dur="500"/>
+                                        <p:tgtEl>
+                                          <p:spTgt spid="36"/>
+                                        </p:tgtEl>
+                                      </p:cBhvr>
+                                    </p:animEffect>
+                                  </p:childTnLst>
+                                </p:cTn>
+                              </p:par>
+                              <p:par>
+                                <p:cTn id="11" presetID="10" presetClass="entr" presetSubtype="0" fill="hold" nodeType="withEffect">
+                                  <p:stCondLst>
+                                    <p:cond delay="600"/>
+                                  </p:stCondLst>
+                                  <p:childTnLst>
+                                    <p:set>
+                                      <p:cBhvr>
+                                        <p:cTn id="12" dur="1" fill="hold">
+                                          <p:stCondLst>
+                                            <p:cond delay="0"/>
+                                          </p:stCondLst>
+                                        </p:cTn>
+                                        <p:tgtEl>
+                                          <p:spTgt spid="37"/>
+                                        </p:tgtEl>
+                                        <p:attrNameLst>
+                                          <p:attrName>style.visibility</p:attrName>
+                                        </p:attrNameLst>
+                                      </p:cBhvr>
+                                      <p:to>
+                                        <p:strVal val="visible"/>
+                                      </p:to>
+                                    </p:set>
+                                    <p:animEffect transition="in" filter="fade">
+                                      <p:cBhvr>
+                                        <p:cTn id="13" dur="500"/>
+                                        <p:tgtEl>
+                                          <p:spTgt spid="37"/>
+                                        </p:tgtEl>
+                                      </p:cBhvr>
+                                    </p:animEffect>
+                                  </p:childTnLst>
+                                </p:cTn>
+                              </p:par>
+                              <p:par>
+                                <p:cTn id="14" presetID="10" presetClass="entr" presetSubtype="0" fill="hold" nodeType="withEffect">
+                                  <p:stCondLst>
+                                    <p:cond delay="900"/>
+                                  </p:stCondLst>
+                                  <p:childTnLst>
+                                    <p:set>
+                                      <p:cBhvr>
+                                        <p:cTn id="15" dur="1" fill="hold">
+                                          <p:stCondLst>
+                                            <p:cond delay="0"/>
+                                          </p:stCondLst>
+                                        </p:cTn>
+                                        <p:tgtEl>
+                                          <p:spTgt spid="38"/>
+                                        </p:tgtEl>
+                                        <p:attrNameLst>
+                                          <p:attrName>style.visibility</p:attrName>
+                                        </p:attrNameLst>
+                                      </p:cBhvr>
+                                      <p:to>
+                                        <p:strVal val="visible"/>
+                                      </p:to>
+                                    </p:set>
+                                    <p:animEffect transition="in" filter="fade">
+                                      <p:cBhvr>
+                                        <p:cTn id="16" dur="500"/>
+                                        <p:tgtEl>
+                                          <p:spTgt spid="38"/>
+                                        </p:tgtEl>
+                                      </p:cBhvr>
+                                    </p:animEffect>
+                                  </p:childTnLst>
+                                </p:cTn>
+                              </p:par>
+                            </p:childTnLst>
+                          </p:cTn>
+                        </p:par>
+                      </p:childTnLst>
+                    </p:cTn>
+                  </p:par>
+                </p:childTnLst>
+              </p:cTn>
+              <p:prevCondLst>
+                <p:cond evt="onPrev" delay="0">
+                  <p:tgtEl>
+                    <p:sldTgt/>
+                  </p:tgtEl>
+                </p:cond>
+              </p:prevCondLst>
+              <p:nextCondLst>
+                <p:cond evt="onNext" delay="0">
+                  <p:tgtEl>
+                    <p:sldTgt/>
+                  </p:tgtEl>
+                </p:cond>
+              </p:nextCondLst>
+            </p:seq>
+          </p:childTnLst>
+        </p:cTn>
+      </p:par>
+    </p:tnLst>
+  </p:timing>
 </p:sld>
 </file>
 
@@ -25065,6 +29454,349 @@
   <p:clrMapOvr>
     <a:masterClrMapping/>
   </p:clrMapOvr>
+  <mc:AlternateContent xmlns:mc="http://schemas.openxmlformats.org/markup-compatibility/2006">
+    <mc:Choice xmlns:p14="http://schemas.microsoft.com/office/powerpoint/2010/main" Requires="p14">
+      <p:transition spd="med" p14:dur="700">
+        <p:fade/>
+      </p:transition>
+    </mc:Choice>
+    <mc:Fallback>
+      <p:transition spd="med">
+        <p:fade/>
+      </p:transition>
+    </mc:Fallback>
+  </mc:AlternateContent>
+  <p:timing>
+    <p:tnLst>
+      <p:par>
+        <p:cTn id="1" dur="indefinite" restart="never" nodeType="tmRoot">
+          <p:childTnLst>
+            <p:seq concurrent="1" nextAc="seek">
+              <p:cTn id="2" dur="indefinite" nodeType="mainSeq">
+                <p:childTnLst>
+                  <p:par>
+                    <p:cTn id="3" fill="hold">
+                      <p:stCondLst>
+                        <p:cond delay="indefinite"/>
+                        <p:cond evt="onBegin" delay="0">
+                          <p:tn val="2"/>
+                        </p:cond>
+                      </p:stCondLst>
+                      <p:childTnLst>
+                        <p:par>
+                          <p:cTn id="4" fill="hold">
+                            <p:stCondLst>
+                              <p:cond delay="0"/>
+                            </p:stCondLst>
+                            <p:childTnLst>
+                              <p:par>
+                                <p:cTn id="5" presetID="10" presetClass="entr" presetSubtype="0" fill="hold" nodeType="afterEffect">
+                                  <p:stCondLst>
+                                    <p:cond delay="0"/>
+                                  </p:stCondLst>
+                                  <p:childTnLst>
+                                    <p:set>
+                                      <p:cBhvr>
+                                        <p:cTn id="6" dur="1" fill="hold">
+                                          <p:stCondLst>
+                                            <p:cond delay="0"/>
+                                          </p:stCondLst>
+                                        </p:cTn>
+                                        <p:tgtEl>
+                                          <p:spTgt spid="4"/>
+                                        </p:tgtEl>
+                                        <p:attrNameLst>
+                                          <p:attrName>style.visibility</p:attrName>
+                                        </p:attrNameLst>
+                                      </p:cBhvr>
+                                      <p:to>
+                                        <p:strVal val="visible"/>
+                                      </p:to>
+                                    </p:set>
+                                    <p:animEffect transition="in" filter="fade">
+                                      <p:cBhvr>
+                                        <p:cTn id="7" dur="500"/>
+                                        <p:tgtEl>
+                                          <p:spTgt spid="4"/>
+                                        </p:tgtEl>
+                                      </p:cBhvr>
+                                    </p:animEffect>
+                                  </p:childTnLst>
+                                </p:cTn>
+                              </p:par>
+                              <p:par>
+                                <p:cTn id="8" presetID="10" presetClass="entr" presetSubtype="0" fill="hold" nodeType="withEffect">
+                                  <p:stCondLst>
+                                    <p:cond delay="225"/>
+                                  </p:stCondLst>
+                                  <p:childTnLst>
+                                    <p:set>
+                                      <p:cBhvr>
+                                        <p:cTn id="9" dur="1" fill="hold">
+                                          <p:stCondLst>
+                                            <p:cond delay="0"/>
+                                          </p:stCondLst>
+                                        </p:cTn>
+                                        <p:tgtEl>
+                                          <p:spTgt spid="13"/>
+                                        </p:tgtEl>
+                                        <p:attrNameLst>
+                                          <p:attrName>style.visibility</p:attrName>
+                                        </p:attrNameLst>
+                                      </p:cBhvr>
+                                      <p:to>
+                                        <p:strVal val="visible"/>
+                                      </p:to>
+                                    </p:set>
+                                    <p:animEffect transition="in" filter="fade">
+                                      <p:cBhvr>
+                                        <p:cTn id="10" dur="500"/>
+                                        <p:tgtEl>
+                                          <p:spTgt spid="13"/>
+                                        </p:tgtEl>
+                                      </p:cBhvr>
+                                    </p:animEffect>
+                                  </p:childTnLst>
+                                </p:cTn>
+                              </p:par>
+                              <p:par>
+                                <p:cTn id="11" presetID="10" presetClass="entr" presetSubtype="0" fill="hold" nodeType="withEffect">
+                                  <p:stCondLst>
+                                    <p:cond delay="450"/>
+                                  </p:stCondLst>
+                                  <p:childTnLst>
+                                    <p:set>
+                                      <p:cBhvr>
+                                        <p:cTn id="12" dur="1" fill="hold">
+                                          <p:stCondLst>
+                                            <p:cond delay="0"/>
+                                          </p:stCondLst>
+                                        </p:cTn>
+                                        <p:tgtEl>
+                                          <p:spTgt spid="14"/>
+                                        </p:tgtEl>
+                                        <p:attrNameLst>
+                                          <p:attrName>style.visibility</p:attrName>
+                                        </p:attrNameLst>
+                                      </p:cBhvr>
+                                      <p:to>
+                                        <p:strVal val="visible"/>
+                                      </p:to>
+                                    </p:set>
+                                    <p:animEffect transition="in" filter="fade">
+                                      <p:cBhvr>
+                                        <p:cTn id="13" dur="500"/>
+                                        <p:tgtEl>
+                                          <p:spTgt spid="14"/>
+                                        </p:tgtEl>
+                                      </p:cBhvr>
+                                    </p:animEffect>
+                                  </p:childTnLst>
+                                </p:cTn>
+                              </p:par>
+                              <p:par>
+                                <p:cTn id="14" presetID="10" presetClass="entr" presetSubtype="0" fill="hold" nodeType="withEffect">
+                                  <p:stCondLst>
+                                    <p:cond delay="675"/>
+                                  </p:stCondLst>
+                                  <p:childTnLst>
+                                    <p:set>
+                                      <p:cBhvr>
+                                        <p:cTn id="15" dur="1" fill="hold">
+                                          <p:stCondLst>
+                                            <p:cond delay="0"/>
+                                          </p:stCondLst>
+                                        </p:cTn>
+                                        <p:tgtEl>
+                                          <p:spTgt spid="29"/>
+                                        </p:tgtEl>
+                                        <p:attrNameLst>
+                                          <p:attrName>style.visibility</p:attrName>
+                                        </p:attrNameLst>
+                                      </p:cBhvr>
+                                      <p:to>
+                                        <p:strVal val="visible"/>
+                                      </p:to>
+                                    </p:set>
+                                    <p:animEffect transition="in" filter="fade">
+                                      <p:cBhvr>
+                                        <p:cTn id="16" dur="500"/>
+                                        <p:tgtEl>
+                                          <p:spTgt spid="29"/>
+                                        </p:tgtEl>
+                                      </p:cBhvr>
+                                    </p:animEffect>
+                                  </p:childTnLst>
+                                </p:cTn>
+                              </p:par>
+                              <p:par>
+                                <p:cTn id="17" presetID="10" presetClass="entr" presetSubtype="0" fill="hold" nodeType="withEffect">
+                                  <p:stCondLst>
+                                    <p:cond delay="900"/>
+                                  </p:stCondLst>
+                                  <p:childTnLst>
+                                    <p:set>
+                                      <p:cBhvr>
+                                        <p:cTn id="18" dur="1" fill="hold">
+                                          <p:stCondLst>
+                                            <p:cond delay="0"/>
+                                          </p:stCondLst>
+                                        </p:cTn>
+                                        <p:tgtEl>
+                                          <p:spTgt spid="30"/>
+                                        </p:tgtEl>
+                                        <p:attrNameLst>
+                                          <p:attrName>style.visibility</p:attrName>
+                                        </p:attrNameLst>
+                                      </p:cBhvr>
+                                      <p:to>
+                                        <p:strVal val="visible"/>
+                                      </p:to>
+                                    </p:set>
+                                    <p:animEffect transition="in" filter="fade">
+                                      <p:cBhvr>
+                                        <p:cTn id="19" dur="500"/>
+                                        <p:tgtEl>
+                                          <p:spTgt spid="30"/>
+                                        </p:tgtEl>
+                                      </p:cBhvr>
+                                    </p:animEffect>
+                                  </p:childTnLst>
+                                </p:cTn>
+                              </p:par>
+                              <p:par>
+                                <p:cTn id="20" presetID="10" presetClass="entr" presetSubtype="0" fill="hold" nodeType="withEffect">
+                                  <p:stCondLst>
+                                    <p:cond delay="1125"/>
+                                  </p:stCondLst>
+                                  <p:childTnLst>
+                                    <p:set>
+                                      <p:cBhvr>
+                                        <p:cTn id="21" dur="1" fill="hold">
+                                          <p:stCondLst>
+                                            <p:cond delay="0"/>
+                                          </p:stCondLst>
+                                        </p:cTn>
+                                        <p:tgtEl>
+                                          <p:spTgt spid="39"/>
+                                        </p:tgtEl>
+                                        <p:attrNameLst>
+                                          <p:attrName>style.visibility</p:attrName>
+                                        </p:attrNameLst>
+                                      </p:cBhvr>
+                                      <p:to>
+                                        <p:strVal val="visible"/>
+                                      </p:to>
+                                    </p:set>
+                                    <p:animEffect transition="in" filter="fade">
+                                      <p:cBhvr>
+                                        <p:cTn id="22" dur="500"/>
+                                        <p:tgtEl>
+                                          <p:spTgt spid="39"/>
+                                        </p:tgtEl>
+                                      </p:cBhvr>
+                                    </p:animEffect>
+                                  </p:childTnLst>
+                                </p:cTn>
+                              </p:par>
+                              <p:par>
+                                <p:cTn id="23" presetID="10" presetClass="entr" presetSubtype="0" fill="hold" nodeType="withEffect">
+                                  <p:stCondLst>
+                                    <p:cond delay="1350"/>
+                                  </p:stCondLst>
+                                  <p:childTnLst>
+                                    <p:set>
+                                      <p:cBhvr>
+                                        <p:cTn id="24" dur="1" fill="hold">
+                                          <p:stCondLst>
+                                            <p:cond delay="0"/>
+                                          </p:stCondLst>
+                                        </p:cTn>
+                                        <p:tgtEl>
+                                          <p:spTgt spid="40"/>
+                                        </p:tgtEl>
+                                        <p:attrNameLst>
+                                          <p:attrName>style.visibility</p:attrName>
+                                        </p:attrNameLst>
+                                      </p:cBhvr>
+                                      <p:to>
+                                        <p:strVal val="visible"/>
+                                      </p:to>
+                                    </p:set>
+                                    <p:animEffect transition="in" filter="fade">
+                                      <p:cBhvr>
+                                        <p:cTn id="25" dur="500"/>
+                                        <p:tgtEl>
+                                          <p:spTgt spid="40"/>
+                                        </p:tgtEl>
+                                      </p:cBhvr>
+                                    </p:animEffect>
+                                  </p:childTnLst>
+                                </p:cTn>
+                              </p:par>
+                              <p:par>
+                                <p:cTn id="26" presetID="10" presetClass="entr" presetSubtype="0" fill="hold" nodeType="withEffect">
+                                  <p:stCondLst>
+                                    <p:cond delay="1575"/>
+                                  </p:stCondLst>
+                                  <p:childTnLst>
+                                    <p:set>
+                                      <p:cBhvr>
+                                        <p:cTn id="27" dur="1" fill="hold">
+                                          <p:stCondLst>
+                                            <p:cond delay="0"/>
+                                          </p:stCondLst>
+                                        </p:cTn>
+                                        <p:tgtEl>
+                                          <p:spTgt spid="41"/>
+                                        </p:tgtEl>
+                                        <p:attrNameLst>
+                                          <p:attrName>style.visibility</p:attrName>
+                                        </p:attrNameLst>
+                                      </p:cBhvr>
+                                      <p:to>
+                                        <p:strVal val="visible"/>
+                                      </p:to>
+                                    </p:set>
+                                    <p:animEffect transition="in" filter="fade">
+                                      <p:cBhvr>
+                                        <p:cTn id="28" dur="500"/>
+                                        <p:tgtEl>
+                                          <p:spTgt spid="41"/>
+                                        </p:tgtEl>
+                                      </p:cBhvr>
+                                    </p:animEffect>
+                                  </p:childTnLst>
+                                </p:cTn>
+                              </p:par>
+                            </p:childTnLst>
+                          </p:cTn>
+                        </p:par>
+                      </p:childTnLst>
+                    </p:cTn>
+                  </p:par>
+                </p:childTnLst>
+              </p:cTn>
+              <p:prevCondLst>
+                <p:cond evt="onPrev" delay="0">
+                  <p:tgtEl>
+                    <p:sldTgt/>
+                  </p:tgtEl>
+                </p:cond>
+              </p:prevCondLst>
+              <p:nextCondLst>
+                <p:cond evt="onNext" delay="0">
+                  <p:tgtEl>
+                    <p:sldTgt/>
+                  </p:tgtEl>
+                </p:cond>
+              </p:nextCondLst>
+            </p:seq>
+          </p:childTnLst>
+        </p:cTn>
+      </p:par>
+    </p:tnLst>
+  </p:timing>
 </p:sld>
 </file>
 
@@ -27486,6 +32218,314 @@
   <p:clrMapOvr>
     <a:masterClrMapping/>
   </p:clrMapOvr>
+  <mc:AlternateContent xmlns:mc="http://schemas.openxmlformats.org/markup-compatibility/2006">
+    <mc:Choice xmlns:p14="http://schemas.microsoft.com/office/powerpoint/2010/main" Requires="p14">
+      <p:transition spd="med" p14:dur="700">
+        <p:fade/>
+      </p:transition>
+    </mc:Choice>
+    <mc:Fallback>
+      <p:transition spd="med">
+        <p:fade/>
+      </p:transition>
+    </mc:Fallback>
+  </mc:AlternateContent>
+  <p:timing>
+    <p:tnLst>
+      <p:par>
+        <p:cTn id="1" dur="indefinite" restart="never" nodeType="tmRoot">
+          <p:childTnLst>
+            <p:seq concurrent="1" nextAc="seek">
+              <p:cTn id="2" dur="indefinite" nodeType="mainSeq">
+                <p:childTnLst>
+                  <p:par>
+                    <p:cTn id="3" fill="hold">
+                      <p:stCondLst>
+                        <p:cond delay="indefinite"/>
+                        <p:cond evt="onBegin" delay="0">
+                          <p:tn val="2"/>
+                        </p:cond>
+                      </p:stCondLst>
+                      <p:childTnLst>
+                        <p:par>
+                          <p:cTn id="4" fill="hold">
+                            <p:stCondLst>
+                              <p:cond delay="0"/>
+                            </p:stCondLst>
+                            <p:childTnLst>
+                              <p:par>
+                                <p:cTn id="5" presetID="10" presetClass="entr" presetSubtype="0" fill="hold" nodeType="afterEffect">
+                                  <p:stCondLst>
+                                    <p:cond delay="0"/>
+                                  </p:stCondLst>
+                                  <p:childTnLst>
+                                    <p:set>
+                                      <p:cBhvr>
+                                        <p:cTn id="6" dur="1" fill="hold">
+                                          <p:stCondLst>
+                                            <p:cond delay="0"/>
+                                          </p:stCondLst>
+                                        </p:cTn>
+                                        <p:tgtEl>
+                                          <p:spTgt spid="4"/>
+                                        </p:tgtEl>
+                                        <p:attrNameLst>
+                                          <p:attrName>style.visibility</p:attrName>
+                                        </p:attrNameLst>
+                                      </p:cBhvr>
+                                      <p:to>
+                                        <p:strVal val="visible"/>
+                                      </p:to>
+                                    </p:set>
+                                    <p:animEffect transition="in" filter="fade">
+                                      <p:cBhvr>
+                                        <p:cTn id="7" dur="500"/>
+                                        <p:tgtEl>
+                                          <p:spTgt spid="4"/>
+                                        </p:tgtEl>
+                                      </p:cBhvr>
+                                    </p:animEffect>
+                                  </p:childTnLst>
+                                </p:cTn>
+                              </p:par>
+                              <p:par>
+                                <p:cTn id="8" presetID="10" presetClass="entr" presetSubtype="0" fill="hold" nodeType="withEffect">
+                                  <p:stCondLst>
+                                    <p:cond delay="257"/>
+                                  </p:stCondLst>
+                                  <p:childTnLst>
+                                    <p:set>
+                                      <p:cBhvr>
+                                        <p:cTn id="9" dur="1" fill="hold">
+                                          <p:stCondLst>
+                                            <p:cond delay="0"/>
+                                          </p:stCondLst>
+                                        </p:cTn>
+                                        <p:tgtEl>
+                                          <p:spTgt spid="37"/>
+                                        </p:tgtEl>
+                                        <p:attrNameLst>
+                                          <p:attrName>style.visibility</p:attrName>
+                                        </p:attrNameLst>
+                                      </p:cBhvr>
+                                      <p:to>
+                                        <p:strVal val="visible"/>
+                                      </p:to>
+                                    </p:set>
+                                    <p:animEffect transition="in" filter="fade">
+                                      <p:cBhvr>
+                                        <p:cTn id="10" dur="500"/>
+                                        <p:tgtEl>
+                                          <p:spTgt spid="37"/>
+                                        </p:tgtEl>
+                                      </p:cBhvr>
+                                    </p:animEffect>
+                                  </p:childTnLst>
+                                </p:cTn>
+                              </p:par>
+                              <p:par>
+                                <p:cTn id="11" presetID="10" presetClass="entr" presetSubtype="0" fill="hold" nodeType="withEffect">
+                                  <p:stCondLst>
+                                    <p:cond delay="514"/>
+                                  </p:stCondLst>
+                                  <p:childTnLst>
+                                    <p:set>
+                                      <p:cBhvr>
+                                        <p:cTn id="12" dur="1" fill="hold">
+                                          <p:stCondLst>
+                                            <p:cond delay="0"/>
+                                          </p:stCondLst>
+                                        </p:cTn>
+                                        <p:tgtEl>
+                                          <p:spTgt spid="52"/>
+                                        </p:tgtEl>
+                                        <p:attrNameLst>
+                                          <p:attrName>style.visibility</p:attrName>
+                                        </p:attrNameLst>
+                                      </p:cBhvr>
+                                      <p:to>
+                                        <p:strVal val="visible"/>
+                                      </p:to>
+                                    </p:set>
+                                    <p:animEffect transition="in" filter="fade">
+                                      <p:cBhvr>
+                                        <p:cTn id="13" dur="500"/>
+                                        <p:tgtEl>
+                                          <p:spTgt spid="52"/>
+                                        </p:tgtEl>
+                                      </p:cBhvr>
+                                    </p:animEffect>
+                                  </p:childTnLst>
+                                </p:cTn>
+                              </p:par>
+                              <p:par>
+                                <p:cTn id="14" presetID="10" presetClass="entr" presetSubtype="0" fill="hold" nodeType="withEffect">
+                                  <p:stCondLst>
+                                    <p:cond delay="771"/>
+                                  </p:stCondLst>
+                                  <p:childTnLst>
+                                    <p:set>
+                                      <p:cBhvr>
+                                        <p:cTn id="15" dur="1" fill="hold">
+                                          <p:stCondLst>
+                                            <p:cond delay="0"/>
+                                          </p:stCondLst>
+                                        </p:cTn>
+                                        <p:tgtEl>
+                                          <p:spTgt spid="58"/>
+                                        </p:tgtEl>
+                                        <p:attrNameLst>
+                                          <p:attrName>style.visibility</p:attrName>
+                                        </p:attrNameLst>
+                                      </p:cBhvr>
+                                      <p:to>
+                                        <p:strVal val="visible"/>
+                                      </p:to>
+                                    </p:set>
+                                    <p:animEffect transition="in" filter="fade">
+                                      <p:cBhvr>
+                                        <p:cTn id="16" dur="500"/>
+                                        <p:tgtEl>
+                                          <p:spTgt spid="58"/>
+                                        </p:tgtEl>
+                                      </p:cBhvr>
+                                    </p:animEffect>
+                                  </p:childTnLst>
+                                </p:cTn>
+                              </p:par>
+                              <p:par>
+                                <p:cTn id="17" presetID="10" presetClass="entr" presetSubtype="0" fill="hold" nodeType="withEffect">
+                                  <p:stCondLst>
+                                    <p:cond delay="1028"/>
+                                  </p:stCondLst>
+                                  <p:childTnLst>
+                                    <p:set>
+                                      <p:cBhvr>
+                                        <p:cTn id="18" dur="1" fill="hold">
+                                          <p:stCondLst>
+                                            <p:cond delay="0"/>
+                                          </p:stCondLst>
+                                        </p:cTn>
+                                        <p:tgtEl>
+                                          <p:spTgt spid="62"/>
+                                        </p:tgtEl>
+                                        <p:attrNameLst>
+                                          <p:attrName>style.visibility</p:attrName>
+                                        </p:attrNameLst>
+                                      </p:cBhvr>
+                                      <p:to>
+                                        <p:strVal val="visible"/>
+                                      </p:to>
+                                    </p:set>
+                                    <p:animEffect transition="in" filter="fade">
+                                      <p:cBhvr>
+                                        <p:cTn id="19" dur="500"/>
+                                        <p:tgtEl>
+                                          <p:spTgt spid="62"/>
+                                        </p:tgtEl>
+                                      </p:cBhvr>
+                                    </p:animEffect>
+                                  </p:childTnLst>
+                                </p:cTn>
+                              </p:par>
+                              <p:par>
+                                <p:cTn id="20" presetID="10" presetClass="entr" presetSubtype="0" fill="hold" nodeType="withEffect">
+                                  <p:stCondLst>
+                                    <p:cond delay="1285"/>
+                                  </p:stCondLst>
+                                  <p:childTnLst>
+                                    <p:set>
+                                      <p:cBhvr>
+                                        <p:cTn id="21" dur="1" fill="hold">
+                                          <p:stCondLst>
+                                            <p:cond delay="0"/>
+                                          </p:stCondLst>
+                                        </p:cTn>
+                                        <p:tgtEl>
+                                          <p:spTgt spid="63"/>
+                                        </p:tgtEl>
+                                        <p:attrNameLst>
+                                          <p:attrName>style.visibility</p:attrName>
+                                        </p:attrNameLst>
+                                      </p:cBhvr>
+                                      <p:to>
+                                        <p:strVal val="visible"/>
+                                      </p:to>
+                                    </p:set>
+                                    <p:animEffect transition="in" filter="fade">
+                                      <p:cBhvr>
+                                        <p:cTn id="22" dur="500"/>
+                                        <p:tgtEl>
+                                          <p:spTgt spid="63"/>
+                                        </p:tgtEl>
+                                      </p:cBhvr>
+                                    </p:animEffect>
+                                  </p:childTnLst>
+                                </p:cTn>
+                              </p:par>
+                              <p:par>
+                                <p:cTn id="23" presetID="10" presetClass="entr" presetSubtype="0" fill="hold" nodeType="withEffect">
+                                  <p:stCondLst>
+                                    <p:cond delay="1542"/>
+                                  </p:stCondLst>
+                                  <p:childTnLst>
+                                    <p:set>
+                                      <p:cBhvr>
+                                        <p:cTn id="24" dur="1" fill="hold">
+                                          <p:stCondLst>
+                                            <p:cond delay="0"/>
+                                          </p:stCondLst>
+                                        </p:cTn>
+                                        <p:tgtEl>
+                                          <p:spTgt spid="64"/>
+                                        </p:tgtEl>
+                                        <p:attrNameLst>
+                                          <p:attrName>style.visibility</p:attrName>
+                                        </p:attrNameLst>
+                                      </p:cBhvr>
+                                      <p:to>
+                                        <p:strVal val="visible"/>
+                                      </p:to>
+                                    </p:set>
+                                    <p:animEffect transition="in" filter="fade">
+                                      <p:cBhvr>
+                                        <p:cTn id="25" dur="500"/>
+                                        <p:tgtEl>
+                                          <p:spTgt spid="64"/>
+                                        </p:tgtEl>
+                                      </p:cBhvr>
+                                    </p:animEffect>
+                                  </p:childTnLst>
+                                </p:cTn>
+                              </p:par>
+                            </p:childTnLst>
+                          </p:cTn>
+                        </p:par>
+                      </p:childTnLst>
+                    </p:cTn>
+                  </p:par>
+                </p:childTnLst>
+              </p:cTn>
+              <p:prevCondLst>
+                <p:cond evt="onPrev" delay="0">
+                  <p:tgtEl>
+                    <p:sldTgt/>
+                  </p:tgtEl>
+                </p:cond>
+              </p:prevCondLst>
+              <p:nextCondLst>
+                <p:cond evt="onNext" delay="0">
+                  <p:tgtEl>
+                    <p:sldTgt/>
+                  </p:tgtEl>
+                </p:cond>
+              </p:nextCondLst>
+            </p:seq>
+          </p:childTnLst>
+        </p:cTn>
+      </p:par>
+    </p:tnLst>
+  </p:timing>
 </p:sld>
 </file>
 
@@ -28769,6 +33809,244 @@
   <p:clrMapOvr>
     <a:masterClrMapping/>
   </p:clrMapOvr>
+  <mc:AlternateContent xmlns:mc="http://schemas.openxmlformats.org/markup-compatibility/2006">
+    <mc:Choice xmlns:p14="http://schemas.microsoft.com/office/powerpoint/2010/main" Requires="p14">
+      <p:transition spd="med" p14:dur="700">
+        <p:fade/>
+      </p:transition>
+    </mc:Choice>
+    <mc:Fallback>
+      <p:transition spd="med">
+        <p:fade/>
+      </p:transition>
+    </mc:Fallback>
+  </mc:AlternateContent>
+  <p:timing>
+    <p:tnLst>
+      <p:par>
+        <p:cTn id="1" dur="indefinite" restart="never" nodeType="tmRoot">
+          <p:childTnLst>
+            <p:seq concurrent="1" nextAc="seek">
+              <p:cTn id="2" dur="indefinite" nodeType="mainSeq">
+                <p:childTnLst>
+                  <p:par>
+                    <p:cTn id="3" fill="hold">
+                      <p:stCondLst>
+                        <p:cond delay="indefinite"/>
+                        <p:cond evt="onBegin" delay="0">
+                          <p:tn val="2"/>
+                        </p:cond>
+                      </p:stCondLst>
+                      <p:childTnLst>
+                        <p:par>
+                          <p:cTn id="4" fill="hold">
+                            <p:stCondLst>
+                              <p:cond delay="0"/>
+                            </p:stCondLst>
+                            <p:childTnLst>
+                              <p:par>
+                                <p:cTn id="5" presetID="10" presetClass="entr" presetSubtype="0" fill="hold" nodeType="afterEffect">
+                                  <p:stCondLst>
+                                    <p:cond delay="0"/>
+                                  </p:stCondLst>
+                                  <p:childTnLst>
+                                    <p:set>
+                                      <p:cBhvr>
+                                        <p:cTn id="6" dur="1" fill="hold">
+                                          <p:stCondLst>
+                                            <p:cond delay="0"/>
+                                          </p:stCondLst>
+                                        </p:cTn>
+                                        <p:tgtEl>
+                                          <p:spTgt spid="4"/>
+                                        </p:tgtEl>
+                                        <p:attrNameLst>
+                                          <p:attrName>style.visibility</p:attrName>
+                                        </p:attrNameLst>
+                                      </p:cBhvr>
+                                      <p:to>
+                                        <p:strVal val="visible"/>
+                                      </p:to>
+                                    </p:set>
+                                    <p:animEffect transition="in" filter="fade">
+                                      <p:cBhvr>
+                                        <p:cTn id="7" dur="500"/>
+                                        <p:tgtEl>
+                                          <p:spTgt spid="4"/>
+                                        </p:tgtEl>
+                                      </p:cBhvr>
+                                    </p:animEffect>
+                                  </p:childTnLst>
+                                </p:cTn>
+                              </p:par>
+                              <p:par>
+                                <p:cTn id="8" presetID="10" presetClass="entr" presetSubtype="0" fill="hold" nodeType="withEffect">
+                                  <p:stCondLst>
+                                    <p:cond delay="300"/>
+                                  </p:stCondLst>
+                                  <p:childTnLst>
+                                    <p:set>
+                                      <p:cBhvr>
+                                        <p:cTn id="9" dur="1" fill="hold">
+                                          <p:stCondLst>
+                                            <p:cond delay="0"/>
+                                          </p:stCondLst>
+                                        </p:cTn>
+                                        <p:tgtEl>
+                                          <p:spTgt spid="30"/>
+                                        </p:tgtEl>
+                                        <p:attrNameLst>
+                                          <p:attrName>style.visibility</p:attrName>
+                                        </p:attrNameLst>
+                                      </p:cBhvr>
+                                      <p:to>
+                                        <p:strVal val="visible"/>
+                                      </p:to>
+                                    </p:set>
+                                    <p:animEffect transition="in" filter="fade">
+                                      <p:cBhvr>
+                                        <p:cTn id="10" dur="500"/>
+                                        <p:tgtEl>
+                                          <p:spTgt spid="30"/>
+                                        </p:tgtEl>
+                                      </p:cBhvr>
+                                    </p:animEffect>
+                                  </p:childTnLst>
+                                </p:cTn>
+                              </p:par>
+                              <p:par>
+                                <p:cTn id="11" presetID="10" presetClass="entr" presetSubtype="0" fill="hold" nodeType="withEffect">
+                                  <p:stCondLst>
+                                    <p:cond delay="600"/>
+                                  </p:stCondLst>
+                                  <p:childTnLst>
+                                    <p:set>
+                                      <p:cBhvr>
+                                        <p:cTn id="12" dur="1" fill="hold">
+                                          <p:stCondLst>
+                                            <p:cond delay="0"/>
+                                          </p:stCondLst>
+                                        </p:cTn>
+                                        <p:tgtEl>
+                                          <p:spTgt spid="39"/>
+                                        </p:tgtEl>
+                                        <p:attrNameLst>
+                                          <p:attrName>style.visibility</p:attrName>
+                                        </p:attrNameLst>
+                                      </p:cBhvr>
+                                      <p:to>
+                                        <p:strVal val="visible"/>
+                                      </p:to>
+                                    </p:set>
+                                    <p:animEffect transition="in" filter="fade">
+                                      <p:cBhvr>
+                                        <p:cTn id="13" dur="500"/>
+                                        <p:tgtEl>
+                                          <p:spTgt spid="39"/>
+                                        </p:tgtEl>
+                                      </p:cBhvr>
+                                    </p:animEffect>
+                                  </p:childTnLst>
+                                </p:cTn>
+                              </p:par>
+                              <p:par>
+                                <p:cTn id="14" presetID="10" presetClass="entr" presetSubtype="0" fill="hold" nodeType="withEffect">
+                                  <p:stCondLst>
+                                    <p:cond delay="900"/>
+                                  </p:stCondLst>
+                                  <p:childTnLst>
+                                    <p:set>
+                                      <p:cBhvr>
+                                        <p:cTn id="15" dur="1" fill="hold">
+                                          <p:stCondLst>
+                                            <p:cond delay="0"/>
+                                          </p:stCondLst>
+                                        </p:cTn>
+                                        <p:tgtEl>
+                                          <p:spTgt spid="40"/>
+                                        </p:tgtEl>
+                                        <p:attrNameLst>
+                                          <p:attrName>style.visibility</p:attrName>
+                                        </p:attrNameLst>
+                                      </p:cBhvr>
+                                      <p:to>
+                                        <p:strVal val="visible"/>
+                                      </p:to>
+                                    </p:set>
+                                    <p:animEffect transition="in" filter="fade">
+                                      <p:cBhvr>
+                                        <p:cTn id="16" dur="500"/>
+                                        <p:tgtEl>
+                                          <p:spTgt spid="40"/>
+                                        </p:tgtEl>
+                                      </p:cBhvr>
+                                    </p:animEffect>
+                                  </p:childTnLst>
+                                </p:cTn>
+                              </p:par>
+                              <p:par>
+                                <p:cTn id="17" presetID="10" presetClass="entr" presetSubtype="0" fill="hold" nodeType="withEffect">
+                                  <p:stCondLst>
+                                    <p:cond delay="1200"/>
+                                  </p:stCondLst>
+                                  <p:childTnLst>
+                                    <p:set>
+                                      <p:cBhvr>
+                                        <p:cTn id="18" dur="1" fill="hold">
+                                          <p:stCondLst>
+                                            <p:cond delay="0"/>
+                                          </p:stCondLst>
+                                        </p:cTn>
+                                        <p:tgtEl>
+                                          <p:spTgt spid="41"/>
+                                        </p:tgtEl>
+                                        <p:attrNameLst>
+                                          <p:attrName>style.visibility</p:attrName>
+                                        </p:attrNameLst>
+                                      </p:cBhvr>
+                                      <p:to>
+                                        <p:strVal val="visible"/>
+                                      </p:to>
+                                    </p:set>
+                                    <p:animEffect transition="in" filter="fade">
+                                      <p:cBhvr>
+                                        <p:cTn id="19" dur="500"/>
+                                        <p:tgtEl>
+                                          <p:spTgt spid="41"/>
+                                        </p:tgtEl>
+                                      </p:cBhvr>
+                                    </p:animEffect>
+                                  </p:childTnLst>
+                                </p:cTn>
+                              </p:par>
+                            </p:childTnLst>
+                          </p:cTn>
+                        </p:par>
+                      </p:childTnLst>
+                    </p:cTn>
+                  </p:par>
+                </p:childTnLst>
+              </p:cTn>
+              <p:prevCondLst>
+                <p:cond evt="onPrev" delay="0">
+                  <p:tgtEl>
+                    <p:sldTgt/>
+                  </p:tgtEl>
+                </p:cond>
+              </p:prevCondLst>
+              <p:nextCondLst>
+                <p:cond evt="onNext" delay="0">
+                  <p:tgtEl>
+                    <p:sldTgt/>
+                  </p:tgtEl>
+                </p:cond>
+              </p:nextCondLst>
+            </p:seq>
+          </p:childTnLst>
+        </p:cTn>
+      </p:par>
+    </p:tnLst>
+  </p:timing>
 </p:sld>
 </file>
 
@@ -31605,6 +36883,279 @@
   <p:clrMapOvr>
     <a:masterClrMapping/>
   </p:clrMapOvr>
+  <mc:AlternateContent xmlns:mc="http://schemas.openxmlformats.org/markup-compatibility/2006">
+    <mc:Choice xmlns:p14="http://schemas.microsoft.com/office/powerpoint/2010/main" Requires="p14">
+      <p:transition spd="med" p14:dur="700">
+        <p:fade/>
+      </p:transition>
+    </mc:Choice>
+    <mc:Fallback>
+      <p:transition spd="med">
+        <p:fade/>
+      </p:transition>
+    </mc:Fallback>
+  </mc:AlternateContent>
+  <p:timing>
+    <p:tnLst>
+      <p:par>
+        <p:cTn id="1" dur="indefinite" restart="never" nodeType="tmRoot">
+          <p:childTnLst>
+            <p:seq concurrent="1" nextAc="seek">
+              <p:cTn id="2" dur="indefinite" nodeType="mainSeq">
+                <p:childTnLst>
+                  <p:par>
+                    <p:cTn id="3" fill="hold">
+                      <p:stCondLst>
+                        <p:cond delay="indefinite"/>
+                        <p:cond evt="onBegin" delay="0">
+                          <p:tn val="2"/>
+                        </p:cond>
+                      </p:stCondLst>
+                      <p:childTnLst>
+                        <p:par>
+                          <p:cTn id="4" fill="hold">
+                            <p:stCondLst>
+                              <p:cond delay="0"/>
+                            </p:stCondLst>
+                            <p:childTnLst>
+                              <p:par>
+                                <p:cTn id="5" presetID="10" presetClass="entr" presetSubtype="0" fill="hold" nodeType="afterEffect">
+                                  <p:stCondLst>
+                                    <p:cond delay="0"/>
+                                  </p:stCondLst>
+                                  <p:childTnLst>
+                                    <p:set>
+                                      <p:cBhvr>
+                                        <p:cTn id="6" dur="1" fill="hold">
+                                          <p:stCondLst>
+                                            <p:cond delay="0"/>
+                                          </p:stCondLst>
+                                        </p:cTn>
+                                        <p:tgtEl>
+                                          <p:spTgt spid="4"/>
+                                        </p:tgtEl>
+                                        <p:attrNameLst>
+                                          <p:attrName>style.visibility</p:attrName>
+                                        </p:attrNameLst>
+                                      </p:cBhvr>
+                                      <p:to>
+                                        <p:strVal val="visible"/>
+                                      </p:to>
+                                    </p:set>
+                                    <p:animEffect transition="in" filter="fade">
+                                      <p:cBhvr>
+                                        <p:cTn id="7" dur="500"/>
+                                        <p:tgtEl>
+                                          <p:spTgt spid="4"/>
+                                        </p:tgtEl>
+                                      </p:cBhvr>
+                                    </p:animEffect>
+                                  </p:childTnLst>
+                                </p:cTn>
+                              </p:par>
+                              <p:par>
+                                <p:cTn id="8" presetID="10" presetClass="entr" presetSubtype="0" fill="hold" nodeType="withEffect">
+                                  <p:stCondLst>
+                                    <p:cond delay="300"/>
+                                  </p:stCondLst>
+                                  <p:childTnLst>
+                                    <p:set>
+                                      <p:cBhvr>
+                                        <p:cTn id="9" dur="1" fill="hold">
+                                          <p:stCondLst>
+                                            <p:cond delay="0"/>
+                                          </p:stCondLst>
+                                        </p:cTn>
+                                        <p:tgtEl>
+                                          <p:spTgt spid="60"/>
+                                        </p:tgtEl>
+                                        <p:attrNameLst>
+                                          <p:attrName>style.visibility</p:attrName>
+                                        </p:attrNameLst>
+                                      </p:cBhvr>
+                                      <p:to>
+                                        <p:strVal val="visible"/>
+                                      </p:to>
+                                    </p:set>
+                                    <p:animEffect transition="in" filter="fade">
+                                      <p:cBhvr>
+                                        <p:cTn id="10" dur="500"/>
+                                        <p:tgtEl>
+                                          <p:spTgt spid="60"/>
+                                        </p:tgtEl>
+                                      </p:cBhvr>
+                                    </p:animEffect>
+                                  </p:childTnLst>
+                                </p:cTn>
+                              </p:par>
+                              <p:par>
+                                <p:cTn id="11" presetID="10" presetClass="entr" presetSubtype="0" fill="hold" nodeType="withEffect">
+                                  <p:stCondLst>
+                                    <p:cond delay="600"/>
+                                  </p:stCondLst>
+                                  <p:childTnLst>
+                                    <p:set>
+                                      <p:cBhvr>
+                                        <p:cTn id="12" dur="1" fill="hold">
+                                          <p:stCondLst>
+                                            <p:cond delay="0"/>
+                                          </p:stCondLst>
+                                        </p:cTn>
+                                        <p:tgtEl>
+                                          <p:spTgt spid="76"/>
+                                        </p:tgtEl>
+                                        <p:attrNameLst>
+                                          <p:attrName>style.visibility</p:attrName>
+                                        </p:attrNameLst>
+                                      </p:cBhvr>
+                                      <p:to>
+                                        <p:strVal val="visible"/>
+                                      </p:to>
+                                    </p:set>
+                                    <p:animEffect transition="in" filter="fade">
+                                      <p:cBhvr>
+                                        <p:cTn id="13" dur="500"/>
+                                        <p:tgtEl>
+                                          <p:spTgt spid="76"/>
+                                        </p:tgtEl>
+                                      </p:cBhvr>
+                                    </p:animEffect>
+                                  </p:childTnLst>
+                                </p:cTn>
+                              </p:par>
+                              <p:par>
+                                <p:cTn id="14" presetID="10" presetClass="entr" presetSubtype="0" fill="hold" nodeType="withEffect">
+                                  <p:stCondLst>
+                                    <p:cond delay="900"/>
+                                  </p:stCondLst>
+                                  <p:childTnLst>
+                                    <p:set>
+                                      <p:cBhvr>
+                                        <p:cTn id="15" dur="1" fill="hold">
+                                          <p:stCondLst>
+                                            <p:cond delay="0"/>
+                                          </p:stCondLst>
+                                        </p:cTn>
+                                        <p:tgtEl>
+                                          <p:spTgt spid="77"/>
+                                        </p:tgtEl>
+                                        <p:attrNameLst>
+                                          <p:attrName>style.visibility</p:attrName>
+                                        </p:attrNameLst>
+                                      </p:cBhvr>
+                                      <p:to>
+                                        <p:strVal val="visible"/>
+                                      </p:to>
+                                    </p:set>
+                                    <p:animEffect transition="in" filter="fade">
+                                      <p:cBhvr>
+                                        <p:cTn id="16" dur="500"/>
+                                        <p:tgtEl>
+                                          <p:spTgt spid="77"/>
+                                        </p:tgtEl>
+                                      </p:cBhvr>
+                                    </p:animEffect>
+                                  </p:childTnLst>
+                                </p:cTn>
+                              </p:par>
+                              <p:par>
+                                <p:cTn id="17" presetID="10" presetClass="entr" presetSubtype="0" fill="hold" nodeType="withEffect">
+                                  <p:stCondLst>
+                                    <p:cond delay="1200"/>
+                                  </p:stCondLst>
+                                  <p:childTnLst>
+                                    <p:set>
+                                      <p:cBhvr>
+                                        <p:cTn id="18" dur="1" fill="hold">
+                                          <p:stCondLst>
+                                            <p:cond delay="0"/>
+                                          </p:stCondLst>
+                                        </p:cTn>
+                                        <p:tgtEl>
+                                          <p:spTgt spid="78"/>
+                                        </p:tgtEl>
+                                        <p:attrNameLst>
+                                          <p:attrName>style.visibility</p:attrName>
+                                        </p:attrNameLst>
+                                      </p:cBhvr>
+                                      <p:to>
+                                        <p:strVal val="visible"/>
+                                      </p:to>
+                                    </p:set>
+                                    <p:animEffect transition="in" filter="fade">
+                                      <p:cBhvr>
+                                        <p:cTn id="19" dur="500"/>
+                                        <p:tgtEl>
+                                          <p:spTgt spid="78"/>
+                                        </p:tgtEl>
+                                      </p:cBhvr>
+                                    </p:animEffect>
+                                  </p:childTnLst>
+                                </p:cTn>
+                              </p:par>
+                              <p:par>
+                                <p:cTn id="20" presetID="10" presetClass="entr" presetSubtype="0" fill="hold" nodeType="withEffect">
+                                  <p:stCondLst>
+                                    <p:cond delay="1500"/>
+                                  </p:stCondLst>
+                                  <p:childTnLst>
+                                    <p:set>
+                                      <p:cBhvr>
+                                        <p:cTn id="21" dur="1" fill="hold">
+                                          <p:stCondLst>
+                                            <p:cond delay="0"/>
+                                          </p:stCondLst>
+                                        </p:cTn>
+                                        <p:tgtEl>
+                                          <p:spTgt spid="79"/>
+                                        </p:tgtEl>
+                                        <p:attrNameLst>
+                                          <p:attrName>style.visibility</p:attrName>
+                                        </p:attrNameLst>
+                                      </p:cBhvr>
+                                      <p:to>
+                                        <p:strVal val="visible"/>
+                                      </p:to>
+                                    </p:set>
+                                    <p:animEffect transition="in" filter="fade">
+                                      <p:cBhvr>
+                                        <p:cTn id="22" dur="500"/>
+                                        <p:tgtEl>
+                                          <p:spTgt spid="79"/>
+                                        </p:tgtEl>
+                                      </p:cBhvr>
+                                    </p:animEffect>
+                                  </p:childTnLst>
+                                </p:cTn>
+                              </p:par>
+                            </p:childTnLst>
+                          </p:cTn>
+                        </p:par>
+                      </p:childTnLst>
+                    </p:cTn>
+                  </p:par>
+                </p:childTnLst>
+              </p:cTn>
+              <p:prevCondLst>
+                <p:cond evt="onPrev" delay="0">
+                  <p:tgtEl>
+                    <p:sldTgt/>
+                  </p:tgtEl>
+                </p:cond>
+              </p:prevCondLst>
+              <p:nextCondLst>
+                <p:cond evt="onNext" delay="0">
+                  <p:tgtEl>
+                    <p:sldTgt/>
+                  </p:tgtEl>
+                </p:cond>
+              </p:nextCondLst>
+            </p:seq>
+          </p:childTnLst>
+        </p:cTn>
+      </p:par>
+    </p:tnLst>
+  </p:timing>
 </p:sld>
 </file>
 
